--- a/protected-downloads/praesentation/M09.pptx
+++ b/protected-downloads/praesentation/M09.pptx
@@ -8,15 +8,15 @@
     <p:sldId id="256" r:id="rId7"/>
     <p:sldId id="257" r:id="rId8"/>
     <p:sldId id="258" r:id="rId9"/>
-    <p:sldId id="259" r:id="rId10"/>
-    <p:sldId id="260" r:id="rId11"/>
-    <p:sldId id="261" r:id="rId12"/>
-    <p:sldId id="262" r:id="rId13"/>
-    <p:sldId id="263" r:id="rId14"/>
-    <p:sldId id="264" r:id="rId15"/>
-    <p:sldId id="265" r:id="rId16"/>
-    <p:sldId id="266" r:id="rId17"/>
-    <p:sldId id="267" r:id="rId18"/>
+    <p:sldId id="259" r:id="rId11"/>
+    <p:sldId id="260" r:id="rId12"/>
+    <p:sldId id="261" r:id="rId13"/>
+    <p:sldId id="262" r:id="rId14"/>
+    <p:sldId id="263" r:id="rId15"/>
+    <p:sldId id="264" r:id="rId16"/>
+    <p:sldId id="265" r:id="rId17"/>
+    <p:sldId id="266" r:id="rId18"/>
+    <p:sldId id="267" r:id="rId19"/>
   </p:sldIdLst>
   <p:sldSz cx="12188952" cy="6858000" type="screen4x3"/>
   <p:notesSz cx="6858000" cy="9144000"/>
@@ -116,6 +116,986 @@
     </a:lvl9pPr>
   </p:defaultTextStyle>
 </p:presentation>
+</file>
+
+<file path=ppt/notesMasters/notesMaster1.xml><?xml version="1.0" encoding="utf-8"?>
+<p:notesMaster xmlns:a="http://schemas.openxmlformats.org/drawingml/2006/main" xmlns:p="http://schemas.openxmlformats.org/presentationml/2006/main" xmlns:r="http://schemas.openxmlformats.org/officeDocument/2006/relationships">
+  <p:cSld>
+    <p:bg>
+      <p:bgRef idx="1001">
+        <a:schemeClr val="bg1"/>
+      </p:bgRef>
+    </p:bg>
+    <p:spTree>
+      <p:nvGrpSpPr>
+        <p:cNvPr id="1" name=""/>
+        <p:cNvGrpSpPr/>
+        <p:nvPr/>
+      </p:nvGrpSpPr>
+      <p:grpSpPr>
+        <a:xfrm>
+          <a:off x="0" y="0"/>
+          <a:ext cx="0" cy="0"/>
+          <a:chOff x="0" y="0"/>
+          <a:chExt cx="0" cy="0"/>
+        </a:xfrm>
+      </p:grpSpPr>
+      <p:sp>
+        <p:nvSpPr>
+          <p:cNvPr id="2" name="Header Placeholder 1"/>
+          <p:cNvSpPr>
+            <a:spLocks noGrp="1"/>
+          </p:cNvSpPr>
+          <p:nvPr>
+            <p:ph type="hdr" sz="quarter"/>
+          </p:nvPr>
+        </p:nvSpPr>
+        <p:spPr>
+          <a:xfrm>
+            <a:off x="0" y="0"/>
+            <a:ext cx="2971800" cy="457200"/>
+          </a:xfrm>
+          <a:prstGeom prst="rect">
+            <a:avLst/>
+          </a:prstGeom>
+        </p:spPr>
+        <p:txBody>
+          <a:bodyPr vert="horz" lIns="91440" tIns="45720" rIns="91440" bIns="45720" rtlCol="0"/>
+          <a:lstStyle>
+            <a:lvl1pPr algn="l">
+              <a:defRPr sz="1200"/>
+            </a:lvl1pPr>
+          </a:lstStyle>
+          <a:p>
+            <a:endParaRPr lang="en-US"/>
+          </a:p>
+        </p:txBody>
+      </p:sp>
+      <p:sp>
+        <p:nvSpPr>
+          <p:cNvPr id="3" name="Date Placeholder 2"/>
+          <p:cNvSpPr>
+            <a:spLocks noGrp="1"/>
+          </p:cNvSpPr>
+          <p:nvPr>
+            <p:ph type="dt" idx="1"/>
+          </p:nvPr>
+        </p:nvSpPr>
+        <p:spPr>
+          <a:xfrm>
+            <a:off x="3884613" y="0"/>
+            <a:ext cx="2971800" cy="457200"/>
+          </a:xfrm>
+          <a:prstGeom prst="rect">
+            <a:avLst/>
+          </a:prstGeom>
+        </p:spPr>
+        <p:txBody>
+          <a:bodyPr vert="horz" lIns="91440" tIns="45720" rIns="91440" bIns="45720" rtlCol="0"/>
+          <a:lstStyle>
+            <a:lvl1pPr algn="r">
+              <a:defRPr sz="1200"/>
+            </a:lvl1pPr>
+          </a:lstStyle>
+          <a:p>
+            <a:fld id="{0F89C1C7-3DCD-1040-A9CF-14679D8B5DDD}" type="datetimeFigureOut">
+              <a:rPr lang="en-US" smtClean="0"/>
+              <a:t>10/17/16</a:t>
+            </a:fld>
+            <a:endParaRPr lang="en-US"/>
+          </a:p>
+        </p:txBody>
+      </p:sp>
+      <p:sp>
+        <p:nvSpPr>
+          <p:cNvPr id="4" name="Slide Image Placeholder 3"/>
+          <p:cNvSpPr>
+            <a:spLocks noGrp="1" noRot="1" noChangeAspect="1"/>
+          </p:cNvSpPr>
+          <p:nvPr>
+            <p:ph type="sldImg" idx="2"/>
+          </p:nvPr>
+        </p:nvSpPr>
+        <p:spPr>
+          <a:xfrm>
+            <a:off x="1143000" y="685800"/>
+            <a:ext cx="4572000" cy="3429000"/>
+          </a:xfrm>
+          <a:prstGeom prst="rect">
+            <a:avLst/>
+          </a:prstGeom>
+          <a:noFill/>
+          <a:ln w="12700">
+            <a:solidFill>
+              <a:prstClr val="black"/>
+            </a:solidFill>
+          </a:ln>
+        </p:spPr>
+        <p:txBody>
+          <a:bodyPr vert="horz" lIns="91440" tIns="45720" rIns="91440" bIns="45720" rtlCol="0" anchor="ctr"/>
+          <a:lstStyle/>
+          <a:p>
+            <a:endParaRPr lang="en-US"/>
+          </a:p>
+        </p:txBody>
+      </p:sp>
+      <p:sp>
+        <p:nvSpPr>
+          <p:cNvPr id="5" name="Notes Placeholder 4"/>
+          <p:cNvSpPr>
+            <a:spLocks noGrp="1"/>
+          </p:cNvSpPr>
+          <p:nvPr>
+            <p:ph type="body" sz="quarter" idx="3"/>
+          </p:nvPr>
+        </p:nvSpPr>
+        <p:spPr>
+          <a:xfrm>
+            <a:off x="685800" y="4343400"/>
+            <a:ext cx="5486400" cy="4114800"/>
+          </a:xfrm>
+          <a:prstGeom prst="rect">
+            <a:avLst/>
+          </a:prstGeom>
+        </p:spPr>
+        <p:txBody>
+          <a:bodyPr vert="horz" lIns="91440" tIns="45720" rIns="91440" bIns="45720" rtlCol="0"/>
+          <a:lstStyle/>
+          <a:p>
+            <a:pPr lvl="0"/>
+            <a:r>
+              <a:rPr lang="en-US" smtClean="0"/>
+              <a:t>Click to edit Master text styles</a:t>
+            </a:r>
+          </a:p>
+          <a:p>
+            <a:pPr lvl="1"/>
+            <a:r>
+              <a:rPr lang="en-US" smtClean="0"/>
+              <a:t>Second level</a:t>
+            </a:r>
+          </a:p>
+          <a:p>
+            <a:pPr lvl="2"/>
+            <a:r>
+              <a:rPr lang="en-US" smtClean="0"/>
+              <a:t>Third level</a:t>
+            </a:r>
+          </a:p>
+          <a:p>
+            <a:pPr lvl="3"/>
+            <a:r>
+              <a:rPr lang="en-US" smtClean="0"/>
+              <a:t>Fourth level</a:t>
+            </a:r>
+          </a:p>
+          <a:p>
+            <a:pPr lvl="4"/>
+            <a:r>
+              <a:rPr lang="en-US" smtClean="0"/>
+              <a:t>Fifth level</a:t>
+            </a:r>
+            <a:endParaRPr lang="en-US"/>
+          </a:p>
+        </p:txBody>
+      </p:sp>
+      <p:sp>
+        <p:nvSpPr>
+          <p:cNvPr id="6" name="Footer Placeholder 5"/>
+          <p:cNvSpPr>
+            <a:spLocks noGrp="1"/>
+          </p:cNvSpPr>
+          <p:nvPr>
+            <p:ph type="ftr" sz="quarter" idx="4"/>
+          </p:nvPr>
+        </p:nvSpPr>
+        <p:spPr>
+          <a:xfrm>
+            <a:off x="0" y="8685213"/>
+            <a:ext cx="2971800" cy="457200"/>
+          </a:xfrm>
+          <a:prstGeom prst="rect">
+            <a:avLst/>
+          </a:prstGeom>
+        </p:spPr>
+        <p:txBody>
+          <a:bodyPr vert="horz" lIns="91440" tIns="45720" rIns="91440" bIns="45720" rtlCol="0" anchor="b"/>
+          <a:lstStyle>
+            <a:lvl1pPr algn="l">
+              <a:defRPr sz="1200"/>
+            </a:lvl1pPr>
+          </a:lstStyle>
+          <a:p>
+            <a:endParaRPr lang="en-US"/>
+          </a:p>
+        </p:txBody>
+      </p:sp>
+      <p:sp>
+        <p:nvSpPr>
+          <p:cNvPr id="7" name="Slide Number Placeholder 6"/>
+          <p:cNvSpPr>
+            <a:spLocks noGrp="1"/>
+          </p:cNvSpPr>
+          <p:nvPr>
+            <p:ph type="sldNum" sz="quarter" idx="5"/>
+          </p:nvPr>
+        </p:nvSpPr>
+        <p:spPr>
+          <a:xfrm>
+            <a:off x="3884613" y="8685213"/>
+            <a:ext cx="2971800" cy="457200"/>
+          </a:xfrm>
+          <a:prstGeom prst="rect">
+            <a:avLst/>
+          </a:prstGeom>
+        </p:spPr>
+        <p:txBody>
+          <a:bodyPr vert="horz" lIns="91440" tIns="45720" rIns="91440" bIns="45720" rtlCol="0" anchor="b"/>
+          <a:lstStyle>
+            <a:lvl1pPr algn="r">
+              <a:defRPr sz="1200"/>
+            </a:lvl1pPr>
+          </a:lstStyle>
+          <a:p>
+            <a:fld id="{BB5E49A5-4136-284D-997B-48E1D791AD67}" type="slidenum">
+              <a:rPr lang="en-US" smtClean="0"/>
+              <a:t>‹#›</a:t>
+            </a:fld>
+            <a:endParaRPr lang="en-US"/>
+          </a:p>
+        </p:txBody>
+      </p:sp>
+    </p:spTree>
+    <p:extLst>
+      <p:ext uri="{BB962C8B-B14F-4D97-AF65-F5344CB8AC3E}">
+        <p14:creationId xmlns:p14="http://schemas.microsoft.com/office/powerpoint/2010/main" val="2623252185"/>
+      </p:ext>
+    </p:extLst>
+  </p:cSld>
+  <p:clrMap bg1="lt1" tx1="dk1" bg2="lt2" tx2="dk2" accent1="accent1" accent2="accent2" accent3="accent3" accent4="accent4" accent5="accent5" accent6="accent6" hlink="hlink" folHlink="folHlink"/>
+  <p:notesStyle>
+    <a:lvl1pPr marL="0" algn="l" defTabSz="457200" rtl="0" eaLnBrk="1" latinLnBrk="0" hangingPunct="1">
+      <a:defRPr sz="1200" kern="1200">
+        <a:solidFill>
+          <a:schemeClr val="tx1"/>
+        </a:solidFill>
+        <a:latin typeface="+mn-lt"/>
+        <a:ea typeface="+mn-ea"/>
+        <a:cs typeface="+mn-cs"/>
+      </a:defRPr>
+    </a:lvl1pPr>
+    <a:lvl2pPr marL="457200" algn="l" defTabSz="457200" rtl="0" eaLnBrk="1" latinLnBrk="0" hangingPunct="1">
+      <a:defRPr sz="1200" kern="1200">
+        <a:solidFill>
+          <a:schemeClr val="tx1"/>
+        </a:solidFill>
+        <a:latin typeface="+mn-lt"/>
+        <a:ea typeface="+mn-ea"/>
+        <a:cs typeface="+mn-cs"/>
+      </a:defRPr>
+    </a:lvl2pPr>
+    <a:lvl3pPr marL="914400" algn="l" defTabSz="457200" rtl="0" eaLnBrk="1" latinLnBrk="0" hangingPunct="1">
+      <a:defRPr sz="1200" kern="1200">
+        <a:solidFill>
+          <a:schemeClr val="tx1"/>
+        </a:solidFill>
+        <a:latin typeface="+mn-lt"/>
+        <a:ea typeface="+mn-ea"/>
+        <a:cs typeface="+mn-cs"/>
+      </a:defRPr>
+    </a:lvl3pPr>
+    <a:lvl4pPr marL="1371600" algn="l" defTabSz="457200" rtl="0" eaLnBrk="1" latinLnBrk="0" hangingPunct="1">
+      <a:defRPr sz="1200" kern="1200">
+        <a:solidFill>
+          <a:schemeClr val="tx1"/>
+        </a:solidFill>
+        <a:latin typeface="+mn-lt"/>
+        <a:ea typeface="+mn-ea"/>
+        <a:cs typeface="+mn-cs"/>
+      </a:defRPr>
+    </a:lvl4pPr>
+    <a:lvl5pPr marL="1828800" algn="l" defTabSz="457200" rtl="0" eaLnBrk="1" latinLnBrk="0" hangingPunct="1">
+      <a:defRPr sz="1200" kern="1200">
+        <a:solidFill>
+          <a:schemeClr val="tx1"/>
+        </a:solidFill>
+        <a:latin typeface="+mn-lt"/>
+        <a:ea typeface="+mn-ea"/>
+        <a:cs typeface="+mn-cs"/>
+      </a:defRPr>
+    </a:lvl5pPr>
+    <a:lvl6pPr marL="2286000" algn="l" defTabSz="457200" rtl="0" eaLnBrk="1" latinLnBrk="0" hangingPunct="1">
+      <a:defRPr sz="1200" kern="1200">
+        <a:solidFill>
+          <a:schemeClr val="tx1"/>
+        </a:solidFill>
+        <a:latin typeface="+mn-lt"/>
+        <a:ea typeface="+mn-ea"/>
+        <a:cs typeface="+mn-cs"/>
+      </a:defRPr>
+    </a:lvl6pPr>
+    <a:lvl7pPr marL="2743200" algn="l" defTabSz="457200" rtl="0" eaLnBrk="1" latinLnBrk="0" hangingPunct="1">
+      <a:defRPr sz="1200" kern="1200">
+        <a:solidFill>
+          <a:schemeClr val="tx1"/>
+        </a:solidFill>
+        <a:latin typeface="+mn-lt"/>
+        <a:ea typeface="+mn-ea"/>
+        <a:cs typeface="+mn-cs"/>
+      </a:defRPr>
+    </a:lvl7pPr>
+    <a:lvl8pPr marL="3200400" algn="l" defTabSz="457200" rtl="0" eaLnBrk="1" latinLnBrk="0" hangingPunct="1">
+      <a:defRPr sz="1200" kern="1200">
+        <a:solidFill>
+          <a:schemeClr val="tx1"/>
+        </a:solidFill>
+        <a:latin typeface="+mn-lt"/>
+        <a:ea typeface="+mn-ea"/>
+        <a:cs typeface="+mn-cs"/>
+      </a:defRPr>
+    </a:lvl8pPr>
+    <a:lvl9pPr marL="3657600" algn="l" defTabSz="457200" rtl="0" eaLnBrk="1" latinLnBrk="0" hangingPunct="1">
+      <a:defRPr sz="1200" kern="1200">
+        <a:solidFill>
+          <a:schemeClr val="tx1"/>
+        </a:solidFill>
+        <a:latin typeface="+mn-lt"/>
+        <a:ea typeface="+mn-ea"/>
+        <a:cs typeface="+mn-cs"/>
+      </a:defRPr>
+    </a:lvl9pPr>
+  </p:notesStyle>
+</p:notesMaster>
+</file>
+
+<file path=ppt/notesSlides/notesSlide1.xml><?xml version="1.0" encoding="utf-8"?>
+<p:notes xmlns:a="http://schemas.openxmlformats.org/drawingml/2006/main" xmlns:p="http://schemas.openxmlformats.org/presentationml/2006/main" xmlns:r="http://schemas.openxmlformats.org/officeDocument/2006/relationships">
+  <p:cSld>
+    <p:spTree>
+      <p:nvGrpSpPr>
+        <p:cNvPr id="1" name=""/>
+        <p:cNvGrpSpPr/>
+        <p:nvPr/>
+      </p:nvGrpSpPr>
+      <p:grpSpPr>
+        <a:xfrm>
+          <a:off x="0" y="0"/>
+          <a:ext cx="0" cy="0"/>
+          <a:chOff x="0" y="0"/>
+          <a:chExt cx="0" cy="0"/>
+        </a:xfrm>
+      </p:grpSpPr>
+      <p:sp>
+        <p:nvSpPr>
+          <p:cNvPr id="2" name="Slide Image Placeholder 1"/>
+          <p:cNvSpPr>
+            <a:spLocks noGrp="1"/>
+          </p:cNvSpPr>
+          <p:nvPr>
+            <p:ph type="sldImg" idx="2"/>
+          </p:nvPr>
+        </p:nvSpPr>
+        <p:spPr/>
+      </p:sp>
+      <p:sp>
+        <p:nvSpPr>
+          <p:cNvPr id="3" name="Notes Placeholder 2"/>
+          <p:cNvSpPr>
+            <a:spLocks noGrp="1"/>
+          </p:cNvSpPr>
+          <p:nvPr>
+            <p:ph type="body" idx="3" sz="quarter"/>
+          </p:nvPr>
+        </p:nvSpPr>
+        <p:spPr/>
+        <p:txBody>
+          <a:bodyPr/>
+          <a:lstStyle/>
+          <a:p>
+            <a:r>
+              <a:t>Siehe Trainerhandbuch (Sektion 3) für Moderationshinweise, Timing und erwartete Teilnehmerreaktionen.</a:t>
+            </a:r>
+          </a:p>
+        </p:txBody>
+      </p:sp>
+      <p:sp>
+        <p:nvSpPr>
+          <p:cNvPr id="4" name="Slide Number Placeholder 3"/>
+          <p:cNvSpPr>
+            <a:spLocks noGrp="1"/>
+          </p:cNvSpPr>
+          <p:nvPr>
+            <p:ph type="sldNum" idx="5" sz="quarter"/>
+          </p:nvPr>
+        </p:nvSpPr>
+        <p:spPr/>
+      </p:sp>
+    </p:spTree>
+  </p:cSld>
+  <p:clrMapOvr>
+    <a:masterClrMapping/>
+  </p:clrMapOvr>
+</p:notes>
+</file>
+
+<file path=ppt/notesSlides/notesSlide2.xml><?xml version="1.0" encoding="utf-8"?>
+<p:notes xmlns:a="http://schemas.openxmlformats.org/drawingml/2006/main" xmlns:p="http://schemas.openxmlformats.org/presentationml/2006/main" xmlns:r="http://schemas.openxmlformats.org/officeDocument/2006/relationships">
+  <p:cSld>
+    <p:spTree>
+      <p:nvGrpSpPr>
+        <p:cNvPr id="1" name=""/>
+        <p:cNvGrpSpPr/>
+        <p:nvPr/>
+      </p:nvGrpSpPr>
+      <p:grpSpPr>
+        <a:xfrm>
+          <a:off x="0" y="0"/>
+          <a:ext cx="0" cy="0"/>
+          <a:chOff x="0" y="0"/>
+          <a:chExt cx="0" cy="0"/>
+        </a:xfrm>
+      </p:grpSpPr>
+      <p:sp>
+        <p:nvSpPr>
+          <p:cNvPr id="2" name="Slide Image Placeholder 1"/>
+          <p:cNvSpPr>
+            <a:spLocks noGrp="1"/>
+          </p:cNvSpPr>
+          <p:nvPr>
+            <p:ph type="sldImg" idx="2"/>
+          </p:nvPr>
+        </p:nvSpPr>
+        <p:spPr/>
+      </p:sp>
+      <p:sp>
+        <p:nvSpPr>
+          <p:cNvPr id="3" name="Notes Placeholder 2"/>
+          <p:cNvSpPr>
+            <a:spLocks noGrp="1"/>
+          </p:cNvSpPr>
+          <p:nvPr>
+            <p:ph type="body" idx="3" sz="quarter"/>
+          </p:nvPr>
+        </p:nvSpPr>
+        <p:spPr/>
+        <p:txBody>
+          <a:bodyPr/>
+          <a:lstStyle/>
+          <a:p>
+            <a:r>
+              <a:t>Siehe Trainerhandbuch (Sektion 3) für Moderationshinweise, Timing und erwartete Teilnehmerreaktionen.</a:t>
+            </a:r>
+          </a:p>
+        </p:txBody>
+      </p:sp>
+      <p:sp>
+        <p:nvSpPr>
+          <p:cNvPr id="4" name="Slide Number Placeholder 3"/>
+          <p:cNvSpPr>
+            <a:spLocks noGrp="1"/>
+          </p:cNvSpPr>
+          <p:nvPr>
+            <p:ph type="sldNum" idx="5" sz="quarter"/>
+          </p:nvPr>
+        </p:nvSpPr>
+        <p:spPr/>
+      </p:sp>
+    </p:spTree>
+  </p:cSld>
+  <p:clrMapOvr>
+    <a:masterClrMapping/>
+  </p:clrMapOvr>
+</p:notes>
+</file>
+
+<file path=ppt/notesSlides/notesSlide3.xml><?xml version="1.0" encoding="utf-8"?>
+<p:notes xmlns:a="http://schemas.openxmlformats.org/drawingml/2006/main" xmlns:p="http://schemas.openxmlformats.org/presentationml/2006/main" xmlns:r="http://schemas.openxmlformats.org/officeDocument/2006/relationships">
+  <p:cSld>
+    <p:spTree>
+      <p:nvGrpSpPr>
+        <p:cNvPr id="1" name=""/>
+        <p:cNvGrpSpPr/>
+        <p:nvPr/>
+      </p:nvGrpSpPr>
+      <p:grpSpPr>
+        <a:xfrm>
+          <a:off x="0" y="0"/>
+          <a:ext cx="0" cy="0"/>
+          <a:chOff x="0" y="0"/>
+          <a:chExt cx="0" cy="0"/>
+        </a:xfrm>
+      </p:grpSpPr>
+      <p:sp>
+        <p:nvSpPr>
+          <p:cNvPr id="2" name="Slide Image Placeholder 1"/>
+          <p:cNvSpPr>
+            <a:spLocks noGrp="1"/>
+          </p:cNvSpPr>
+          <p:nvPr>
+            <p:ph type="sldImg" idx="2"/>
+          </p:nvPr>
+        </p:nvSpPr>
+        <p:spPr/>
+      </p:sp>
+      <p:sp>
+        <p:nvSpPr>
+          <p:cNvPr id="3" name="Notes Placeholder 2"/>
+          <p:cNvSpPr>
+            <a:spLocks noGrp="1"/>
+          </p:cNvSpPr>
+          <p:nvPr>
+            <p:ph type="body" idx="3" sz="quarter"/>
+          </p:nvPr>
+        </p:nvSpPr>
+        <p:spPr/>
+        <p:txBody>
+          <a:bodyPr/>
+          <a:lstStyle/>
+          <a:p>
+            <a:r>
+              <a:t>Siehe Trainerhandbuch (Sektion 3) für Moderationshinweise, Timing und erwartete Teilnehmerreaktionen.</a:t>
+            </a:r>
+          </a:p>
+        </p:txBody>
+      </p:sp>
+      <p:sp>
+        <p:nvSpPr>
+          <p:cNvPr id="4" name="Slide Number Placeholder 3"/>
+          <p:cNvSpPr>
+            <a:spLocks noGrp="1"/>
+          </p:cNvSpPr>
+          <p:nvPr>
+            <p:ph type="sldNum" idx="5" sz="quarter"/>
+          </p:nvPr>
+        </p:nvSpPr>
+        <p:spPr/>
+      </p:sp>
+    </p:spTree>
+  </p:cSld>
+  <p:clrMapOvr>
+    <a:masterClrMapping/>
+  </p:clrMapOvr>
+</p:notes>
+</file>
+
+<file path=ppt/notesSlides/notesSlide4.xml><?xml version="1.0" encoding="utf-8"?>
+<p:notes xmlns:a="http://schemas.openxmlformats.org/drawingml/2006/main" xmlns:p="http://schemas.openxmlformats.org/presentationml/2006/main" xmlns:r="http://schemas.openxmlformats.org/officeDocument/2006/relationships">
+  <p:cSld>
+    <p:spTree>
+      <p:nvGrpSpPr>
+        <p:cNvPr id="1" name=""/>
+        <p:cNvGrpSpPr/>
+        <p:nvPr/>
+      </p:nvGrpSpPr>
+      <p:grpSpPr>
+        <a:xfrm>
+          <a:off x="0" y="0"/>
+          <a:ext cx="0" cy="0"/>
+          <a:chOff x="0" y="0"/>
+          <a:chExt cx="0" cy="0"/>
+        </a:xfrm>
+      </p:grpSpPr>
+      <p:sp>
+        <p:nvSpPr>
+          <p:cNvPr id="2" name="Slide Image Placeholder 1"/>
+          <p:cNvSpPr>
+            <a:spLocks noGrp="1"/>
+          </p:cNvSpPr>
+          <p:nvPr>
+            <p:ph type="sldImg" idx="2"/>
+          </p:nvPr>
+        </p:nvSpPr>
+        <p:spPr/>
+      </p:sp>
+      <p:sp>
+        <p:nvSpPr>
+          <p:cNvPr id="3" name="Notes Placeholder 2"/>
+          <p:cNvSpPr>
+            <a:spLocks noGrp="1"/>
+          </p:cNvSpPr>
+          <p:nvPr>
+            <p:ph type="body" idx="3" sz="quarter"/>
+          </p:nvPr>
+        </p:nvSpPr>
+        <p:spPr/>
+        <p:txBody>
+          <a:bodyPr/>
+          <a:lstStyle/>
+          <a:p>
+            <a:r>
+              <a:t>Siehe Trainerhandbuch (Sektion 3) für Moderationshinweise, Timing und erwartete Teilnehmerreaktionen.</a:t>
+            </a:r>
+          </a:p>
+        </p:txBody>
+      </p:sp>
+      <p:sp>
+        <p:nvSpPr>
+          <p:cNvPr id="4" name="Slide Number Placeholder 3"/>
+          <p:cNvSpPr>
+            <a:spLocks noGrp="1"/>
+          </p:cNvSpPr>
+          <p:nvPr>
+            <p:ph type="sldNum" idx="5" sz="quarter"/>
+          </p:nvPr>
+        </p:nvSpPr>
+        <p:spPr/>
+      </p:sp>
+    </p:spTree>
+  </p:cSld>
+  <p:clrMapOvr>
+    <a:masterClrMapping/>
+  </p:clrMapOvr>
+</p:notes>
+</file>
+
+<file path=ppt/notesSlides/notesSlide5.xml><?xml version="1.0" encoding="utf-8"?>
+<p:notes xmlns:a="http://schemas.openxmlformats.org/drawingml/2006/main" xmlns:p="http://schemas.openxmlformats.org/presentationml/2006/main" xmlns:r="http://schemas.openxmlformats.org/officeDocument/2006/relationships">
+  <p:cSld>
+    <p:spTree>
+      <p:nvGrpSpPr>
+        <p:cNvPr id="1" name=""/>
+        <p:cNvGrpSpPr/>
+        <p:nvPr/>
+      </p:nvGrpSpPr>
+      <p:grpSpPr>
+        <a:xfrm>
+          <a:off x="0" y="0"/>
+          <a:ext cx="0" cy="0"/>
+          <a:chOff x="0" y="0"/>
+          <a:chExt cx="0" cy="0"/>
+        </a:xfrm>
+      </p:grpSpPr>
+      <p:sp>
+        <p:nvSpPr>
+          <p:cNvPr id="2" name="Slide Image Placeholder 1"/>
+          <p:cNvSpPr>
+            <a:spLocks noGrp="1"/>
+          </p:cNvSpPr>
+          <p:nvPr>
+            <p:ph type="sldImg" idx="2"/>
+          </p:nvPr>
+        </p:nvSpPr>
+        <p:spPr/>
+      </p:sp>
+      <p:sp>
+        <p:nvSpPr>
+          <p:cNvPr id="3" name="Notes Placeholder 2"/>
+          <p:cNvSpPr>
+            <a:spLocks noGrp="1"/>
+          </p:cNvSpPr>
+          <p:nvPr>
+            <p:ph type="body" idx="3" sz="quarter"/>
+          </p:nvPr>
+        </p:nvSpPr>
+        <p:spPr/>
+        <p:txBody>
+          <a:bodyPr/>
+          <a:lstStyle/>
+          <a:p>
+            <a:r>
+              <a:t>Siehe Trainerhandbuch (Sektion 3) für Moderationshinweise, Timing und erwartete Teilnehmerreaktionen.</a:t>
+            </a:r>
+          </a:p>
+        </p:txBody>
+      </p:sp>
+      <p:sp>
+        <p:nvSpPr>
+          <p:cNvPr id="4" name="Slide Number Placeholder 3"/>
+          <p:cNvSpPr>
+            <a:spLocks noGrp="1"/>
+          </p:cNvSpPr>
+          <p:nvPr>
+            <p:ph type="sldNum" idx="5" sz="quarter"/>
+          </p:nvPr>
+        </p:nvSpPr>
+        <p:spPr/>
+      </p:sp>
+    </p:spTree>
+  </p:cSld>
+  <p:clrMapOvr>
+    <a:masterClrMapping/>
+  </p:clrMapOvr>
+</p:notes>
+</file>
+
+<file path=ppt/notesSlides/notesSlide6.xml><?xml version="1.0" encoding="utf-8"?>
+<p:notes xmlns:a="http://schemas.openxmlformats.org/drawingml/2006/main" xmlns:p="http://schemas.openxmlformats.org/presentationml/2006/main" xmlns:r="http://schemas.openxmlformats.org/officeDocument/2006/relationships">
+  <p:cSld>
+    <p:spTree>
+      <p:nvGrpSpPr>
+        <p:cNvPr id="1" name=""/>
+        <p:cNvGrpSpPr/>
+        <p:nvPr/>
+      </p:nvGrpSpPr>
+      <p:grpSpPr>
+        <a:xfrm>
+          <a:off x="0" y="0"/>
+          <a:ext cx="0" cy="0"/>
+          <a:chOff x="0" y="0"/>
+          <a:chExt cx="0" cy="0"/>
+        </a:xfrm>
+      </p:grpSpPr>
+      <p:sp>
+        <p:nvSpPr>
+          <p:cNvPr id="2" name="Slide Image Placeholder 1"/>
+          <p:cNvSpPr>
+            <a:spLocks noGrp="1"/>
+          </p:cNvSpPr>
+          <p:nvPr>
+            <p:ph type="sldImg" idx="2"/>
+          </p:nvPr>
+        </p:nvSpPr>
+        <p:spPr/>
+      </p:sp>
+      <p:sp>
+        <p:nvSpPr>
+          <p:cNvPr id="3" name="Notes Placeholder 2"/>
+          <p:cNvSpPr>
+            <a:spLocks noGrp="1"/>
+          </p:cNvSpPr>
+          <p:nvPr>
+            <p:ph type="body" idx="3" sz="quarter"/>
+          </p:nvPr>
+        </p:nvSpPr>
+        <p:spPr/>
+        <p:txBody>
+          <a:bodyPr/>
+          <a:lstStyle/>
+          <a:p>
+            <a:r>
+              <a:t>Siehe Trainerhandbuch (Sektion 3) für Moderationshinweise, Timing und erwartete Teilnehmerreaktionen.</a:t>
+            </a:r>
+          </a:p>
+        </p:txBody>
+      </p:sp>
+      <p:sp>
+        <p:nvSpPr>
+          <p:cNvPr id="4" name="Slide Number Placeholder 3"/>
+          <p:cNvSpPr>
+            <a:spLocks noGrp="1"/>
+          </p:cNvSpPr>
+          <p:nvPr>
+            <p:ph type="sldNum" idx="5" sz="quarter"/>
+          </p:nvPr>
+        </p:nvSpPr>
+        <p:spPr/>
+      </p:sp>
+    </p:spTree>
+  </p:cSld>
+  <p:clrMapOvr>
+    <a:masterClrMapping/>
+  </p:clrMapOvr>
+</p:notes>
+</file>
+
+<file path=ppt/notesSlides/notesSlide7.xml><?xml version="1.0" encoding="utf-8"?>
+<p:notes xmlns:a="http://schemas.openxmlformats.org/drawingml/2006/main" xmlns:p="http://schemas.openxmlformats.org/presentationml/2006/main" xmlns:r="http://schemas.openxmlformats.org/officeDocument/2006/relationships">
+  <p:cSld>
+    <p:spTree>
+      <p:nvGrpSpPr>
+        <p:cNvPr id="1" name=""/>
+        <p:cNvGrpSpPr/>
+        <p:nvPr/>
+      </p:nvGrpSpPr>
+      <p:grpSpPr>
+        <a:xfrm>
+          <a:off x="0" y="0"/>
+          <a:ext cx="0" cy="0"/>
+          <a:chOff x="0" y="0"/>
+          <a:chExt cx="0" cy="0"/>
+        </a:xfrm>
+      </p:grpSpPr>
+      <p:sp>
+        <p:nvSpPr>
+          <p:cNvPr id="2" name="Slide Image Placeholder 1"/>
+          <p:cNvSpPr>
+            <a:spLocks noGrp="1"/>
+          </p:cNvSpPr>
+          <p:nvPr>
+            <p:ph type="sldImg" idx="2"/>
+          </p:nvPr>
+        </p:nvSpPr>
+        <p:spPr/>
+      </p:sp>
+      <p:sp>
+        <p:nvSpPr>
+          <p:cNvPr id="3" name="Notes Placeholder 2"/>
+          <p:cNvSpPr>
+            <a:spLocks noGrp="1"/>
+          </p:cNvSpPr>
+          <p:nvPr>
+            <p:ph type="body" idx="3" sz="quarter"/>
+          </p:nvPr>
+        </p:nvSpPr>
+        <p:spPr/>
+        <p:txBody>
+          <a:bodyPr/>
+          <a:lstStyle/>
+          <a:p>
+            <a:r>
+              <a:t>Siehe Trainerhandbuch (Sektion 3) für Moderationshinweise, Timing und erwartete Teilnehmerreaktionen.</a:t>
+            </a:r>
+          </a:p>
+        </p:txBody>
+      </p:sp>
+      <p:sp>
+        <p:nvSpPr>
+          <p:cNvPr id="4" name="Slide Number Placeholder 3"/>
+          <p:cNvSpPr>
+            <a:spLocks noGrp="1"/>
+          </p:cNvSpPr>
+          <p:nvPr>
+            <p:ph type="sldNum" idx="5" sz="quarter"/>
+          </p:nvPr>
+        </p:nvSpPr>
+        <p:spPr/>
+      </p:sp>
+    </p:spTree>
+  </p:cSld>
+  <p:clrMapOvr>
+    <a:masterClrMapping/>
+  </p:clrMapOvr>
+</p:notes>
+</file>
+
+<file path=ppt/notesSlides/notesSlide8.xml><?xml version="1.0" encoding="utf-8"?>
+<p:notes xmlns:a="http://schemas.openxmlformats.org/drawingml/2006/main" xmlns:p="http://schemas.openxmlformats.org/presentationml/2006/main" xmlns:r="http://schemas.openxmlformats.org/officeDocument/2006/relationships">
+  <p:cSld>
+    <p:spTree>
+      <p:nvGrpSpPr>
+        <p:cNvPr id="1" name=""/>
+        <p:cNvGrpSpPr/>
+        <p:nvPr/>
+      </p:nvGrpSpPr>
+      <p:grpSpPr>
+        <a:xfrm>
+          <a:off x="0" y="0"/>
+          <a:ext cx="0" cy="0"/>
+          <a:chOff x="0" y="0"/>
+          <a:chExt cx="0" cy="0"/>
+        </a:xfrm>
+      </p:grpSpPr>
+      <p:sp>
+        <p:nvSpPr>
+          <p:cNvPr id="2" name="Slide Image Placeholder 1"/>
+          <p:cNvSpPr>
+            <a:spLocks noGrp="1"/>
+          </p:cNvSpPr>
+          <p:nvPr>
+            <p:ph type="sldImg" idx="2"/>
+          </p:nvPr>
+        </p:nvSpPr>
+        <p:spPr/>
+      </p:sp>
+      <p:sp>
+        <p:nvSpPr>
+          <p:cNvPr id="3" name="Notes Placeholder 2"/>
+          <p:cNvSpPr>
+            <a:spLocks noGrp="1"/>
+          </p:cNvSpPr>
+          <p:nvPr>
+            <p:ph type="body" idx="3" sz="quarter"/>
+          </p:nvPr>
+        </p:nvSpPr>
+        <p:spPr/>
+        <p:txBody>
+          <a:bodyPr/>
+          <a:lstStyle/>
+          <a:p>
+            <a:r>
+              <a:t>Siehe Trainerhandbuch (Sektion 3) für Moderationshinweise, Timing und erwartete Teilnehmerreaktionen.</a:t>
+            </a:r>
+          </a:p>
+        </p:txBody>
+      </p:sp>
+      <p:sp>
+        <p:nvSpPr>
+          <p:cNvPr id="4" name="Slide Number Placeholder 3"/>
+          <p:cNvSpPr>
+            <a:spLocks noGrp="1"/>
+          </p:cNvSpPr>
+          <p:nvPr>
+            <p:ph type="sldNum" idx="5" sz="quarter"/>
+          </p:nvPr>
+        </p:nvSpPr>
+        <p:spPr/>
+      </p:sp>
+    </p:spTree>
+  </p:cSld>
+  <p:clrMapOvr>
+    <a:masterClrMapping/>
+  </p:clrMapOvr>
+</p:notes>
+</file>
+
+<file path=ppt/notesSlides/notesSlide9.xml><?xml version="1.0" encoding="utf-8"?>
+<p:notes xmlns:a="http://schemas.openxmlformats.org/drawingml/2006/main" xmlns:p="http://schemas.openxmlformats.org/presentationml/2006/main" xmlns:r="http://schemas.openxmlformats.org/officeDocument/2006/relationships">
+  <p:cSld>
+    <p:spTree>
+      <p:nvGrpSpPr>
+        <p:cNvPr id="1" name=""/>
+        <p:cNvGrpSpPr/>
+        <p:nvPr/>
+      </p:nvGrpSpPr>
+      <p:grpSpPr>
+        <a:xfrm>
+          <a:off x="0" y="0"/>
+          <a:ext cx="0" cy="0"/>
+          <a:chOff x="0" y="0"/>
+          <a:chExt cx="0" cy="0"/>
+        </a:xfrm>
+      </p:grpSpPr>
+      <p:sp>
+        <p:nvSpPr>
+          <p:cNvPr id="2" name="Slide Image Placeholder 1"/>
+          <p:cNvSpPr>
+            <a:spLocks noGrp="1"/>
+          </p:cNvSpPr>
+          <p:nvPr>
+            <p:ph type="sldImg" idx="2"/>
+          </p:nvPr>
+        </p:nvSpPr>
+        <p:spPr/>
+      </p:sp>
+      <p:sp>
+        <p:nvSpPr>
+          <p:cNvPr id="3" name="Notes Placeholder 2"/>
+          <p:cNvSpPr>
+            <a:spLocks noGrp="1"/>
+          </p:cNvSpPr>
+          <p:nvPr>
+            <p:ph type="body" idx="3" sz="quarter"/>
+          </p:nvPr>
+        </p:nvSpPr>
+        <p:spPr/>
+        <p:txBody>
+          <a:bodyPr/>
+          <a:lstStyle/>
+          <a:p>
+            <a:r>
+              <a:t>Siehe Trainerhandbuch (Sektion 3) für Moderationshinweise, Timing und erwartete Teilnehmerreaktionen.</a:t>
+            </a:r>
+          </a:p>
+        </p:txBody>
+      </p:sp>
+      <p:sp>
+        <p:nvSpPr>
+          <p:cNvPr id="4" name="Slide Number Placeholder 3"/>
+          <p:cNvSpPr>
+            <a:spLocks noGrp="1"/>
+          </p:cNvSpPr>
+          <p:nvPr>
+            <p:ph type="sldNum" idx="5" sz="quarter"/>
+          </p:nvPr>
+        </p:nvSpPr>
+        <p:spPr/>
+      </p:sp>
+    </p:spTree>
+  </p:cSld>
+  <p:clrMapOvr>
+    <a:masterClrMapping/>
+  </p:clrMapOvr>
+</p:notes>
 </file>
 
 <file path=ppt/slideLayouts/slideLayout1.xml><?xml version="1.0" encoding="utf-8"?>
@@ -3953,7 +4933,7 @@
                 </a:solidFill>
                 <a:latin typeface="Arial"/>
               </a:rPr>
-              <a:t>Meine Zielbranche: ___________________________</a:t>
+              <a:t>Bewertungslogik: 1 = schwach / kaum relevant · 5 = stark / hochrelevant</a:t>
             </a:r>
           </a:p>
           <a:p>
@@ -3972,45 +4952,7 @@
                 </a:solidFill>
                 <a:latin typeface="Arial"/>
               </a:rPr>
-              <a:t>Bewertungslogik: 1 = schwach / kaum relevant · 5 = stark / hochrelevant</a:t>
-            </a:r>
-          </a:p>
-          <a:p>
-            <a:pPr>
-              <a:spcBef>
-                <a:spcPts val="400"/>
-              </a:spcBef>
-              <a:spcAft>
-                <a:spcPts val="200"/>
-              </a:spcAft>
-            </a:pPr>
-            <a:r>
-              <a:rPr sz="1200">
-                <a:solidFill>
-                  <a:srgbClr val="3D5466"/>
-                </a:solidFill>
-                <a:latin typeface="Arial"/>
-              </a:rPr>
               <a:t>Wichtigste Erkenntnis aus dieser Analyse:</a:t>
-            </a:r>
-          </a:p>
-          <a:p>
-            <a:pPr>
-              <a:spcBef>
-                <a:spcPts val="400"/>
-              </a:spcBef>
-              <a:spcAft>
-                <a:spcPts val="200"/>
-              </a:spcAft>
-            </a:pPr>
-            <a:r>
-              <a:rPr sz="1200">
-                <a:solidFill>
-                  <a:srgbClr val="3D5466"/>
-                </a:solidFill>
-                <a:latin typeface="Arial"/>
-              </a:rPr>
-              <a:t>___________________________________________________________________________</a:t>
             </a:r>
           </a:p>
         </p:txBody>
@@ -4390,45 +5332,7 @@
                 </a:solidFill>
                 <a:latin typeface="Arial"/>
               </a:rPr>
-              <a:t>Mein Zielsegment: ___________________________</a:t>
-            </a:r>
-          </a:p>
-          <a:p>
-            <a:pPr>
-              <a:spcBef>
-                <a:spcPts val="400"/>
-              </a:spcBef>
-              <a:spcAft>
-                <a:spcPts val="200"/>
-              </a:spcAft>
-            </a:pPr>
-            <a:r>
-              <a:rPr sz="1200">
-                <a:solidFill>
-                  <a:srgbClr val="3D5466"/>
-                </a:solidFill>
-                <a:latin typeface="Arial"/>
-              </a:rPr>
               <a:t>Meine Kernmotivation (Warum diese Branche?):</a:t>
-            </a:r>
-          </a:p>
-          <a:p>
-            <a:pPr>
-              <a:spcBef>
-                <a:spcPts val="400"/>
-              </a:spcBef>
-              <a:spcAft>
-                <a:spcPts val="200"/>
-              </a:spcAft>
-            </a:pPr>
-            <a:r>
-              <a:rPr sz="1200">
-                <a:solidFill>
-                  <a:srgbClr val="3D5466"/>
-                </a:solidFill>
-                <a:latin typeface="Arial"/>
-              </a:rPr>
-              <a:t>___________________________________________________________________________</a:t>
             </a:r>
           </a:p>
         </p:txBody>
@@ -4808,64 +5712,7 @@
                 </a:solidFill>
                 <a:latin typeface="Arial"/>
               </a:rPr>
-              <a:t>Datum: _______________  Kunde/Unternehmen: ___________________________</a:t>
-            </a:r>
-          </a:p>
-          <a:p>
-            <a:pPr>
-              <a:spcBef>
-                <a:spcPts val="400"/>
-              </a:spcBef>
-              <a:spcAft>
-                <a:spcPts val="200"/>
-              </a:spcAft>
-            </a:pPr>
-            <a:r>
-              <a:rPr sz="1200">
-                <a:solidFill>
-                  <a:srgbClr val="3D5466"/>
-                </a:solidFill>
-                <a:latin typeface="Arial"/>
-              </a:rPr>
-              <a:t>Branche: _______________  Berater: ___________________________</a:t>
-            </a:r>
-          </a:p>
-          <a:p>
-            <a:pPr>
-              <a:spcBef>
-                <a:spcPts val="400"/>
-              </a:spcBef>
-              <a:spcAft>
-                <a:spcPts val="200"/>
-              </a:spcAft>
-            </a:pPr>
-            <a:r>
-              <a:rPr sz="1200">
-                <a:solidFill>
-                  <a:srgbClr val="3D5466"/>
-                </a:solidFill>
-                <a:latin typeface="Arial"/>
-              </a:rPr>
               <a:t>Mein wichtigstes Branchenlernen aus diesem Gespräch:</a:t>
-            </a:r>
-          </a:p>
-          <a:p>
-            <a:pPr>
-              <a:spcBef>
-                <a:spcPts val="400"/>
-              </a:spcBef>
-              <a:spcAft>
-                <a:spcPts val="200"/>
-              </a:spcAft>
-            </a:pPr>
-            <a:r>
-              <a:rPr sz="1200">
-                <a:solidFill>
-                  <a:srgbClr val="3D5466"/>
-                </a:solidFill>
-                <a:latin typeface="Arial"/>
-              </a:rPr>
-              <a:t>___________________________________________________________________________</a:t>
             </a:r>
           </a:p>
           <a:p>
@@ -4885,101 +5732,6 @@
                 <a:latin typeface="Arial"/>
               </a:rPr>
               <a:t>→  Tipp: Dieses Protokoll in agree (Gesprächsnotiz) hinterlegen. Orientieren Sie sich an dieser Mini-Vorlage (5 Stichpunkte reichen):</a:t>
-            </a:r>
-          </a:p>
-          <a:p>
-            <a:pPr>
-              <a:spcBef>
-                <a:spcPts val="600"/>
-              </a:spcBef>
-              <a:spcAft>
-                <a:spcPts val="200"/>
-              </a:spcAft>
-            </a:pPr>
-            <a:r>
-              <a:rPr sz="1200" i="1">
-                <a:solidFill>
-                  <a:srgbClr val="3D5466"/>
-                </a:solidFill>
-                <a:latin typeface="Arial"/>
-              </a:rPr>
-              <a:t>→  1. Branchenentwicklung laut Kunde: _____________</a:t>
-            </a:r>
-          </a:p>
-          <a:p>
-            <a:pPr>
-              <a:spcBef>
-                <a:spcPts val="600"/>
-              </a:spcBef>
-              <a:spcAft>
-                <a:spcPts val="200"/>
-              </a:spcAft>
-            </a:pPr>
-            <a:r>
-              <a:rPr sz="1200" i="1">
-                <a:solidFill>
-                  <a:srgbClr val="3D5466"/>
-                </a:solidFill>
-                <a:latin typeface="Arial"/>
-              </a:rPr>
-              <a:t>→  2. Genannte Risiken/Belastungen: _____________</a:t>
-            </a:r>
-          </a:p>
-          <a:p>
-            <a:pPr>
-              <a:spcBef>
-                <a:spcPts val="600"/>
-              </a:spcBef>
-              <a:spcAft>
-                <a:spcPts val="200"/>
-              </a:spcAft>
-            </a:pPr>
-            <a:r>
-              <a:rPr sz="1200" i="1">
-                <a:solidFill>
-                  <a:srgbClr val="3D5466"/>
-                </a:solidFill>
-                <a:latin typeface="Arial"/>
-              </a:rPr>
-              <a:t>→  3. Chancen oder Investitionsabsichten: _____________</a:t>
-            </a:r>
-          </a:p>
-          <a:p>
-            <a:pPr>
-              <a:spcBef>
-                <a:spcPts val="600"/>
-              </a:spcBef>
-              <a:spcAft>
-                <a:spcPts val="200"/>
-              </a:spcAft>
-            </a:pPr>
-            <a:r>
-              <a:rPr sz="1200" i="1">
-                <a:solidFill>
-                  <a:srgbClr val="3D5466"/>
-                </a:solidFill>
-                <a:latin typeface="Arial"/>
-              </a:rPr>
-              <a:t>→  4. Eigene Einschätzung (Kreditrisiko, Beratungsansatz): _____________</a:t>
-            </a:r>
-          </a:p>
-          <a:p>
-            <a:pPr>
-              <a:spcBef>
-                <a:spcPts val="600"/>
-              </a:spcBef>
-              <a:spcAft>
-                <a:spcPts val="200"/>
-              </a:spcAft>
-            </a:pPr>
-            <a:r>
-              <a:rPr sz="1200" i="1">
-                <a:solidFill>
-                  <a:srgbClr val="3D5466"/>
-                </a:solidFill>
-                <a:latin typeface="Arial"/>
-              </a:rPr>
-              <a:t>→  5. Nächste Aktion / Folgethema: _____________</a:t>
             </a:r>
           </a:p>
           <a:p>
@@ -8689,4 +9441,324 @@
   </a:objectDefaults>
   <a:extraClrSchemeLst/>
 </a:theme>
+</file>
+
+<file path=ppt/theme/theme2.xml><?xml version="1.0" encoding="utf-8"?>
+<a:theme xmlns:a="http://schemas.openxmlformats.org/drawingml/2006/main" name="Office Theme">
+  <a:themeElements>
+    <a:clrScheme name="Office">
+      <a:dk1>
+        <a:sysClr val="windowText" lastClr="000000"/>
+      </a:dk1>
+      <a:lt1>
+        <a:sysClr val="window" lastClr="FFFFFF"/>
+      </a:lt1>
+      <a:dk2>
+        <a:srgbClr val="1F497D"/>
+      </a:dk2>
+      <a:lt2>
+        <a:srgbClr val="EEECE1"/>
+      </a:lt2>
+      <a:accent1>
+        <a:srgbClr val="4F81BD"/>
+      </a:accent1>
+      <a:accent2>
+        <a:srgbClr val="C0504D"/>
+      </a:accent2>
+      <a:accent3>
+        <a:srgbClr val="9BBB59"/>
+      </a:accent3>
+      <a:accent4>
+        <a:srgbClr val="8064A2"/>
+      </a:accent4>
+      <a:accent5>
+        <a:srgbClr val="4BACC6"/>
+      </a:accent5>
+      <a:accent6>
+        <a:srgbClr val="F79646"/>
+      </a:accent6>
+      <a:hlink>
+        <a:srgbClr val="0000FF"/>
+      </a:hlink>
+      <a:folHlink>
+        <a:srgbClr val="800080"/>
+      </a:folHlink>
+    </a:clrScheme>
+    <a:fontScheme name="Office">
+      <a:majorFont>
+        <a:latin typeface="Calibri"/>
+        <a:ea typeface=""/>
+        <a:cs typeface=""/>
+        <a:font script="Jpan" typeface="ＭＳ Ｐゴシック"/>
+        <a:font script="Hang" typeface="맑은 고딕"/>
+        <a:font script="Hans" typeface="宋体"/>
+        <a:font script="Hant" typeface="新細明體"/>
+        <a:font script="Arab" typeface="Times New Roman"/>
+        <a:font script="Hebr" typeface="Times New Roman"/>
+        <a:font script="Thai" typeface="Angsana New"/>
+        <a:font script="Ethi" typeface="Nyala"/>
+        <a:font script="Beng" typeface="Vrinda"/>
+        <a:font script="Gujr" typeface="Shruti"/>
+        <a:font script="Khmr" typeface="MoolBoran"/>
+        <a:font script="Knda" typeface="Tunga"/>
+        <a:font script="Guru" typeface="Raavi"/>
+        <a:font script="Cans" typeface="Euphemia"/>
+        <a:font script="Cher" typeface="Plantagenet Cherokee"/>
+        <a:font script="Yiii" typeface="Microsoft Yi Baiti"/>
+        <a:font script="Tibt" typeface="Microsoft Himalaya"/>
+        <a:font script="Thaa" typeface="MV Boli"/>
+        <a:font script="Deva" typeface="Mangal"/>
+        <a:font script="Telu" typeface="Gautami"/>
+        <a:font script="Taml" typeface="Latha"/>
+        <a:font script="Syrc" typeface="Estrangelo Edessa"/>
+        <a:font script="Orya" typeface="Kalinga"/>
+        <a:font script="Mlym" typeface="Kartika"/>
+        <a:font script="Laoo" typeface="DokChampa"/>
+        <a:font script="Sinh" typeface="Iskoola Pota"/>
+        <a:font script="Mong" typeface="Mongolian Baiti"/>
+        <a:font script="Viet" typeface="Times New Roman"/>
+        <a:font script="Uigh" typeface="Microsoft Uighur"/>
+        <a:font script="Geor" typeface="Sylfaen"/>
+      </a:majorFont>
+      <a:minorFont>
+        <a:latin typeface="Calibri"/>
+        <a:ea typeface=""/>
+        <a:cs typeface=""/>
+        <a:font script="Jpan" typeface="ＭＳ Ｐゴシック"/>
+        <a:font script="Hang" typeface="맑은 고딕"/>
+        <a:font script="Hans" typeface="宋体"/>
+        <a:font script="Hant" typeface="新細明體"/>
+        <a:font script="Arab" typeface="Arial"/>
+        <a:font script="Hebr" typeface="Arial"/>
+        <a:font script="Thai" typeface="Cordia New"/>
+        <a:font script="Ethi" typeface="Nyala"/>
+        <a:font script="Beng" typeface="Vrinda"/>
+        <a:font script="Gujr" typeface="Shruti"/>
+        <a:font script="Khmr" typeface="DaunPenh"/>
+        <a:font script="Knda" typeface="Tunga"/>
+        <a:font script="Guru" typeface="Raavi"/>
+        <a:font script="Cans" typeface="Euphemia"/>
+        <a:font script="Cher" typeface="Plantagenet Cherokee"/>
+        <a:font script="Yiii" typeface="Microsoft Yi Baiti"/>
+        <a:font script="Tibt" typeface="Microsoft Himalaya"/>
+        <a:font script="Thaa" typeface="MV Boli"/>
+        <a:font script="Deva" typeface="Mangal"/>
+        <a:font script="Telu" typeface="Gautami"/>
+        <a:font script="Taml" typeface="Latha"/>
+        <a:font script="Syrc" typeface="Estrangelo Edessa"/>
+        <a:font script="Orya" typeface="Kalinga"/>
+        <a:font script="Mlym" typeface="Kartika"/>
+        <a:font script="Laoo" typeface="DokChampa"/>
+        <a:font script="Sinh" typeface="Iskoola Pota"/>
+        <a:font script="Mong" typeface="Mongolian Baiti"/>
+        <a:font script="Viet" typeface="Arial"/>
+        <a:font script="Uigh" typeface="Microsoft Uighur"/>
+        <a:font script="Geor" typeface="Sylfaen"/>
+      </a:minorFont>
+    </a:fontScheme>
+    <a:fmtScheme name="Office">
+      <a:fillStyleLst>
+        <a:solidFill>
+          <a:schemeClr val="phClr"/>
+        </a:solidFill>
+        <a:gradFill rotWithShape="1">
+          <a:gsLst>
+            <a:gs pos="0">
+              <a:schemeClr val="phClr">
+                <a:tint val="50000"/>
+                <a:satMod val="300000"/>
+              </a:schemeClr>
+            </a:gs>
+            <a:gs pos="35000">
+              <a:schemeClr val="phClr">
+                <a:tint val="37000"/>
+                <a:satMod val="300000"/>
+              </a:schemeClr>
+            </a:gs>
+            <a:gs pos="100000">
+              <a:schemeClr val="phClr">
+                <a:tint val="15000"/>
+                <a:satMod val="350000"/>
+              </a:schemeClr>
+            </a:gs>
+          </a:gsLst>
+          <a:lin ang="16200000" scaled="1"/>
+        </a:gradFill>
+        <a:gradFill rotWithShape="1">
+          <a:gsLst>
+            <a:gs pos="0">
+              <a:schemeClr val="phClr">
+                <a:tint val="100000"/>
+                <a:shade val="100000"/>
+                <a:satMod val="130000"/>
+              </a:schemeClr>
+            </a:gs>
+            <a:gs pos="100000">
+              <a:schemeClr val="phClr">
+                <a:tint val="50000"/>
+                <a:shade val="100000"/>
+                <a:satMod val="350000"/>
+              </a:schemeClr>
+            </a:gs>
+          </a:gsLst>
+          <a:lin ang="16200000" scaled="0"/>
+        </a:gradFill>
+      </a:fillStyleLst>
+      <a:lnStyleLst>
+        <a:ln w="9525" cap="flat" cmpd="sng" algn="ctr">
+          <a:solidFill>
+            <a:schemeClr val="phClr">
+              <a:shade val="95000"/>
+              <a:satMod val="105000"/>
+            </a:schemeClr>
+          </a:solidFill>
+          <a:prstDash val="solid"/>
+        </a:ln>
+        <a:ln w="25400" cap="flat" cmpd="sng" algn="ctr">
+          <a:solidFill>
+            <a:schemeClr val="phClr"/>
+          </a:solidFill>
+          <a:prstDash val="solid"/>
+        </a:ln>
+        <a:ln w="38100" cap="flat" cmpd="sng" algn="ctr">
+          <a:solidFill>
+            <a:schemeClr val="phClr"/>
+          </a:solidFill>
+          <a:prstDash val="solid"/>
+        </a:ln>
+      </a:lnStyleLst>
+      <a:effectStyleLst>
+        <a:effectStyle>
+          <a:effectLst>
+            <a:outerShdw blurRad="40000" dist="20000" dir="5400000" rotWithShape="0">
+              <a:srgbClr val="000000">
+                <a:alpha val="38000"/>
+              </a:srgbClr>
+            </a:outerShdw>
+          </a:effectLst>
+        </a:effectStyle>
+        <a:effectStyle>
+          <a:effectLst>
+            <a:outerShdw blurRad="40000" dist="23000" dir="5400000" rotWithShape="0">
+              <a:srgbClr val="000000">
+                <a:alpha val="35000"/>
+              </a:srgbClr>
+            </a:outerShdw>
+          </a:effectLst>
+        </a:effectStyle>
+        <a:effectStyle>
+          <a:effectLst>
+            <a:outerShdw blurRad="40000" dist="23000" dir="5400000" rotWithShape="0">
+              <a:srgbClr val="000000">
+                <a:alpha val="35000"/>
+              </a:srgbClr>
+            </a:outerShdw>
+          </a:effectLst>
+          <a:scene3d>
+            <a:camera prst="orthographicFront">
+              <a:rot lat="0" lon="0" rev="0"/>
+            </a:camera>
+            <a:lightRig rig="threePt" dir="t">
+              <a:rot lat="0" lon="0" rev="1200000"/>
+            </a:lightRig>
+          </a:scene3d>
+          <a:sp3d>
+            <a:bevelT w="63500" h="25400"/>
+          </a:sp3d>
+        </a:effectStyle>
+      </a:effectStyleLst>
+      <a:bgFillStyleLst>
+        <a:solidFill>
+          <a:schemeClr val="phClr"/>
+        </a:solidFill>
+        <a:gradFill rotWithShape="1">
+          <a:gsLst>
+            <a:gs pos="0">
+              <a:schemeClr val="phClr">
+                <a:tint val="40000"/>
+                <a:satMod val="350000"/>
+              </a:schemeClr>
+            </a:gs>
+            <a:gs pos="40000">
+              <a:schemeClr val="phClr">
+                <a:tint val="45000"/>
+                <a:shade val="99000"/>
+                <a:satMod val="350000"/>
+              </a:schemeClr>
+            </a:gs>
+            <a:gs pos="100000">
+              <a:schemeClr val="phClr">
+                <a:shade val="20000"/>
+                <a:satMod val="255000"/>
+              </a:schemeClr>
+            </a:gs>
+          </a:gsLst>
+          <a:path path="circle">
+            <a:fillToRect l="50000" t="-80000" r="50000" b="180000"/>
+          </a:path>
+        </a:gradFill>
+        <a:gradFill rotWithShape="1">
+          <a:gsLst>
+            <a:gs pos="0">
+              <a:schemeClr val="phClr">
+                <a:tint val="80000"/>
+                <a:satMod val="300000"/>
+              </a:schemeClr>
+            </a:gs>
+            <a:gs pos="100000">
+              <a:schemeClr val="phClr">
+                <a:shade val="30000"/>
+                <a:satMod val="200000"/>
+              </a:schemeClr>
+            </a:gs>
+          </a:gsLst>
+          <a:path path="circle">
+            <a:fillToRect l="50000" t="50000" r="50000" b="50000"/>
+          </a:path>
+        </a:gradFill>
+      </a:bgFillStyleLst>
+    </a:fmtScheme>
+  </a:themeElements>
+  <a:objectDefaults>
+    <a:spDef>
+      <a:spPr/>
+      <a:bodyPr/>
+      <a:lstStyle/>
+      <a:style>
+        <a:lnRef idx="1">
+          <a:schemeClr val="accent1"/>
+        </a:lnRef>
+        <a:fillRef idx="3">
+          <a:schemeClr val="accent1"/>
+        </a:fillRef>
+        <a:effectRef idx="2">
+          <a:schemeClr val="accent1"/>
+        </a:effectRef>
+        <a:fontRef idx="minor">
+          <a:schemeClr val="lt1"/>
+        </a:fontRef>
+      </a:style>
+    </a:spDef>
+    <a:lnDef>
+      <a:spPr/>
+      <a:bodyPr/>
+      <a:lstStyle/>
+      <a:style>
+        <a:lnRef idx="2">
+          <a:schemeClr val="accent1"/>
+        </a:lnRef>
+        <a:fillRef idx="0">
+          <a:schemeClr val="accent1"/>
+        </a:fillRef>
+        <a:effectRef idx="1">
+          <a:schemeClr val="accent1"/>
+        </a:effectRef>
+        <a:fontRef idx="minor">
+          <a:schemeClr val="tx1"/>
+        </a:fontRef>
+      </a:style>
+    </a:lnDef>
+  </a:objectDefaults>
+  <a:extraClrSchemeLst/>
+</a:theme>
 </file>
--- a/protected-downloads/praesentation/M09.pptx
+++ b/protected-downloads/praesentation/M09.pptx
@@ -4448,7 +4448,7 @@
                 </a:solidFill>
                 <a:latin typeface="Arial"/>
               </a:rPr>
-              <a:t>Stratege</a:t>
+              <a:t>Strategischer Partner</a:t>
             </a:r>
           </a:p>
         </p:txBody>

--- a/protected-downloads/praesentation/M09.pptx
+++ b/protected-downloads/praesentation/M09.pptx
@@ -5751,25 +5751,6 @@
                 <a:latin typeface="Arial"/>
               </a:rPr>
               <a:t>→  Drei solcher Notizen aus der gleichen Branche zeigen Ihnen verlässlich die Muster – und sind im nächsten Jahresgespräch Gold wert.</a:t>
-            </a:r>
-          </a:p>
-          <a:p>
-            <a:pPr>
-              <a:spcBef>
-                <a:spcPts val="400"/>
-              </a:spcBef>
-              <a:spcAft>
-                <a:spcPts val="200"/>
-              </a:spcAft>
-            </a:pPr>
-            <a:r>
-              <a:rPr sz="1200">
-                <a:solidFill>
-                  <a:srgbClr val="3D5466"/>
-                </a:solidFill>
-                <a:latin typeface="Arial"/>
-              </a:rPr>
-              <a:t># 5. PRAXISTRANSFER</a:t>
             </a:r>
           </a:p>
         </p:txBody>

--- a/protected-downloads/praesentation/M09.pptx
+++ b/protected-downloads/praesentation/M09.pptx
@@ -8,7 +8,7 @@
     <p:sldId id="256" r:id="rId7"/>
     <p:sldId id="257" r:id="rId8"/>
     <p:sldId id="258" r:id="rId9"/>
-    <p:sldId id="259" r:id="rId11"/>
+    <p:sldId id="259" r:id="rId10"/>
     <p:sldId id="260" r:id="rId12"/>
     <p:sldId id="261" r:id="rId13"/>
     <p:sldId id="262" r:id="rId14"/>
@@ -17,6 +17,7 @@
     <p:sldId id="265" r:id="rId17"/>
     <p:sldId id="266" r:id="rId18"/>
     <p:sldId id="267" r:id="rId19"/>
+    <p:sldId id="268" r:id="rId20"/>
   </p:sldIdLst>
   <p:sldSz cx="12188952" cy="6858000" type="screen4x3"/>
   <p:notesSz cx="6858000" cy="9144000"/>
@@ -4891,7 +4892,7 @@
                 </a:solidFill>
                 <a:latin typeface="Source Serif 4"/>
               </a:rPr>
-              <a:t>Arbeitsblatt A: Branchenanalyse – Five Forces Scoring</a:t>
+              <a:t>Wissensarbeit transparent machen – Gespräche in der Lernphase</a:t>
             </a:r>
           </a:p>
         </p:txBody>
@@ -4933,7 +4934,45 @@
                 </a:solidFill>
                 <a:latin typeface="Arial"/>
               </a:rPr>
-              <a:t>Bewertungslogik: 1 = schwach / kaum relevant · 5 = stark / hochrelevant</a:t>
+              <a:t>Formulierungen, die funktionieren:</a:t>
+            </a:r>
+          </a:p>
+          <a:p>
+            <a:pPr>
+              <a:spcBef>
+                <a:spcPts val="600"/>
+              </a:spcBef>
+              <a:spcAft>
+                <a:spcPts val="200"/>
+              </a:spcAft>
+            </a:pPr>
+            <a:r>
+              <a:rPr sz="1200" i="1">
+                <a:solidFill>
+                  <a:srgbClr val="3D5466"/>
+                </a:solidFill>
+                <a:latin typeface="Arial"/>
+              </a:rPr>
+              <a:t>→  „Ich bin gerade dabei, mein Wissen über Ihre Branche systematisch auszubauen – ich lerne am meisten von meinen Kunden. Was sollte jeder Bankmitarbeiter über Ihr Geschäft wissen?"</a:t>
+            </a:r>
+          </a:p>
+          <a:p>
+            <a:pPr>
+              <a:spcBef>
+                <a:spcPts val="600"/>
+              </a:spcBef>
+              <a:spcAft>
+                <a:spcPts val="200"/>
+              </a:spcAft>
+            </a:pPr>
+            <a:r>
+              <a:rPr sz="1200" i="1">
+                <a:solidFill>
+                  <a:srgbClr val="3D5466"/>
+                </a:solidFill>
+                <a:latin typeface="Arial"/>
+              </a:rPr>
+              <a:t>→  „Ich habe mit dem DZ BANK Agrar-Spezialisten gesprochen – der hat mir [Thema] erklärt. Das war neu für mich. Stimmt das mit Ihrer Erfahrung überein?"</a:t>
             </a:r>
           </a:p>
           <a:p>
@@ -4952,7 +4991,159 @@
                 </a:solidFill>
                 <a:latin typeface="Arial"/>
               </a:rPr>
-              <a:t>Wichtigste Erkenntnis aus dieser Analyse:</a:t>
+              <a:t>Was vermeiden:</a:t>
+            </a:r>
+          </a:p>
+          <a:p>
+            <a:pPr>
+              <a:spcBef>
+                <a:spcPts val="400"/>
+              </a:spcBef>
+              <a:spcAft>
+                <a:spcPts val="200"/>
+              </a:spcAft>
+            </a:pPr>
+            <a:r>
+              <a:rPr sz="1300">
+                <a:solidFill>
+                  <a:srgbClr val="3D5466"/>
+                </a:solidFill>
+                <a:latin typeface="Arial"/>
+              </a:rPr>
+              <a:t>▸  Nicht sagen: „Ich kenne mich in Ihrer Branche noch nicht so gut aus." (schafft Unsicherheit)</a:t>
+            </a:r>
+          </a:p>
+          <a:p>
+            <a:pPr>
+              <a:spcBef>
+                <a:spcPts val="400"/>
+              </a:spcBef>
+              <a:spcAft>
+                <a:spcPts val="200"/>
+              </a:spcAft>
+            </a:pPr>
+            <a:r>
+              <a:rPr sz="1300">
+                <a:solidFill>
+                  <a:srgbClr val="3D5466"/>
+                </a:solidFill>
+                <a:latin typeface="Arial"/>
+              </a:rPr>
+              <a:t>▸  Nicht sagen: „Ich bin kein Branchenexperte, aber..." (unnötige Selbstabwertung)</a:t>
+            </a:r>
+          </a:p>
+          <a:p>
+            <a:pPr>
+              <a:spcBef>
+                <a:spcPts val="400"/>
+              </a:spcBef>
+              <a:spcAft>
+                <a:spcPts val="200"/>
+              </a:spcAft>
+            </a:pPr>
+            <a:r>
+              <a:rPr sz="1300">
+                <a:solidFill>
+                  <a:srgbClr val="3D5466"/>
+                </a:solidFill>
+                <a:latin typeface="Arial"/>
+              </a:rPr>
+              <a:t>▸  Nicht so tun, als ob man alles weiß (Kunden merken es sofort)</a:t>
+            </a:r>
+          </a:p>
+          <a:p>
+            <a:pPr>
+              <a:spcBef>
+                <a:spcPts val="400"/>
+              </a:spcBef>
+              <a:spcAft>
+                <a:spcPts val="200"/>
+              </a:spcAft>
+            </a:pPr>
+            <a:r>
+              <a:rPr sz="1200">
+                <a:solidFill>
+                  <a:srgbClr val="3D5466"/>
+                </a:solidFill>
+                <a:latin typeface="Arial"/>
+              </a:rPr>
+              <a:t>Die Grundregel: Interesse + konkrete Vorbereitung + echtes Zuhören ersetzen fehlende Expertise – zumindest in den ersten Gesprächen. Expertise entsteht dann im Dialog.</a:t>
+            </a:r>
+          </a:p>
+          <a:p>
+            <a:pPr>
+              <a:spcBef>
+                <a:spcPts val="400"/>
+              </a:spcBef>
+              <a:spcAft>
+                <a:spcPts val="200"/>
+              </a:spcAft>
+            </a:pPr>
+            <a:r>
+              <a:rPr sz="1200">
+                <a:solidFill>
+                  <a:srgbClr val="3D5466"/>
+                </a:solidFill>
+                <a:latin typeface="Arial"/>
+              </a:rPr>
+              <a:t>## 4.3 Informationsquellen für Branchenexpertise</a:t>
+            </a:r>
+          </a:p>
+          <a:p>
+            <a:pPr>
+              <a:spcBef>
+                <a:spcPts val="400"/>
+              </a:spcBef>
+              <a:spcAft>
+                <a:spcPts val="200"/>
+              </a:spcAft>
+            </a:pPr>
+            <a:r>
+              <a:rPr sz="1200">
+                <a:solidFill>
+                  <a:srgbClr val="3D5466"/>
+                </a:solidFill>
+                <a:latin typeface="Arial"/>
+              </a:rPr>
+              <a:t>Systematische Branchenexpertise entsteht aus dem Zusammenspiel verschiedener Quellen. Die folgende Matrix hilft bei der Auswahl:</a:t>
+            </a:r>
+          </a:p>
+          <a:p>
+            <a:pPr>
+              <a:spcBef>
+                <a:spcPts val="400"/>
+              </a:spcBef>
+              <a:spcAft>
+                <a:spcPts val="200"/>
+              </a:spcAft>
+            </a:pPr>
+            <a:r>
+              <a:rPr sz="1200">
+                <a:solidFill>
+                  <a:srgbClr val="3D5466"/>
+                </a:solidFill>
+                <a:latin typeface="Arial"/>
+              </a:rPr>
+              <a:t>Empfohlene Priorisierung für den Start: Branchenverband (Jahresbericht), DZ BANK Research (sofern verfügbar), IHK-Konjunkturbericht, 3–5 Kundengespräche mit Fokus auf Branchentrends.</a:t>
+            </a:r>
+          </a:p>
+          <a:p>
+            <a:pPr>
+              <a:spcBef>
+                <a:spcPts val="400"/>
+              </a:spcBef>
+              <a:spcAft>
+                <a:spcPts val="200"/>
+              </a:spcAft>
+            </a:pPr>
+            <a:r>
+              <a:rPr sz="1200">
+                <a:solidFill>
+                  <a:srgbClr val="3D5466"/>
+                </a:solidFill>
+                <a:latin typeface="Arial"/>
+              </a:rPr>
+              <a:t>## 4.4 Expertennetzwerk aufbauen</a:t>
             </a:r>
           </a:p>
         </p:txBody>
@@ -5290,7 +5481,7 @@
                 </a:solidFill>
                 <a:latin typeface="Source Serif 4"/>
               </a:rPr>
-              <a:t>Arbeitsblatt B: Mein 3-Monats-Expertiseplan</a:t>
+              <a:t>Arbeitsblatt A: Branchenanalyse – Five Forces Scoring</a:t>
             </a:r>
           </a:p>
         </p:txBody>
@@ -5332,7 +5523,26 @@
                 </a:solidFill>
                 <a:latin typeface="Arial"/>
               </a:rPr>
-              <a:t>Meine Kernmotivation (Warum diese Branche?):</a:t>
+              <a:t>Bewertungslogik: 1 = schwach / kaum relevant · 5 = stark / hochrelevant</a:t>
+            </a:r>
+          </a:p>
+          <a:p>
+            <a:pPr>
+              <a:spcBef>
+                <a:spcPts val="400"/>
+              </a:spcBef>
+              <a:spcAft>
+                <a:spcPts val="200"/>
+              </a:spcAft>
+            </a:pPr>
+            <a:r>
+              <a:rPr sz="1200">
+                <a:solidFill>
+                  <a:srgbClr val="3D5466"/>
+                </a:solidFill>
+                <a:latin typeface="Arial"/>
+              </a:rPr>
+              <a:t>Wichtigste Erkenntnis aus dieser Analyse:</a:t>
             </a:r>
           </a:p>
         </p:txBody>
@@ -5670,6 +5880,386 @@
                 </a:solidFill>
                 <a:latin typeface="Source Serif 4"/>
               </a:rPr>
+              <a:t>Arbeitsblatt B: Mein 3-Monats-Expertiseplan</a:t>
+            </a:r>
+          </a:p>
+        </p:txBody>
+      </p:sp>
+      <p:sp>
+        <p:nvSpPr>
+          <p:cNvPr id="8" name="TextBox 7"/>
+          <p:cNvSpPr txBox="1"/>
+          <p:nvPr/>
+        </p:nvSpPr>
+        <p:spPr>
+          <a:xfrm>
+            <a:off x="685800" y="1417320"/>
+            <a:ext cx="10817352" cy="5029200"/>
+          </a:xfrm>
+          <a:prstGeom prst="rect">
+            <a:avLst/>
+          </a:prstGeom>
+          <a:noFill/>
+        </p:spPr>
+        <p:txBody>
+          <a:bodyPr wrap="square">
+            <a:spAutoFit/>
+          </a:bodyPr>
+          <a:lstStyle/>
+          <a:p>
+            <a:pPr>
+              <a:spcBef>
+                <a:spcPts val="400"/>
+              </a:spcBef>
+              <a:spcAft>
+                <a:spcPts val="200"/>
+              </a:spcAft>
+            </a:pPr>
+            <a:r>
+              <a:rPr sz="1200">
+                <a:solidFill>
+                  <a:srgbClr val="3D5466"/>
+                </a:solidFill>
+                <a:latin typeface="Arial"/>
+              </a:rPr>
+              <a:t>Meine Kernmotivation (Warum diese Branche?):</a:t>
+            </a:r>
+          </a:p>
+        </p:txBody>
+      </p:sp>
+      <p:sp>
+        <p:nvSpPr>
+          <p:cNvPr id="9" name="Rectangle 8"/>
+          <p:cNvSpPr/>
+          <p:nvPr/>
+        </p:nvSpPr>
+        <p:spPr>
+          <a:xfrm>
+            <a:off x="0" y="6510528"/>
+            <a:ext cx="12188952" cy="347472"/>
+          </a:xfrm>
+          <a:prstGeom prst="rect">
+            <a:avLst/>
+          </a:prstGeom>
+          <a:solidFill>
+            <a:srgbClr val="0A1937"/>
+          </a:solidFill>
+          <a:ln>
+            <a:noFill/>
+          </a:ln>
+        </p:spPr>
+        <p:style>
+          <a:lnRef idx="1">
+            <a:schemeClr val="accent1"/>
+          </a:lnRef>
+          <a:fillRef idx="3">
+            <a:schemeClr val="accent1"/>
+          </a:fillRef>
+          <a:effectRef idx="2">
+            <a:schemeClr val="accent1"/>
+          </a:effectRef>
+          <a:fontRef idx="minor">
+            <a:schemeClr val="lt1"/>
+          </a:fontRef>
+        </p:style>
+        <p:txBody>
+          <a:bodyPr rtlCol="0" anchor="ctr"/>
+          <a:lstStyle/>
+          <a:p>
+            <a:pPr algn="ctr"/>
+          </a:p>
+        </p:txBody>
+      </p:sp>
+      <p:sp>
+        <p:nvSpPr>
+          <p:cNvPr id="10" name="TextBox 9"/>
+          <p:cNvSpPr txBox="1"/>
+          <p:nvPr/>
+        </p:nvSpPr>
+        <p:spPr>
+          <a:xfrm>
+            <a:off x="685800" y="6583680"/>
+            <a:ext cx="6490411" cy="256032"/>
+          </a:xfrm>
+          <a:prstGeom prst="rect">
+            <a:avLst/>
+          </a:prstGeom>
+          <a:noFill/>
+        </p:spPr>
+        <p:txBody>
+          <a:bodyPr wrap="none">
+            <a:spAutoFit/>
+          </a:bodyPr>
+          <a:lstStyle/>
+          <a:p>
+            <a:pPr algn="l"/>
+            <a:r>
+              <a:rPr sz="700">
+                <a:solidFill>
+                  <a:srgbClr val="A0B4D2"/>
+                </a:solidFill>
+                <a:latin typeface="JetBrains Mono"/>
+              </a:rPr>
+              <a:t>Benedikt Zoller Coaching  ·  FKB Campus  ·  M09</a:t>
+            </a:r>
+          </a:p>
+        </p:txBody>
+      </p:sp>
+    </p:spTree>
+  </p:cSld>
+  <p:clrMapOvr>
+    <a:masterClrMapping/>
+  </p:clrMapOvr>
+</p:sld>
+</file>
+
+<file path=ppt/slides/slide13.xml><?xml version="1.0" encoding="utf-8"?>
+<p:sld xmlns:a="http://schemas.openxmlformats.org/drawingml/2006/main" xmlns:p="http://schemas.openxmlformats.org/presentationml/2006/main" xmlns:r="http://schemas.openxmlformats.org/officeDocument/2006/relationships">
+  <p:cSld>
+    <p:spTree>
+      <p:nvGrpSpPr>
+        <p:cNvPr id="1" name=""/>
+        <p:cNvGrpSpPr/>
+        <p:nvPr/>
+      </p:nvGrpSpPr>
+      <p:grpSpPr/>
+      <p:sp>
+        <p:nvSpPr>
+          <p:cNvPr id="2" name="Rectangle 1"/>
+          <p:cNvSpPr/>
+          <p:nvPr/>
+        </p:nvSpPr>
+        <p:spPr>
+          <a:xfrm>
+            <a:off x="0" y="0"/>
+            <a:ext cx="12188952" cy="6858000"/>
+          </a:xfrm>
+          <a:prstGeom prst="rect">
+            <a:avLst/>
+          </a:prstGeom>
+          <a:solidFill>
+            <a:srgbClr val="EDEDF3"/>
+          </a:solidFill>
+          <a:ln>
+            <a:noFill/>
+          </a:ln>
+        </p:spPr>
+        <p:style>
+          <a:lnRef idx="1">
+            <a:schemeClr val="accent1"/>
+          </a:lnRef>
+          <a:fillRef idx="3">
+            <a:schemeClr val="accent1"/>
+          </a:fillRef>
+          <a:effectRef idx="2">
+            <a:schemeClr val="accent1"/>
+          </a:effectRef>
+          <a:fontRef idx="minor">
+            <a:schemeClr val="lt1"/>
+          </a:fontRef>
+        </p:style>
+        <p:txBody>
+          <a:bodyPr rtlCol="0" anchor="ctr"/>
+          <a:lstStyle/>
+          <a:p>
+            <a:pPr algn="ctr"/>
+          </a:p>
+        </p:txBody>
+      </p:sp>
+      <p:sp>
+        <p:nvSpPr>
+          <p:cNvPr id="3" name="Rectangle 2"/>
+          <p:cNvSpPr/>
+          <p:nvPr/>
+        </p:nvSpPr>
+        <p:spPr>
+          <a:xfrm>
+            <a:off x="0" y="0"/>
+            <a:ext cx="12188952" cy="50292"/>
+          </a:xfrm>
+          <a:prstGeom prst="rect">
+            <a:avLst/>
+          </a:prstGeom>
+          <a:solidFill>
+            <a:srgbClr val="1F2C56"/>
+          </a:solidFill>
+          <a:ln>
+            <a:noFill/>
+          </a:ln>
+        </p:spPr>
+        <p:style>
+          <a:lnRef idx="1">
+            <a:schemeClr val="accent1"/>
+          </a:lnRef>
+          <a:fillRef idx="3">
+            <a:schemeClr val="accent1"/>
+          </a:fillRef>
+          <a:effectRef idx="2">
+            <a:schemeClr val="accent1"/>
+          </a:effectRef>
+          <a:fontRef idx="minor">
+            <a:schemeClr val="lt1"/>
+          </a:fontRef>
+        </p:style>
+        <p:txBody>
+          <a:bodyPr rtlCol="0" anchor="ctr"/>
+          <a:lstStyle/>
+          <a:p>
+            <a:pPr algn="ctr"/>
+          </a:p>
+        </p:txBody>
+      </p:sp>
+      <p:sp>
+        <p:nvSpPr>
+          <p:cNvPr id="4" name="TextBox 3"/>
+          <p:cNvSpPr txBox="1"/>
+          <p:nvPr/>
+        </p:nvSpPr>
+        <p:spPr>
+          <a:xfrm>
+            <a:off x="685800" y="109728"/>
+            <a:ext cx="10817352" cy="228600"/>
+          </a:xfrm>
+          <a:prstGeom prst="rect">
+            <a:avLst/>
+          </a:prstGeom>
+          <a:noFill/>
+        </p:spPr>
+        <p:txBody>
+          <a:bodyPr wrap="none">
+            <a:spAutoFit/>
+          </a:bodyPr>
+          <a:lstStyle/>
+          <a:p>
+            <a:pPr algn="l"/>
+            <a:r>
+              <a:rPr sz="750">
+                <a:solidFill>
+                  <a:srgbClr val="78808C"/>
+                </a:solidFill>
+                <a:latin typeface="JetBrains Mono"/>
+              </a:rPr>
+              <a:t>M09  ·  INHALT</a:t>
+            </a:r>
+          </a:p>
+        </p:txBody>
+      </p:sp>
+      <p:sp>
+        <p:nvSpPr>
+          <p:cNvPr id="5" name="Rectangle 4"/>
+          <p:cNvSpPr/>
+          <p:nvPr/>
+        </p:nvSpPr>
+        <p:spPr>
+          <a:xfrm>
+            <a:off x="0" y="1234440"/>
+            <a:ext cx="12188952" cy="12700"/>
+          </a:xfrm>
+          <a:prstGeom prst="rect">
+            <a:avLst/>
+          </a:prstGeom>
+          <a:solidFill>
+            <a:srgbClr val="D8DFE4"/>
+          </a:solidFill>
+          <a:ln>
+            <a:noFill/>
+          </a:ln>
+        </p:spPr>
+        <p:style>
+          <a:lnRef idx="1">
+            <a:schemeClr val="accent1"/>
+          </a:lnRef>
+          <a:fillRef idx="3">
+            <a:schemeClr val="accent1"/>
+          </a:fillRef>
+          <a:effectRef idx="2">
+            <a:schemeClr val="accent1"/>
+          </a:effectRef>
+          <a:fontRef idx="minor">
+            <a:schemeClr val="lt1"/>
+          </a:fontRef>
+        </p:style>
+        <p:txBody>
+          <a:bodyPr rtlCol="0" anchor="ctr"/>
+          <a:lstStyle/>
+          <a:p>
+            <a:pPr algn="ctr"/>
+          </a:p>
+        </p:txBody>
+      </p:sp>
+      <p:sp>
+        <p:nvSpPr>
+          <p:cNvPr id="6" name="Rectangle 5"/>
+          <p:cNvSpPr/>
+          <p:nvPr/>
+        </p:nvSpPr>
+        <p:spPr>
+          <a:xfrm>
+            <a:off x="685800" y="502920"/>
+            <a:ext cx="36576" cy="658368"/>
+          </a:xfrm>
+          <a:prstGeom prst="rect">
+            <a:avLst/>
+          </a:prstGeom>
+          <a:solidFill>
+            <a:srgbClr val="D9C089"/>
+          </a:solidFill>
+          <a:ln>
+            <a:noFill/>
+          </a:ln>
+        </p:spPr>
+        <p:style>
+          <a:lnRef idx="1">
+            <a:schemeClr val="accent1"/>
+          </a:lnRef>
+          <a:fillRef idx="3">
+            <a:schemeClr val="accent1"/>
+          </a:fillRef>
+          <a:effectRef idx="2">
+            <a:schemeClr val="accent1"/>
+          </a:effectRef>
+          <a:fontRef idx="minor">
+            <a:schemeClr val="lt1"/>
+          </a:fontRef>
+        </p:style>
+        <p:txBody>
+          <a:bodyPr rtlCol="0" anchor="ctr"/>
+          <a:lstStyle/>
+          <a:p>
+            <a:pPr algn="ctr"/>
+          </a:p>
+        </p:txBody>
+      </p:sp>
+      <p:sp>
+        <p:nvSpPr>
+          <p:cNvPr id="7" name="TextBox 6"/>
+          <p:cNvSpPr txBox="1"/>
+          <p:nvPr/>
+        </p:nvSpPr>
+        <p:spPr>
+          <a:xfrm>
+            <a:off x="813816" y="502920"/>
+            <a:ext cx="10634472" cy="685800"/>
+          </a:xfrm>
+          <a:prstGeom prst="rect">
+            <a:avLst/>
+          </a:prstGeom>
+          <a:noFill/>
+        </p:spPr>
+        <p:txBody>
+          <a:bodyPr wrap="square">
+            <a:spAutoFit/>
+          </a:bodyPr>
+          <a:lstStyle/>
+          <a:p>
+            <a:pPr algn="l"/>
+            <a:r>
+              <a:rPr sz="2400" b="1" i="0">
+                <a:solidFill>
+                  <a:srgbClr val="1F2C56"/>
+                </a:solidFill>
+                <a:latin typeface="Source Serif 4"/>
+              </a:rPr>
               <a:t>Arbeitsblatt C: Strukturiertes Branchengespräch – Protokollvorlage</a:t>
             </a:r>
           </a:p>
@@ -5967,7 +6557,7 @@
                 </a:solidFill>
                 <a:latin typeface="JetBrains Mono"/>
               </a:rPr>
-              <a:t>LERNZIELE  ·  M09</a:t>
+              <a:t>ÜBERBLICK  ·  M09</a:t>
             </a:r>
           </a:p>
         </p:txBody>
@@ -6045,7 +6635,7 @@
                 </a:solidFill>
                 <a:latin typeface="Source Serif 4"/>
               </a:rPr>
-              <a:t>Was Sie heute mitnehmen</a:t>
+              <a:t>Worum geht es heute</a:t>
             </a:r>
           </a:p>
         </p:txBody>
@@ -6058,8 +6648,8 @@
         </p:nvSpPr>
         <p:spPr>
           <a:xfrm>
-            <a:off x="685800" y="1371600"/>
-            <a:ext cx="10817352" cy="5120640"/>
+            <a:off x="685800" y="1737360"/>
+            <a:ext cx="9720072" cy="4206240"/>
           </a:xfrm>
           <a:prstGeom prst="rect">
             <a:avLst/>
@@ -6073,116 +6663,50 @@
           <a:lstStyle/>
           <a:p>
             <a:pPr>
-              <a:spcBef>
-                <a:spcPts val="800"/>
-              </a:spcBef>
               <a:spcAft>
-                <a:spcPts val="200"/>
+                <a:spcPts val="1200"/>
               </a:spcAft>
             </a:pPr>
             <a:r>
-              <a:rPr sz="1400">
+              <a:rPr sz="1700">
                 <a:solidFill>
                   <a:srgbClr val="3D5466"/>
                 </a:solidFill>
                 <a:latin typeface="Arial"/>
               </a:rPr>
-              <a:t>▸  Eine zugewiesene Branche anhand von Porter's Five Forces und PESTEL systematisch analysieren und Werttreiber sowie Risikofaktoren identifizieren</a:t>
+              <a:t>Vom Generalisten zum gefragten Ansprechpartner einer Branche – das ist ein Entwicklungsweg, kein Zufall.</a:t>
             </a:r>
           </a:p>
           <a:p>
             <a:pPr>
-              <a:spcBef>
-                <a:spcPts val="800"/>
-              </a:spcBef>
               <a:spcAft>
-                <a:spcPts val="200"/>
+                <a:spcPts val="1200"/>
               </a:spcAft>
             </a:pPr>
             <a:r>
-              <a:rPr sz="1400">
+              <a:rPr sz="1700">
                 <a:solidFill>
                   <a:srgbClr val="3D5466"/>
                 </a:solidFill>
                 <a:latin typeface="Arial"/>
               </a:rPr>
-              <a:t>▸  Wettbewerbsposition und strategische Optionen eines Firmenkundenunternehmens auf Basis der Branchenanalyse bewerten</a:t>
+              <a:t>In diesem dreimonatigen Programm bauen Sie mit PESTEL-Analyse, Mentoring und Netzwerkarbeit systematisch Branchenexpertise auf.</a:t>
             </a:r>
           </a:p>
           <a:p>
             <a:pPr>
-              <a:spcBef>
-                <a:spcPts val="800"/>
-              </a:spcBef>
               <a:spcAft>
-                <a:spcPts val="200"/>
+                <a:spcPts val="1200"/>
               </a:spcAft>
             </a:pPr>
             <a:r>
-              <a:rPr sz="1400">
+              <a:rPr sz="1700">
                 <a:solidFill>
                   <a:srgbClr val="3D5466"/>
                 </a:solidFill>
                 <a:latin typeface="Arial"/>
               </a:rPr>
-              <a:t>▸  Einen persönlichen 3-Monats-Plan zum Aufbau von Branchenexpertise für ein definiertes Zielsegment entwickeln</a:t>
-            </a:r>
-          </a:p>
-          <a:p>
-            <a:pPr>
-              <a:spcBef>
-                <a:spcPts val="800"/>
-              </a:spcBef>
-              <a:spcAft>
-                <a:spcPts val="200"/>
-              </a:spcAft>
-            </a:pPr>
-            <a:r>
-              <a:rPr sz="1400">
-                <a:solidFill>
-                  <a:srgbClr val="3D5466"/>
-                </a:solidFill>
-                <a:latin typeface="Arial"/>
-              </a:rPr>
-              <a:t>▸  Relevante Informationsquellen für das Zielsegment analysieren und geeignete Quellen auswählen</a:t>
-            </a:r>
-          </a:p>
-          <a:p>
-            <a:pPr>
-              <a:spcBef>
-                <a:spcPts val="800"/>
-              </a:spcBef>
-              <a:spcAft>
-                <a:spcPts val="200"/>
-              </a:spcAft>
-            </a:pPr>
-            <a:r>
-              <a:rPr sz="1400">
-                <a:solidFill>
-                  <a:srgbClr val="3D5466"/>
-                </a:solidFill>
-                <a:latin typeface="Arial"/>
-              </a:rPr>
-              <a:t>▸  Möglichkeiten zum Aufbau eines branchenspezifischen Expertennetzwerks bewerten und konkrete Vernetzungsschritte ableiten</a:t>
-            </a:r>
-          </a:p>
-          <a:p>
-            <a:pPr>
-              <a:spcBef>
-                <a:spcPts val="800"/>
-              </a:spcBef>
-              <a:spcAft>
-                <a:spcPts val="200"/>
-              </a:spcAft>
-            </a:pPr>
-            <a:r>
-              <a:rPr sz="1400">
-                <a:solidFill>
-                  <a:srgbClr val="3D5466"/>
-                </a:solidFill>
-                <a:latin typeface="Arial"/>
-              </a:rPr>
-              <a:t>▸  Ein strukturiertes Branchenportfolio als Dokumentationsinstrument für die Expertiseentwicklung entwickeln</a:t>
+              <a:t>Danach sind Sie intern wie extern als Branchenexperte sichtbar – mit eigenem Themen- und Kontaktportfolio.</a:t>
             </a:r>
           </a:p>
         </p:txBody>
@@ -6399,7 +6923,7 @@
                 </a:solidFill>
                 <a:latin typeface="JetBrains Mono"/>
               </a:rPr>
-              <a:t>M09  ·  INHALT</a:t>
+              <a:t>LERNZIELE  ·  M09</a:t>
             </a:r>
           </a:p>
         </p:txBody>
@@ -6449,57 +6973,14 @@
       </p:sp>
       <p:sp>
         <p:nvSpPr>
-          <p:cNvPr id="6" name="Rectangle 5"/>
-          <p:cNvSpPr/>
+          <p:cNvPr id="6" name="TextBox 5"/>
+          <p:cNvSpPr txBox="1"/>
           <p:nvPr/>
         </p:nvSpPr>
         <p:spPr>
           <a:xfrm>
             <a:off x="685800" y="502920"/>
-            <a:ext cx="36576" cy="658368"/>
-          </a:xfrm>
-          <a:prstGeom prst="rect">
-            <a:avLst/>
-          </a:prstGeom>
-          <a:solidFill>
-            <a:srgbClr val="D9C089"/>
-          </a:solidFill>
-          <a:ln>
-            <a:noFill/>
-          </a:ln>
-        </p:spPr>
-        <p:style>
-          <a:lnRef idx="1">
-            <a:schemeClr val="accent1"/>
-          </a:lnRef>
-          <a:fillRef idx="3">
-            <a:schemeClr val="accent1"/>
-          </a:fillRef>
-          <a:effectRef idx="2">
-            <a:schemeClr val="accent1"/>
-          </a:effectRef>
-          <a:fontRef idx="minor">
-            <a:schemeClr val="lt1"/>
-          </a:fontRef>
-        </p:style>
-        <p:txBody>
-          <a:bodyPr rtlCol="0" anchor="ctr"/>
-          <a:lstStyle/>
-          <a:p>
-            <a:pPr algn="ctr"/>
-          </a:p>
-        </p:txBody>
-      </p:sp>
-      <p:sp>
-        <p:nvSpPr>
-          <p:cNvPr id="7" name="TextBox 6"/>
-          <p:cNvSpPr txBox="1"/>
-          <p:nvPr/>
-        </p:nvSpPr>
-        <p:spPr>
-          <a:xfrm>
-            <a:off x="813816" y="502920"/>
-            <a:ext cx="10634472" cy="685800"/>
+            <a:ext cx="10817352" cy="658368"/>
           </a:xfrm>
           <a:prstGeom prst="rect">
             <a:avLst/>
@@ -6514,27 +6995,27 @@
           <a:p>
             <a:pPr algn="l"/>
             <a:r>
-              <a:rPr sz="2400" b="1" i="0">
+              <a:rPr sz="2600" b="1" i="0">
                 <a:solidFill>
                   <a:srgbClr val="1F2C56"/>
                 </a:solidFill>
                 <a:latin typeface="Source Serif 4"/>
               </a:rPr>
-              <a:t>Was unterscheidet den Branchenexperten?</a:t>
-            </a:r>
-          </a:p>
-        </p:txBody>
-      </p:sp>
-      <p:sp>
-        <p:nvSpPr>
-          <p:cNvPr id="8" name="TextBox 7"/>
+              <a:t>Was Sie heute mitnehmen</a:t>
+            </a:r>
+          </a:p>
+        </p:txBody>
+      </p:sp>
+      <p:sp>
+        <p:nvSpPr>
+          <p:cNvPr id="7" name="TextBox 6"/>
           <p:cNvSpPr txBox="1"/>
           <p:nvPr/>
         </p:nvSpPr>
         <p:spPr>
           <a:xfrm>
-            <a:off x="685800" y="1417320"/>
-            <a:ext cx="10817352" cy="5029200"/>
+            <a:off x="685800" y="1371600"/>
+            <a:ext cx="10817352" cy="5120640"/>
           </a:xfrm>
           <a:prstGeom prst="rect">
             <a:avLst/>
@@ -6549,141 +7030,122 @@
           <a:p>
             <a:pPr>
               <a:spcBef>
-                <a:spcPts val="400"/>
+                <a:spcPts val="800"/>
               </a:spcBef>
               <a:spcAft>
                 <a:spcPts val="200"/>
               </a:spcAft>
             </a:pPr>
             <a:r>
-              <a:rPr sz="1200">
+              <a:rPr sz="1400">
                 <a:solidFill>
                   <a:srgbClr val="3D5466"/>
                 </a:solidFill>
                 <a:latin typeface="Arial"/>
               </a:rPr>
-              <a:t>Branchenexpertise bedeutet mehr als das Kennen von Kennziffern. Sie umfasst:</a:t>
+              <a:t>▸  Eine zugewiesene Branche anhand von Porter's Five Forces und PESTEL systematisch analysieren und Werttreiber sowie Risikofaktoren identifizieren</a:t>
             </a:r>
           </a:p>
           <a:p>
             <a:pPr>
               <a:spcBef>
-                <a:spcPts val="400"/>
+                <a:spcPts val="800"/>
               </a:spcBef>
               <a:spcAft>
                 <a:spcPts val="200"/>
               </a:spcAft>
             </a:pPr>
             <a:r>
-              <a:rPr sz="1300">
+              <a:rPr sz="1400">
                 <a:solidFill>
                   <a:srgbClr val="3D5466"/>
                 </a:solidFill>
                 <a:latin typeface="Arial"/>
               </a:rPr>
-              <a:t>▸  Strukturwissen: Wie ist die Branche aufgebaut? Welche Wertschöpfungsstufen gibt es?</a:t>
+              <a:t>▸  Wettbewerbsposition und strategische Optionen eines Firmenkundenunternehmens auf Basis der Branchenanalyse bewerten</a:t>
             </a:r>
           </a:p>
           <a:p>
             <a:pPr>
               <a:spcBef>
-                <a:spcPts val="400"/>
+                <a:spcPts val="800"/>
               </a:spcBef>
               <a:spcAft>
                 <a:spcPts val="200"/>
               </a:spcAft>
             </a:pPr>
             <a:r>
-              <a:rPr sz="1300">
+              <a:rPr sz="1400">
                 <a:solidFill>
                   <a:srgbClr val="3D5466"/>
                 </a:solidFill>
                 <a:latin typeface="Arial"/>
               </a:rPr>
-              <a:t>▸  Dynamikwissen: Welche Veränderungskräfte treiben die Branche?</a:t>
+              <a:t>▸  Einen persönlichen 3-Monats-Plan zum Aufbau von Branchenexpertise für ein definiertes Zielsegment entwickeln</a:t>
             </a:r>
           </a:p>
           <a:p>
             <a:pPr>
               <a:spcBef>
-                <a:spcPts val="400"/>
+                <a:spcPts val="800"/>
               </a:spcBef>
               <a:spcAft>
                 <a:spcPts val="200"/>
               </a:spcAft>
             </a:pPr>
             <a:r>
-              <a:rPr sz="1300">
+              <a:rPr sz="1400">
                 <a:solidFill>
                   <a:srgbClr val="3D5466"/>
                 </a:solidFill>
                 <a:latin typeface="Arial"/>
               </a:rPr>
-              <a:t>▸  Netzwerkwissen: Wer sind die relevanten Verbände, Meinungsführer, Schlüsselkunden?</a:t>
+              <a:t>▸  Relevante Informationsquellen für das Zielsegment analysieren und geeignete Quellen auswählen</a:t>
             </a:r>
           </a:p>
           <a:p>
             <a:pPr>
               <a:spcBef>
-                <a:spcPts val="400"/>
+                <a:spcPts val="800"/>
               </a:spcBef>
               <a:spcAft>
                 <a:spcPts val="200"/>
               </a:spcAft>
             </a:pPr>
             <a:r>
-              <a:rPr sz="1300">
+              <a:rPr sz="1400">
                 <a:solidFill>
                   <a:srgbClr val="3D5466"/>
                 </a:solidFill>
                 <a:latin typeface="Arial"/>
               </a:rPr>
-              <a:t>▸  Erfahrungswissen: Welche typischen Herausforderungen begegnen Unternehmern dieser Branche?</a:t>
+              <a:t>▸  Möglichkeiten zum Aufbau eines branchenspezifischen Expertennetzwerks bewerten und konkrete Vernetzungsschritte ableiten</a:t>
             </a:r>
           </a:p>
           <a:p>
             <a:pPr>
               <a:spcBef>
-                <a:spcPts val="600"/>
+                <a:spcPts val="800"/>
               </a:spcBef>
               <a:spcAft>
                 <a:spcPts val="200"/>
               </a:spcAft>
             </a:pPr>
             <a:r>
-              <a:rPr sz="1200" i="1">
+              <a:rPr sz="1400">
                 <a:solidFill>
                   <a:srgbClr val="3D5466"/>
                 </a:solidFill>
                 <a:latin typeface="Arial"/>
               </a:rPr>
-              <a:t>→  „Der Experte weiß nicht mehr Fakten als der Novize – er sieht die Situation anders." (Dreyfus &amp; Dreyfus, 1986, S. 28)</a:t>
-            </a:r>
-          </a:p>
-          <a:p>
-            <a:pPr>
-              <a:spcBef>
-                <a:spcPts val="400"/>
-              </a:spcBef>
-              <a:spcAft>
-                <a:spcPts val="200"/>
-              </a:spcAft>
-            </a:pPr>
-            <a:r>
-              <a:rPr sz="1200">
-                <a:solidFill>
-                  <a:srgbClr val="3D5466"/>
-                </a:solidFill>
-                <a:latin typeface="Arial"/>
-              </a:rPr>
-              <a:t>## 4.2 Branchenanalyse: Porter's Five Forces und PESTEL</a:t>
-            </a:r>
-          </a:p>
-        </p:txBody>
-      </p:sp>
-      <p:sp>
-        <p:nvSpPr>
-          <p:cNvPr id="9" name="Rectangle 8"/>
+              <a:t>▸  Ein strukturiertes Branchenportfolio als Dokumentationsinstrument für die Expertiseentwicklung entwickeln</a:t>
+            </a:r>
+          </a:p>
+        </p:txBody>
+      </p:sp>
+      <p:sp>
+        <p:nvSpPr>
+          <p:cNvPr id="8" name="Rectangle 7"/>
           <p:cNvSpPr/>
           <p:nvPr/>
         </p:nvSpPr>
@@ -6726,7 +7188,7 @@
       </p:sp>
       <p:sp>
         <p:nvSpPr>
-          <p:cNvPr id="10" name="TextBox 9"/>
+          <p:cNvPr id="9" name="TextBox 8"/>
           <p:cNvSpPr txBox="1"/>
           <p:nvPr/>
         </p:nvSpPr>
@@ -7014,14 +7476,170 @@
                 </a:solidFill>
                 <a:latin typeface="Source Serif 4"/>
               </a:rPr>
-              <a:t>Porter's Five Forces</a:t>
-            </a:r>
-          </a:p>
-        </p:txBody>
-      </p:sp>
-      <p:sp>
-        <p:nvSpPr>
-          <p:cNvPr id="8" name="Rectangle 7"/>
+              <a:t>Was unterscheidet den Branchenexperten?</a:t>
+            </a:r>
+          </a:p>
+        </p:txBody>
+      </p:sp>
+      <p:sp>
+        <p:nvSpPr>
+          <p:cNvPr id="8" name="TextBox 7"/>
+          <p:cNvSpPr txBox="1"/>
+          <p:nvPr/>
+        </p:nvSpPr>
+        <p:spPr>
+          <a:xfrm>
+            <a:off x="685800" y="1417320"/>
+            <a:ext cx="10817352" cy="5029200"/>
+          </a:xfrm>
+          <a:prstGeom prst="rect">
+            <a:avLst/>
+          </a:prstGeom>
+          <a:noFill/>
+        </p:spPr>
+        <p:txBody>
+          <a:bodyPr wrap="square">
+            <a:spAutoFit/>
+          </a:bodyPr>
+          <a:lstStyle/>
+          <a:p>
+            <a:pPr>
+              <a:spcBef>
+                <a:spcPts val="400"/>
+              </a:spcBef>
+              <a:spcAft>
+                <a:spcPts val="200"/>
+              </a:spcAft>
+            </a:pPr>
+            <a:r>
+              <a:rPr sz="1200">
+                <a:solidFill>
+                  <a:srgbClr val="3D5466"/>
+                </a:solidFill>
+                <a:latin typeface="Arial"/>
+              </a:rPr>
+              <a:t>Branchenexpertise bedeutet mehr als das Kennen von Kennziffern. Sie umfasst:</a:t>
+            </a:r>
+          </a:p>
+          <a:p>
+            <a:pPr>
+              <a:spcBef>
+                <a:spcPts val="400"/>
+              </a:spcBef>
+              <a:spcAft>
+                <a:spcPts val="200"/>
+              </a:spcAft>
+            </a:pPr>
+            <a:r>
+              <a:rPr sz="1300">
+                <a:solidFill>
+                  <a:srgbClr val="3D5466"/>
+                </a:solidFill>
+                <a:latin typeface="Arial"/>
+              </a:rPr>
+              <a:t>▸  Strukturwissen: Wie ist die Branche aufgebaut? Welche Wertschöpfungsstufen gibt es?</a:t>
+            </a:r>
+          </a:p>
+          <a:p>
+            <a:pPr>
+              <a:spcBef>
+                <a:spcPts val="400"/>
+              </a:spcBef>
+              <a:spcAft>
+                <a:spcPts val="200"/>
+              </a:spcAft>
+            </a:pPr>
+            <a:r>
+              <a:rPr sz="1300">
+                <a:solidFill>
+                  <a:srgbClr val="3D5466"/>
+                </a:solidFill>
+                <a:latin typeface="Arial"/>
+              </a:rPr>
+              <a:t>▸  Dynamikwissen: Welche Veränderungskräfte treiben die Branche?</a:t>
+            </a:r>
+          </a:p>
+          <a:p>
+            <a:pPr>
+              <a:spcBef>
+                <a:spcPts val="400"/>
+              </a:spcBef>
+              <a:spcAft>
+                <a:spcPts val="200"/>
+              </a:spcAft>
+            </a:pPr>
+            <a:r>
+              <a:rPr sz="1300">
+                <a:solidFill>
+                  <a:srgbClr val="3D5466"/>
+                </a:solidFill>
+                <a:latin typeface="Arial"/>
+              </a:rPr>
+              <a:t>▸  Netzwerkwissen: Wer sind die relevanten Verbände, Meinungsführer, Schlüsselkunden?</a:t>
+            </a:r>
+          </a:p>
+          <a:p>
+            <a:pPr>
+              <a:spcBef>
+                <a:spcPts val="400"/>
+              </a:spcBef>
+              <a:spcAft>
+                <a:spcPts val="200"/>
+              </a:spcAft>
+            </a:pPr>
+            <a:r>
+              <a:rPr sz="1300">
+                <a:solidFill>
+                  <a:srgbClr val="3D5466"/>
+                </a:solidFill>
+                <a:latin typeface="Arial"/>
+              </a:rPr>
+              <a:t>▸  Erfahrungswissen: Welche typischen Herausforderungen begegnen Unternehmern dieser Branche?</a:t>
+            </a:r>
+          </a:p>
+          <a:p>
+            <a:pPr>
+              <a:spcBef>
+                <a:spcPts val="600"/>
+              </a:spcBef>
+              <a:spcAft>
+                <a:spcPts val="200"/>
+              </a:spcAft>
+            </a:pPr>
+            <a:r>
+              <a:rPr sz="1200" i="1">
+                <a:solidFill>
+                  <a:srgbClr val="3D5466"/>
+                </a:solidFill>
+                <a:latin typeface="Arial"/>
+              </a:rPr>
+              <a:t>→  „Der Experte weiß nicht mehr Fakten als der Novize – er sieht die Situation anders." (Dreyfus &amp; Dreyfus, 1986, S. 28)</a:t>
+            </a:r>
+          </a:p>
+          <a:p>
+            <a:pPr>
+              <a:spcBef>
+                <a:spcPts val="400"/>
+              </a:spcBef>
+              <a:spcAft>
+                <a:spcPts val="200"/>
+              </a:spcAft>
+            </a:pPr>
+            <a:r>
+              <a:rPr sz="1200">
+                <a:solidFill>
+                  <a:srgbClr val="3D5466"/>
+                </a:solidFill>
+                <a:latin typeface="Arial"/>
+              </a:rPr>
+              <a:t>## 4.2 Branchenanalyse: Porter's Five Forces und PESTEL</a:t>
+            </a:r>
+          </a:p>
+        </p:txBody>
+      </p:sp>
+      <p:sp>
+        <p:nvSpPr>
+          <p:cNvPr id="9" name="Rectangle 8"/>
           <p:cNvSpPr/>
           <p:nvPr/>
         </p:nvSpPr>
@@ -7064,7 +7682,7 @@
       </p:sp>
       <p:sp>
         <p:nvSpPr>
-          <p:cNvPr id="9" name="TextBox 8"/>
+          <p:cNvPr id="10" name="TextBox 9"/>
           <p:cNvSpPr txBox="1"/>
           <p:nvPr/>
         </p:nvSpPr>
@@ -7352,56 +7970,14 @@
                 </a:solidFill>
                 <a:latin typeface="Source Serif 4"/>
               </a:rPr>
-              <a:t>PESTEL-Analyse</a:t>
-            </a:r>
-          </a:p>
-        </p:txBody>
-      </p:sp>
-      <p:sp>
-        <p:nvSpPr>
-          <p:cNvPr id="8" name="TextBox 7"/>
-          <p:cNvSpPr txBox="1"/>
-          <p:nvPr/>
-        </p:nvSpPr>
-        <p:spPr>
-          <a:xfrm>
-            <a:off x="685800" y="1417320"/>
-            <a:ext cx="10817352" cy="5029200"/>
-          </a:xfrm>
-          <a:prstGeom prst="rect">
-            <a:avLst/>
-          </a:prstGeom>
-          <a:noFill/>
-        </p:spPr>
-        <p:txBody>
-          <a:bodyPr wrap="square">
-            <a:spAutoFit/>
-          </a:bodyPr>
-          <a:lstStyle/>
-          <a:p>
-            <a:pPr>
-              <a:spcBef>
-                <a:spcPts val="400"/>
-              </a:spcBef>
-              <a:spcAft>
-                <a:spcPts val="200"/>
-              </a:spcAft>
-            </a:pPr>
-            <a:r>
-              <a:rPr sz="1200">
-                <a:solidFill>
-                  <a:srgbClr val="3D5466"/>
-                </a:solidFill>
-                <a:latin typeface="Arial"/>
-              </a:rPr>
-              <a:t>Die PESTEL-Analyse ergänzt das Five-Forces-Modell um das makroökonomische Umfeld:</a:t>
-            </a:r>
-          </a:p>
-        </p:txBody>
-      </p:sp>
-      <p:sp>
-        <p:nvSpPr>
-          <p:cNvPr id="9" name="Rectangle 8"/>
+              <a:t>Porter's Five Forces</a:t>
+            </a:r>
+          </a:p>
+        </p:txBody>
+      </p:sp>
+      <p:sp>
+        <p:nvSpPr>
+          <p:cNvPr id="8" name="Rectangle 7"/>
           <p:cNvSpPr/>
           <p:nvPr/>
         </p:nvSpPr>
@@ -7444,7 +8020,7 @@
       </p:sp>
       <p:sp>
         <p:nvSpPr>
-          <p:cNvPr id="10" name="TextBox 9"/>
+          <p:cNvPr id="9" name="TextBox 8"/>
           <p:cNvSpPr txBox="1"/>
           <p:nvPr/>
         </p:nvSpPr>
@@ -7510,7 +8086,7 @@
             <a:avLst/>
           </a:prstGeom>
           <a:solidFill>
-            <a:srgbClr val="FFFFFF"/>
+            <a:srgbClr val="EDEDF3"/>
           </a:solidFill>
           <a:ln>
             <a:noFill/>
@@ -7611,43 +8187,51 @@
                 </a:solidFill>
                 <a:latin typeface="JetBrains Mono"/>
               </a:rPr>
-              <a:t>M09  ·  SCHAUBILD</a:t>
-            </a:r>
-          </a:p>
-        </p:txBody>
-      </p:sp>
-      <p:sp>
-        <p:nvSpPr>
-          <p:cNvPr id="5" name="TextBox 4"/>
-          <p:cNvSpPr txBox="1"/>
-          <p:nvPr/>
-        </p:nvSpPr>
-        <p:spPr>
-          <a:xfrm>
-            <a:off x="685800" y="502920"/>
-            <a:ext cx="10817352" cy="594360"/>
-          </a:xfrm>
-          <a:prstGeom prst="rect">
-            <a:avLst/>
-          </a:prstGeom>
-          <a:noFill/>
-        </p:spPr>
-        <p:txBody>
-          <a:bodyPr wrap="square">
-            <a:spAutoFit/>
-          </a:bodyPr>
-          <a:lstStyle/>
-          <a:p>
-            <a:pPr algn="l"/>
-            <a:r>
-              <a:rPr sz="2000" b="1" i="0">
-                <a:solidFill>
-                  <a:srgbClr val="1F2C56"/>
-                </a:solidFill>
-                <a:latin typeface="Source Serif 4"/>
-              </a:rPr>
-              <a:t>PESTEL-Analyse für die Bankpraxis</a:t>
-            </a:r>
+              <a:t>M09  ·  INHALT</a:t>
+            </a:r>
+          </a:p>
+        </p:txBody>
+      </p:sp>
+      <p:sp>
+        <p:nvSpPr>
+          <p:cNvPr id="5" name="Rectangle 4"/>
+          <p:cNvSpPr/>
+          <p:nvPr/>
+        </p:nvSpPr>
+        <p:spPr>
+          <a:xfrm>
+            <a:off x="0" y="1234440"/>
+            <a:ext cx="12188952" cy="12700"/>
+          </a:xfrm>
+          <a:prstGeom prst="rect">
+            <a:avLst/>
+          </a:prstGeom>
+          <a:solidFill>
+            <a:srgbClr val="D8DFE4"/>
+          </a:solidFill>
+          <a:ln>
+            <a:noFill/>
+          </a:ln>
+        </p:spPr>
+        <p:style>
+          <a:lnRef idx="1">
+            <a:schemeClr val="accent1"/>
+          </a:lnRef>
+          <a:fillRef idx="3">
+            <a:schemeClr val="accent1"/>
+          </a:fillRef>
+          <a:effectRef idx="2">
+            <a:schemeClr val="accent1"/>
+          </a:effectRef>
+          <a:fontRef idx="minor">
+            <a:schemeClr val="lt1"/>
+          </a:fontRef>
+        </p:style>
+        <p:txBody>
+          <a:bodyPr rtlCol="0" anchor="ctr"/>
+          <a:lstStyle/>
+          <a:p>
+            <a:pPr algn="ctr"/>
           </a:p>
         </p:txBody>
       </p:sp>
@@ -7659,8 +8243,8 @@
         </p:nvSpPr>
         <p:spPr>
           <a:xfrm>
-            <a:off x="685800" y="1143000"/>
-            <a:ext cx="10817352" cy="25400"/>
+            <a:off x="685800" y="502920"/>
+            <a:ext cx="36576" cy="658368"/>
           </a:xfrm>
           <a:prstGeom prst="rect">
             <a:avLst/>
@@ -7694,33 +8278,86 @@
           </a:p>
         </p:txBody>
       </p:sp>
-      <p:pic>
-        <p:nvPicPr>
-          <p:cNvPr id="7" name="Picture 6" descr="image.png"/>
-          <p:cNvPicPr>
-            <a:picLocks noChangeAspect="1"/>
-          </p:cNvPicPr>
-          <p:nvPr/>
-        </p:nvPicPr>
-        <p:blipFill>
-          <a:blip r:embed="rId2"/>
-          <a:stretch>
-            <a:fillRect/>
-          </a:stretch>
-        </p:blipFill>
-        <p:spPr>
-          <a:xfrm>
-            <a:off x="2303489" y="1325880"/>
-            <a:ext cx="7581973" cy="4937760"/>
-          </a:xfrm>
-          <a:prstGeom prst="rect">
-            <a:avLst/>
-          </a:prstGeom>
-        </p:spPr>
-      </p:pic>
-      <p:sp>
-        <p:nvSpPr>
-          <p:cNvPr id="8" name="Rectangle 7"/>
+      <p:sp>
+        <p:nvSpPr>
+          <p:cNvPr id="7" name="TextBox 6"/>
+          <p:cNvSpPr txBox="1"/>
+          <p:nvPr/>
+        </p:nvSpPr>
+        <p:spPr>
+          <a:xfrm>
+            <a:off x="813816" y="502920"/>
+            <a:ext cx="10634472" cy="685800"/>
+          </a:xfrm>
+          <a:prstGeom prst="rect">
+            <a:avLst/>
+          </a:prstGeom>
+          <a:noFill/>
+        </p:spPr>
+        <p:txBody>
+          <a:bodyPr wrap="square">
+            <a:spAutoFit/>
+          </a:bodyPr>
+          <a:lstStyle/>
+          <a:p>
+            <a:pPr algn="l"/>
+            <a:r>
+              <a:rPr sz="2400" b="1" i="0">
+                <a:solidFill>
+                  <a:srgbClr val="1F2C56"/>
+                </a:solidFill>
+                <a:latin typeface="Source Serif 4"/>
+              </a:rPr>
+              <a:t>PESTEL-Analyse</a:t>
+            </a:r>
+          </a:p>
+        </p:txBody>
+      </p:sp>
+      <p:sp>
+        <p:nvSpPr>
+          <p:cNvPr id="8" name="TextBox 7"/>
+          <p:cNvSpPr txBox="1"/>
+          <p:nvPr/>
+        </p:nvSpPr>
+        <p:spPr>
+          <a:xfrm>
+            <a:off x="685800" y="1417320"/>
+            <a:ext cx="10817352" cy="5029200"/>
+          </a:xfrm>
+          <a:prstGeom prst="rect">
+            <a:avLst/>
+          </a:prstGeom>
+          <a:noFill/>
+        </p:spPr>
+        <p:txBody>
+          <a:bodyPr wrap="square">
+            <a:spAutoFit/>
+          </a:bodyPr>
+          <a:lstStyle/>
+          <a:p>
+            <a:pPr>
+              <a:spcBef>
+                <a:spcPts val="400"/>
+              </a:spcBef>
+              <a:spcAft>
+                <a:spcPts val="200"/>
+              </a:spcAft>
+            </a:pPr>
+            <a:r>
+              <a:rPr sz="1200">
+                <a:solidFill>
+                  <a:srgbClr val="3D5466"/>
+                </a:solidFill>
+                <a:latin typeface="Arial"/>
+              </a:rPr>
+              <a:t>Die PESTEL-Analyse ergänzt das Five-Forces-Modell um das makroökonomische Umfeld:</a:t>
+            </a:r>
+          </a:p>
+        </p:txBody>
+      </p:sp>
+      <p:sp>
+        <p:nvSpPr>
+          <p:cNvPr id="9" name="Rectangle 8"/>
           <p:cNvSpPr/>
           <p:nvPr/>
         </p:nvSpPr>
@@ -7763,7 +8400,7 @@
       </p:sp>
       <p:sp>
         <p:nvSpPr>
-          <p:cNvPr id="9" name="TextBox 8"/>
+          <p:cNvPr id="10" name="TextBox 9"/>
           <p:cNvSpPr txBox="1"/>
           <p:nvPr/>
         </p:nvSpPr>
@@ -7792,41 +8429,6 @@
                 <a:latin typeface="JetBrains Mono"/>
               </a:rPr>
               <a:t>Benedikt Zoller Coaching  ·  FKB Campus  ·  M09</a:t>
-            </a:r>
-          </a:p>
-        </p:txBody>
-      </p:sp>
-      <p:sp>
-        <p:nvSpPr>
-          <p:cNvPr id="10" name="TextBox 9"/>
-          <p:cNvSpPr txBox="1"/>
-          <p:nvPr/>
-        </p:nvSpPr>
-        <p:spPr>
-          <a:xfrm>
-            <a:off x="7176211" y="6583680"/>
-            <a:ext cx="4326940" cy="256032"/>
-          </a:xfrm>
-          <a:prstGeom prst="rect">
-            <a:avLst/>
-          </a:prstGeom>
-          <a:noFill/>
-        </p:spPr>
-        <p:txBody>
-          <a:bodyPr wrap="none">
-            <a:spAutoFit/>
-          </a:bodyPr>
-          <a:lstStyle/>
-          <a:p>
-            <a:pPr algn="r"/>
-            <a:r>
-              <a:rPr sz="700">
-                <a:solidFill>
-                  <a:srgbClr val="A0B4D2"/>
-                </a:solidFill>
-                <a:latin typeface="JetBrains Mono"/>
-              </a:rPr>
-              <a:t>Schaubild</a:t>
             </a:r>
           </a:p>
         </p:txBody>
@@ -7864,7 +8466,7 @@
             <a:avLst/>
           </a:prstGeom>
           <a:solidFill>
-            <a:srgbClr val="EDEDF3"/>
+            <a:srgbClr val="FFFFFF"/>
           </a:solidFill>
           <a:ln>
             <a:noFill/>
@@ -7965,51 +8567,43 @@
                 </a:solidFill>
                 <a:latin typeface="JetBrains Mono"/>
               </a:rPr>
-              <a:t>M09  ·  INHALT</a:t>
-            </a:r>
-          </a:p>
-        </p:txBody>
-      </p:sp>
-      <p:sp>
-        <p:nvSpPr>
-          <p:cNvPr id="5" name="Rectangle 4"/>
-          <p:cNvSpPr/>
-          <p:nvPr/>
-        </p:nvSpPr>
-        <p:spPr>
-          <a:xfrm>
-            <a:off x="0" y="1234440"/>
-            <a:ext cx="12188952" cy="12700"/>
-          </a:xfrm>
-          <a:prstGeom prst="rect">
-            <a:avLst/>
-          </a:prstGeom>
-          <a:solidFill>
-            <a:srgbClr val="D8DFE4"/>
-          </a:solidFill>
-          <a:ln>
-            <a:noFill/>
-          </a:ln>
-        </p:spPr>
-        <p:style>
-          <a:lnRef idx="1">
-            <a:schemeClr val="accent1"/>
-          </a:lnRef>
-          <a:fillRef idx="3">
-            <a:schemeClr val="accent1"/>
-          </a:fillRef>
-          <a:effectRef idx="2">
-            <a:schemeClr val="accent1"/>
-          </a:effectRef>
-          <a:fontRef idx="minor">
-            <a:schemeClr val="lt1"/>
-          </a:fontRef>
-        </p:style>
-        <p:txBody>
-          <a:bodyPr rtlCol="0" anchor="ctr"/>
-          <a:lstStyle/>
-          <a:p>
-            <a:pPr algn="ctr"/>
+              <a:t>M09  ·  SCHAUBILD</a:t>
+            </a:r>
+          </a:p>
+        </p:txBody>
+      </p:sp>
+      <p:sp>
+        <p:nvSpPr>
+          <p:cNvPr id="5" name="TextBox 4"/>
+          <p:cNvSpPr txBox="1"/>
+          <p:nvPr/>
+        </p:nvSpPr>
+        <p:spPr>
+          <a:xfrm>
+            <a:off x="685800" y="502920"/>
+            <a:ext cx="10817352" cy="594360"/>
+          </a:xfrm>
+          <a:prstGeom prst="rect">
+            <a:avLst/>
+          </a:prstGeom>
+          <a:noFill/>
+        </p:spPr>
+        <p:txBody>
+          <a:bodyPr wrap="square">
+            <a:spAutoFit/>
+          </a:bodyPr>
+          <a:lstStyle/>
+          <a:p>
+            <a:pPr algn="l"/>
+            <a:r>
+              <a:rPr sz="2000" b="1" i="0">
+                <a:solidFill>
+                  <a:srgbClr val="1F2C56"/>
+                </a:solidFill>
+                <a:latin typeface="Source Serif 4"/>
+              </a:rPr>
+              <a:t>PESTEL-Analyse für die Bankpraxis</a:t>
+            </a:r>
           </a:p>
         </p:txBody>
       </p:sp>
@@ -8021,8 +8615,8 @@
         </p:nvSpPr>
         <p:spPr>
           <a:xfrm>
-            <a:off x="685800" y="502920"/>
-            <a:ext cx="36576" cy="658368"/>
+            <a:off x="685800" y="1143000"/>
+            <a:ext cx="10817352" cy="25400"/>
           </a:xfrm>
           <a:prstGeom prst="rect">
             <a:avLst/>
@@ -8056,41 +8650,30 @@
           </a:p>
         </p:txBody>
       </p:sp>
-      <p:sp>
-        <p:nvSpPr>
-          <p:cNvPr id="7" name="TextBox 6"/>
-          <p:cNvSpPr txBox="1"/>
-          <p:nvPr/>
-        </p:nvSpPr>
-        <p:spPr>
-          <a:xfrm>
-            <a:off x="813816" y="502920"/>
-            <a:ext cx="10634472" cy="685800"/>
-          </a:xfrm>
-          <a:prstGeom prst="rect">
-            <a:avLst/>
-          </a:prstGeom>
-          <a:noFill/>
-        </p:spPr>
-        <p:txBody>
-          <a:bodyPr wrap="square">
-            <a:spAutoFit/>
-          </a:bodyPr>
-          <a:lstStyle/>
-          <a:p>
-            <a:pPr algn="l"/>
-            <a:r>
-              <a:rPr sz="2400" b="1" i="0">
-                <a:solidFill>
-                  <a:srgbClr val="1F2C56"/>
-                </a:solidFill>
-                <a:latin typeface="Source Serif 4"/>
-              </a:rPr>
-              <a:t>Kombination im Kundengespräch</a:t>
-            </a:r>
-          </a:p>
-        </p:txBody>
-      </p:sp>
+      <p:pic>
+        <p:nvPicPr>
+          <p:cNvPr id="7" name="Picture 6" descr="image.png"/>
+          <p:cNvPicPr>
+            <a:picLocks noChangeAspect="1"/>
+          </p:cNvPicPr>
+          <p:nvPr/>
+        </p:nvPicPr>
+        <p:blipFill>
+          <a:blip r:embed="rId2"/>
+          <a:stretch>
+            <a:fillRect/>
+          </a:stretch>
+        </p:blipFill>
+        <p:spPr>
+          <a:xfrm>
+            <a:off x="2303489" y="1325880"/>
+            <a:ext cx="7581973" cy="4937760"/>
+          </a:xfrm>
+          <a:prstGeom prst="rect">
+            <a:avLst/>
+          </a:prstGeom>
+        </p:spPr>
+      </p:pic>
       <p:sp>
         <p:nvSpPr>
           <p:cNvPr id="8" name="Rectangle 7"/>
@@ -8165,6 +8748,41 @@
                 <a:latin typeface="JetBrains Mono"/>
               </a:rPr>
               <a:t>Benedikt Zoller Coaching  ·  FKB Campus  ·  M09</a:t>
+            </a:r>
+          </a:p>
+        </p:txBody>
+      </p:sp>
+      <p:sp>
+        <p:nvSpPr>
+          <p:cNvPr id="10" name="TextBox 9"/>
+          <p:cNvSpPr txBox="1"/>
+          <p:nvPr/>
+        </p:nvSpPr>
+        <p:spPr>
+          <a:xfrm>
+            <a:off x="7176211" y="6583680"/>
+            <a:ext cx="4326940" cy="256032"/>
+          </a:xfrm>
+          <a:prstGeom prst="rect">
+            <a:avLst/>
+          </a:prstGeom>
+          <a:noFill/>
+        </p:spPr>
+        <p:txBody>
+          <a:bodyPr wrap="none">
+            <a:spAutoFit/>
+          </a:bodyPr>
+          <a:lstStyle/>
+          <a:p>
+            <a:pPr algn="r"/>
+            <a:r>
+              <a:rPr sz="700">
+                <a:solidFill>
+                  <a:srgbClr val="A0B4D2"/>
+                </a:solidFill>
+                <a:latin typeface="JetBrains Mono"/>
+              </a:rPr>
+              <a:t>Schaubild</a:t>
             </a:r>
           </a:p>
         </p:txBody>
@@ -8424,7 +9042,7 @@
                 </a:solidFill>
                 <a:latin typeface="Source Serif 4"/>
               </a:rPr>
-              <a:t>Einstiegsfragen für Branchenanfänger</a:t>
+              <a:t>Kombination im Kundengespräch</a:t>
             </a:r>
           </a:p>
         </p:txBody>
@@ -8762,265 +9380,14 @@
                 </a:solidFill>
                 <a:latin typeface="Source Serif 4"/>
               </a:rPr>
-              <a:t>Wissensarbeit transparent machen – Gespräche in der Lernphase</a:t>
-            </a:r>
-          </a:p>
-        </p:txBody>
-      </p:sp>
-      <p:sp>
-        <p:nvSpPr>
-          <p:cNvPr id="8" name="TextBox 7"/>
-          <p:cNvSpPr txBox="1"/>
-          <p:nvPr/>
-        </p:nvSpPr>
-        <p:spPr>
-          <a:xfrm>
-            <a:off x="685800" y="1417320"/>
-            <a:ext cx="10817352" cy="5029200"/>
-          </a:xfrm>
-          <a:prstGeom prst="rect">
-            <a:avLst/>
-          </a:prstGeom>
-          <a:noFill/>
-        </p:spPr>
-        <p:txBody>
-          <a:bodyPr wrap="square">
-            <a:spAutoFit/>
-          </a:bodyPr>
-          <a:lstStyle/>
-          <a:p>
-            <a:pPr>
-              <a:spcBef>
-                <a:spcPts val="400"/>
-              </a:spcBef>
-              <a:spcAft>
-                <a:spcPts val="200"/>
-              </a:spcAft>
-            </a:pPr>
-            <a:r>
-              <a:rPr sz="1200">
-                <a:solidFill>
-                  <a:srgbClr val="3D5466"/>
-                </a:solidFill>
-                <a:latin typeface="Arial"/>
-              </a:rPr>
-              <a:t>Formulierungen, die funktionieren:</a:t>
-            </a:r>
-          </a:p>
-          <a:p>
-            <a:pPr>
-              <a:spcBef>
-                <a:spcPts val="600"/>
-              </a:spcBef>
-              <a:spcAft>
-                <a:spcPts val="200"/>
-              </a:spcAft>
-            </a:pPr>
-            <a:r>
-              <a:rPr sz="1200" i="1">
-                <a:solidFill>
-                  <a:srgbClr val="3D5466"/>
-                </a:solidFill>
-                <a:latin typeface="Arial"/>
-              </a:rPr>
-              <a:t>→  „Ich bin gerade dabei, mein Wissen über Ihre Branche systematisch auszubauen – ich lerne am meisten von meinen Kunden. Was sollte jeder Bankmitarbeiter über Ihr Geschäft wissen?"</a:t>
-            </a:r>
-          </a:p>
-          <a:p>
-            <a:pPr>
-              <a:spcBef>
-                <a:spcPts val="600"/>
-              </a:spcBef>
-              <a:spcAft>
-                <a:spcPts val="200"/>
-              </a:spcAft>
-            </a:pPr>
-            <a:r>
-              <a:rPr sz="1200" i="1">
-                <a:solidFill>
-                  <a:srgbClr val="3D5466"/>
-                </a:solidFill>
-                <a:latin typeface="Arial"/>
-              </a:rPr>
-              <a:t>→  „Ich habe mit dem DZ BANK Agrar-Spezialisten gesprochen – der hat mir [Thema] erklärt. Das war neu für mich. Stimmt das mit Ihrer Erfahrung überein?"</a:t>
-            </a:r>
-          </a:p>
-          <a:p>
-            <a:pPr>
-              <a:spcBef>
-                <a:spcPts val="400"/>
-              </a:spcBef>
-              <a:spcAft>
-                <a:spcPts val="200"/>
-              </a:spcAft>
-            </a:pPr>
-            <a:r>
-              <a:rPr sz="1200">
-                <a:solidFill>
-                  <a:srgbClr val="3D5466"/>
-                </a:solidFill>
-                <a:latin typeface="Arial"/>
-              </a:rPr>
-              <a:t>Was vermeiden:</a:t>
-            </a:r>
-          </a:p>
-          <a:p>
-            <a:pPr>
-              <a:spcBef>
-                <a:spcPts val="400"/>
-              </a:spcBef>
-              <a:spcAft>
-                <a:spcPts val="200"/>
-              </a:spcAft>
-            </a:pPr>
-            <a:r>
-              <a:rPr sz="1300">
-                <a:solidFill>
-                  <a:srgbClr val="3D5466"/>
-                </a:solidFill>
-                <a:latin typeface="Arial"/>
-              </a:rPr>
-              <a:t>▸  Nicht sagen: „Ich kenne mich in Ihrer Branche noch nicht so gut aus." (schafft Unsicherheit)</a:t>
-            </a:r>
-          </a:p>
-          <a:p>
-            <a:pPr>
-              <a:spcBef>
-                <a:spcPts val="400"/>
-              </a:spcBef>
-              <a:spcAft>
-                <a:spcPts val="200"/>
-              </a:spcAft>
-            </a:pPr>
-            <a:r>
-              <a:rPr sz="1300">
-                <a:solidFill>
-                  <a:srgbClr val="3D5466"/>
-                </a:solidFill>
-                <a:latin typeface="Arial"/>
-              </a:rPr>
-              <a:t>▸  Nicht sagen: „Ich bin kein Branchenexperte, aber..." (unnötige Selbstabwertung)</a:t>
-            </a:r>
-          </a:p>
-          <a:p>
-            <a:pPr>
-              <a:spcBef>
-                <a:spcPts val="400"/>
-              </a:spcBef>
-              <a:spcAft>
-                <a:spcPts val="200"/>
-              </a:spcAft>
-            </a:pPr>
-            <a:r>
-              <a:rPr sz="1300">
-                <a:solidFill>
-                  <a:srgbClr val="3D5466"/>
-                </a:solidFill>
-                <a:latin typeface="Arial"/>
-              </a:rPr>
-              <a:t>▸  Nicht so tun, als ob man alles weiß (Kunden merken es sofort)</a:t>
-            </a:r>
-          </a:p>
-          <a:p>
-            <a:pPr>
-              <a:spcBef>
-                <a:spcPts val="400"/>
-              </a:spcBef>
-              <a:spcAft>
-                <a:spcPts val="200"/>
-              </a:spcAft>
-            </a:pPr>
-            <a:r>
-              <a:rPr sz="1200">
-                <a:solidFill>
-                  <a:srgbClr val="3D5466"/>
-                </a:solidFill>
-                <a:latin typeface="Arial"/>
-              </a:rPr>
-              <a:t>Die Grundregel: Interesse + konkrete Vorbereitung + echtes Zuhören ersetzen fehlende Expertise – zumindest in den ersten Gesprächen. Expertise entsteht dann im Dialog.</a:t>
-            </a:r>
-          </a:p>
-          <a:p>
-            <a:pPr>
-              <a:spcBef>
-                <a:spcPts val="400"/>
-              </a:spcBef>
-              <a:spcAft>
-                <a:spcPts val="200"/>
-              </a:spcAft>
-            </a:pPr>
-            <a:r>
-              <a:rPr sz="1200">
-                <a:solidFill>
-                  <a:srgbClr val="3D5466"/>
-                </a:solidFill>
-                <a:latin typeface="Arial"/>
-              </a:rPr>
-              <a:t>## 4.3 Informationsquellen für Branchenexpertise</a:t>
-            </a:r>
-          </a:p>
-          <a:p>
-            <a:pPr>
-              <a:spcBef>
-                <a:spcPts val="400"/>
-              </a:spcBef>
-              <a:spcAft>
-                <a:spcPts val="200"/>
-              </a:spcAft>
-            </a:pPr>
-            <a:r>
-              <a:rPr sz="1200">
-                <a:solidFill>
-                  <a:srgbClr val="3D5466"/>
-                </a:solidFill>
-                <a:latin typeface="Arial"/>
-              </a:rPr>
-              <a:t>Systematische Branchenexpertise entsteht aus dem Zusammenspiel verschiedener Quellen. Die folgende Matrix hilft bei der Auswahl:</a:t>
-            </a:r>
-          </a:p>
-          <a:p>
-            <a:pPr>
-              <a:spcBef>
-                <a:spcPts val="400"/>
-              </a:spcBef>
-              <a:spcAft>
-                <a:spcPts val="200"/>
-              </a:spcAft>
-            </a:pPr>
-            <a:r>
-              <a:rPr sz="1200">
-                <a:solidFill>
-                  <a:srgbClr val="3D5466"/>
-                </a:solidFill>
-                <a:latin typeface="Arial"/>
-              </a:rPr>
-              <a:t>Empfohlene Priorisierung für den Start: Branchenverband (Jahresbericht), DZ BANK Research (sofern verfügbar), IHK-Konjunkturbericht, 3–5 Kundengespräche mit Fokus auf Branchentrends.</a:t>
-            </a:r>
-          </a:p>
-          <a:p>
-            <a:pPr>
-              <a:spcBef>
-                <a:spcPts val="400"/>
-              </a:spcBef>
-              <a:spcAft>
-                <a:spcPts val="200"/>
-              </a:spcAft>
-            </a:pPr>
-            <a:r>
-              <a:rPr sz="1200">
-                <a:solidFill>
-                  <a:srgbClr val="3D5466"/>
-                </a:solidFill>
-                <a:latin typeface="Arial"/>
-              </a:rPr>
-              <a:t>## 4.4 Expertennetzwerk aufbauen</a:t>
-            </a:r>
-          </a:p>
-        </p:txBody>
-      </p:sp>
-      <p:sp>
-        <p:nvSpPr>
-          <p:cNvPr id="9" name="Rectangle 8"/>
+              <a:t>Einstiegsfragen für Branchenanfänger</a:t>
+            </a:r>
+          </a:p>
+        </p:txBody>
+      </p:sp>
+      <p:sp>
+        <p:nvSpPr>
+          <p:cNvPr id="8" name="Rectangle 7"/>
           <p:cNvSpPr/>
           <p:nvPr/>
         </p:nvSpPr>
@@ -9063,7 +9430,7 @@
       </p:sp>
       <p:sp>
         <p:nvSpPr>
-          <p:cNvPr id="10" name="TextBox 9"/>
+          <p:cNvPr id="9" name="TextBox 8"/>
           <p:cNvSpPr txBox="1"/>
           <p:nvPr/>
         </p:nvSpPr>

--- a/protected-downloads/praesentation/M09.pptx
+++ b/protected-downloads/praesentation/M09.pptx
@@ -514,7 +514,7 @@
           <a:lstStyle/>
           <a:p>
             <a:r>
-              <a:t>Siehe Trainerhandbuch (Sektion 3) für Moderationshinweise, Timing und erwartete Teilnehmerreaktionen.</a:t>
+              <a:t>Agenda aus dem Ablaufplan (Sektion 3.1). Timing und Pausen siehe Trainerhandbuch.</a:t>
             </a:r>
           </a:p>
         </p:txBody>
@@ -890,146 +890,6 @@
 </file>
 
 <file path=ppt/notesSlides/notesSlide7.xml><?xml version="1.0" encoding="utf-8"?>
-<p:notes xmlns:a="http://schemas.openxmlformats.org/drawingml/2006/main" xmlns:p="http://schemas.openxmlformats.org/presentationml/2006/main" xmlns:r="http://schemas.openxmlformats.org/officeDocument/2006/relationships">
-  <p:cSld>
-    <p:spTree>
-      <p:nvGrpSpPr>
-        <p:cNvPr id="1" name=""/>
-        <p:cNvGrpSpPr/>
-        <p:nvPr/>
-      </p:nvGrpSpPr>
-      <p:grpSpPr>
-        <a:xfrm>
-          <a:off x="0" y="0"/>
-          <a:ext cx="0" cy="0"/>
-          <a:chOff x="0" y="0"/>
-          <a:chExt cx="0" cy="0"/>
-        </a:xfrm>
-      </p:grpSpPr>
-      <p:sp>
-        <p:nvSpPr>
-          <p:cNvPr id="2" name="Slide Image Placeholder 1"/>
-          <p:cNvSpPr>
-            <a:spLocks noGrp="1"/>
-          </p:cNvSpPr>
-          <p:nvPr>
-            <p:ph type="sldImg" idx="2"/>
-          </p:nvPr>
-        </p:nvSpPr>
-        <p:spPr/>
-      </p:sp>
-      <p:sp>
-        <p:nvSpPr>
-          <p:cNvPr id="3" name="Notes Placeholder 2"/>
-          <p:cNvSpPr>
-            <a:spLocks noGrp="1"/>
-          </p:cNvSpPr>
-          <p:nvPr>
-            <p:ph type="body" idx="3" sz="quarter"/>
-          </p:nvPr>
-        </p:nvSpPr>
-        <p:spPr/>
-        <p:txBody>
-          <a:bodyPr/>
-          <a:lstStyle/>
-          <a:p>
-            <a:r>
-              <a:t>Siehe Trainerhandbuch (Sektion 3) für Moderationshinweise, Timing und erwartete Teilnehmerreaktionen.</a:t>
-            </a:r>
-          </a:p>
-        </p:txBody>
-      </p:sp>
-      <p:sp>
-        <p:nvSpPr>
-          <p:cNvPr id="4" name="Slide Number Placeholder 3"/>
-          <p:cNvSpPr>
-            <a:spLocks noGrp="1"/>
-          </p:cNvSpPr>
-          <p:nvPr>
-            <p:ph type="sldNum" idx="5" sz="quarter"/>
-          </p:nvPr>
-        </p:nvSpPr>
-        <p:spPr/>
-      </p:sp>
-    </p:spTree>
-  </p:cSld>
-  <p:clrMapOvr>
-    <a:masterClrMapping/>
-  </p:clrMapOvr>
-</p:notes>
-</file>
-
-<file path=ppt/notesSlides/notesSlide8.xml><?xml version="1.0" encoding="utf-8"?>
-<p:notes xmlns:a="http://schemas.openxmlformats.org/drawingml/2006/main" xmlns:p="http://schemas.openxmlformats.org/presentationml/2006/main" xmlns:r="http://schemas.openxmlformats.org/officeDocument/2006/relationships">
-  <p:cSld>
-    <p:spTree>
-      <p:nvGrpSpPr>
-        <p:cNvPr id="1" name=""/>
-        <p:cNvGrpSpPr/>
-        <p:nvPr/>
-      </p:nvGrpSpPr>
-      <p:grpSpPr>
-        <a:xfrm>
-          <a:off x="0" y="0"/>
-          <a:ext cx="0" cy="0"/>
-          <a:chOff x="0" y="0"/>
-          <a:chExt cx="0" cy="0"/>
-        </a:xfrm>
-      </p:grpSpPr>
-      <p:sp>
-        <p:nvSpPr>
-          <p:cNvPr id="2" name="Slide Image Placeholder 1"/>
-          <p:cNvSpPr>
-            <a:spLocks noGrp="1"/>
-          </p:cNvSpPr>
-          <p:nvPr>
-            <p:ph type="sldImg" idx="2"/>
-          </p:nvPr>
-        </p:nvSpPr>
-        <p:spPr/>
-      </p:sp>
-      <p:sp>
-        <p:nvSpPr>
-          <p:cNvPr id="3" name="Notes Placeholder 2"/>
-          <p:cNvSpPr>
-            <a:spLocks noGrp="1"/>
-          </p:cNvSpPr>
-          <p:nvPr>
-            <p:ph type="body" idx="3" sz="quarter"/>
-          </p:nvPr>
-        </p:nvSpPr>
-        <p:spPr/>
-        <p:txBody>
-          <a:bodyPr/>
-          <a:lstStyle/>
-          <a:p>
-            <a:r>
-              <a:t>Siehe Trainerhandbuch (Sektion 3) für Moderationshinweise, Timing und erwartete Teilnehmerreaktionen.</a:t>
-            </a:r>
-          </a:p>
-        </p:txBody>
-      </p:sp>
-      <p:sp>
-        <p:nvSpPr>
-          <p:cNvPr id="4" name="Slide Number Placeholder 3"/>
-          <p:cNvSpPr>
-            <a:spLocks noGrp="1"/>
-          </p:cNvSpPr>
-          <p:nvPr>
-            <p:ph type="sldNum" idx="5" sz="quarter"/>
-          </p:nvPr>
-        </p:nvSpPr>
-        <p:spPr/>
-      </p:sp>
-    </p:spTree>
-  </p:cSld>
-  <p:clrMapOvr>
-    <a:masterClrMapping/>
-  </p:clrMapOvr>
-</p:notes>
-</file>
-
-<file path=ppt/notesSlides/notesSlide9.xml><?xml version="1.0" encoding="utf-8"?>
 <p:notes xmlns:a="http://schemas.openxmlformats.org/drawingml/2006/main" xmlns:p="http://schemas.openxmlformats.org/presentationml/2006/main" xmlns:r="http://schemas.openxmlformats.org/officeDocument/2006/relationships">
   <p:cSld>
     <p:spTree>
@@ -4670,7 +4530,7 @@
             <a:avLst/>
           </a:prstGeom>
           <a:solidFill>
-            <a:srgbClr val="EDEDF3"/>
+            <a:srgbClr val="FFFFFF"/>
           </a:solidFill>
           <a:ln>
             <a:noFill/>
@@ -4771,51 +4631,43 @@
                 </a:solidFill>
                 <a:latin typeface="JetBrains Mono"/>
               </a:rPr>
-              <a:t>M09  ·  INHALT</a:t>
-            </a:r>
-          </a:p>
-        </p:txBody>
-      </p:sp>
-      <p:sp>
-        <p:nvSpPr>
-          <p:cNvPr id="5" name="Rectangle 4"/>
-          <p:cNvSpPr/>
-          <p:nvPr/>
-        </p:nvSpPr>
-        <p:spPr>
-          <a:xfrm>
-            <a:off x="0" y="1234440"/>
-            <a:ext cx="12188952" cy="12700"/>
-          </a:xfrm>
-          <a:prstGeom prst="rect">
-            <a:avLst/>
-          </a:prstGeom>
-          <a:solidFill>
-            <a:srgbClr val="D8DFE4"/>
-          </a:solidFill>
-          <a:ln>
-            <a:noFill/>
-          </a:ln>
-        </p:spPr>
-        <p:style>
-          <a:lnRef idx="1">
-            <a:schemeClr val="accent1"/>
-          </a:lnRef>
-          <a:fillRef idx="3">
-            <a:schemeClr val="accent1"/>
-          </a:fillRef>
-          <a:effectRef idx="2">
-            <a:schemeClr val="accent1"/>
-          </a:effectRef>
-          <a:fontRef idx="minor">
-            <a:schemeClr val="lt1"/>
-          </a:fontRef>
-        </p:style>
-        <p:txBody>
-          <a:bodyPr rtlCol="0" anchor="ctr"/>
-          <a:lstStyle/>
-          <a:p>
-            <a:pPr algn="ctr"/>
+              <a:t>M09  ·  ÜBERSICHT</a:t>
+            </a:r>
+          </a:p>
+        </p:txBody>
+      </p:sp>
+      <p:sp>
+        <p:nvSpPr>
+          <p:cNvPr id="5" name="TextBox 4"/>
+          <p:cNvSpPr txBox="1"/>
+          <p:nvPr/>
+        </p:nvSpPr>
+        <p:spPr>
+          <a:xfrm>
+            <a:off x="685800" y="502920"/>
+            <a:ext cx="10817352" cy="594360"/>
+          </a:xfrm>
+          <a:prstGeom prst="rect">
+            <a:avLst/>
+          </a:prstGeom>
+          <a:noFill/>
+        </p:spPr>
+        <p:txBody>
+          <a:bodyPr wrap="square">
+            <a:spAutoFit/>
+          </a:bodyPr>
+          <a:lstStyle/>
+          <a:p>
+            <a:pPr algn="l"/>
+            <a:r>
+              <a:rPr sz="2000" b="1" i="0">
+                <a:solidFill>
+                  <a:srgbClr val="1F2C56"/>
+                </a:solidFill>
+                <a:latin typeface="Source Serif 4"/>
+              </a:rPr>
+              <a:t>Arbeitsblatt A: Branchenanalyse – Five Forces Scoring</a:t>
+            </a:r>
           </a:p>
         </p:txBody>
       </p:sp>
@@ -4827,8 +4679,8 @@
         </p:nvSpPr>
         <p:spPr>
           <a:xfrm>
-            <a:off x="685800" y="502920"/>
-            <a:ext cx="36576" cy="658368"/>
+            <a:off x="685800" y="1143000"/>
+            <a:ext cx="10817352" cy="25400"/>
           </a:xfrm>
           <a:prstGeom prst="rect">
             <a:avLst/>
@@ -4862,295 +4714,391 @@
           </a:p>
         </p:txBody>
       </p:sp>
-      <p:sp>
-        <p:nvSpPr>
-          <p:cNvPr id="7" name="TextBox 6"/>
-          <p:cNvSpPr txBox="1"/>
-          <p:nvPr/>
-        </p:nvSpPr>
-        <p:spPr>
-          <a:xfrm>
-            <a:off x="813816" y="502920"/>
-            <a:ext cx="10634472" cy="685800"/>
-          </a:xfrm>
-          <a:prstGeom prst="rect">
-            <a:avLst/>
-          </a:prstGeom>
-          <a:noFill/>
-        </p:spPr>
-        <p:txBody>
-          <a:bodyPr wrap="square">
-            <a:spAutoFit/>
-          </a:bodyPr>
-          <a:lstStyle/>
-          <a:p>
-            <a:pPr algn="l"/>
-            <a:r>
-              <a:rPr sz="2400" b="1" i="0">
-                <a:solidFill>
-                  <a:srgbClr val="1F2C56"/>
-                </a:solidFill>
-                <a:latin typeface="Source Serif 4"/>
-              </a:rPr>
-              <a:t>Wissensarbeit transparent machen – Gespräche in der Lernphase</a:t>
-            </a:r>
-          </a:p>
-        </p:txBody>
-      </p:sp>
-      <p:sp>
-        <p:nvSpPr>
-          <p:cNvPr id="8" name="TextBox 7"/>
-          <p:cNvSpPr txBox="1"/>
-          <p:nvPr/>
-        </p:nvSpPr>
-        <p:spPr>
-          <a:xfrm>
-            <a:off x="685800" y="1417320"/>
-            <a:ext cx="10817352" cy="5029200"/>
-          </a:xfrm>
-          <a:prstGeom prst="rect">
-            <a:avLst/>
-          </a:prstGeom>
-          <a:noFill/>
-        </p:spPr>
-        <p:txBody>
-          <a:bodyPr wrap="square">
-            <a:spAutoFit/>
-          </a:bodyPr>
-          <a:lstStyle/>
-          <a:p>
-            <a:pPr>
-              <a:spcBef>
-                <a:spcPts val="400"/>
-              </a:spcBef>
-              <a:spcAft>
-                <a:spcPts val="200"/>
-              </a:spcAft>
-            </a:pPr>
-            <a:r>
-              <a:rPr sz="1200">
-                <a:solidFill>
-                  <a:srgbClr val="3D5466"/>
-                </a:solidFill>
-                <a:latin typeface="Arial"/>
-              </a:rPr>
-              <a:t>Formulierungen, die funktionieren:</a:t>
-            </a:r>
-          </a:p>
-          <a:p>
-            <a:pPr>
-              <a:spcBef>
-                <a:spcPts val="600"/>
-              </a:spcBef>
-              <a:spcAft>
-                <a:spcPts val="200"/>
-              </a:spcAft>
-            </a:pPr>
-            <a:r>
-              <a:rPr sz="1200" i="1">
-                <a:solidFill>
-                  <a:srgbClr val="3D5466"/>
-                </a:solidFill>
-                <a:latin typeface="Arial"/>
-              </a:rPr>
-              <a:t>→  „Ich bin gerade dabei, mein Wissen über Ihre Branche systematisch auszubauen – ich lerne am meisten von meinen Kunden. Was sollte jeder Bankmitarbeiter über Ihr Geschäft wissen?"</a:t>
-            </a:r>
-          </a:p>
-          <a:p>
-            <a:pPr>
-              <a:spcBef>
-                <a:spcPts val="600"/>
-              </a:spcBef>
-              <a:spcAft>
-                <a:spcPts val="200"/>
-              </a:spcAft>
-            </a:pPr>
-            <a:r>
-              <a:rPr sz="1200" i="1">
-                <a:solidFill>
-                  <a:srgbClr val="3D5466"/>
-                </a:solidFill>
-                <a:latin typeface="Arial"/>
-              </a:rPr>
-              <a:t>→  „Ich habe mit dem DZ BANK Agrar-Spezialisten gesprochen – der hat mir [Thema] erklärt. Das war neu für mich. Stimmt das mit Ihrer Erfahrung überein?"</a:t>
-            </a:r>
-          </a:p>
-          <a:p>
-            <a:pPr>
-              <a:spcBef>
-                <a:spcPts val="400"/>
-              </a:spcBef>
-              <a:spcAft>
-                <a:spcPts val="200"/>
-              </a:spcAft>
-            </a:pPr>
-            <a:r>
-              <a:rPr sz="1200">
-                <a:solidFill>
-                  <a:srgbClr val="3D5466"/>
-                </a:solidFill>
-                <a:latin typeface="Arial"/>
-              </a:rPr>
-              <a:t>Was vermeiden:</a:t>
-            </a:r>
-          </a:p>
-          <a:p>
-            <a:pPr>
-              <a:spcBef>
-                <a:spcPts val="400"/>
-              </a:spcBef>
-              <a:spcAft>
-                <a:spcPts val="200"/>
-              </a:spcAft>
-            </a:pPr>
-            <a:r>
-              <a:rPr sz="1300">
-                <a:solidFill>
-                  <a:srgbClr val="3D5466"/>
-                </a:solidFill>
-                <a:latin typeface="Arial"/>
-              </a:rPr>
-              <a:t>▸  Nicht sagen: „Ich kenne mich in Ihrer Branche noch nicht so gut aus." (schafft Unsicherheit)</a:t>
-            </a:r>
-          </a:p>
-          <a:p>
-            <a:pPr>
-              <a:spcBef>
-                <a:spcPts val="400"/>
-              </a:spcBef>
-              <a:spcAft>
-                <a:spcPts val="200"/>
-              </a:spcAft>
-            </a:pPr>
-            <a:r>
-              <a:rPr sz="1300">
-                <a:solidFill>
-                  <a:srgbClr val="3D5466"/>
-                </a:solidFill>
-                <a:latin typeface="Arial"/>
-              </a:rPr>
-              <a:t>▸  Nicht sagen: „Ich bin kein Branchenexperte, aber..." (unnötige Selbstabwertung)</a:t>
-            </a:r>
-          </a:p>
-          <a:p>
-            <a:pPr>
-              <a:spcBef>
-                <a:spcPts val="400"/>
-              </a:spcBef>
-              <a:spcAft>
-                <a:spcPts val="200"/>
-              </a:spcAft>
-            </a:pPr>
-            <a:r>
-              <a:rPr sz="1300">
-                <a:solidFill>
-                  <a:srgbClr val="3D5466"/>
-                </a:solidFill>
-                <a:latin typeface="Arial"/>
-              </a:rPr>
-              <a:t>▸  Nicht so tun, als ob man alles weiß (Kunden merken es sofort)</a:t>
-            </a:r>
-          </a:p>
-          <a:p>
-            <a:pPr>
-              <a:spcBef>
-                <a:spcPts val="400"/>
-              </a:spcBef>
-              <a:spcAft>
-                <a:spcPts val="200"/>
-              </a:spcAft>
-            </a:pPr>
-            <a:r>
-              <a:rPr sz="1200">
-                <a:solidFill>
-                  <a:srgbClr val="3D5466"/>
-                </a:solidFill>
-                <a:latin typeface="Arial"/>
-              </a:rPr>
-              <a:t>Die Grundregel: Interesse + konkrete Vorbereitung + echtes Zuhören ersetzen fehlende Expertise – zumindest in den ersten Gesprächen. Expertise entsteht dann im Dialog.</a:t>
-            </a:r>
-          </a:p>
-          <a:p>
-            <a:pPr>
-              <a:spcBef>
-                <a:spcPts val="400"/>
-              </a:spcBef>
-              <a:spcAft>
-                <a:spcPts val="200"/>
-              </a:spcAft>
-            </a:pPr>
-            <a:r>
-              <a:rPr sz="1200">
-                <a:solidFill>
-                  <a:srgbClr val="3D5466"/>
-                </a:solidFill>
-                <a:latin typeface="Arial"/>
-              </a:rPr>
-              <a:t>## 4.3 Informationsquellen für Branchenexpertise</a:t>
-            </a:r>
-          </a:p>
-          <a:p>
-            <a:pPr>
-              <a:spcBef>
-                <a:spcPts val="400"/>
-              </a:spcBef>
-              <a:spcAft>
-                <a:spcPts val="200"/>
-              </a:spcAft>
-            </a:pPr>
-            <a:r>
-              <a:rPr sz="1200">
-                <a:solidFill>
-                  <a:srgbClr val="3D5466"/>
-                </a:solidFill>
-                <a:latin typeface="Arial"/>
-              </a:rPr>
-              <a:t>Systematische Branchenexpertise entsteht aus dem Zusammenspiel verschiedener Quellen. Die folgende Matrix hilft bei der Auswahl:</a:t>
-            </a:r>
-          </a:p>
-          <a:p>
-            <a:pPr>
-              <a:spcBef>
-                <a:spcPts val="400"/>
-              </a:spcBef>
-              <a:spcAft>
-                <a:spcPts val="200"/>
-              </a:spcAft>
-            </a:pPr>
-            <a:r>
-              <a:rPr sz="1200">
-                <a:solidFill>
-                  <a:srgbClr val="3D5466"/>
-                </a:solidFill>
-                <a:latin typeface="Arial"/>
-              </a:rPr>
-              <a:t>Empfohlene Priorisierung für den Start: Branchenverband (Jahresbericht), DZ BANK Research (sofern verfügbar), IHK-Konjunkturbericht, 3–5 Kundengespräche mit Fokus auf Branchentrends.</a:t>
-            </a:r>
-          </a:p>
-          <a:p>
-            <a:pPr>
-              <a:spcBef>
-                <a:spcPts val="400"/>
-              </a:spcBef>
-              <a:spcAft>
-                <a:spcPts val="200"/>
-              </a:spcAft>
-            </a:pPr>
-            <a:r>
-              <a:rPr sz="1200">
-                <a:solidFill>
-                  <a:srgbClr val="3D5466"/>
-                </a:solidFill>
-                <a:latin typeface="Arial"/>
-              </a:rPr>
-              <a:t>## 4.4 Expertennetzwerk aufbauen</a:t>
-            </a:r>
-          </a:p>
-        </p:txBody>
-      </p:sp>
-      <p:sp>
-        <p:nvSpPr>
-          <p:cNvPr id="9" name="Rectangle 8"/>
+      <p:graphicFrame>
+        <p:nvGraphicFramePr>
+          <p:cNvPr id="7" name="Table 6"/>
+          <p:cNvGraphicFramePr>
+            <a:graphicFrameLocks noGrp="1"/>
+          </p:cNvGraphicFramePr>
+          <p:nvPr/>
+        </p:nvGraphicFramePr>
+        <p:xfrm>
+          <a:off x="685800" y="1417320"/>
+          <a:ext cx="10817352" cy="2688336"/>
+        </p:xfrm>
+        <a:graphic>
+          <a:graphicData uri="http://schemas.openxmlformats.org/drawingml/2006/table">
+            <a:tbl>
+              <a:tblPr firstRow="1" bandRow="1">
+                <a:tableStyleId>{5C22544A-7EE6-4342-B048-85BDC9FD1C3A}</a:tableStyleId>
+              </a:tblPr>
+              <a:tblGrid>
+                <a:gridCol w="2704338"/>
+                <a:gridCol w="2704338"/>
+                <a:gridCol w="2704338"/>
+                <a:gridCol w="2704338"/>
+              </a:tblGrid>
+              <a:tr h="384048">
+                <a:tc>
+                  <a:txBody>
+                    <a:bodyPr/>
+                    <a:lstStyle/>
+                    <a:p>
+                      <a:r>
+                        <a:rPr sz="1100" b="1">
+                          <a:solidFill>
+                            <a:srgbClr val="FFFFFF"/>
+                          </a:solidFill>
+                          <a:latin typeface="Arial"/>
+                        </a:rPr>
+                        <a:t>Kraft</a:t>
+                      </a:r>
+                    </a:p>
+                  </a:txBody>
+                  <a:tcPr>
+                    <a:solidFill>
+                      <a:srgbClr val="1F2C56"/>
+                    </a:solidFill>
+                  </a:tcPr>
+                </a:tc>
+                <a:tc>
+                  <a:txBody>
+                    <a:bodyPr/>
+                    <a:lstStyle/>
+                    <a:p>
+                      <a:r>
+                        <a:rPr sz="1100" b="1">
+                          <a:solidFill>
+                            <a:srgbClr val="FFFFFF"/>
+                          </a:solidFill>
+                          <a:latin typeface="Arial"/>
+                        </a:rPr>
+                        <a:t>Kurzbeschreibung</a:t>
+                      </a:r>
+                    </a:p>
+                  </a:txBody>
+                  <a:tcPr>
+                    <a:solidFill>
+                      <a:srgbClr val="1F2C56"/>
+                    </a:solidFill>
+                  </a:tcPr>
+                </a:tc>
+                <a:tc>
+                  <a:txBody>
+                    <a:bodyPr/>
+                    <a:lstStyle/>
+                    <a:p>
+                      <a:r>
+                        <a:rPr sz="1100" b="1">
+                          <a:solidFill>
+                            <a:srgbClr val="FFFFFF"/>
+                          </a:solidFill>
+                          <a:latin typeface="Arial"/>
+                        </a:rPr>
+                        <a:t>Stärke (1–5)</a:t>
+                      </a:r>
+                    </a:p>
+                  </a:txBody>
+                  <a:tcPr>
+                    <a:solidFill>
+                      <a:srgbClr val="1F2C56"/>
+                    </a:solidFill>
+                  </a:tcPr>
+                </a:tc>
+                <a:tc>
+                  <a:txBody>
+                    <a:bodyPr/>
+                    <a:lstStyle/>
+                    <a:p>
+                      <a:r>
+                        <a:rPr sz="1100" b="1">
+                          <a:solidFill>
+                            <a:srgbClr val="FFFFFF"/>
+                          </a:solidFill>
+                          <a:latin typeface="Arial"/>
+                        </a:rPr>
+                        <a:t>Implikation für Kreditrisiko</a:t>
+                      </a:r>
+                    </a:p>
+                  </a:txBody>
+                  <a:tcPr>
+                    <a:solidFill>
+                      <a:srgbClr val="1F2C56"/>
+                    </a:solidFill>
+                  </a:tcPr>
+                </a:tc>
+              </a:tr>
+              <a:tr h="384048">
+                <a:tc>
+                  <a:txBody>
+                    <a:bodyPr/>
+                    <a:lstStyle/>
+                    <a:p>
+                      <a:r>
+                        <a:rPr sz="1050">
+                          <a:solidFill>
+                            <a:srgbClr val="3D5466"/>
+                          </a:solidFill>
+                          <a:latin typeface="Arial"/>
+                        </a:rPr>
+                        <a:t>Neue Wettbewerber</a:t>
+                      </a:r>
+                    </a:p>
+                  </a:txBody>
+                  <a:tcPr/>
+                </a:tc>
+                <a:tc>
+                  <a:txBody>
+                    <a:bodyPr/>
+                    <a:lstStyle/>
+                    <a:p/>
+                  </a:txBody>
+                  <a:tcPr/>
+                </a:tc>
+                <a:tc>
+                  <a:txBody>
+                    <a:bodyPr/>
+                    <a:lstStyle/>
+                    <a:p/>
+                  </a:txBody>
+                  <a:tcPr/>
+                </a:tc>
+                <a:tc>
+                  <a:txBody>
+                    <a:bodyPr/>
+                    <a:lstStyle/>
+                    <a:p/>
+                  </a:txBody>
+                  <a:tcPr/>
+                </a:tc>
+              </a:tr>
+              <a:tr h="384048">
+                <a:tc>
+                  <a:txBody>
+                    <a:bodyPr/>
+                    <a:lstStyle/>
+                    <a:p>
+                      <a:r>
+                        <a:rPr sz="1050">
+                          <a:solidFill>
+                            <a:srgbClr val="3D5466"/>
+                          </a:solidFill>
+                          <a:latin typeface="Arial"/>
+                        </a:rPr>
+                        <a:t>Lieferantenmacht</a:t>
+                      </a:r>
+                    </a:p>
+                  </a:txBody>
+                  <a:tcPr/>
+                </a:tc>
+                <a:tc>
+                  <a:txBody>
+                    <a:bodyPr/>
+                    <a:lstStyle/>
+                    <a:p/>
+                  </a:txBody>
+                  <a:tcPr/>
+                </a:tc>
+                <a:tc>
+                  <a:txBody>
+                    <a:bodyPr/>
+                    <a:lstStyle/>
+                    <a:p/>
+                  </a:txBody>
+                  <a:tcPr/>
+                </a:tc>
+                <a:tc>
+                  <a:txBody>
+                    <a:bodyPr/>
+                    <a:lstStyle/>
+                    <a:p/>
+                  </a:txBody>
+                  <a:tcPr/>
+                </a:tc>
+              </a:tr>
+              <a:tr h="384048">
+                <a:tc>
+                  <a:txBody>
+                    <a:bodyPr/>
+                    <a:lstStyle/>
+                    <a:p>
+                      <a:r>
+                        <a:rPr sz="1050">
+                          <a:solidFill>
+                            <a:srgbClr val="3D5466"/>
+                          </a:solidFill>
+                          <a:latin typeface="Arial"/>
+                        </a:rPr>
+                        <a:t>Abnehmermacht</a:t>
+                      </a:r>
+                    </a:p>
+                  </a:txBody>
+                  <a:tcPr/>
+                </a:tc>
+                <a:tc>
+                  <a:txBody>
+                    <a:bodyPr/>
+                    <a:lstStyle/>
+                    <a:p/>
+                  </a:txBody>
+                  <a:tcPr/>
+                </a:tc>
+                <a:tc>
+                  <a:txBody>
+                    <a:bodyPr/>
+                    <a:lstStyle/>
+                    <a:p/>
+                  </a:txBody>
+                  <a:tcPr/>
+                </a:tc>
+                <a:tc>
+                  <a:txBody>
+                    <a:bodyPr/>
+                    <a:lstStyle/>
+                    <a:p/>
+                  </a:txBody>
+                  <a:tcPr/>
+                </a:tc>
+              </a:tr>
+              <a:tr h="384048">
+                <a:tc>
+                  <a:txBody>
+                    <a:bodyPr/>
+                    <a:lstStyle/>
+                    <a:p>
+                      <a:r>
+                        <a:rPr sz="1050">
+                          <a:solidFill>
+                            <a:srgbClr val="3D5466"/>
+                          </a:solidFill>
+                          <a:latin typeface="Arial"/>
+                        </a:rPr>
+                        <a:t>Substitutionsbedrohung</a:t>
+                      </a:r>
+                    </a:p>
+                  </a:txBody>
+                  <a:tcPr/>
+                </a:tc>
+                <a:tc>
+                  <a:txBody>
+                    <a:bodyPr/>
+                    <a:lstStyle/>
+                    <a:p/>
+                  </a:txBody>
+                  <a:tcPr/>
+                </a:tc>
+                <a:tc>
+                  <a:txBody>
+                    <a:bodyPr/>
+                    <a:lstStyle/>
+                    <a:p/>
+                  </a:txBody>
+                  <a:tcPr/>
+                </a:tc>
+                <a:tc>
+                  <a:txBody>
+                    <a:bodyPr/>
+                    <a:lstStyle/>
+                    <a:p/>
+                  </a:txBody>
+                  <a:tcPr/>
+                </a:tc>
+              </a:tr>
+              <a:tr h="384048">
+                <a:tc>
+                  <a:txBody>
+                    <a:bodyPr/>
+                    <a:lstStyle/>
+                    <a:p>
+                      <a:r>
+                        <a:rPr sz="1050">
+                          <a:solidFill>
+                            <a:srgbClr val="3D5466"/>
+                          </a:solidFill>
+                          <a:latin typeface="Arial"/>
+                        </a:rPr>
+                        <a:t>Rivalität intern</a:t>
+                      </a:r>
+                    </a:p>
+                  </a:txBody>
+                  <a:tcPr/>
+                </a:tc>
+                <a:tc>
+                  <a:txBody>
+                    <a:bodyPr/>
+                    <a:lstStyle/>
+                    <a:p/>
+                  </a:txBody>
+                  <a:tcPr/>
+                </a:tc>
+                <a:tc>
+                  <a:txBody>
+                    <a:bodyPr/>
+                    <a:lstStyle/>
+                    <a:p/>
+                  </a:txBody>
+                  <a:tcPr/>
+                </a:tc>
+                <a:tc>
+                  <a:txBody>
+                    <a:bodyPr/>
+                    <a:lstStyle/>
+                    <a:p/>
+                  </a:txBody>
+                  <a:tcPr/>
+                </a:tc>
+              </a:tr>
+              <a:tr h="384048">
+                <a:tc>
+                  <a:txBody>
+                    <a:bodyPr/>
+                    <a:lstStyle/>
+                    <a:p>
+                      <a:r>
+                        <a:rPr sz="1050">
+                          <a:solidFill>
+                            <a:srgbClr val="3D5466"/>
+                          </a:solidFill>
+                          <a:latin typeface="Arial"/>
+                        </a:rPr>
+                        <a:t>Gesamteindruck Branche</a:t>
+                      </a:r>
+                    </a:p>
+                  </a:txBody>
+                  <a:tcPr/>
+                </a:tc>
+                <a:tc>
+                  <a:txBody>
+                    <a:bodyPr/>
+                    <a:lstStyle/>
+                    <a:p/>
+                  </a:txBody>
+                  <a:tcPr/>
+                </a:tc>
+                <a:tc>
+                  <a:txBody>
+                    <a:bodyPr/>
+                    <a:lstStyle/>
+                    <a:p/>
+                  </a:txBody>
+                  <a:tcPr/>
+                </a:tc>
+                <a:tc>
+                  <a:txBody>
+                    <a:bodyPr/>
+                    <a:lstStyle/>
+                    <a:p/>
+                  </a:txBody>
+                  <a:tcPr/>
+                </a:tc>
+              </a:tr>
+            </a:tbl>
+          </a:graphicData>
+        </a:graphic>
+      </p:graphicFrame>
+      <p:sp>
+        <p:nvSpPr>
+          <p:cNvPr id="8" name="Rectangle 7"/>
           <p:cNvSpPr/>
           <p:nvPr/>
         </p:nvSpPr>
@@ -5193,7 +5141,7 @@
       </p:sp>
       <p:sp>
         <p:nvSpPr>
-          <p:cNvPr id="10" name="TextBox 9"/>
+          <p:cNvPr id="9" name="TextBox 8"/>
           <p:cNvSpPr txBox="1"/>
           <p:nvPr/>
         </p:nvSpPr>
@@ -5222,6 +5170,41 @@
                 <a:latin typeface="JetBrains Mono"/>
               </a:rPr>
               <a:t>Benedikt Zoller Coaching  ·  FKB Campus  ·  M09</a:t>
+            </a:r>
+          </a:p>
+        </p:txBody>
+      </p:sp>
+      <p:sp>
+        <p:nvSpPr>
+          <p:cNvPr id="10" name="TextBox 9"/>
+          <p:cNvSpPr txBox="1"/>
+          <p:nvPr/>
+        </p:nvSpPr>
+        <p:spPr>
+          <a:xfrm>
+            <a:off x="7176211" y="6583680"/>
+            <a:ext cx="4326940" cy="256032"/>
+          </a:xfrm>
+          <a:prstGeom prst="rect">
+            <a:avLst/>
+          </a:prstGeom>
+          <a:noFill/>
+        </p:spPr>
+        <p:txBody>
+          <a:bodyPr wrap="none">
+            <a:spAutoFit/>
+          </a:bodyPr>
+          <a:lstStyle/>
+          <a:p>
+            <a:pPr algn="r"/>
+            <a:r>
+              <a:rPr sz="700">
+                <a:solidFill>
+                  <a:srgbClr val="A0B4D2"/>
+                </a:solidFill>
+                <a:latin typeface="JetBrains Mono"/>
+              </a:rPr>
+              <a:t>Übersicht</a:t>
             </a:r>
           </a:p>
         </p:txBody>
@@ -5481,7 +5464,7 @@
                 </a:solidFill>
                 <a:latin typeface="Source Serif 4"/>
               </a:rPr>
-              <a:t>Arbeitsblatt A: Branchenanalyse – Five Forces Scoring</a:t>
+              <a:t>Arbeitsblatt B: Mein 3-Monats-Expertiseplan</a:t>
             </a:r>
           </a:p>
         </p:txBody>
@@ -5517,32 +5500,13 @@
               </a:spcAft>
             </a:pPr>
             <a:r>
-              <a:rPr sz="1200">
+              <a:rPr sz="1300">
                 <a:solidFill>
                   <a:srgbClr val="3D5466"/>
                 </a:solidFill>
                 <a:latin typeface="Arial"/>
               </a:rPr>
-              <a:t>Bewertungslogik: 1 = schwach / kaum relevant · 5 = stark / hochrelevant</a:t>
-            </a:r>
-          </a:p>
-          <a:p>
-            <a:pPr>
-              <a:spcBef>
-                <a:spcPts val="400"/>
-              </a:spcBef>
-              <a:spcAft>
-                <a:spcPts val="200"/>
-              </a:spcAft>
-            </a:pPr>
-            <a:r>
-              <a:rPr sz="1200">
-                <a:solidFill>
-                  <a:srgbClr val="3D5466"/>
-                </a:solidFill>
-                <a:latin typeface="Arial"/>
-              </a:rPr>
-              <a:t>Wichtigste Erkenntnis aus dieser Analyse:</a:t>
+              <a:t>▸  Meine Kernmotivation (Warum diese Branche?):</a:t>
             </a:r>
           </a:p>
         </p:txBody>
@@ -5658,7 +5622,7 @@
             <a:avLst/>
           </a:prstGeom>
           <a:solidFill>
-            <a:srgbClr val="EDEDF3"/>
+            <a:srgbClr val="FFFFFF"/>
           </a:solidFill>
           <a:ln>
             <a:noFill/>
@@ -5759,51 +5723,43 @@
                 </a:solidFill>
                 <a:latin typeface="JetBrains Mono"/>
               </a:rPr>
-              <a:t>M09  ·  INHALT</a:t>
-            </a:r>
-          </a:p>
-        </p:txBody>
-      </p:sp>
-      <p:sp>
-        <p:nvSpPr>
-          <p:cNvPr id="5" name="Rectangle 4"/>
-          <p:cNvSpPr/>
-          <p:nvPr/>
-        </p:nvSpPr>
-        <p:spPr>
-          <a:xfrm>
-            <a:off x="0" y="1234440"/>
-            <a:ext cx="12188952" cy="12700"/>
-          </a:xfrm>
-          <a:prstGeom prst="rect">
-            <a:avLst/>
-          </a:prstGeom>
-          <a:solidFill>
-            <a:srgbClr val="D8DFE4"/>
-          </a:solidFill>
-          <a:ln>
-            <a:noFill/>
-          </a:ln>
-        </p:spPr>
-        <p:style>
-          <a:lnRef idx="1">
-            <a:schemeClr val="accent1"/>
-          </a:lnRef>
-          <a:fillRef idx="3">
-            <a:schemeClr val="accent1"/>
-          </a:fillRef>
-          <a:effectRef idx="2">
-            <a:schemeClr val="accent1"/>
-          </a:effectRef>
-          <a:fontRef idx="minor">
-            <a:schemeClr val="lt1"/>
-          </a:fontRef>
-        </p:style>
-        <p:txBody>
-          <a:bodyPr rtlCol="0" anchor="ctr"/>
-          <a:lstStyle/>
-          <a:p>
-            <a:pPr algn="ctr"/>
+              <a:t>M09  ·  ÜBERSICHT</a:t>
+            </a:r>
+          </a:p>
+        </p:txBody>
+      </p:sp>
+      <p:sp>
+        <p:nvSpPr>
+          <p:cNvPr id="5" name="TextBox 4"/>
+          <p:cNvSpPr txBox="1"/>
+          <p:nvPr/>
+        </p:nvSpPr>
+        <p:spPr>
+          <a:xfrm>
+            <a:off x="685800" y="502920"/>
+            <a:ext cx="10817352" cy="594360"/>
+          </a:xfrm>
+          <a:prstGeom prst="rect">
+            <a:avLst/>
+          </a:prstGeom>
+          <a:noFill/>
+        </p:spPr>
+        <p:txBody>
+          <a:bodyPr wrap="square">
+            <a:spAutoFit/>
+          </a:bodyPr>
+          <a:lstStyle/>
+          <a:p>
+            <a:pPr algn="l"/>
+            <a:r>
+              <a:rPr sz="2000" b="1" i="0">
+                <a:solidFill>
+                  <a:srgbClr val="1F2C56"/>
+                </a:solidFill>
+                <a:latin typeface="Source Serif 4"/>
+              </a:rPr>
+              <a:t>Arbeitsblatt B: Mein 3-Monats-Expertiseplan</a:t>
+            </a:r>
           </a:p>
         </p:txBody>
       </p:sp>
@@ -5815,8 +5771,8 @@
         </p:nvSpPr>
         <p:spPr>
           <a:xfrm>
-            <a:off x="685800" y="502920"/>
-            <a:ext cx="36576" cy="658368"/>
+            <a:off x="685800" y="1143000"/>
+            <a:ext cx="10817352" cy="25400"/>
           </a:xfrm>
           <a:prstGeom prst="rect">
             <a:avLst/>
@@ -5850,86 +5806,289 @@
           </a:p>
         </p:txBody>
       </p:sp>
-      <p:sp>
-        <p:nvSpPr>
-          <p:cNvPr id="7" name="TextBox 6"/>
-          <p:cNvSpPr txBox="1"/>
-          <p:nvPr/>
-        </p:nvSpPr>
-        <p:spPr>
-          <a:xfrm>
-            <a:off x="813816" y="502920"/>
-            <a:ext cx="10634472" cy="685800"/>
-          </a:xfrm>
-          <a:prstGeom prst="rect">
-            <a:avLst/>
-          </a:prstGeom>
-          <a:noFill/>
-        </p:spPr>
-        <p:txBody>
-          <a:bodyPr wrap="square">
-            <a:spAutoFit/>
-          </a:bodyPr>
-          <a:lstStyle/>
-          <a:p>
-            <a:pPr algn="l"/>
-            <a:r>
-              <a:rPr sz="2400" b="1" i="0">
-                <a:solidFill>
-                  <a:srgbClr val="1F2C56"/>
-                </a:solidFill>
-                <a:latin typeface="Source Serif 4"/>
-              </a:rPr>
-              <a:t>Arbeitsblatt B: Mein 3-Monats-Expertiseplan</a:t>
-            </a:r>
-          </a:p>
-        </p:txBody>
-      </p:sp>
-      <p:sp>
-        <p:nvSpPr>
-          <p:cNvPr id="8" name="TextBox 7"/>
-          <p:cNvSpPr txBox="1"/>
-          <p:nvPr/>
-        </p:nvSpPr>
-        <p:spPr>
-          <a:xfrm>
-            <a:off x="685800" y="1417320"/>
-            <a:ext cx="10817352" cy="5029200"/>
-          </a:xfrm>
-          <a:prstGeom prst="rect">
-            <a:avLst/>
-          </a:prstGeom>
-          <a:noFill/>
-        </p:spPr>
-        <p:txBody>
-          <a:bodyPr wrap="square">
-            <a:spAutoFit/>
-          </a:bodyPr>
-          <a:lstStyle/>
-          <a:p>
-            <a:pPr>
-              <a:spcBef>
-                <a:spcPts val="400"/>
-              </a:spcBef>
-              <a:spcAft>
-                <a:spcPts val="200"/>
-              </a:spcAft>
-            </a:pPr>
-            <a:r>
-              <a:rPr sz="1200">
-                <a:solidFill>
-                  <a:srgbClr val="3D5466"/>
-                </a:solidFill>
-                <a:latin typeface="Arial"/>
-              </a:rPr>
-              <a:t>Meine Kernmotivation (Warum diese Branche?):</a:t>
-            </a:r>
-          </a:p>
-        </p:txBody>
-      </p:sp>
-      <p:sp>
-        <p:nvSpPr>
-          <p:cNvPr id="9" name="Rectangle 8"/>
+      <p:graphicFrame>
+        <p:nvGraphicFramePr>
+          <p:cNvPr id="7" name="Table 6"/>
+          <p:cNvGraphicFramePr>
+            <a:graphicFrameLocks noGrp="1"/>
+          </p:cNvGraphicFramePr>
+          <p:nvPr/>
+        </p:nvGraphicFramePr>
+        <p:xfrm>
+          <a:off x="685800" y="1417320"/>
+          <a:ext cx="10817352" cy="1536192"/>
+        </p:xfrm>
+        <a:graphic>
+          <a:graphicData uri="http://schemas.openxmlformats.org/drawingml/2006/table">
+            <a:tbl>
+              <a:tblPr firstRow="1" bandRow="1">
+                <a:tableStyleId>{5C22544A-7EE6-4342-B048-85BDC9FD1C3A}</a:tableStyleId>
+              </a:tblPr>
+              <a:tblGrid>
+                <a:gridCol w="2704338"/>
+                <a:gridCol w="2704338"/>
+                <a:gridCol w="2704338"/>
+                <a:gridCol w="2704338"/>
+              </a:tblGrid>
+              <a:tr h="384048">
+                <a:tc>
+                  <a:txBody>
+                    <a:bodyPr/>
+                    <a:lstStyle/>
+                    <a:p>
+                      <a:r>
+                        <a:rPr sz="1100" b="1">
+                          <a:solidFill>
+                            <a:srgbClr val="FFFFFF"/>
+                          </a:solidFill>
+                          <a:latin typeface="Arial"/>
+                        </a:rPr>
+                        <a:t>Monat</a:t>
+                      </a:r>
+                    </a:p>
+                  </a:txBody>
+                  <a:tcPr>
+                    <a:solidFill>
+                      <a:srgbClr val="1F2C56"/>
+                    </a:solidFill>
+                  </a:tcPr>
+                </a:tc>
+                <a:tc>
+                  <a:txBody>
+                    <a:bodyPr/>
+                    <a:lstStyle/>
+                    <a:p>
+                      <a:r>
+                        <a:rPr sz="1100" b="1">
+                          <a:solidFill>
+                            <a:srgbClr val="FFFFFF"/>
+                          </a:solidFill>
+                          <a:latin typeface="Arial"/>
+                        </a:rPr>
+                        <a:t>Schwerpunkt</a:t>
+                      </a:r>
+                    </a:p>
+                  </a:txBody>
+                  <a:tcPr>
+                    <a:solidFill>
+                      <a:srgbClr val="1F2C56"/>
+                    </a:solidFill>
+                  </a:tcPr>
+                </a:tc>
+                <a:tc>
+                  <a:txBody>
+                    <a:bodyPr/>
+                    <a:lstStyle/>
+                    <a:p>
+                      <a:r>
+                        <a:rPr sz="1100" b="1">
+                          <a:solidFill>
+                            <a:srgbClr val="FFFFFF"/>
+                          </a:solidFill>
+                          <a:latin typeface="Arial"/>
+                        </a:rPr>
+                        <a:t>Konkrete Aktivität</a:t>
+                      </a:r>
+                    </a:p>
+                  </a:txBody>
+                  <a:tcPr>
+                    <a:solidFill>
+                      <a:srgbClr val="1F2C56"/>
+                    </a:solidFill>
+                  </a:tcPr>
+                </a:tc>
+                <a:tc>
+                  <a:txBody>
+                    <a:bodyPr/>
+                    <a:lstStyle/>
+                    <a:p>
+                      <a:r>
+                        <a:rPr sz="1100" b="1">
+                          <a:solidFill>
+                            <a:srgbClr val="FFFFFF"/>
+                          </a:solidFill>
+                          <a:latin typeface="Arial"/>
+                        </a:rPr>
+                        <a:t>Erwartetes Ergebnis</a:t>
+                      </a:r>
+                    </a:p>
+                  </a:txBody>
+                  <a:tcPr>
+                    <a:solidFill>
+                      <a:srgbClr val="1F2C56"/>
+                    </a:solidFill>
+                  </a:tcPr>
+                </a:tc>
+              </a:tr>
+              <a:tr h="384048">
+                <a:tc>
+                  <a:txBody>
+                    <a:bodyPr/>
+                    <a:lstStyle/>
+                    <a:p>
+                      <a:r>
+                        <a:rPr sz="1050">
+                          <a:solidFill>
+                            <a:srgbClr val="3D5466"/>
+                          </a:solidFill>
+                          <a:latin typeface="Arial"/>
+                        </a:rPr>
+                        <a:t>Monat 1</a:t>
+                      </a:r>
+                    </a:p>
+                  </a:txBody>
+                  <a:tcPr/>
+                </a:tc>
+                <a:tc>
+                  <a:txBody>
+                    <a:bodyPr/>
+                    <a:lstStyle/>
+                    <a:p>
+                      <a:r>
+                        <a:rPr sz="1050">
+                          <a:solidFill>
+                            <a:srgbClr val="3D5466"/>
+                          </a:solidFill>
+                          <a:latin typeface="Arial"/>
+                        </a:rPr>
+                        <a:t>Strukturwissen</a:t>
+                      </a:r>
+                    </a:p>
+                  </a:txBody>
+                  <a:tcPr/>
+                </a:tc>
+                <a:tc>
+                  <a:txBody>
+                    <a:bodyPr/>
+                    <a:lstStyle/>
+                    <a:p/>
+                  </a:txBody>
+                  <a:tcPr/>
+                </a:tc>
+                <a:tc>
+                  <a:txBody>
+                    <a:bodyPr/>
+                    <a:lstStyle/>
+                    <a:p/>
+                  </a:txBody>
+                  <a:tcPr/>
+                </a:tc>
+              </a:tr>
+              <a:tr h="384048">
+                <a:tc>
+                  <a:txBody>
+                    <a:bodyPr/>
+                    <a:lstStyle/>
+                    <a:p>
+                      <a:r>
+                        <a:rPr sz="1050">
+                          <a:solidFill>
+                            <a:srgbClr val="3D5466"/>
+                          </a:solidFill>
+                          <a:latin typeface="Arial"/>
+                        </a:rPr>
+                        <a:t>Monat 2</a:t>
+                      </a:r>
+                    </a:p>
+                  </a:txBody>
+                  <a:tcPr/>
+                </a:tc>
+                <a:tc>
+                  <a:txBody>
+                    <a:bodyPr/>
+                    <a:lstStyle/>
+                    <a:p>
+                      <a:r>
+                        <a:rPr sz="1050">
+                          <a:solidFill>
+                            <a:srgbClr val="3D5466"/>
+                          </a:solidFill>
+                          <a:latin typeface="Arial"/>
+                        </a:rPr>
+                        <a:t>Kundengespräche</a:t>
+                      </a:r>
+                    </a:p>
+                  </a:txBody>
+                  <a:tcPr/>
+                </a:tc>
+                <a:tc>
+                  <a:txBody>
+                    <a:bodyPr/>
+                    <a:lstStyle/>
+                    <a:p/>
+                  </a:txBody>
+                  <a:tcPr/>
+                </a:tc>
+                <a:tc>
+                  <a:txBody>
+                    <a:bodyPr/>
+                    <a:lstStyle/>
+                    <a:p/>
+                  </a:txBody>
+                  <a:tcPr/>
+                </a:tc>
+              </a:tr>
+              <a:tr h="384048">
+                <a:tc>
+                  <a:txBody>
+                    <a:bodyPr/>
+                    <a:lstStyle/>
+                    <a:p>
+                      <a:r>
+                        <a:rPr sz="1050">
+                          <a:solidFill>
+                            <a:srgbClr val="3D5466"/>
+                          </a:solidFill>
+                          <a:latin typeface="Arial"/>
+                        </a:rPr>
+                        <a:t>Monat 3</a:t>
+                      </a:r>
+                    </a:p>
+                  </a:txBody>
+                  <a:tcPr/>
+                </a:tc>
+                <a:tc>
+                  <a:txBody>
+                    <a:bodyPr/>
+                    <a:lstStyle/>
+                    <a:p>
+                      <a:r>
+                        <a:rPr sz="1050">
+                          <a:solidFill>
+                            <a:srgbClr val="3D5466"/>
+                          </a:solidFill>
+                          <a:latin typeface="Arial"/>
+                        </a:rPr>
+                        <a:t>Netzwerk &amp; Portfolio</a:t>
+                      </a:r>
+                    </a:p>
+                  </a:txBody>
+                  <a:tcPr/>
+                </a:tc>
+                <a:tc>
+                  <a:txBody>
+                    <a:bodyPr/>
+                    <a:lstStyle/>
+                    <a:p/>
+                  </a:txBody>
+                  <a:tcPr/>
+                </a:tc>
+                <a:tc>
+                  <a:txBody>
+                    <a:bodyPr/>
+                    <a:lstStyle/>
+                    <a:p/>
+                  </a:txBody>
+                  <a:tcPr/>
+                </a:tc>
+              </a:tr>
+            </a:tbl>
+          </a:graphicData>
+        </a:graphic>
+      </p:graphicFrame>
+      <p:sp>
+        <p:nvSpPr>
+          <p:cNvPr id="8" name="Rectangle 7"/>
           <p:cNvSpPr/>
           <p:nvPr/>
         </p:nvSpPr>
@@ -5972,7 +6131,7 @@
       </p:sp>
       <p:sp>
         <p:nvSpPr>
-          <p:cNvPr id="10" name="TextBox 9"/>
+          <p:cNvPr id="9" name="TextBox 8"/>
           <p:cNvSpPr txBox="1"/>
           <p:nvPr/>
         </p:nvSpPr>
@@ -6001,6 +6160,41 @@
                 <a:latin typeface="JetBrains Mono"/>
               </a:rPr>
               <a:t>Benedikt Zoller Coaching  ·  FKB Campus  ·  M09</a:t>
+            </a:r>
+          </a:p>
+        </p:txBody>
+      </p:sp>
+      <p:sp>
+        <p:nvSpPr>
+          <p:cNvPr id="10" name="TextBox 9"/>
+          <p:cNvSpPr txBox="1"/>
+          <p:nvPr/>
+        </p:nvSpPr>
+        <p:spPr>
+          <a:xfrm>
+            <a:off x="7176211" y="6583680"/>
+            <a:ext cx="4326940" cy="256032"/>
+          </a:xfrm>
+          <a:prstGeom prst="rect">
+            <a:avLst/>
+          </a:prstGeom>
+          <a:noFill/>
+        </p:spPr>
+        <p:txBody>
+          <a:bodyPr wrap="none">
+            <a:spAutoFit/>
+          </a:bodyPr>
+          <a:lstStyle/>
+          <a:p>
+            <a:pPr algn="r"/>
+            <a:r>
+              <a:rPr sz="700">
+                <a:solidFill>
+                  <a:srgbClr val="A0B4D2"/>
+                </a:solidFill>
+                <a:latin typeface="JetBrains Mono"/>
+              </a:rPr>
+              <a:t>Übersicht</a:t>
             </a:r>
           </a:p>
         </p:txBody>
@@ -6296,13 +6490,13 @@
               </a:spcAft>
             </a:pPr>
             <a:r>
-              <a:rPr sz="1200">
+              <a:rPr sz="1300">
                 <a:solidFill>
                   <a:srgbClr val="3D5466"/>
                 </a:solidFill>
                 <a:latin typeface="Arial"/>
               </a:rPr>
-              <a:t>Mein wichtigstes Branchenlernen aus diesem Gespräch:</a:t>
+              <a:t>▸  Mein wichtigstes Branchenlernen aus diesem Gespräch:</a:t>
             </a:r>
           </a:p>
           <a:p>
@@ -7355,7 +7549,7 @@
                 </a:solidFill>
                 <a:latin typeface="JetBrains Mono"/>
               </a:rPr>
-              <a:t>M09  ·  INHALT</a:t>
+              <a:t>AGENDA  ·  M09</a:t>
             </a:r>
           </a:p>
         </p:txBody>
@@ -7405,57 +7599,14 @@
       </p:sp>
       <p:sp>
         <p:nvSpPr>
-          <p:cNvPr id="6" name="Rectangle 5"/>
-          <p:cNvSpPr/>
+          <p:cNvPr id="6" name="TextBox 5"/>
+          <p:cNvSpPr txBox="1"/>
           <p:nvPr/>
         </p:nvSpPr>
         <p:spPr>
           <a:xfrm>
             <a:off x="685800" y="502920"/>
-            <a:ext cx="36576" cy="658368"/>
-          </a:xfrm>
-          <a:prstGeom prst="rect">
-            <a:avLst/>
-          </a:prstGeom>
-          <a:solidFill>
-            <a:srgbClr val="D9C089"/>
-          </a:solidFill>
-          <a:ln>
-            <a:noFill/>
-          </a:ln>
-        </p:spPr>
-        <p:style>
-          <a:lnRef idx="1">
-            <a:schemeClr val="accent1"/>
-          </a:lnRef>
-          <a:fillRef idx="3">
-            <a:schemeClr val="accent1"/>
-          </a:fillRef>
-          <a:effectRef idx="2">
-            <a:schemeClr val="accent1"/>
-          </a:effectRef>
-          <a:fontRef idx="minor">
-            <a:schemeClr val="lt1"/>
-          </a:fontRef>
-        </p:style>
-        <p:txBody>
-          <a:bodyPr rtlCol="0" anchor="ctr"/>
-          <a:lstStyle/>
-          <a:p>
-            <a:pPr algn="ctr"/>
-          </a:p>
-        </p:txBody>
-      </p:sp>
-      <p:sp>
-        <p:nvSpPr>
-          <p:cNvPr id="7" name="TextBox 6"/>
-          <p:cNvSpPr txBox="1"/>
-          <p:nvPr/>
-        </p:nvSpPr>
-        <p:spPr>
-          <a:xfrm>
-            <a:off x="813816" y="502920"/>
-            <a:ext cx="10634472" cy="685800"/>
+            <a:ext cx="10817352" cy="658368"/>
           </a:xfrm>
           <a:prstGeom prst="rect">
             <a:avLst/>
@@ -7470,27 +7621,27 @@
           <a:p>
             <a:pPr algn="l"/>
             <a:r>
-              <a:rPr sz="2400" b="1" i="0">
+              <a:rPr sz="2600" b="1" i="0">
                 <a:solidFill>
                   <a:srgbClr val="1F2C56"/>
                 </a:solidFill>
                 <a:latin typeface="Source Serif 4"/>
               </a:rPr>
-              <a:t>Was unterscheidet den Branchenexperten?</a:t>
-            </a:r>
-          </a:p>
-        </p:txBody>
-      </p:sp>
-      <p:sp>
-        <p:nvSpPr>
-          <p:cNvPr id="8" name="TextBox 7"/>
+              <a:t>So läuft das Modul</a:t>
+            </a:r>
+          </a:p>
+        </p:txBody>
+      </p:sp>
+      <p:sp>
+        <p:nvSpPr>
+          <p:cNvPr id="7" name="TextBox 6"/>
           <p:cNvSpPr txBox="1"/>
           <p:nvPr/>
         </p:nvSpPr>
         <p:spPr>
           <a:xfrm>
-            <a:off x="685800" y="1417320"/>
-            <a:ext cx="10817352" cy="5029200"/>
+            <a:off x="685800" y="1463040"/>
+            <a:ext cx="10817352" cy="4937760"/>
           </a:xfrm>
           <a:prstGeom prst="rect">
             <a:avLst/>
@@ -7508,17 +7659,35 @@
                 <a:spcPts val="400"/>
               </a:spcBef>
               <a:spcAft>
-                <a:spcPts val="200"/>
+                <a:spcPts val="100"/>
               </a:spcAft>
             </a:pPr>
             <a:r>
-              <a:rPr sz="1200">
+              <a:rPr sz="900">
+                <a:solidFill>
+                  <a:srgbClr val="78808C"/>
+                </a:solidFill>
+                <a:latin typeface="Consolas"/>
+              </a:rPr>
+              <a:t/>
+            </a:r>
+            <a:r>
+              <a:rPr sz="1200" b="1">
                 <a:solidFill>
                   <a:srgbClr val="3D5466"/>
                 </a:solidFill>
                 <a:latin typeface="Arial"/>
               </a:rPr>
-              <a:t>Branchenexpertise bedeutet mehr als das Kennen von Kennziffern. Sie umfasst:</a:t>
+              <a:t>  Einstieg</a:t>
+            </a:r>
+            <a:r>
+              <a:rPr sz="900">
+                <a:solidFill>
+                  <a:srgbClr val="78808C"/>
+                </a:solidFill>
+                <a:latin typeface="Arial"/>
+              </a:rPr>
+              <a:t>  ·  Plenum-Blitzlicht</a:t>
             </a:r>
           </a:p>
           <a:p>
@@ -7527,17 +7696,35 @@
                 <a:spcPts val="400"/>
               </a:spcBef>
               <a:spcAft>
-                <a:spcPts val="200"/>
+                <a:spcPts val="100"/>
               </a:spcAft>
             </a:pPr>
             <a:r>
-              <a:rPr sz="1300">
+              <a:rPr sz="900">
+                <a:solidFill>
+                  <a:srgbClr val="78808C"/>
+                </a:solidFill>
+                <a:latin typeface="Consolas"/>
+              </a:rPr>
+              <a:t/>
+            </a:r>
+            <a:r>
+              <a:rPr sz="1200" b="1">
                 <a:solidFill>
                   <a:srgbClr val="3D5466"/>
                 </a:solidFill>
                 <a:latin typeface="Arial"/>
               </a:rPr>
-              <a:t>▸  Strukturwissen: Wie ist die Branche aufgebaut? Welche Wertschöpfungsstufen gibt es?</a:t>
+              <a:t>  Theorie-Input 1</a:t>
+            </a:r>
+            <a:r>
+              <a:rPr sz="900">
+                <a:solidFill>
+                  <a:srgbClr val="78808C"/>
+                </a:solidFill>
+                <a:latin typeface="Arial"/>
+              </a:rPr>
+              <a:t>  ·  Trainer-Vortrag mit Foliensatz</a:t>
             </a:r>
           </a:p>
           <a:p>
@@ -7546,17 +7733,35 @@
                 <a:spcPts val="400"/>
               </a:spcBef>
               <a:spcAft>
-                <a:spcPts val="200"/>
+                <a:spcPts val="100"/>
               </a:spcAft>
             </a:pPr>
             <a:r>
-              <a:rPr sz="1300">
+              <a:rPr sz="900">
+                <a:solidFill>
+                  <a:srgbClr val="78808C"/>
+                </a:solidFill>
+                <a:latin typeface="Consolas"/>
+              </a:rPr>
+              <a:t/>
+            </a:r>
+            <a:r>
+              <a:rPr sz="1200" b="1">
                 <a:solidFill>
                   <a:srgbClr val="3D5466"/>
                 </a:solidFill>
                 <a:latin typeface="Arial"/>
               </a:rPr>
-              <a:t>▸  Dynamikwissen: Welche Veränderungskräfte treiben die Branche?</a:t>
+              <a:t>  Porter Demo + Übung</a:t>
+            </a:r>
+            <a:r>
+              <a:rPr sz="900">
+                <a:solidFill>
+                  <a:srgbClr val="78808C"/>
+                </a:solidFill>
+                <a:latin typeface="Arial"/>
+              </a:rPr>
+              <a:t>  ·  Kleingruppen</a:t>
             </a:r>
           </a:p>
           <a:p>
@@ -7565,17 +7770,26 @@
                 <a:spcPts val="400"/>
               </a:spcBef>
               <a:spcAft>
-                <a:spcPts val="200"/>
+                <a:spcPts val="100"/>
               </a:spcAft>
             </a:pPr>
             <a:r>
-              <a:rPr sz="1300">
+              <a:rPr sz="900">
+                <a:solidFill>
+                  <a:srgbClr val="78808C"/>
+                </a:solidFill>
+                <a:latin typeface="Consolas"/>
+              </a:rPr>
+              <a:t/>
+            </a:r>
+            <a:r>
+              <a:rPr sz="1200" b="1">
                 <a:solidFill>
                   <a:srgbClr val="3D5466"/>
                 </a:solidFill>
                 <a:latin typeface="Arial"/>
               </a:rPr>
-              <a:t>▸  Netzwerkwissen: Wer sind die relevanten Verbände, Meinungsführer, Schlüsselkunden?</a:t>
+              <a:t>  Pause</a:t>
             </a:r>
           </a:p>
           <a:p>
@@ -7584,36 +7798,35 @@
                 <a:spcPts val="400"/>
               </a:spcBef>
               <a:spcAft>
-                <a:spcPts val="200"/>
+                <a:spcPts val="100"/>
               </a:spcAft>
             </a:pPr>
             <a:r>
-              <a:rPr sz="1300">
+              <a:rPr sz="900">
+                <a:solidFill>
+                  <a:srgbClr val="78808C"/>
+                </a:solidFill>
+                <a:latin typeface="Consolas"/>
+              </a:rPr>
+              <a:t/>
+            </a:r>
+            <a:r>
+              <a:rPr sz="1200" b="1">
                 <a:solidFill>
                   <a:srgbClr val="3D5466"/>
                 </a:solidFill>
                 <a:latin typeface="Arial"/>
               </a:rPr>
-              <a:t>▸  Erfahrungswissen: Welche typischen Herausforderungen begegnen Unternehmern dieser Branche?</a:t>
-            </a:r>
-          </a:p>
-          <a:p>
-            <a:pPr>
-              <a:spcBef>
-                <a:spcPts val="600"/>
-              </a:spcBef>
-              <a:spcAft>
-                <a:spcPts val="200"/>
-              </a:spcAft>
-            </a:pPr>
-            <a:r>
-              <a:rPr sz="1200" i="1">
-                <a:solidFill>
-                  <a:srgbClr val="3D5466"/>
+              <a:t>  PESTEL-Übung</a:t>
+            </a:r>
+            <a:r>
+              <a:rPr sz="900">
+                <a:solidFill>
+                  <a:srgbClr val="78808C"/>
                 </a:solidFill>
                 <a:latin typeface="Arial"/>
               </a:rPr>
-              <a:t>→  „Der Experte weiß nicht mehr Fakten als der Novize – er sieht die Situation anders." (Dreyfus &amp; Dreyfus, 1986, S. 28)</a:t>
+              <a:t>  ·  Trainer-Vortrag + Partnerarbeit</a:t>
             </a:r>
           </a:p>
           <a:p>
@@ -7622,24 +7835,283 @@
                 <a:spcPts val="400"/>
               </a:spcBef>
               <a:spcAft>
-                <a:spcPts val="200"/>
+                <a:spcPts val="100"/>
               </a:spcAft>
             </a:pPr>
             <a:r>
-              <a:rPr sz="1200">
+              <a:rPr sz="900">
+                <a:solidFill>
+                  <a:srgbClr val="78808C"/>
+                </a:solidFill>
+                <a:latin typeface="Consolas"/>
+              </a:rPr>
+              <a:t/>
+            </a:r>
+            <a:r>
+              <a:rPr sz="1200" b="1">
                 <a:solidFill>
                   <a:srgbClr val="3D5466"/>
                 </a:solidFill>
                 <a:latin typeface="Arial"/>
               </a:rPr>
-              <a:t>## 4.2 Branchenanalyse: Porter's Five Forces und PESTEL</a:t>
-            </a:r>
-          </a:p>
-        </p:txBody>
-      </p:sp>
-      <p:sp>
-        <p:nvSpPr>
-          <p:cNvPr id="9" name="Rectangle 8"/>
+              <a:t>  Informationsquellen-Workshop</a:t>
+            </a:r>
+            <a:r>
+              <a:rPr sz="900">
+                <a:solidFill>
+                  <a:srgbClr val="78808C"/>
+                </a:solidFill>
+                <a:latin typeface="Arial"/>
+              </a:rPr>
+              <a:t>  ·  Gruppenarbeit: je 10 min Recherche, dann Vorstellung</a:t>
+            </a:r>
+          </a:p>
+          <a:p>
+            <a:pPr>
+              <a:spcBef>
+                <a:spcPts val="400"/>
+              </a:spcBef>
+              <a:spcAft>
+                <a:spcPts val="100"/>
+              </a:spcAft>
+            </a:pPr>
+            <a:r>
+              <a:rPr sz="900">
+                <a:solidFill>
+                  <a:srgbClr val="78808C"/>
+                </a:solidFill>
+                <a:latin typeface="Consolas"/>
+              </a:rPr>
+              <a:t/>
+            </a:r>
+            <a:r>
+              <a:rPr sz="1200" b="1">
+                <a:solidFill>
+                  <a:srgbClr val="3D5466"/>
+                </a:solidFill>
+                <a:latin typeface="Arial"/>
+              </a:rPr>
+              <a:t>  Mittagspause</a:t>
+            </a:r>
+          </a:p>
+          <a:p>
+            <a:pPr>
+              <a:spcBef>
+                <a:spcPts val="400"/>
+              </a:spcBef>
+              <a:spcAft>
+                <a:spcPts val="100"/>
+              </a:spcAft>
+            </a:pPr>
+            <a:r>
+              <a:rPr sz="900">
+                <a:solidFill>
+                  <a:srgbClr val="78808C"/>
+                </a:solidFill>
+                <a:latin typeface="Consolas"/>
+              </a:rPr>
+              <a:t/>
+            </a:r>
+            <a:r>
+              <a:rPr sz="1200" b="1">
+                <a:solidFill>
+                  <a:srgbClr val="3D5466"/>
+                </a:solidFill>
+                <a:latin typeface="Arial"/>
+              </a:rPr>
+              <a:t>  Netzwerkstrategie</a:t>
+            </a:r>
+            <a:r>
+              <a:rPr sz="900">
+                <a:solidFill>
+                  <a:srgbClr val="78808C"/>
+                </a:solidFill>
+                <a:latin typeface="Arial"/>
+              </a:rPr>
+              <a:t>  ·  Einzelarbeit + Plenumsdiskussion</a:t>
+            </a:r>
+          </a:p>
+          <a:p>
+            <a:pPr>
+              <a:spcBef>
+                <a:spcPts val="400"/>
+              </a:spcBef>
+              <a:spcAft>
+                <a:spcPts val="100"/>
+              </a:spcAft>
+            </a:pPr>
+            <a:r>
+              <a:rPr sz="900">
+                <a:solidFill>
+                  <a:srgbClr val="78808C"/>
+                </a:solidFill>
+                <a:latin typeface="Consolas"/>
+              </a:rPr>
+              <a:t/>
+            </a:r>
+            <a:r>
+              <a:rPr sz="1200" b="1">
+                <a:solidFill>
+                  <a:srgbClr val="3D5466"/>
+                </a:solidFill>
+                <a:latin typeface="Arial"/>
+              </a:rPr>
+              <a:t>  Branchenportfolio</a:t>
+            </a:r>
+            <a:r>
+              <a:rPr sz="900">
+                <a:solidFill>
+                  <a:srgbClr val="78808C"/>
+                </a:solidFill>
+                <a:latin typeface="Arial"/>
+              </a:rPr>
+              <a:t>  ·  Trainer-Vortrag (15 min) + Einzelarbeit (25 min)</a:t>
+            </a:r>
+          </a:p>
+          <a:p>
+            <a:pPr>
+              <a:spcBef>
+                <a:spcPts val="400"/>
+              </a:spcBef>
+              <a:spcAft>
+                <a:spcPts val="100"/>
+              </a:spcAft>
+            </a:pPr>
+            <a:r>
+              <a:rPr sz="900">
+                <a:solidFill>
+                  <a:srgbClr val="78808C"/>
+                </a:solidFill>
+                <a:latin typeface="Consolas"/>
+              </a:rPr>
+              <a:t/>
+            </a:r>
+            <a:r>
+              <a:rPr sz="1200" b="1">
+                <a:solidFill>
+                  <a:srgbClr val="3D5466"/>
+                </a:solidFill>
+                <a:latin typeface="Arial"/>
+              </a:rPr>
+              <a:t>  Pause</a:t>
+            </a:r>
+          </a:p>
+          <a:p>
+            <a:pPr>
+              <a:spcBef>
+                <a:spcPts val="400"/>
+              </a:spcBef>
+              <a:spcAft>
+                <a:spcPts val="100"/>
+              </a:spcAft>
+            </a:pPr>
+            <a:r>
+              <a:rPr sz="900">
+                <a:solidFill>
+                  <a:srgbClr val="78808C"/>
+                </a:solidFill>
+                <a:latin typeface="Consolas"/>
+              </a:rPr>
+              <a:t/>
+            </a:r>
+            <a:r>
+              <a:rPr sz="1200" b="1">
+                <a:solidFill>
+                  <a:srgbClr val="3D5466"/>
+                </a:solidFill>
+                <a:latin typeface="Arial"/>
+              </a:rPr>
+              <a:t>  Persönlicher 3-Monats-Plan</a:t>
+            </a:r>
+            <a:r>
+              <a:rPr sz="900">
+                <a:solidFill>
+                  <a:srgbClr val="78808C"/>
+                </a:solidFill>
+                <a:latin typeface="Arial"/>
+              </a:rPr>
+              <a:t>  ·  Einzelarbeit (40 min); Peer-Review in Tandems (30 min)</a:t>
+            </a:r>
+          </a:p>
+          <a:p>
+            <a:pPr>
+              <a:spcBef>
+                <a:spcPts val="400"/>
+              </a:spcBef>
+              <a:spcAft>
+                <a:spcPts val="100"/>
+              </a:spcAft>
+            </a:pPr>
+            <a:r>
+              <a:rPr sz="900">
+                <a:solidFill>
+                  <a:srgbClr val="78808C"/>
+                </a:solidFill>
+                <a:latin typeface="Consolas"/>
+              </a:rPr>
+              <a:t/>
+            </a:r>
+            <a:r>
+              <a:rPr sz="1200" b="1">
+                <a:solidFill>
+                  <a:srgbClr val="3D5466"/>
+                </a:solidFill>
+                <a:latin typeface="Arial"/>
+              </a:rPr>
+              <a:t>  Monatsrunden-Planung</a:t>
+            </a:r>
+            <a:r>
+              <a:rPr sz="900">
+                <a:solidFill>
+                  <a:srgbClr val="78808C"/>
+                </a:solidFill>
+                <a:latin typeface="Arial"/>
+              </a:rPr>
+              <a:t>  ·  Plenum</a:t>
+            </a:r>
+          </a:p>
+          <a:p>
+            <a:pPr>
+              <a:spcBef>
+                <a:spcPts val="400"/>
+              </a:spcBef>
+              <a:spcAft>
+                <a:spcPts val="100"/>
+              </a:spcAft>
+            </a:pPr>
+            <a:r>
+              <a:rPr sz="900">
+                <a:solidFill>
+                  <a:srgbClr val="78808C"/>
+                </a:solidFill>
+                <a:latin typeface="Consolas"/>
+              </a:rPr>
+              <a:t/>
+            </a:r>
+            <a:r>
+              <a:rPr sz="1200" b="1">
+                <a:solidFill>
+                  <a:srgbClr val="3D5466"/>
+                </a:solidFill>
+                <a:latin typeface="Arial"/>
+              </a:rPr>
+              <a:t>  Verabschiedung</a:t>
+            </a:r>
+            <a:r>
+              <a:rPr sz="900">
+                <a:solidFill>
+                  <a:srgbClr val="78808C"/>
+                </a:solidFill>
+                <a:latin typeface="Arial"/>
+              </a:rPr>
+              <a:t>  ·  Plenum</a:t>
+            </a:r>
+          </a:p>
+        </p:txBody>
+      </p:sp>
+      <p:sp>
+        <p:nvSpPr>
+          <p:cNvPr id="8" name="Rectangle 7"/>
           <p:cNvSpPr/>
           <p:nvPr/>
         </p:nvSpPr>
@@ -7682,7 +8154,7 @@
       </p:sp>
       <p:sp>
         <p:nvSpPr>
-          <p:cNvPr id="10" name="TextBox 9"/>
+          <p:cNvPr id="9" name="TextBox 8"/>
           <p:cNvSpPr txBox="1"/>
           <p:nvPr/>
         </p:nvSpPr>
@@ -7970,14 +8442,170 @@
                 </a:solidFill>
                 <a:latin typeface="Source Serif 4"/>
               </a:rPr>
-              <a:t>Porter's Five Forces</a:t>
-            </a:r>
-          </a:p>
-        </p:txBody>
-      </p:sp>
-      <p:sp>
-        <p:nvSpPr>
-          <p:cNvPr id="8" name="Rectangle 7"/>
+              <a:t>Was unterscheidet den Branchenexperten?</a:t>
+            </a:r>
+          </a:p>
+        </p:txBody>
+      </p:sp>
+      <p:sp>
+        <p:nvSpPr>
+          <p:cNvPr id="8" name="TextBox 7"/>
+          <p:cNvSpPr txBox="1"/>
+          <p:nvPr/>
+        </p:nvSpPr>
+        <p:spPr>
+          <a:xfrm>
+            <a:off x="685800" y="1417320"/>
+            <a:ext cx="10817352" cy="5029200"/>
+          </a:xfrm>
+          <a:prstGeom prst="rect">
+            <a:avLst/>
+          </a:prstGeom>
+          <a:noFill/>
+        </p:spPr>
+        <p:txBody>
+          <a:bodyPr wrap="square">
+            <a:spAutoFit/>
+          </a:bodyPr>
+          <a:lstStyle/>
+          <a:p>
+            <a:pPr>
+              <a:spcBef>
+                <a:spcPts val="400"/>
+              </a:spcBef>
+              <a:spcAft>
+                <a:spcPts val="200"/>
+              </a:spcAft>
+            </a:pPr>
+            <a:r>
+              <a:rPr sz="1300">
+                <a:solidFill>
+                  <a:srgbClr val="3D5466"/>
+                </a:solidFill>
+                <a:latin typeface="Arial"/>
+              </a:rPr>
+              <a:t>▸  Branchenexpertise bedeutet mehr als das Kennen von Kennziffern. Sie umfasst:</a:t>
+            </a:r>
+          </a:p>
+          <a:p>
+            <a:pPr>
+              <a:spcBef>
+                <a:spcPts val="400"/>
+              </a:spcBef>
+              <a:spcAft>
+                <a:spcPts val="200"/>
+              </a:spcAft>
+            </a:pPr>
+            <a:r>
+              <a:rPr sz="1300">
+                <a:solidFill>
+                  <a:srgbClr val="3D5466"/>
+                </a:solidFill>
+                <a:latin typeface="Arial"/>
+              </a:rPr>
+              <a:t>▸  Strukturwissen: Wie ist die Branche aufgebaut? Welche Wertschöpfungsstufen gibt es?</a:t>
+            </a:r>
+          </a:p>
+          <a:p>
+            <a:pPr>
+              <a:spcBef>
+                <a:spcPts val="400"/>
+              </a:spcBef>
+              <a:spcAft>
+                <a:spcPts val="200"/>
+              </a:spcAft>
+            </a:pPr>
+            <a:r>
+              <a:rPr sz="1300">
+                <a:solidFill>
+                  <a:srgbClr val="3D5466"/>
+                </a:solidFill>
+                <a:latin typeface="Arial"/>
+              </a:rPr>
+              <a:t>▸  Dynamikwissen: Welche Veränderungskräfte treiben die Branche?</a:t>
+            </a:r>
+          </a:p>
+          <a:p>
+            <a:pPr>
+              <a:spcBef>
+                <a:spcPts val="400"/>
+              </a:spcBef>
+              <a:spcAft>
+                <a:spcPts val="200"/>
+              </a:spcAft>
+            </a:pPr>
+            <a:r>
+              <a:rPr sz="1300">
+                <a:solidFill>
+                  <a:srgbClr val="3D5466"/>
+                </a:solidFill>
+                <a:latin typeface="Arial"/>
+              </a:rPr>
+              <a:t>▸  Netzwerkwissen: Wer sind die relevanten Verbände, Meinungsführer, Schlüsselkunden?</a:t>
+            </a:r>
+          </a:p>
+          <a:p>
+            <a:pPr>
+              <a:spcBef>
+                <a:spcPts val="400"/>
+              </a:spcBef>
+              <a:spcAft>
+                <a:spcPts val="200"/>
+              </a:spcAft>
+            </a:pPr>
+            <a:r>
+              <a:rPr sz="1300">
+                <a:solidFill>
+                  <a:srgbClr val="3D5466"/>
+                </a:solidFill>
+                <a:latin typeface="Arial"/>
+              </a:rPr>
+              <a:t>▸  Erfahrungswissen: Welche typischen Herausforderungen begegnen Unternehmern dieser Branche?</a:t>
+            </a:r>
+          </a:p>
+          <a:p>
+            <a:pPr>
+              <a:spcBef>
+                <a:spcPts val="600"/>
+              </a:spcBef>
+              <a:spcAft>
+                <a:spcPts val="200"/>
+              </a:spcAft>
+            </a:pPr>
+            <a:r>
+              <a:rPr sz="1200" i="1">
+                <a:solidFill>
+                  <a:srgbClr val="3D5466"/>
+                </a:solidFill>
+                <a:latin typeface="Arial"/>
+              </a:rPr>
+              <a:t>→  „Der Experte weiß nicht mehr Fakten als der Novize – er sieht die Situation anders." (Dreyfus &amp; Dreyfus, 1986, S. 28)</a:t>
+            </a:r>
+          </a:p>
+          <a:p>
+            <a:pPr>
+              <a:spcBef>
+                <a:spcPts val="400"/>
+              </a:spcBef>
+              <a:spcAft>
+                <a:spcPts val="200"/>
+              </a:spcAft>
+            </a:pPr>
+            <a:r>
+              <a:rPr sz="1300">
+                <a:solidFill>
+                  <a:srgbClr val="3D5466"/>
+                </a:solidFill>
+                <a:latin typeface="Arial"/>
+              </a:rPr>
+              <a:t>▸  ## 4.2 Branchenanalyse: Porter's Five Forces und PESTEL</a:t>
+            </a:r>
+          </a:p>
+        </p:txBody>
+      </p:sp>
+      <p:sp>
+        <p:nvSpPr>
+          <p:cNvPr id="9" name="Rectangle 8"/>
           <p:cNvSpPr/>
           <p:nvPr/>
         </p:nvSpPr>
@@ -8020,7 +8648,7 @@
       </p:sp>
       <p:sp>
         <p:nvSpPr>
-          <p:cNvPr id="9" name="TextBox 8"/>
+          <p:cNvPr id="10" name="TextBox 9"/>
           <p:cNvSpPr txBox="1"/>
           <p:nvPr/>
         </p:nvSpPr>
@@ -8344,13 +8972,13 @@
               </a:spcAft>
             </a:pPr>
             <a:r>
-              <a:rPr sz="1200">
+              <a:rPr sz="1300">
                 <a:solidFill>
                   <a:srgbClr val="3D5466"/>
                 </a:solidFill>
                 <a:latin typeface="Arial"/>
               </a:rPr>
-              <a:t>Die PESTEL-Analyse ergänzt das Five-Forces-Modell um das makroökonomische Umfeld:</a:t>
+              <a:t>▸  Die PESTEL-Analyse ergänzt das Five-Forces-Modell um das makroökonomische Umfeld:</a:t>
             </a:r>
           </a:p>
         </p:txBody>
@@ -9042,14 +9670,265 @@
                 </a:solidFill>
                 <a:latin typeface="Source Serif 4"/>
               </a:rPr>
-              <a:t>Kombination im Kundengespräch</a:t>
-            </a:r>
-          </a:p>
-        </p:txBody>
-      </p:sp>
-      <p:sp>
-        <p:nvSpPr>
-          <p:cNvPr id="8" name="Rectangle 7"/>
+              <a:t>Wissensarbeit transparent machen – Gespräche in der Lernphase</a:t>
+            </a:r>
+          </a:p>
+        </p:txBody>
+      </p:sp>
+      <p:sp>
+        <p:nvSpPr>
+          <p:cNvPr id="8" name="TextBox 7"/>
+          <p:cNvSpPr txBox="1"/>
+          <p:nvPr/>
+        </p:nvSpPr>
+        <p:spPr>
+          <a:xfrm>
+            <a:off x="685800" y="1417320"/>
+            <a:ext cx="10817352" cy="5029200"/>
+          </a:xfrm>
+          <a:prstGeom prst="rect">
+            <a:avLst/>
+          </a:prstGeom>
+          <a:noFill/>
+        </p:spPr>
+        <p:txBody>
+          <a:bodyPr wrap="square">
+            <a:spAutoFit/>
+          </a:bodyPr>
+          <a:lstStyle/>
+          <a:p>
+            <a:pPr>
+              <a:spcBef>
+                <a:spcPts val="400"/>
+              </a:spcBef>
+              <a:spcAft>
+                <a:spcPts val="200"/>
+              </a:spcAft>
+            </a:pPr>
+            <a:r>
+              <a:rPr sz="1300">
+                <a:solidFill>
+                  <a:srgbClr val="3D5466"/>
+                </a:solidFill>
+                <a:latin typeface="Arial"/>
+              </a:rPr>
+              <a:t>▸  Formulierungen, die funktionieren:</a:t>
+            </a:r>
+          </a:p>
+          <a:p>
+            <a:pPr>
+              <a:spcBef>
+                <a:spcPts val="600"/>
+              </a:spcBef>
+              <a:spcAft>
+                <a:spcPts val="200"/>
+              </a:spcAft>
+            </a:pPr>
+            <a:r>
+              <a:rPr sz="1200" i="1">
+                <a:solidFill>
+                  <a:srgbClr val="3D5466"/>
+                </a:solidFill>
+                <a:latin typeface="Arial"/>
+              </a:rPr>
+              <a:t>→  „Ich bin gerade dabei, mein Wissen über Ihre Branche systematisch auszubauen – ich lerne am meisten von meinen Kunden. Was sollte jeder Bankmitarbeiter über Ihr Geschäft wissen?"</a:t>
+            </a:r>
+          </a:p>
+          <a:p>
+            <a:pPr>
+              <a:spcBef>
+                <a:spcPts val="600"/>
+              </a:spcBef>
+              <a:spcAft>
+                <a:spcPts val="200"/>
+              </a:spcAft>
+            </a:pPr>
+            <a:r>
+              <a:rPr sz="1200" i="1">
+                <a:solidFill>
+                  <a:srgbClr val="3D5466"/>
+                </a:solidFill>
+                <a:latin typeface="Arial"/>
+              </a:rPr>
+              <a:t>→  „Ich habe mit dem DZ BANK Agrar-Spezialisten gesprochen – der hat mir [Thema] erklärt. Das war neu für mich. Stimmt das mit Ihrer Erfahrung überein?"</a:t>
+            </a:r>
+          </a:p>
+          <a:p>
+            <a:pPr>
+              <a:spcBef>
+                <a:spcPts val="400"/>
+              </a:spcBef>
+              <a:spcAft>
+                <a:spcPts val="200"/>
+              </a:spcAft>
+            </a:pPr>
+            <a:r>
+              <a:rPr sz="1300">
+                <a:solidFill>
+                  <a:srgbClr val="3D5466"/>
+                </a:solidFill>
+                <a:latin typeface="Arial"/>
+              </a:rPr>
+              <a:t>▸  Was vermeiden:</a:t>
+            </a:r>
+          </a:p>
+          <a:p>
+            <a:pPr>
+              <a:spcBef>
+                <a:spcPts val="400"/>
+              </a:spcBef>
+              <a:spcAft>
+                <a:spcPts val="200"/>
+              </a:spcAft>
+            </a:pPr>
+            <a:r>
+              <a:rPr sz="1300">
+                <a:solidFill>
+                  <a:srgbClr val="3D5466"/>
+                </a:solidFill>
+                <a:latin typeface="Arial"/>
+              </a:rPr>
+              <a:t>▸  Nicht sagen: „Ich kenne mich in Ihrer Branche noch nicht so gut aus." (schafft Unsicherheit)</a:t>
+            </a:r>
+          </a:p>
+          <a:p>
+            <a:pPr>
+              <a:spcBef>
+                <a:spcPts val="400"/>
+              </a:spcBef>
+              <a:spcAft>
+                <a:spcPts val="200"/>
+              </a:spcAft>
+            </a:pPr>
+            <a:r>
+              <a:rPr sz="1300">
+                <a:solidFill>
+                  <a:srgbClr val="3D5466"/>
+                </a:solidFill>
+                <a:latin typeface="Arial"/>
+              </a:rPr>
+              <a:t>▸  Nicht sagen: „Ich bin kein Branchenexperte, aber..." (unnötige Selbstabwertung)</a:t>
+            </a:r>
+          </a:p>
+          <a:p>
+            <a:pPr>
+              <a:spcBef>
+                <a:spcPts val="400"/>
+              </a:spcBef>
+              <a:spcAft>
+                <a:spcPts val="200"/>
+              </a:spcAft>
+            </a:pPr>
+            <a:r>
+              <a:rPr sz="1300">
+                <a:solidFill>
+                  <a:srgbClr val="3D5466"/>
+                </a:solidFill>
+                <a:latin typeface="Arial"/>
+              </a:rPr>
+              <a:t>▸  Nicht so tun, als ob man alles weiß (Kunden merken es sofort)</a:t>
+            </a:r>
+          </a:p>
+          <a:p>
+            <a:pPr>
+              <a:spcBef>
+                <a:spcPts val="400"/>
+              </a:spcBef>
+              <a:spcAft>
+                <a:spcPts val="200"/>
+              </a:spcAft>
+            </a:pPr>
+            <a:r>
+              <a:rPr sz="1300">
+                <a:solidFill>
+                  <a:srgbClr val="3D5466"/>
+                </a:solidFill>
+                <a:latin typeface="Arial"/>
+              </a:rPr>
+              <a:t>▸  Die Grundregel: Interesse + konkrete Vorbereitung + echtes Zuhören ersetzen fehlende Expertise – zumindest in den ersten Gesprächen. Expertise entsteht dann im Dialog.</a:t>
+            </a:r>
+          </a:p>
+          <a:p>
+            <a:pPr>
+              <a:spcBef>
+                <a:spcPts val="400"/>
+              </a:spcBef>
+              <a:spcAft>
+                <a:spcPts val="200"/>
+              </a:spcAft>
+            </a:pPr>
+            <a:r>
+              <a:rPr sz="1300">
+                <a:solidFill>
+                  <a:srgbClr val="3D5466"/>
+                </a:solidFill>
+                <a:latin typeface="Arial"/>
+              </a:rPr>
+              <a:t>▸  ## 4.3 Informationsquellen für Branchenexpertise</a:t>
+            </a:r>
+          </a:p>
+          <a:p>
+            <a:pPr>
+              <a:spcBef>
+                <a:spcPts val="400"/>
+              </a:spcBef>
+              <a:spcAft>
+                <a:spcPts val="200"/>
+              </a:spcAft>
+            </a:pPr>
+            <a:r>
+              <a:rPr sz="1300">
+                <a:solidFill>
+                  <a:srgbClr val="3D5466"/>
+                </a:solidFill>
+                <a:latin typeface="Arial"/>
+              </a:rPr>
+              <a:t>▸  Systematische Branchenexpertise entsteht aus dem Zusammenspiel verschiedener Quellen. Die folgende Matrix hilft bei der Auswahl:</a:t>
+            </a:r>
+          </a:p>
+          <a:p>
+            <a:pPr>
+              <a:spcBef>
+                <a:spcPts val="400"/>
+              </a:spcBef>
+              <a:spcAft>
+                <a:spcPts val="200"/>
+              </a:spcAft>
+            </a:pPr>
+            <a:r>
+              <a:rPr sz="1300">
+                <a:solidFill>
+                  <a:srgbClr val="3D5466"/>
+                </a:solidFill>
+                <a:latin typeface="Arial"/>
+              </a:rPr>
+              <a:t>▸  Empfohlene Priorisierung für den Start: Branchenverband (Jahresbericht), DZ BANK Research (sofern verfügbar), IHK-Konjunkturbericht, 3–5 Kundengespräche mit Fokus auf Branchentrends.</a:t>
+            </a:r>
+          </a:p>
+          <a:p>
+            <a:pPr>
+              <a:spcBef>
+                <a:spcPts val="400"/>
+              </a:spcBef>
+              <a:spcAft>
+                <a:spcPts val="200"/>
+              </a:spcAft>
+            </a:pPr>
+            <a:r>
+              <a:rPr sz="1300">
+                <a:solidFill>
+                  <a:srgbClr val="3D5466"/>
+                </a:solidFill>
+                <a:latin typeface="Arial"/>
+              </a:rPr>
+              <a:t>▸  ## 4.4 Expertennetzwerk aufbauen</a:t>
+            </a:r>
+          </a:p>
+        </p:txBody>
+      </p:sp>
+      <p:sp>
+        <p:nvSpPr>
+          <p:cNvPr id="9" name="Rectangle 8"/>
           <p:cNvSpPr/>
           <p:nvPr/>
         </p:nvSpPr>
@@ -9092,7 +9971,7 @@
       </p:sp>
       <p:sp>
         <p:nvSpPr>
-          <p:cNvPr id="9" name="TextBox 8"/>
+          <p:cNvPr id="10" name="TextBox 9"/>
           <p:cNvSpPr txBox="1"/>
           <p:nvPr/>
         </p:nvSpPr>
@@ -9380,14 +10259,75 @@
                 </a:solidFill>
                 <a:latin typeface="Source Serif 4"/>
               </a:rPr>
-              <a:t>Einstiegsfragen für Branchenanfänger</a:t>
-            </a:r>
-          </a:p>
-        </p:txBody>
-      </p:sp>
-      <p:sp>
-        <p:nvSpPr>
-          <p:cNvPr id="8" name="Rectangle 7"/>
+              <a:t>Arbeitsblatt A: Branchenanalyse – Five Forces Scoring</a:t>
+            </a:r>
+          </a:p>
+        </p:txBody>
+      </p:sp>
+      <p:sp>
+        <p:nvSpPr>
+          <p:cNvPr id="8" name="TextBox 7"/>
+          <p:cNvSpPr txBox="1"/>
+          <p:nvPr/>
+        </p:nvSpPr>
+        <p:spPr>
+          <a:xfrm>
+            <a:off x="685800" y="1417320"/>
+            <a:ext cx="10817352" cy="5029200"/>
+          </a:xfrm>
+          <a:prstGeom prst="rect">
+            <a:avLst/>
+          </a:prstGeom>
+          <a:noFill/>
+        </p:spPr>
+        <p:txBody>
+          <a:bodyPr wrap="square">
+            <a:spAutoFit/>
+          </a:bodyPr>
+          <a:lstStyle/>
+          <a:p>
+            <a:pPr>
+              <a:spcBef>
+                <a:spcPts val="400"/>
+              </a:spcBef>
+              <a:spcAft>
+                <a:spcPts val="200"/>
+              </a:spcAft>
+            </a:pPr>
+            <a:r>
+              <a:rPr sz="1300">
+                <a:solidFill>
+                  <a:srgbClr val="3D5466"/>
+                </a:solidFill>
+                <a:latin typeface="Arial"/>
+              </a:rPr>
+              <a:t>▸  Bewertungslogik: 1 = schwach / kaum relevant · 5 = stark / hochrelevant</a:t>
+            </a:r>
+          </a:p>
+          <a:p>
+            <a:pPr>
+              <a:spcBef>
+                <a:spcPts val="400"/>
+              </a:spcBef>
+              <a:spcAft>
+                <a:spcPts val="200"/>
+              </a:spcAft>
+            </a:pPr>
+            <a:r>
+              <a:rPr sz="1300">
+                <a:solidFill>
+                  <a:srgbClr val="3D5466"/>
+                </a:solidFill>
+                <a:latin typeface="Arial"/>
+              </a:rPr>
+              <a:t>▸  Wichtigste Erkenntnis aus dieser Analyse:</a:t>
+            </a:r>
+          </a:p>
+        </p:txBody>
+      </p:sp>
+      <p:sp>
+        <p:nvSpPr>
+          <p:cNvPr id="9" name="Rectangle 8"/>
           <p:cNvSpPr/>
           <p:nvPr/>
         </p:nvSpPr>
@@ -9430,7 +10370,7 @@
       </p:sp>
       <p:sp>
         <p:nvSpPr>
-          <p:cNvPr id="9" name="TextBox 8"/>
+          <p:cNvPr id="10" name="TextBox 9"/>
           <p:cNvSpPr txBox="1"/>
           <p:nvPr/>
         </p:nvSpPr>

--- a/protected-downloads/praesentation/M09.pptx
+++ b/protected-downloads/praesentation/M09.pptx
@@ -4457,7 +4457,7 @@
                 </a:solidFill>
                 <a:latin typeface="JetBrains Mono"/>
               </a:rPr>
-              <a:t>Benedikt Zoller Coaching  ·  FKB Campus  ·  2026</a:t>
+              <a:t>FKB Campus  ·  2026</a:t>
             </a:r>
           </a:p>
         </p:txBody>
@@ -5169,7 +5169,7 @@
                 </a:solidFill>
                 <a:latin typeface="JetBrains Mono"/>
               </a:rPr>
-              <a:t>Benedikt Zoller Coaching  ·  FKB Campus  ·  M09</a:t>
+              <a:t>FKB Campus  ·  M09</a:t>
             </a:r>
           </a:p>
         </p:txBody>
@@ -5584,7 +5584,7 @@
                 </a:solidFill>
                 <a:latin typeface="JetBrains Mono"/>
               </a:rPr>
-              <a:t>Benedikt Zoller Coaching  ·  FKB Campus  ·  M09</a:t>
+              <a:t>FKB Campus  ·  M09</a:t>
             </a:r>
           </a:p>
         </p:txBody>
@@ -6159,7 +6159,7 @@
                 </a:solidFill>
                 <a:latin typeface="JetBrains Mono"/>
               </a:rPr>
-              <a:t>Benedikt Zoller Coaching  ·  FKB Campus  ·  M09</a:t>
+              <a:t>FKB Campus  ·  M09</a:t>
             </a:r>
           </a:p>
         </p:txBody>
@@ -6612,7 +6612,7 @@
                 </a:solidFill>
                 <a:latin typeface="JetBrains Mono"/>
               </a:rPr>
-              <a:t>Benedikt Zoller Coaching  ·  FKB Campus  ·  M09</a:t>
+              <a:t>FKB Campus  ·  M09</a:t>
             </a:r>
           </a:p>
         </p:txBody>
@@ -6978,7 +6978,7 @@
                 </a:solidFill>
                 <a:latin typeface="JetBrains Mono"/>
               </a:rPr>
-              <a:t>Benedikt Zoller Coaching  ·  FKB Campus  ·  M09</a:t>
+              <a:t>FKB Campus  ·  M09</a:t>
             </a:r>
           </a:p>
         </p:txBody>
@@ -7410,7 +7410,7 @@
                 </a:solidFill>
                 <a:latin typeface="JetBrains Mono"/>
               </a:rPr>
-              <a:t>Benedikt Zoller Coaching  ·  FKB Campus  ·  M09</a:t>
+              <a:t>FKB Campus  ·  M09</a:t>
             </a:r>
           </a:p>
         </p:txBody>
@@ -8182,7 +8182,7 @@
                 </a:solidFill>
                 <a:latin typeface="JetBrains Mono"/>
               </a:rPr>
-              <a:t>Benedikt Zoller Coaching  ·  FKB Campus  ·  M09</a:t>
+              <a:t>FKB Campus  ·  M09</a:t>
             </a:r>
           </a:p>
         </p:txBody>
@@ -8676,7 +8676,7 @@
                 </a:solidFill>
                 <a:latin typeface="JetBrains Mono"/>
               </a:rPr>
-              <a:t>Benedikt Zoller Coaching  ·  FKB Campus  ·  M09</a:t>
+              <a:t>FKB Campus  ·  M09</a:t>
             </a:r>
           </a:p>
         </p:txBody>
@@ -9056,7 +9056,7 @@
                 </a:solidFill>
                 <a:latin typeface="JetBrains Mono"/>
               </a:rPr>
-              <a:t>Benedikt Zoller Coaching  ·  FKB Campus  ·  M09</a:t>
+              <a:t>FKB Campus  ·  M09</a:t>
             </a:r>
           </a:p>
         </p:txBody>
@@ -9375,7 +9375,7 @@
                 </a:solidFill>
                 <a:latin typeface="JetBrains Mono"/>
               </a:rPr>
-              <a:t>Benedikt Zoller Coaching  ·  FKB Campus  ·  M09</a:t>
+              <a:t>FKB Campus  ·  M09</a:t>
             </a:r>
           </a:p>
         </p:txBody>
@@ -9999,7 +9999,7 @@
                 </a:solidFill>
                 <a:latin typeface="JetBrains Mono"/>
               </a:rPr>
-              <a:t>Benedikt Zoller Coaching  ·  FKB Campus  ·  M09</a:t>
+              <a:t>FKB Campus  ·  M09</a:t>
             </a:r>
           </a:p>
         </p:txBody>
@@ -10398,7 +10398,7 @@
                 </a:solidFill>
                 <a:latin typeface="JetBrains Mono"/>
               </a:rPr>
-              <a:t>Benedikt Zoller Coaching  ·  FKB Campus  ·  M09</a:t>
+              <a:t>FKB Campus  ·  M09</a:t>
             </a:r>
           </a:p>
         </p:txBody>

--- a/protected-downloads/praesentation/M09.pptx
+++ b/protected-downloads/praesentation/M09.pptx
@@ -7761,7 +7761,7 @@
                 </a:solidFill>
                 <a:latin typeface="Arial"/>
               </a:rPr>
-              <a:t>  ·  Kleingruppen</a:t>
+              <a:t>  ·  Kleingruppen (nach Zielbranche)</a:t>
             </a:r>
           </a:p>
           <a:p>

--- a/protected-downloads/praesentation/M09.pptx
+++ b/protected-downloads/praesentation/M09.pptx
@@ -4379,7 +4379,7 @@
                 </a:solidFill>
                 <a:latin typeface="Arial"/>
               </a:rPr>
-              <a:t>v0.4</a:t>
+              <a:t>v1.0</a:t>
             </a:r>
           </a:p>
         </p:txBody>

--- a/protected-downloads/praesentation/M09.pptx
+++ b/protected-downloads/praesentation/M09.pptx
@@ -4666,7 +4666,7 @@
                 </a:solidFill>
                 <a:latin typeface="Source Serif 4"/>
               </a:rPr>
-              <a:t>Arbeitsblatt A: Branchenanalyse – Five Forces Scoring</a:t>
+              <a:t>AB-1: Branchenanalyse – Five Forces Scoring</a:t>
             </a:r>
           </a:p>
         </p:txBody>
@@ -5464,7 +5464,7 @@
                 </a:solidFill>
                 <a:latin typeface="Source Serif 4"/>
               </a:rPr>
-              <a:t>Arbeitsblatt B: Mein 3-Monats-Expertiseplan</a:t>
+              <a:t>AB-2: Mein 3-Monats-Expertiseplan</a:t>
             </a:r>
           </a:p>
         </p:txBody>
@@ -5758,7 +5758,7 @@
                 </a:solidFill>
                 <a:latin typeface="Source Serif 4"/>
               </a:rPr>
-              <a:t>Arbeitsblatt B: Mein 3-Monats-Expertiseplan</a:t>
+              <a:t>AB-2: Mein 3-Monats-Expertiseplan</a:t>
             </a:r>
           </a:p>
         </p:txBody>
@@ -6454,7 +6454,7 @@
                 </a:solidFill>
                 <a:latin typeface="Source Serif 4"/>
               </a:rPr>
-              <a:t>Arbeitsblatt C: Strukturiertes Branchengespräch – Protokollvorlage</a:t>
+              <a:t>AB-3: Strukturiertes Branchengespräch – Protokollvorlage</a:t>
             </a:r>
           </a:p>
         </p:txBody>
@@ -10259,7 +10259,7 @@
                 </a:solidFill>
                 <a:latin typeface="Source Serif 4"/>
               </a:rPr>
-              <a:t>Arbeitsblatt A: Branchenanalyse – Five Forces Scoring</a:t>
+              <a:t>AB-1: Branchenanalyse – Five Forces Scoring</a:t>
             </a:r>
           </a:p>
         </p:txBody>

--- a/protected-downloads/praesentation/M09.pptx
+++ b/protected-downloads/praesentation/M09.pptx
@@ -4054,7 +4054,7 @@
                 <a:solidFill>
                   <a:srgbClr val="C8D2E6"/>
                 </a:solidFill>
-                <a:latin typeface="JetBrains Mono"/>
+                <a:latin typeface="Consolas"/>
               </a:rPr>
               <a:t>FKB CAMPUS  ·  FIRMENKUNDENAKADEMIE  ·  M09</a:t>
             </a:r>
@@ -4089,7 +4089,7 @@
                 <a:solidFill>
                   <a:srgbClr val="FFFFFF"/>
                 </a:solidFill>
-                <a:latin typeface="Source Serif 4"/>
+                <a:latin typeface="Arial"/>
               </a:rPr>
               <a:t>Branchenexperte werden</a:t>
             </a:r>
@@ -4124,7 +4124,7 @@
                 <a:solidFill>
                   <a:srgbClr val="BECDE6"/>
                 </a:solidFill>
-                <a:latin typeface="Source Serif 4"/>
+                <a:latin typeface="Arial"/>
               </a:rPr>
               <a:t>Systematischer Aufbau von Branchenexpertise im 3-Monats-Programm</a:t>
             </a:r>
@@ -4202,7 +4202,7 @@
                 <a:solidFill>
                   <a:srgbClr val="A0B4D2"/>
                 </a:solidFill>
-                <a:latin typeface="JetBrains Mono"/>
+                <a:latin typeface="Consolas"/>
               </a:rPr>
               <a:t>KOMPETENZFELD</a:t>
             </a:r>
@@ -4272,7 +4272,7 @@
                 <a:solidFill>
                   <a:srgbClr val="A0B4D2"/>
                 </a:solidFill>
-                <a:latin typeface="JetBrains Mono"/>
+                <a:latin typeface="Consolas"/>
               </a:rPr>
               <a:t>KOMPETENZSTUFE</a:t>
             </a:r>
@@ -4342,7 +4342,7 @@
                 <a:solidFill>
                   <a:srgbClr val="A0B4D2"/>
                 </a:solidFill>
-                <a:latin typeface="JetBrains Mono"/>
+                <a:latin typeface="Consolas"/>
               </a:rPr>
               <a:t>VERSION</a:t>
             </a:r>
@@ -4455,7 +4455,7 @@
                 <a:solidFill>
                   <a:srgbClr val="96A5BE"/>
                 </a:solidFill>
-                <a:latin typeface="JetBrains Mono"/>
+                <a:latin typeface="Consolas"/>
               </a:rPr>
               <a:t>FKB Campus  ·  2026</a:t>
             </a:r>
@@ -4490,7 +4490,7 @@
                 <a:solidFill>
                   <a:srgbClr val="96A5BE"/>
                 </a:solidFill>
-                <a:latin typeface="JetBrains Mono"/>
+                <a:latin typeface="Consolas"/>
               </a:rPr>
               <a:t>Trainer-Präsentation</a:t>
             </a:r>
@@ -4629,7 +4629,7 @@
                 <a:solidFill>
                   <a:srgbClr val="78808C"/>
                 </a:solidFill>
-                <a:latin typeface="JetBrains Mono"/>
+                <a:latin typeface="Consolas"/>
               </a:rPr>
               <a:t>M09  ·  ÜBERSICHT</a:t>
             </a:r>
@@ -4664,7 +4664,7 @@
                 <a:solidFill>
                   <a:srgbClr val="1F2C56"/>
                 </a:solidFill>
-                <a:latin typeface="Source Serif 4"/>
+                <a:latin typeface="Arial"/>
               </a:rPr>
               <a:t>AB-1: Branchenanalyse – Five Forces Scoring</a:t>
             </a:r>
@@ -5167,7 +5167,7 @@
                 <a:solidFill>
                   <a:srgbClr val="A0B4D2"/>
                 </a:solidFill>
-                <a:latin typeface="JetBrains Mono"/>
+                <a:latin typeface="Consolas"/>
               </a:rPr>
               <a:t>FKB Campus  ·  M09</a:t>
             </a:r>
@@ -5202,7 +5202,7 @@
                 <a:solidFill>
                   <a:srgbClr val="A0B4D2"/>
                 </a:solidFill>
-                <a:latin typeface="JetBrains Mono"/>
+                <a:latin typeface="Consolas"/>
               </a:rPr>
               <a:t>Übersicht</a:t>
             </a:r>
@@ -5341,7 +5341,7 @@
                 <a:solidFill>
                   <a:srgbClr val="78808C"/>
                 </a:solidFill>
-                <a:latin typeface="JetBrains Mono"/>
+                <a:latin typeface="Consolas"/>
               </a:rPr>
               <a:t>M09  ·  INHALT</a:t>
             </a:r>
@@ -5462,7 +5462,7 @@
                 <a:solidFill>
                   <a:srgbClr val="1F2C56"/>
                 </a:solidFill>
-                <a:latin typeface="Source Serif 4"/>
+                <a:latin typeface="Arial"/>
               </a:rPr>
               <a:t>AB-2: Mein 3-Monats-Expertiseplan</a:t>
             </a:r>
@@ -5478,7 +5478,7 @@
         <p:spPr>
           <a:xfrm>
             <a:off x="685800" y="1417320"/>
-            <a:ext cx="10817352" cy="5029200"/>
+            <a:ext cx="10817352" cy="4892040"/>
           </a:xfrm>
           <a:prstGeom prst="rect">
             <a:avLst/>
@@ -5486,12 +5486,12 @@
           <a:noFill/>
         </p:spPr>
         <p:txBody>
-          <a:bodyPr wrap="square">
+          <a:bodyPr wrap="square" anchor="ctr">
             <a:spAutoFit/>
           </a:bodyPr>
           <a:lstStyle/>
           <a:p>
-            <a:pPr>
+            <a:pPr marL="190500" indent="-190500">
               <a:spcBef>
                 <a:spcPts val="400"/>
               </a:spcBef>
@@ -5582,7 +5582,7 @@
                 <a:solidFill>
                   <a:srgbClr val="A0B4D2"/>
                 </a:solidFill>
-                <a:latin typeface="JetBrains Mono"/>
+                <a:latin typeface="Consolas"/>
               </a:rPr>
               <a:t>FKB Campus  ·  M09</a:t>
             </a:r>
@@ -5721,7 +5721,7 @@
                 <a:solidFill>
                   <a:srgbClr val="78808C"/>
                 </a:solidFill>
-                <a:latin typeface="JetBrains Mono"/>
+                <a:latin typeface="Consolas"/>
               </a:rPr>
               <a:t>M09  ·  ÜBERSICHT</a:t>
             </a:r>
@@ -5756,7 +5756,7 @@
                 <a:solidFill>
                   <a:srgbClr val="1F2C56"/>
                 </a:solidFill>
-                <a:latin typeface="Source Serif 4"/>
+                <a:latin typeface="Arial"/>
               </a:rPr>
               <a:t>AB-2: Mein 3-Monats-Expertiseplan</a:t>
             </a:r>
@@ -6157,7 +6157,7 @@
                 <a:solidFill>
                   <a:srgbClr val="A0B4D2"/>
                 </a:solidFill>
-                <a:latin typeface="JetBrains Mono"/>
+                <a:latin typeface="Consolas"/>
               </a:rPr>
               <a:t>FKB Campus  ·  M09</a:t>
             </a:r>
@@ -6192,7 +6192,7 @@
                 <a:solidFill>
                   <a:srgbClr val="A0B4D2"/>
                 </a:solidFill>
-                <a:latin typeface="JetBrains Mono"/>
+                <a:latin typeface="Consolas"/>
               </a:rPr>
               <a:t>Übersicht</a:t>
             </a:r>
@@ -6331,7 +6331,7 @@
                 <a:solidFill>
                   <a:srgbClr val="78808C"/>
                 </a:solidFill>
-                <a:latin typeface="JetBrains Mono"/>
+                <a:latin typeface="Consolas"/>
               </a:rPr>
               <a:t>M09  ·  INHALT</a:t>
             </a:r>
@@ -6452,7 +6452,7 @@
                 <a:solidFill>
                   <a:srgbClr val="1F2C56"/>
                 </a:solidFill>
-                <a:latin typeface="Source Serif 4"/>
+                <a:latin typeface="Arial"/>
               </a:rPr>
               <a:t>AB-3: Strukturiertes Branchengespräch – Protokollvorlage</a:t>
             </a:r>
@@ -6468,7 +6468,7 @@
         <p:spPr>
           <a:xfrm>
             <a:off x="685800" y="1417320"/>
-            <a:ext cx="10817352" cy="5029200"/>
+            <a:ext cx="10817352" cy="4892040"/>
           </a:xfrm>
           <a:prstGeom prst="rect">
             <a:avLst/>
@@ -6476,12 +6476,12 @@
           <a:noFill/>
         </p:spPr>
         <p:txBody>
-          <a:bodyPr wrap="square">
+          <a:bodyPr wrap="square" anchor="ctr">
             <a:spAutoFit/>
           </a:bodyPr>
           <a:lstStyle/>
           <a:p>
-            <a:pPr>
+            <a:pPr marL="190500" indent="-190500">
               <a:spcBef>
                 <a:spcPts val="400"/>
               </a:spcBef>
@@ -6500,7 +6500,7 @@
             </a:r>
           </a:p>
           <a:p>
-            <a:pPr>
+            <a:pPr marL="177800" indent="-177800">
               <a:spcBef>
                 <a:spcPts val="600"/>
               </a:spcBef>
@@ -6519,7 +6519,7 @@
             </a:r>
           </a:p>
           <a:p>
-            <a:pPr>
+            <a:pPr marL="177800" indent="-177800">
               <a:spcBef>
                 <a:spcPts val="600"/>
               </a:spcBef>
@@ -6610,7 +6610,7 @@
                 <a:solidFill>
                   <a:srgbClr val="A0B4D2"/>
                 </a:solidFill>
-                <a:latin typeface="JetBrains Mono"/>
+                <a:latin typeface="Consolas"/>
               </a:rPr>
               <a:t>FKB Campus  ·  M09</a:t>
             </a:r>
@@ -6749,7 +6749,7 @@
                 <a:solidFill>
                   <a:srgbClr val="78808C"/>
                 </a:solidFill>
-                <a:latin typeface="JetBrains Mono"/>
+                <a:latin typeface="Consolas"/>
               </a:rPr>
               <a:t>ÜBERBLICK  ·  M09</a:t>
             </a:r>
@@ -6827,7 +6827,7 @@
                 <a:solidFill>
                   <a:srgbClr val="1F2C56"/>
                 </a:solidFill>
-                <a:latin typeface="Source Serif 4"/>
+                <a:latin typeface="Arial"/>
               </a:rPr>
               <a:t>Worum geht es heute</a:t>
             </a:r>
@@ -6976,7 +6976,7 @@
                 <a:solidFill>
                   <a:srgbClr val="A0B4D2"/>
                 </a:solidFill>
-                <a:latin typeface="JetBrains Mono"/>
+                <a:latin typeface="Consolas"/>
               </a:rPr>
               <a:t>FKB Campus  ·  M09</a:t>
             </a:r>
@@ -7115,7 +7115,7 @@
                 <a:solidFill>
                   <a:srgbClr val="78808C"/>
                 </a:solidFill>
-                <a:latin typeface="JetBrains Mono"/>
+                <a:latin typeface="Consolas"/>
               </a:rPr>
               <a:t>LERNZIELE  ·  M09</a:t>
             </a:r>
@@ -7193,7 +7193,7 @@
                 <a:solidFill>
                   <a:srgbClr val="1F2C56"/>
                 </a:solidFill>
-                <a:latin typeface="Source Serif 4"/>
+                <a:latin typeface="Arial"/>
               </a:rPr>
               <a:t>Was Sie heute mitnehmen</a:t>
             </a:r>
@@ -7408,7 +7408,7 @@
                 <a:solidFill>
                   <a:srgbClr val="A0B4D2"/>
                 </a:solidFill>
-                <a:latin typeface="JetBrains Mono"/>
+                <a:latin typeface="Consolas"/>
               </a:rPr>
               <a:t>FKB Campus  ·  M09</a:t>
             </a:r>
@@ -7547,7 +7547,7 @@
                 <a:solidFill>
                   <a:srgbClr val="78808C"/>
                 </a:solidFill>
-                <a:latin typeface="JetBrains Mono"/>
+                <a:latin typeface="Consolas"/>
               </a:rPr>
               <a:t>AGENDA  ·  M09</a:t>
             </a:r>
@@ -7625,7 +7625,7 @@
                 <a:solidFill>
                   <a:srgbClr val="1F2C56"/>
                 </a:solidFill>
-                <a:latin typeface="Source Serif 4"/>
+                <a:latin typeface="Arial"/>
               </a:rPr>
               <a:t>So läuft das Modul</a:t>
             </a:r>
@@ -8180,7 +8180,7 @@
                 <a:solidFill>
                   <a:srgbClr val="A0B4D2"/>
                 </a:solidFill>
-                <a:latin typeface="JetBrains Mono"/>
+                <a:latin typeface="Consolas"/>
               </a:rPr>
               <a:t>FKB Campus  ·  M09</a:t>
             </a:r>
@@ -8319,7 +8319,7 @@
                 <a:solidFill>
                   <a:srgbClr val="78808C"/>
                 </a:solidFill>
-                <a:latin typeface="JetBrains Mono"/>
+                <a:latin typeface="Consolas"/>
               </a:rPr>
               <a:t>M09  ·  INHALT</a:t>
             </a:r>
@@ -8440,7 +8440,7 @@
                 <a:solidFill>
                   <a:srgbClr val="1F2C56"/>
                 </a:solidFill>
-                <a:latin typeface="Source Serif 4"/>
+                <a:latin typeface="Arial"/>
               </a:rPr>
               <a:t>Was unterscheidet den Branchenexperten?</a:t>
             </a:r>
@@ -8456,7 +8456,7 @@
         <p:spPr>
           <a:xfrm>
             <a:off x="685800" y="1417320"/>
-            <a:ext cx="10817352" cy="5029200"/>
+            <a:ext cx="10817352" cy="4892040"/>
           </a:xfrm>
           <a:prstGeom prst="rect">
             <a:avLst/>
@@ -8469,7 +8469,7 @@
           </a:bodyPr>
           <a:lstStyle/>
           <a:p>
-            <a:pPr>
+            <a:pPr marL="190500" indent="-190500">
               <a:spcBef>
                 <a:spcPts val="400"/>
               </a:spcBef>
@@ -8488,7 +8488,7 @@
             </a:r>
           </a:p>
           <a:p>
-            <a:pPr>
+            <a:pPr marL="190500" indent="-190500">
               <a:spcBef>
                 <a:spcPts val="400"/>
               </a:spcBef>
@@ -8507,7 +8507,7 @@
             </a:r>
           </a:p>
           <a:p>
-            <a:pPr>
+            <a:pPr marL="190500" indent="-190500">
               <a:spcBef>
                 <a:spcPts val="400"/>
               </a:spcBef>
@@ -8526,7 +8526,7 @@
             </a:r>
           </a:p>
           <a:p>
-            <a:pPr>
+            <a:pPr marL="190500" indent="-190500">
               <a:spcBef>
                 <a:spcPts val="400"/>
               </a:spcBef>
@@ -8545,7 +8545,7 @@
             </a:r>
           </a:p>
           <a:p>
-            <a:pPr>
+            <a:pPr marL="190500" indent="-190500">
               <a:spcBef>
                 <a:spcPts val="400"/>
               </a:spcBef>
@@ -8564,7 +8564,7 @@
             </a:r>
           </a:p>
           <a:p>
-            <a:pPr>
+            <a:pPr marL="177800" indent="-177800">
               <a:spcBef>
                 <a:spcPts val="600"/>
               </a:spcBef>
@@ -8583,7 +8583,7 @@
             </a:r>
           </a:p>
           <a:p>
-            <a:pPr>
+            <a:pPr marL="190500" indent="-190500">
               <a:spcBef>
                 <a:spcPts val="400"/>
               </a:spcBef>
@@ -8674,7 +8674,7 @@
                 <a:solidFill>
                   <a:srgbClr val="A0B4D2"/>
                 </a:solidFill>
-                <a:latin typeface="JetBrains Mono"/>
+                <a:latin typeface="Consolas"/>
               </a:rPr>
               <a:t>FKB Campus  ·  M09</a:t>
             </a:r>
@@ -8813,7 +8813,7 @@
                 <a:solidFill>
                   <a:srgbClr val="78808C"/>
                 </a:solidFill>
-                <a:latin typeface="JetBrains Mono"/>
+                <a:latin typeface="Consolas"/>
               </a:rPr>
               <a:t>M09  ·  INHALT</a:t>
             </a:r>
@@ -8934,7 +8934,7 @@
                 <a:solidFill>
                   <a:srgbClr val="1F2C56"/>
                 </a:solidFill>
-                <a:latin typeface="Source Serif 4"/>
+                <a:latin typeface="Arial"/>
               </a:rPr>
               <a:t>PESTEL-Analyse</a:t>
             </a:r>
@@ -8950,7 +8950,7 @@
         <p:spPr>
           <a:xfrm>
             <a:off x="685800" y="1417320"/>
-            <a:ext cx="10817352" cy="5029200"/>
+            <a:ext cx="10817352" cy="4892040"/>
           </a:xfrm>
           <a:prstGeom prst="rect">
             <a:avLst/>
@@ -8958,12 +8958,12 @@
           <a:noFill/>
         </p:spPr>
         <p:txBody>
-          <a:bodyPr wrap="square">
+          <a:bodyPr wrap="square" anchor="ctr">
             <a:spAutoFit/>
           </a:bodyPr>
           <a:lstStyle/>
           <a:p>
-            <a:pPr>
+            <a:pPr marL="190500" indent="-190500">
               <a:spcBef>
                 <a:spcPts val="400"/>
               </a:spcBef>
@@ -9054,7 +9054,7 @@
                 <a:solidFill>
                   <a:srgbClr val="A0B4D2"/>
                 </a:solidFill>
-                <a:latin typeface="JetBrains Mono"/>
+                <a:latin typeface="Consolas"/>
               </a:rPr>
               <a:t>FKB Campus  ·  M09</a:t>
             </a:r>
@@ -9193,7 +9193,7 @@
                 <a:solidFill>
                   <a:srgbClr val="78808C"/>
                 </a:solidFill>
-                <a:latin typeface="JetBrains Mono"/>
+                <a:latin typeface="Consolas"/>
               </a:rPr>
               <a:t>M09  ·  SCHAUBILD</a:t>
             </a:r>
@@ -9228,7 +9228,7 @@
                 <a:solidFill>
                   <a:srgbClr val="1F2C56"/>
                 </a:solidFill>
-                <a:latin typeface="Source Serif 4"/>
+                <a:latin typeface="Arial"/>
               </a:rPr>
               <a:t>PESTEL-Analyse für die Bankpraxis</a:t>
             </a:r>
@@ -9373,7 +9373,7 @@
                 <a:solidFill>
                   <a:srgbClr val="A0B4D2"/>
                 </a:solidFill>
-                <a:latin typeface="JetBrains Mono"/>
+                <a:latin typeface="Consolas"/>
               </a:rPr>
               <a:t>FKB Campus  ·  M09</a:t>
             </a:r>
@@ -9408,7 +9408,7 @@
                 <a:solidFill>
                   <a:srgbClr val="A0B4D2"/>
                 </a:solidFill>
-                <a:latin typeface="JetBrains Mono"/>
+                <a:latin typeface="Consolas"/>
               </a:rPr>
               <a:t>Schaubild</a:t>
             </a:r>
@@ -9547,7 +9547,7 @@
                 <a:solidFill>
                   <a:srgbClr val="78808C"/>
                 </a:solidFill>
-                <a:latin typeface="JetBrains Mono"/>
+                <a:latin typeface="Consolas"/>
               </a:rPr>
               <a:t>M09  ·  INHALT</a:t>
             </a:r>
@@ -9668,7 +9668,7 @@
                 <a:solidFill>
                   <a:srgbClr val="1F2C56"/>
                 </a:solidFill>
-                <a:latin typeface="Source Serif 4"/>
+                <a:latin typeface="Arial"/>
               </a:rPr>
               <a:t>Wissensarbeit transparent machen – Gespräche in der Lernphase</a:t>
             </a:r>
@@ -9684,7 +9684,7 @@
         <p:spPr>
           <a:xfrm>
             <a:off x="685800" y="1417320"/>
-            <a:ext cx="10817352" cy="5029200"/>
+            <a:ext cx="10817352" cy="4892040"/>
           </a:xfrm>
           <a:prstGeom prst="rect">
             <a:avLst/>
@@ -9697,7 +9697,7 @@
           </a:bodyPr>
           <a:lstStyle/>
           <a:p>
-            <a:pPr>
+            <a:pPr marL="190500" indent="-190500">
               <a:spcBef>
                 <a:spcPts val="400"/>
               </a:spcBef>
@@ -9716,7 +9716,7 @@
             </a:r>
           </a:p>
           <a:p>
-            <a:pPr>
+            <a:pPr marL="177800" indent="-177800">
               <a:spcBef>
                 <a:spcPts val="600"/>
               </a:spcBef>
@@ -9735,7 +9735,7 @@
             </a:r>
           </a:p>
           <a:p>
-            <a:pPr>
+            <a:pPr marL="177800" indent="-177800">
               <a:spcBef>
                 <a:spcPts val="600"/>
               </a:spcBef>
@@ -9754,7 +9754,7 @@
             </a:r>
           </a:p>
           <a:p>
-            <a:pPr>
+            <a:pPr marL="190500" indent="-190500">
               <a:spcBef>
                 <a:spcPts val="400"/>
               </a:spcBef>
@@ -9773,7 +9773,7 @@
             </a:r>
           </a:p>
           <a:p>
-            <a:pPr>
+            <a:pPr marL="190500" indent="-190500">
               <a:spcBef>
                 <a:spcPts val="400"/>
               </a:spcBef>
@@ -9792,7 +9792,7 @@
             </a:r>
           </a:p>
           <a:p>
-            <a:pPr>
+            <a:pPr marL="190500" indent="-190500">
               <a:spcBef>
                 <a:spcPts val="400"/>
               </a:spcBef>
@@ -9811,7 +9811,7 @@
             </a:r>
           </a:p>
           <a:p>
-            <a:pPr>
+            <a:pPr marL="190500" indent="-190500">
               <a:spcBef>
                 <a:spcPts val="400"/>
               </a:spcBef>
@@ -9830,7 +9830,7 @@
             </a:r>
           </a:p>
           <a:p>
-            <a:pPr>
+            <a:pPr marL="190500" indent="-190500">
               <a:spcBef>
                 <a:spcPts val="400"/>
               </a:spcBef>
@@ -9849,7 +9849,7 @@
             </a:r>
           </a:p>
           <a:p>
-            <a:pPr>
+            <a:pPr marL="190500" indent="-190500">
               <a:spcBef>
                 <a:spcPts val="400"/>
               </a:spcBef>
@@ -9868,7 +9868,7 @@
             </a:r>
           </a:p>
           <a:p>
-            <a:pPr>
+            <a:pPr marL="190500" indent="-190500">
               <a:spcBef>
                 <a:spcPts val="400"/>
               </a:spcBef>
@@ -9887,7 +9887,7 @@
             </a:r>
           </a:p>
           <a:p>
-            <a:pPr>
+            <a:pPr marL="190500" indent="-190500">
               <a:spcBef>
                 <a:spcPts val="400"/>
               </a:spcBef>
@@ -9906,7 +9906,7 @@
             </a:r>
           </a:p>
           <a:p>
-            <a:pPr>
+            <a:pPr marL="190500" indent="-190500">
               <a:spcBef>
                 <a:spcPts val="400"/>
               </a:spcBef>
@@ -9997,7 +9997,7 @@
                 <a:solidFill>
                   <a:srgbClr val="A0B4D2"/>
                 </a:solidFill>
-                <a:latin typeface="JetBrains Mono"/>
+                <a:latin typeface="Consolas"/>
               </a:rPr>
               <a:t>FKB Campus  ·  M09</a:t>
             </a:r>
@@ -10136,7 +10136,7 @@
                 <a:solidFill>
                   <a:srgbClr val="78808C"/>
                 </a:solidFill>
-                <a:latin typeface="JetBrains Mono"/>
+                <a:latin typeface="Consolas"/>
               </a:rPr>
               <a:t>M09  ·  INHALT</a:t>
             </a:r>
@@ -10257,7 +10257,7 @@
                 <a:solidFill>
                   <a:srgbClr val="1F2C56"/>
                 </a:solidFill>
-                <a:latin typeface="Source Serif 4"/>
+                <a:latin typeface="Arial"/>
               </a:rPr>
               <a:t>AB-1: Branchenanalyse – Five Forces Scoring</a:t>
             </a:r>
@@ -10273,7 +10273,7 @@
         <p:spPr>
           <a:xfrm>
             <a:off x="685800" y="1417320"/>
-            <a:ext cx="10817352" cy="5029200"/>
+            <a:ext cx="10817352" cy="4892040"/>
           </a:xfrm>
           <a:prstGeom prst="rect">
             <a:avLst/>
@@ -10281,12 +10281,12 @@
           <a:noFill/>
         </p:spPr>
         <p:txBody>
-          <a:bodyPr wrap="square">
+          <a:bodyPr wrap="square" anchor="ctr">
             <a:spAutoFit/>
           </a:bodyPr>
           <a:lstStyle/>
           <a:p>
-            <a:pPr>
+            <a:pPr marL="190500" indent="-190500">
               <a:spcBef>
                 <a:spcPts val="400"/>
               </a:spcBef>
@@ -10305,7 +10305,7 @@
             </a:r>
           </a:p>
           <a:p>
-            <a:pPr>
+            <a:pPr marL="190500" indent="-190500">
               <a:spcBef>
                 <a:spcPts val="400"/>
               </a:spcBef>
@@ -10396,7 +10396,7 @@
                 <a:solidFill>
                   <a:srgbClr val="A0B4D2"/>
                 </a:solidFill>
-                <a:latin typeface="JetBrains Mono"/>
+                <a:latin typeface="Consolas"/>
               </a:rPr>
               <a:t>FKB Campus  ·  M09</a:t>
             </a:r>

--- a/protected-downloads/praesentation/M09.pptx
+++ b/protected-downloads/praesentation/M09.pptx
@@ -18,6 +18,15 @@
     <p:sldId id="266" r:id="rId18"/>
     <p:sldId id="267" r:id="rId19"/>
     <p:sldId id="268" r:id="rId20"/>
+    <p:sldId id="269" r:id="rId21"/>
+    <p:sldId id="270" r:id="rId22"/>
+    <p:sldId id="271" r:id="rId23"/>
+    <p:sldId id="272" r:id="rId24"/>
+    <p:sldId id="273" r:id="rId25"/>
+    <p:sldId id="274" r:id="rId26"/>
+    <p:sldId id="275" r:id="rId27"/>
+    <p:sldId id="276" r:id="rId28"/>
+    <p:sldId id="277" r:id="rId29"/>
   </p:sldIdLst>
   <p:sldSz cx="12188952" cy="6858000" type="screen4x3"/>
   <p:notesSz cx="6858000" cy="9144000"/>
@@ -539,6 +548,221 @@
 </p:notes>
 </file>
 
+<file path=ppt/notesSlides/notesSlide10.xml><?xml version="1.0" encoding="utf-8"?>
+<p:notes xmlns:a="http://schemas.openxmlformats.org/drawingml/2006/main" xmlns:p="http://schemas.openxmlformats.org/presentationml/2006/main" xmlns:r="http://schemas.openxmlformats.org/officeDocument/2006/relationships">
+  <p:cSld>
+    <p:spTree>
+      <p:nvGrpSpPr>
+        <p:cNvPr id="1" name=""/>
+        <p:cNvGrpSpPr/>
+        <p:nvPr/>
+      </p:nvGrpSpPr>
+      <p:grpSpPr>
+        <a:xfrm>
+          <a:off x="0" y="0"/>
+          <a:ext cx="0" cy="0"/>
+          <a:chOff x="0" y="0"/>
+          <a:chExt cx="0" cy="0"/>
+        </a:xfrm>
+      </p:grpSpPr>
+      <p:sp>
+        <p:nvSpPr>
+          <p:cNvPr id="2" name="Slide Image Placeholder 1"/>
+          <p:cNvSpPr>
+            <a:spLocks noGrp="1"/>
+          </p:cNvSpPr>
+          <p:nvPr>
+            <p:ph type="sldImg" idx="2"/>
+          </p:nvPr>
+        </p:nvSpPr>
+        <p:spPr/>
+      </p:sp>
+      <p:sp>
+        <p:nvSpPr>
+          <p:cNvPr id="3" name="Notes Placeholder 2"/>
+          <p:cNvSpPr>
+            <a:spLocks noGrp="1"/>
+          </p:cNvSpPr>
+          <p:nvPr>
+            <p:ph type="body" idx="3" sz="quarter"/>
+          </p:nvPr>
+        </p:nvSpPr>
+        <p:spPr/>
+        <p:txBody>
+          <a:bodyPr/>
+          <a:lstStyle/>
+          <a:p>
+            <a:r>
+              <a:t>Einzelarbeit (40 Min.) + Peer-Review in Tandems (30 Min.). Commitment-Runde: „Bis Runde 1 werde ich…".</a:t>
+            </a:r>
+          </a:p>
+          <a:p>
+            <a:r>
+              <a:t>Die drei Monatsrunden sind Teil des Moduls – sie machen aus dem Workshop einen Lernprozess über Zeit.</a:t>
+            </a:r>
+          </a:p>
+        </p:txBody>
+      </p:sp>
+      <p:sp>
+        <p:nvSpPr>
+          <p:cNvPr id="4" name="Slide Number Placeholder 3"/>
+          <p:cNvSpPr>
+            <a:spLocks noGrp="1"/>
+          </p:cNvSpPr>
+          <p:nvPr>
+            <p:ph type="sldNum" idx="5" sz="quarter"/>
+          </p:nvPr>
+        </p:nvSpPr>
+        <p:spPr/>
+      </p:sp>
+    </p:spTree>
+  </p:cSld>
+  <p:clrMapOvr>
+    <a:masterClrMapping/>
+  </p:clrMapOvr>
+</p:notes>
+</file>
+
+<file path=ppt/notesSlides/notesSlide11.xml><?xml version="1.0" encoding="utf-8"?>
+<p:notes xmlns:a="http://schemas.openxmlformats.org/drawingml/2006/main" xmlns:p="http://schemas.openxmlformats.org/presentationml/2006/main" xmlns:r="http://schemas.openxmlformats.org/officeDocument/2006/relationships">
+  <p:cSld>
+    <p:spTree>
+      <p:nvGrpSpPr>
+        <p:cNvPr id="1" name=""/>
+        <p:cNvGrpSpPr/>
+        <p:nvPr/>
+      </p:nvGrpSpPr>
+      <p:grpSpPr>
+        <a:xfrm>
+          <a:off x="0" y="0"/>
+          <a:ext cx="0" cy="0"/>
+          <a:chOff x="0" y="0"/>
+          <a:chExt cx="0" cy="0"/>
+        </a:xfrm>
+      </p:grpSpPr>
+      <p:sp>
+        <p:nvSpPr>
+          <p:cNvPr id="2" name="Slide Image Placeholder 1"/>
+          <p:cNvSpPr>
+            <a:spLocks noGrp="1"/>
+          </p:cNvSpPr>
+          <p:nvPr>
+            <p:ph type="sldImg" idx="2"/>
+          </p:nvPr>
+        </p:nvSpPr>
+        <p:spPr/>
+      </p:sp>
+      <p:sp>
+        <p:nvSpPr>
+          <p:cNvPr id="3" name="Notes Placeholder 2"/>
+          <p:cNvSpPr>
+            <a:spLocks noGrp="1"/>
+          </p:cNvSpPr>
+          <p:nvPr>
+            <p:ph type="body" idx="3" sz="quarter"/>
+          </p:nvPr>
+        </p:nvSpPr>
+        <p:spPr/>
+        <p:txBody>
+          <a:bodyPr/>
+          <a:lstStyle/>
+          <a:p>
+            <a:r>
+              <a:t>Überleitung zu den Monatsrunden und zum Transfer.</a:t>
+            </a:r>
+          </a:p>
+        </p:txBody>
+      </p:sp>
+      <p:sp>
+        <p:nvSpPr>
+          <p:cNvPr id="4" name="Slide Number Placeholder 3"/>
+          <p:cNvSpPr>
+            <a:spLocks noGrp="1"/>
+          </p:cNvSpPr>
+          <p:nvPr>
+            <p:ph type="sldNum" idx="5" sz="quarter"/>
+          </p:nvPr>
+        </p:nvSpPr>
+        <p:spPr/>
+      </p:sp>
+    </p:spTree>
+  </p:cSld>
+  <p:clrMapOvr>
+    <a:masterClrMapping/>
+  </p:clrMapOvr>
+</p:notes>
+</file>
+
+<file path=ppt/notesSlides/notesSlide12.xml><?xml version="1.0" encoding="utf-8"?>
+<p:notes xmlns:a="http://schemas.openxmlformats.org/drawingml/2006/main" xmlns:p="http://schemas.openxmlformats.org/presentationml/2006/main" xmlns:r="http://schemas.openxmlformats.org/officeDocument/2006/relationships">
+  <p:cSld>
+    <p:spTree>
+      <p:nvGrpSpPr>
+        <p:cNvPr id="1" name=""/>
+        <p:cNvGrpSpPr/>
+        <p:nvPr/>
+      </p:nvGrpSpPr>
+      <p:grpSpPr>
+        <a:xfrm>
+          <a:off x="0" y="0"/>
+          <a:ext cx="0" cy="0"/>
+          <a:chOff x="0" y="0"/>
+          <a:chExt cx="0" cy="0"/>
+        </a:xfrm>
+      </p:grpSpPr>
+      <p:sp>
+        <p:nvSpPr>
+          <p:cNvPr id="2" name="Slide Image Placeholder 1"/>
+          <p:cNvSpPr>
+            <a:spLocks noGrp="1"/>
+          </p:cNvSpPr>
+          <p:nvPr>
+            <p:ph type="sldImg" idx="2"/>
+          </p:nvPr>
+        </p:nvSpPr>
+        <p:spPr/>
+      </p:sp>
+      <p:sp>
+        <p:nvSpPr>
+          <p:cNvPr id="3" name="Notes Placeholder 2"/>
+          <p:cNvSpPr>
+            <a:spLocks noGrp="1"/>
+          </p:cNvSpPr>
+          <p:nvPr>
+            <p:ph type="body" idx="3" sz="quarter"/>
+          </p:nvPr>
+        </p:nvSpPr>
+        <p:spPr/>
+        <p:txBody>
+          <a:bodyPr/>
+          <a:lstStyle/>
+          <a:p>
+            <a:r>
+              <a:t>Monatsrunden-Planung als Transferanker; Selbstcheck begleitet den Prozess.</a:t>
+            </a:r>
+          </a:p>
+        </p:txBody>
+      </p:sp>
+      <p:sp>
+        <p:nvSpPr>
+          <p:cNvPr id="4" name="Slide Number Placeholder 3"/>
+          <p:cNvSpPr>
+            <a:spLocks noGrp="1"/>
+          </p:cNvSpPr>
+          <p:nvPr>
+            <p:ph type="sldNum" idx="5" sz="quarter"/>
+          </p:nvPr>
+        </p:nvSpPr>
+        <p:spPr/>
+      </p:sp>
+    </p:spTree>
+  </p:cSld>
+  <p:clrMapOvr>
+    <a:masterClrMapping/>
+  </p:clrMapOvr>
+</p:notes>
+</file>
+
 <file path=ppt/notesSlides/notesSlide2.xml><?xml version="1.0" encoding="utf-8"?>
 <p:notes xmlns:a="http://schemas.openxmlformats.org/drawingml/2006/main" xmlns:p="http://schemas.openxmlformats.org/presentationml/2006/main" xmlns:r="http://schemas.openxmlformats.org/officeDocument/2006/relationships">
   <p:cSld>
@@ -584,7 +808,7 @@
           <a:lstStyle/>
           <a:p>
             <a:r>
-              <a:t>Siehe Trainerhandbuch (Sektion 3) für Moderationshinweise, Timing und erwartete Teilnehmerreaktionen.</a:t>
+              <a:t>Blitzlicht: jede/r nennt Zielbranche und eine Erwartung an den Tag. Tagesüberblick am Flipchart.</a:t>
             </a:r>
           </a:p>
         </p:txBody>
@@ -654,7 +878,7 @@
           <a:lstStyle/>
           <a:p>
             <a:r>
-              <a:t>Siehe Trainerhandbuch (Sektion 3) für Moderationshinweise, Timing und erwartete Teilnehmerreaktionen.</a:t>
+              <a:t>Dreyfus 3→4 als roter Faden: vom kompetenten Bearbeiter zum gefragten Gesprächspartner.</a:t>
             </a:r>
           </a:p>
         </p:txBody>
@@ -724,7 +948,7 @@
           <a:lstStyle/>
           <a:p>
             <a:r>
-              <a:t>Siehe Trainerhandbuch (Sektion 3) für Moderationshinweise, Timing und erwartete Teilnehmerreaktionen.</a:t>
+              <a:t>Trainer analysiert live eine Beispielbranche (15 Min.), dann Kleingruppen nach Zielbranche (Handwerk/Industrie/Dienstleistung).</a:t>
             </a:r>
           </a:p>
         </p:txBody>
@@ -794,7 +1018,7 @@
           <a:lstStyle/>
           <a:p>
             <a:r>
-              <a:t>Siehe Trainerhandbuch (Sektion 3) für Moderationshinweise, Timing und erwartete Teilnehmerreaktionen.</a:t>
+              <a:t>AB-1 in Kleingruppen nach Segment-Ähnlichkeit. Porter-Vorlage A3.</a:t>
             </a:r>
           </a:p>
         </p:txBody>
@@ -864,7 +1088,7 @@
           <a:lstStyle/>
           <a:p>
             <a:r>
-              <a:t>Siehe Trainerhandbuch (Sektion 3) für Moderationshinweise, Timing und erwartete Teilnehmerreaktionen.</a:t>
+              <a:t>PESTEL-Framework einführen (10 Min.), dann die Kleingruppenanalyse um die PESTEL-Dimensionen ergänzen.</a:t>
             </a:r>
           </a:p>
         </p:txBody>
@@ -934,7 +1158,147 @@
           <a:lstStyle/>
           <a:p>
             <a:r>
-              <a:t>Siehe Trainerhandbuch (Sektion 3) für Moderationshinweise, Timing und erwartete Teilnehmerreaktionen.</a:t>
+              <a:t>Gruppenarbeit je 10 Min. Recherche, dann Vorstellung. DZ BANK Research-Demo. Quellenkarte mitgeben.</a:t>
+            </a:r>
+          </a:p>
+        </p:txBody>
+      </p:sp>
+      <p:sp>
+        <p:nvSpPr>
+          <p:cNvPr id="4" name="Slide Number Placeholder 3"/>
+          <p:cNvSpPr>
+            <a:spLocks noGrp="1"/>
+          </p:cNvSpPr>
+          <p:nvPr>
+            <p:ph type="sldNum" idx="5" sz="quarter"/>
+          </p:nvPr>
+        </p:nvSpPr>
+        <p:spPr/>
+      </p:sp>
+    </p:spTree>
+  </p:cSld>
+  <p:clrMapOvr>
+    <a:masterClrMapping/>
+  </p:clrMapOvr>
+</p:notes>
+</file>
+
+<file path=ppt/notesSlides/notesSlide8.xml><?xml version="1.0" encoding="utf-8"?>
+<p:notes xmlns:a="http://schemas.openxmlformats.org/drawingml/2006/main" xmlns:p="http://schemas.openxmlformats.org/presentationml/2006/main" xmlns:r="http://schemas.openxmlformats.org/officeDocument/2006/relationships">
+  <p:cSld>
+    <p:spTree>
+      <p:nvGrpSpPr>
+        <p:cNvPr id="1" name=""/>
+        <p:cNvGrpSpPr/>
+        <p:nvPr/>
+      </p:nvGrpSpPr>
+      <p:grpSpPr>
+        <a:xfrm>
+          <a:off x="0" y="0"/>
+          <a:ext cx="0" cy="0"/>
+          <a:chOff x="0" y="0"/>
+          <a:chExt cx="0" cy="0"/>
+        </a:xfrm>
+      </p:grpSpPr>
+      <p:sp>
+        <p:nvSpPr>
+          <p:cNvPr id="2" name="Slide Image Placeholder 1"/>
+          <p:cNvSpPr>
+            <a:spLocks noGrp="1"/>
+          </p:cNvSpPr>
+          <p:nvPr>
+            <p:ph type="sldImg" idx="2"/>
+          </p:nvPr>
+        </p:nvSpPr>
+        <p:spPr/>
+      </p:sp>
+      <p:sp>
+        <p:nvSpPr>
+          <p:cNvPr id="3" name="Notes Placeholder 2"/>
+          <p:cNvSpPr>
+            <a:spLocks noGrp="1"/>
+          </p:cNvSpPr>
+          <p:nvPr>
+            <p:ph type="body" idx="3" sz="quarter"/>
+          </p:nvPr>
+        </p:nvSpPr>
+        <p:spPr/>
+        <p:txBody>
+          <a:bodyPr/>
+          <a:lstStyle/>
+          <a:p>
+            <a:r>
+              <a:t>Einzelarbeit auf der Netzwerkkarte, dann Plenumsdiskussion.</a:t>
+            </a:r>
+          </a:p>
+        </p:txBody>
+      </p:sp>
+      <p:sp>
+        <p:nvSpPr>
+          <p:cNvPr id="4" name="Slide Number Placeholder 3"/>
+          <p:cNvSpPr>
+            <a:spLocks noGrp="1"/>
+          </p:cNvSpPr>
+          <p:nvPr>
+            <p:ph type="sldNum" idx="5" sz="quarter"/>
+          </p:nvPr>
+        </p:nvSpPr>
+        <p:spPr/>
+      </p:sp>
+    </p:spTree>
+  </p:cSld>
+  <p:clrMapOvr>
+    <a:masterClrMapping/>
+  </p:clrMapOvr>
+</p:notes>
+</file>
+
+<file path=ppt/notesSlides/notesSlide9.xml><?xml version="1.0" encoding="utf-8"?>
+<p:notes xmlns:a="http://schemas.openxmlformats.org/drawingml/2006/main" xmlns:p="http://schemas.openxmlformats.org/presentationml/2006/main" xmlns:r="http://schemas.openxmlformats.org/officeDocument/2006/relationships">
+  <p:cSld>
+    <p:spTree>
+      <p:nvGrpSpPr>
+        <p:cNvPr id="1" name=""/>
+        <p:cNvGrpSpPr/>
+        <p:nvPr/>
+      </p:nvGrpSpPr>
+      <p:grpSpPr>
+        <a:xfrm>
+          <a:off x="0" y="0"/>
+          <a:ext cx="0" cy="0"/>
+          <a:chOff x="0" y="0"/>
+          <a:chExt cx="0" cy="0"/>
+        </a:xfrm>
+      </p:grpSpPr>
+      <p:sp>
+        <p:nvSpPr>
+          <p:cNvPr id="2" name="Slide Image Placeholder 1"/>
+          <p:cNvSpPr>
+            <a:spLocks noGrp="1"/>
+          </p:cNvSpPr>
+          <p:nvPr>
+            <p:ph type="sldImg" idx="2"/>
+          </p:nvPr>
+        </p:nvSpPr>
+        <p:spPr/>
+      </p:sp>
+      <p:sp>
+        <p:nvSpPr>
+          <p:cNvPr id="3" name="Notes Placeholder 2"/>
+          <p:cNvSpPr>
+            <a:spLocks noGrp="1"/>
+          </p:cNvSpPr>
+          <p:nvPr>
+            <p:ph type="body" idx="3" sz="quarter"/>
+          </p:nvPr>
+        </p:nvSpPr>
+        <p:spPr/>
+        <p:txBody>
+          <a:bodyPr/>
+          <a:lstStyle/>
+          <a:p>
+            <a:r>
+              <a:t>Trainer-Vortrag (15 Min.) + Einzelarbeit auf der Portfolio-Vorlage A3.</a:t>
             </a:r>
           </a:p>
         </p:txBody>
@@ -4530,7 +4894,7 @@
             <a:avLst/>
           </a:prstGeom>
           <a:solidFill>
-            <a:srgbClr val="FFFFFF"/>
+            <a:srgbClr val="EDEDF3"/>
           </a:solidFill>
           <a:ln>
             <a:noFill/>
@@ -4631,43 +4995,51 @@
                 </a:solidFill>
                 <a:latin typeface="Consolas"/>
               </a:rPr>
-              <a:t>M09  ·  ÜBERSICHT</a:t>
-            </a:r>
-          </a:p>
-        </p:txBody>
-      </p:sp>
-      <p:sp>
-        <p:nvSpPr>
-          <p:cNvPr id="5" name="TextBox 4"/>
-          <p:cNvSpPr txBox="1"/>
-          <p:nvPr/>
-        </p:nvSpPr>
-        <p:spPr>
-          <a:xfrm>
-            <a:off x="685800" y="502920"/>
-            <a:ext cx="10817352" cy="594360"/>
-          </a:xfrm>
-          <a:prstGeom prst="rect">
-            <a:avLst/>
-          </a:prstGeom>
-          <a:noFill/>
-        </p:spPr>
-        <p:txBody>
-          <a:bodyPr wrap="square">
-            <a:spAutoFit/>
-          </a:bodyPr>
-          <a:lstStyle/>
-          <a:p>
-            <a:pPr algn="l"/>
-            <a:r>
-              <a:rPr sz="2000" b="1" i="0">
-                <a:solidFill>
-                  <a:srgbClr val="1F2C56"/>
-                </a:solidFill>
-                <a:latin typeface="Arial"/>
-              </a:rPr>
-              <a:t>AB-1: Branchenanalyse – Five Forces Scoring</a:t>
-            </a:r>
+              <a:t>M09  ·  ARBEITSBLATT</a:t>
+            </a:r>
+          </a:p>
+        </p:txBody>
+      </p:sp>
+      <p:sp>
+        <p:nvSpPr>
+          <p:cNvPr id="5" name="Rectangle 4"/>
+          <p:cNvSpPr/>
+          <p:nvPr/>
+        </p:nvSpPr>
+        <p:spPr>
+          <a:xfrm>
+            <a:off x="0" y="1234440"/>
+            <a:ext cx="12188952" cy="12700"/>
+          </a:xfrm>
+          <a:prstGeom prst="rect">
+            <a:avLst/>
+          </a:prstGeom>
+          <a:solidFill>
+            <a:srgbClr val="D8DFE4"/>
+          </a:solidFill>
+          <a:ln>
+            <a:noFill/>
+          </a:ln>
+        </p:spPr>
+        <p:style>
+          <a:lnRef idx="1">
+            <a:schemeClr val="accent1"/>
+          </a:lnRef>
+          <a:fillRef idx="3">
+            <a:schemeClr val="accent1"/>
+          </a:fillRef>
+          <a:effectRef idx="2">
+            <a:schemeClr val="accent1"/>
+          </a:effectRef>
+          <a:fontRef idx="minor">
+            <a:schemeClr val="lt1"/>
+          </a:fontRef>
+        </p:style>
+        <p:txBody>
+          <a:bodyPr rtlCol="0" anchor="ctr"/>
+          <a:lstStyle/>
+          <a:p>
+            <a:pPr algn="ctr"/>
           </a:p>
         </p:txBody>
       </p:sp>
@@ -4679,8 +5051,8 @@
         </p:nvSpPr>
         <p:spPr>
           <a:xfrm>
-            <a:off x="685800" y="1143000"/>
-            <a:ext cx="10817352" cy="25400"/>
+            <a:off x="685800" y="502920"/>
+            <a:ext cx="36576" cy="658368"/>
           </a:xfrm>
           <a:prstGeom prst="rect">
             <a:avLst/>
@@ -4714,391 +5086,202 @@
           </a:p>
         </p:txBody>
       </p:sp>
-      <p:graphicFrame>
-        <p:nvGraphicFramePr>
-          <p:cNvPr id="7" name="Table 6"/>
-          <p:cNvGraphicFramePr>
-            <a:graphicFrameLocks noGrp="1"/>
-          </p:cNvGraphicFramePr>
-          <p:nvPr/>
-        </p:nvGraphicFramePr>
-        <p:xfrm>
-          <a:off x="685800" y="1417320"/>
-          <a:ext cx="10817352" cy="2688336"/>
-        </p:xfrm>
-        <a:graphic>
-          <a:graphicData uri="http://schemas.openxmlformats.org/drawingml/2006/table">
-            <a:tbl>
-              <a:tblPr firstRow="1" bandRow="1">
-                <a:tableStyleId>{5C22544A-7EE6-4342-B048-85BDC9FD1C3A}</a:tableStyleId>
-              </a:tblPr>
-              <a:tblGrid>
-                <a:gridCol w="2704338"/>
-                <a:gridCol w="2704338"/>
-                <a:gridCol w="2704338"/>
-                <a:gridCol w="2704338"/>
-              </a:tblGrid>
-              <a:tr h="384048">
-                <a:tc>
-                  <a:txBody>
-                    <a:bodyPr/>
-                    <a:lstStyle/>
-                    <a:p>
-                      <a:r>
-                        <a:rPr sz="1100" b="1">
-                          <a:solidFill>
-                            <a:srgbClr val="FFFFFF"/>
-                          </a:solidFill>
-                          <a:latin typeface="Arial"/>
-                        </a:rPr>
-                        <a:t>Kraft</a:t>
-                      </a:r>
-                    </a:p>
-                  </a:txBody>
-                  <a:tcPr>
-                    <a:solidFill>
-                      <a:srgbClr val="1F2C56"/>
-                    </a:solidFill>
-                  </a:tcPr>
-                </a:tc>
-                <a:tc>
-                  <a:txBody>
-                    <a:bodyPr/>
-                    <a:lstStyle/>
-                    <a:p>
-                      <a:r>
-                        <a:rPr sz="1100" b="1">
-                          <a:solidFill>
-                            <a:srgbClr val="FFFFFF"/>
-                          </a:solidFill>
-                          <a:latin typeface="Arial"/>
-                        </a:rPr>
-                        <a:t>Kurzbeschreibung</a:t>
-                      </a:r>
-                    </a:p>
-                  </a:txBody>
-                  <a:tcPr>
-                    <a:solidFill>
-                      <a:srgbClr val="1F2C56"/>
-                    </a:solidFill>
-                  </a:tcPr>
-                </a:tc>
-                <a:tc>
-                  <a:txBody>
-                    <a:bodyPr/>
-                    <a:lstStyle/>
-                    <a:p>
-                      <a:r>
-                        <a:rPr sz="1100" b="1">
-                          <a:solidFill>
-                            <a:srgbClr val="FFFFFF"/>
-                          </a:solidFill>
-                          <a:latin typeface="Arial"/>
-                        </a:rPr>
-                        <a:t>Stärke (1–5)</a:t>
-                      </a:r>
-                    </a:p>
-                  </a:txBody>
-                  <a:tcPr>
-                    <a:solidFill>
-                      <a:srgbClr val="1F2C56"/>
-                    </a:solidFill>
-                  </a:tcPr>
-                </a:tc>
-                <a:tc>
-                  <a:txBody>
-                    <a:bodyPr/>
-                    <a:lstStyle/>
-                    <a:p>
-                      <a:r>
-                        <a:rPr sz="1100" b="1">
-                          <a:solidFill>
-                            <a:srgbClr val="FFFFFF"/>
-                          </a:solidFill>
-                          <a:latin typeface="Arial"/>
-                        </a:rPr>
-                        <a:t>Implikation für Kreditrisiko</a:t>
-                      </a:r>
-                    </a:p>
-                  </a:txBody>
-                  <a:tcPr>
-                    <a:solidFill>
-                      <a:srgbClr val="1F2C56"/>
-                    </a:solidFill>
-                  </a:tcPr>
-                </a:tc>
-              </a:tr>
-              <a:tr h="384048">
-                <a:tc>
-                  <a:txBody>
-                    <a:bodyPr/>
-                    <a:lstStyle/>
-                    <a:p>
-                      <a:r>
-                        <a:rPr sz="1050">
-                          <a:solidFill>
-                            <a:srgbClr val="3D5466"/>
-                          </a:solidFill>
-                          <a:latin typeface="Arial"/>
-                        </a:rPr>
-                        <a:t>Neue Wettbewerber</a:t>
-                      </a:r>
-                    </a:p>
-                  </a:txBody>
-                  <a:tcPr/>
-                </a:tc>
-                <a:tc>
-                  <a:txBody>
-                    <a:bodyPr/>
-                    <a:lstStyle/>
-                    <a:p/>
-                  </a:txBody>
-                  <a:tcPr/>
-                </a:tc>
-                <a:tc>
-                  <a:txBody>
-                    <a:bodyPr/>
-                    <a:lstStyle/>
-                    <a:p/>
-                  </a:txBody>
-                  <a:tcPr/>
-                </a:tc>
-                <a:tc>
-                  <a:txBody>
-                    <a:bodyPr/>
-                    <a:lstStyle/>
-                    <a:p/>
-                  </a:txBody>
-                  <a:tcPr/>
-                </a:tc>
-              </a:tr>
-              <a:tr h="384048">
-                <a:tc>
-                  <a:txBody>
-                    <a:bodyPr/>
-                    <a:lstStyle/>
-                    <a:p>
-                      <a:r>
-                        <a:rPr sz="1050">
-                          <a:solidFill>
-                            <a:srgbClr val="3D5466"/>
-                          </a:solidFill>
-                          <a:latin typeface="Arial"/>
-                        </a:rPr>
-                        <a:t>Lieferantenmacht</a:t>
-                      </a:r>
-                    </a:p>
-                  </a:txBody>
-                  <a:tcPr/>
-                </a:tc>
-                <a:tc>
-                  <a:txBody>
-                    <a:bodyPr/>
-                    <a:lstStyle/>
-                    <a:p/>
-                  </a:txBody>
-                  <a:tcPr/>
-                </a:tc>
-                <a:tc>
-                  <a:txBody>
-                    <a:bodyPr/>
-                    <a:lstStyle/>
-                    <a:p/>
-                  </a:txBody>
-                  <a:tcPr/>
-                </a:tc>
-                <a:tc>
-                  <a:txBody>
-                    <a:bodyPr/>
-                    <a:lstStyle/>
-                    <a:p/>
-                  </a:txBody>
-                  <a:tcPr/>
-                </a:tc>
-              </a:tr>
-              <a:tr h="384048">
-                <a:tc>
-                  <a:txBody>
-                    <a:bodyPr/>
-                    <a:lstStyle/>
-                    <a:p>
-                      <a:r>
-                        <a:rPr sz="1050">
-                          <a:solidFill>
-                            <a:srgbClr val="3D5466"/>
-                          </a:solidFill>
-                          <a:latin typeface="Arial"/>
-                        </a:rPr>
-                        <a:t>Abnehmermacht</a:t>
-                      </a:r>
-                    </a:p>
-                  </a:txBody>
-                  <a:tcPr/>
-                </a:tc>
-                <a:tc>
-                  <a:txBody>
-                    <a:bodyPr/>
-                    <a:lstStyle/>
-                    <a:p/>
-                  </a:txBody>
-                  <a:tcPr/>
-                </a:tc>
-                <a:tc>
-                  <a:txBody>
-                    <a:bodyPr/>
-                    <a:lstStyle/>
-                    <a:p/>
-                  </a:txBody>
-                  <a:tcPr/>
-                </a:tc>
-                <a:tc>
-                  <a:txBody>
-                    <a:bodyPr/>
-                    <a:lstStyle/>
-                    <a:p/>
-                  </a:txBody>
-                  <a:tcPr/>
-                </a:tc>
-              </a:tr>
-              <a:tr h="384048">
-                <a:tc>
-                  <a:txBody>
-                    <a:bodyPr/>
-                    <a:lstStyle/>
-                    <a:p>
-                      <a:r>
-                        <a:rPr sz="1050">
-                          <a:solidFill>
-                            <a:srgbClr val="3D5466"/>
-                          </a:solidFill>
-                          <a:latin typeface="Arial"/>
-                        </a:rPr>
-                        <a:t>Substitutionsbedrohung</a:t>
-                      </a:r>
-                    </a:p>
-                  </a:txBody>
-                  <a:tcPr/>
-                </a:tc>
-                <a:tc>
-                  <a:txBody>
-                    <a:bodyPr/>
-                    <a:lstStyle/>
-                    <a:p/>
-                  </a:txBody>
-                  <a:tcPr/>
-                </a:tc>
-                <a:tc>
-                  <a:txBody>
-                    <a:bodyPr/>
-                    <a:lstStyle/>
-                    <a:p/>
-                  </a:txBody>
-                  <a:tcPr/>
-                </a:tc>
-                <a:tc>
-                  <a:txBody>
-                    <a:bodyPr/>
-                    <a:lstStyle/>
-                    <a:p/>
-                  </a:txBody>
-                  <a:tcPr/>
-                </a:tc>
-              </a:tr>
-              <a:tr h="384048">
-                <a:tc>
-                  <a:txBody>
-                    <a:bodyPr/>
-                    <a:lstStyle/>
-                    <a:p>
-                      <a:r>
-                        <a:rPr sz="1050">
-                          <a:solidFill>
-                            <a:srgbClr val="3D5466"/>
-                          </a:solidFill>
-                          <a:latin typeface="Arial"/>
-                        </a:rPr>
-                        <a:t>Rivalität intern</a:t>
-                      </a:r>
-                    </a:p>
-                  </a:txBody>
-                  <a:tcPr/>
-                </a:tc>
-                <a:tc>
-                  <a:txBody>
-                    <a:bodyPr/>
-                    <a:lstStyle/>
-                    <a:p/>
-                  </a:txBody>
-                  <a:tcPr/>
-                </a:tc>
-                <a:tc>
-                  <a:txBody>
-                    <a:bodyPr/>
-                    <a:lstStyle/>
-                    <a:p/>
-                  </a:txBody>
-                  <a:tcPr/>
-                </a:tc>
-                <a:tc>
-                  <a:txBody>
-                    <a:bodyPr/>
-                    <a:lstStyle/>
-                    <a:p/>
-                  </a:txBody>
-                  <a:tcPr/>
-                </a:tc>
-              </a:tr>
-              <a:tr h="384048">
-                <a:tc>
-                  <a:txBody>
-                    <a:bodyPr/>
-                    <a:lstStyle/>
-                    <a:p>
-                      <a:r>
-                        <a:rPr sz="1050">
-                          <a:solidFill>
-                            <a:srgbClr val="3D5466"/>
-                          </a:solidFill>
-                          <a:latin typeface="Arial"/>
-                        </a:rPr>
-                        <a:t>Gesamteindruck Branche</a:t>
-                      </a:r>
-                    </a:p>
-                  </a:txBody>
-                  <a:tcPr/>
-                </a:tc>
-                <a:tc>
-                  <a:txBody>
-                    <a:bodyPr/>
-                    <a:lstStyle/>
-                    <a:p/>
-                  </a:txBody>
-                  <a:tcPr/>
-                </a:tc>
-                <a:tc>
-                  <a:txBody>
-                    <a:bodyPr/>
-                    <a:lstStyle/>
-                    <a:p/>
-                  </a:txBody>
-                  <a:tcPr/>
-                </a:tc>
-                <a:tc>
-                  <a:txBody>
-                    <a:bodyPr/>
-                    <a:lstStyle/>
-                    <a:p/>
-                  </a:txBody>
-                  <a:tcPr/>
-                </a:tc>
-              </a:tr>
-            </a:tbl>
-          </a:graphicData>
-        </a:graphic>
-      </p:graphicFrame>
-      <p:sp>
-        <p:nvSpPr>
-          <p:cNvPr id="8" name="Rectangle 7"/>
+      <p:sp>
+        <p:nvSpPr>
+          <p:cNvPr id="7" name="TextBox 6"/>
+          <p:cNvSpPr txBox="1"/>
+          <p:nvPr/>
+        </p:nvSpPr>
+        <p:spPr>
+          <a:xfrm>
+            <a:off x="813816" y="502920"/>
+            <a:ext cx="10634472" cy="685800"/>
+          </a:xfrm>
+          <a:prstGeom prst="rect">
+            <a:avLst/>
+          </a:prstGeom>
+          <a:noFill/>
+        </p:spPr>
+        <p:txBody>
+          <a:bodyPr wrap="square">
+            <a:spAutoFit/>
+          </a:bodyPr>
+          <a:lstStyle/>
+          <a:p>
+            <a:pPr algn="l"/>
+            <a:r>
+              <a:rPr sz="2400" b="1" i="0">
+                <a:solidFill>
+                  <a:srgbClr val="1F2C56"/>
+                </a:solidFill>
+                <a:latin typeface="Arial"/>
+              </a:rPr>
+              <a:t>Five-Forces-Scoring bearbeiten</a:t>
+            </a:r>
+          </a:p>
+        </p:txBody>
+      </p:sp>
+      <p:sp>
+        <p:nvSpPr>
+          <p:cNvPr id="8" name="TextBox 7"/>
+          <p:cNvSpPr txBox="1"/>
+          <p:nvPr/>
+        </p:nvSpPr>
+        <p:spPr>
+          <a:xfrm>
+            <a:off x="685800" y="1554480"/>
+            <a:ext cx="10817352" cy="3840480"/>
+          </a:xfrm>
+          <a:prstGeom prst="rect">
+            <a:avLst/>
+          </a:prstGeom>
+          <a:noFill/>
+        </p:spPr>
+        <p:txBody>
+          <a:bodyPr wrap="square">
+            <a:spAutoFit/>
+          </a:bodyPr>
+          <a:lstStyle/>
+          <a:p>
+            <a:pPr marL="190500" indent="-190500">
+              <a:spcBef>
+                <a:spcPts val="400"/>
+              </a:spcBef>
+              <a:spcAft>
+                <a:spcPts val="200"/>
+              </a:spcAft>
+            </a:pPr>
+            <a:r>
+              <a:rPr sz="1400">
+                <a:solidFill>
+                  <a:srgbClr val="3D5466"/>
+                </a:solidFill>
+                <a:latin typeface="Arial"/>
+              </a:rPr>
+              <a:t>▸  Analysieren Sie Ihre Zielbranche entlang der fünf Kräfte (AB-1).</a:t>
+            </a:r>
+          </a:p>
+          <a:p>
+            <a:pPr marL="190500" indent="-190500">
+              <a:spcBef>
+                <a:spcPts val="400"/>
+              </a:spcBef>
+              <a:spcAft>
+                <a:spcPts val="200"/>
+              </a:spcAft>
+            </a:pPr>
+            <a:r>
+              <a:rPr sz="1400">
+                <a:solidFill>
+                  <a:srgbClr val="3D5466"/>
+                </a:solidFill>
+                <a:latin typeface="Arial"/>
+              </a:rPr>
+              <a:t>▸  Vergeben Sie je Kraft ein Scoring und begründen Sie es.</a:t>
+            </a:r>
+          </a:p>
+          <a:p>
+            <a:pPr marL="190500" indent="-190500">
+              <a:spcBef>
+                <a:spcPts val="400"/>
+              </a:spcBef>
+              <a:spcAft>
+                <a:spcPts val="200"/>
+              </a:spcAft>
+            </a:pPr>
+            <a:r>
+              <a:rPr sz="1400">
+                <a:solidFill>
+                  <a:srgbClr val="3D5466"/>
+                </a:solidFill>
+                <a:latin typeface="Arial"/>
+              </a:rPr>
+              <a:t>▸  Leiten Sie ab, wo die Branche verwundbar ist – und wo stabil.</a:t>
+            </a:r>
+          </a:p>
+        </p:txBody>
+      </p:sp>
+      <p:sp>
+        <p:nvSpPr>
+          <p:cNvPr id="9" name="Rectangle 8"/>
+          <p:cNvSpPr/>
+          <p:nvPr/>
+        </p:nvSpPr>
+        <p:spPr>
+          <a:xfrm>
+            <a:off x="685800" y="5486400"/>
+            <a:ext cx="10817352" cy="640080"/>
+          </a:xfrm>
+          <a:prstGeom prst="rect">
+            <a:avLst/>
+          </a:prstGeom>
+          <a:solidFill>
+            <a:srgbClr val="1F2C56"/>
+          </a:solidFill>
+          <a:ln>
+            <a:noFill/>
+          </a:ln>
+        </p:spPr>
+        <p:style>
+          <a:lnRef idx="1">
+            <a:schemeClr val="accent1"/>
+          </a:lnRef>
+          <a:fillRef idx="3">
+            <a:schemeClr val="accent1"/>
+          </a:fillRef>
+          <a:effectRef idx="2">
+            <a:schemeClr val="accent1"/>
+          </a:effectRef>
+          <a:fontRef idx="minor">
+            <a:schemeClr val="lt1"/>
+          </a:fontRef>
+        </p:style>
+        <p:txBody>
+          <a:bodyPr rtlCol="0" anchor="ctr"/>
+          <a:lstStyle/>
+          <a:p>
+            <a:pPr algn="ctr"/>
+          </a:p>
+        </p:txBody>
+      </p:sp>
+      <p:sp>
+        <p:nvSpPr>
+          <p:cNvPr id="10" name="TextBox 9"/>
+          <p:cNvSpPr txBox="1"/>
+          <p:nvPr/>
+        </p:nvSpPr>
+        <p:spPr>
+          <a:xfrm>
+            <a:off x="868680" y="5596128"/>
+            <a:ext cx="10451592" cy="457200"/>
+          </a:xfrm>
+          <a:prstGeom prst="rect">
+            <a:avLst/>
+          </a:prstGeom>
+          <a:noFill/>
+        </p:spPr>
+        <p:txBody>
+          <a:bodyPr wrap="square">
+            <a:spAutoFit/>
+          </a:bodyPr>
+          <a:lstStyle/>
+          <a:p>
+            <a:pPr algn="l"/>
+            <a:r>
+              <a:rPr sz="1300" b="1" i="0">
+                <a:solidFill>
+                  <a:srgbClr val="FFFFFF"/>
+                </a:solidFill>
+                <a:latin typeface="Arial"/>
+              </a:rPr>
+              <a:t>→  Bearbeitung im Teilnehmer-Workbook (Arbeitsblatt mit Ausfüllfeldern)</a:t>
+            </a:r>
+          </a:p>
+        </p:txBody>
+      </p:sp>
+      <p:sp>
+        <p:nvSpPr>
+          <p:cNvPr id="11" name="Rectangle 10"/>
           <p:cNvSpPr/>
           <p:nvPr/>
         </p:nvSpPr>
@@ -5141,7 +5324,7 @@
       </p:sp>
       <p:sp>
         <p:nvSpPr>
-          <p:cNvPr id="9" name="TextBox 8"/>
+          <p:cNvPr id="12" name="TextBox 11"/>
           <p:cNvSpPr txBox="1"/>
           <p:nvPr/>
         </p:nvSpPr>
@@ -5170,41 +5353,6 @@
                 <a:latin typeface="Consolas"/>
               </a:rPr>
               <a:t>FKB Campus  ·  M09</a:t>
-            </a:r>
-          </a:p>
-        </p:txBody>
-      </p:sp>
-      <p:sp>
-        <p:nvSpPr>
-          <p:cNvPr id="10" name="TextBox 9"/>
-          <p:cNvSpPr txBox="1"/>
-          <p:nvPr/>
-        </p:nvSpPr>
-        <p:spPr>
-          <a:xfrm>
-            <a:off x="7176211" y="6583680"/>
-            <a:ext cx="4326940" cy="256032"/>
-          </a:xfrm>
-          <a:prstGeom prst="rect">
-            <a:avLst/>
-          </a:prstGeom>
-          <a:noFill/>
-        </p:spPr>
-        <p:txBody>
-          <a:bodyPr wrap="none">
-            <a:spAutoFit/>
-          </a:bodyPr>
-          <a:lstStyle/>
-          <a:p>
-            <a:pPr algn="r"/>
-            <a:r>
-              <a:rPr sz="700">
-                <a:solidFill>
-                  <a:srgbClr val="A0B4D2"/>
-                </a:solidFill>
-                <a:latin typeface="Consolas"/>
-              </a:rPr>
-              <a:t>Übersicht</a:t>
             </a:r>
           </a:p>
         </p:txBody>
@@ -5242,7 +5390,7 @@
             <a:avLst/>
           </a:prstGeom>
           <a:solidFill>
-            <a:srgbClr val="EDEDF3"/>
+            <a:srgbClr val="1F2C56"/>
           </a:solidFill>
           <a:ln>
             <a:noFill/>
@@ -5272,57 +5420,14 @@
       </p:sp>
       <p:sp>
         <p:nvSpPr>
-          <p:cNvPr id="3" name="Rectangle 2"/>
-          <p:cNvSpPr/>
-          <p:nvPr/>
-        </p:nvSpPr>
-        <p:spPr>
-          <a:xfrm>
-            <a:off x="0" y="0"/>
-            <a:ext cx="12188952" cy="50292"/>
-          </a:xfrm>
-          <a:prstGeom prst="rect">
-            <a:avLst/>
-          </a:prstGeom>
-          <a:solidFill>
-            <a:srgbClr val="1F2C56"/>
-          </a:solidFill>
-          <a:ln>
-            <a:noFill/>
-          </a:ln>
-        </p:spPr>
-        <p:style>
-          <a:lnRef idx="1">
-            <a:schemeClr val="accent1"/>
-          </a:lnRef>
-          <a:fillRef idx="3">
-            <a:schemeClr val="accent1"/>
-          </a:fillRef>
-          <a:effectRef idx="2">
-            <a:schemeClr val="accent1"/>
-          </a:effectRef>
-          <a:fontRef idx="minor">
-            <a:schemeClr val="lt1"/>
-          </a:fontRef>
-        </p:style>
-        <p:txBody>
-          <a:bodyPr rtlCol="0" anchor="ctr"/>
-          <a:lstStyle/>
-          <a:p>
-            <a:pPr algn="ctr"/>
-          </a:p>
-        </p:txBody>
-      </p:sp>
-      <p:sp>
-        <p:nvSpPr>
-          <p:cNvPr id="4" name="TextBox 3"/>
+          <p:cNvPr id="3" name="TextBox 2"/>
           <p:cNvSpPr txBox="1"/>
           <p:nvPr/>
         </p:nvSpPr>
         <p:spPr>
           <a:xfrm>
-            <a:off x="685800" y="109728"/>
-            <a:ext cx="10817352" cy="228600"/>
+            <a:off x="685800" y="2377440"/>
+            <a:ext cx="10817352" cy="365760"/>
           </a:xfrm>
           <a:prstGeom prst="rect">
             <a:avLst/>
@@ -5337,70 +5442,27 @@
           <a:p>
             <a:pPr algn="l"/>
             <a:r>
-              <a:rPr sz="750">
-                <a:solidFill>
-                  <a:srgbClr val="78808C"/>
+              <a:rPr sz="1200">
+                <a:solidFill>
+                  <a:srgbClr val="D9C089"/>
                 </a:solidFill>
                 <a:latin typeface="Consolas"/>
               </a:rPr>
-              <a:t>M09  ·  INHALT</a:t>
-            </a:r>
-          </a:p>
-        </p:txBody>
-      </p:sp>
-      <p:sp>
-        <p:nvSpPr>
-          <p:cNvPr id="5" name="Rectangle 4"/>
+              <a:t>11:10–11:40</a:t>
+            </a:r>
+          </a:p>
+        </p:txBody>
+      </p:sp>
+      <p:sp>
+        <p:nvSpPr>
+          <p:cNvPr id="4" name="Rectangle 3"/>
           <p:cNvSpPr/>
           <p:nvPr/>
         </p:nvSpPr>
         <p:spPr>
           <a:xfrm>
-            <a:off x="0" y="1234440"/>
-            <a:ext cx="12188952" cy="12700"/>
-          </a:xfrm>
-          <a:prstGeom prst="rect">
-            <a:avLst/>
-          </a:prstGeom>
-          <a:solidFill>
-            <a:srgbClr val="D8DFE4"/>
-          </a:solidFill>
-          <a:ln>
-            <a:noFill/>
-          </a:ln>
-        </p:spPr>
-        <p:style>
-          <a:lnRef idx="1">
-            <a:schemeClr val="accent1"/>
-          </a:lnRef>
-          <a:fillRef idx="3">
-            <a:schemeClr val="accent1"/>
-          </a:fillRef>
-          <a:effectRef idx="2">
-            <a:schemeClr val="accent1"/>
-          </a:effectRef>
-          <a:fontRef idx="minor">
-            <a:schemeClr val="lt1"/>
-          </a:fontRef>
-        </p:style>
-        <p:txBody>
-          <a:bodyPr rtlCol="0" anchor="ctr"/>
-          <a:lstStyle/>
-          <a:p>
-            <a:pPr algn="ctr"/>
-          </a:p>
-        </p:txBody>
-      </p:sp>
-      <p:sp>
-        <p:nvSpPr>
-          <p:cNvPr id="6" name="Rectangle 5"/>
-          <p:cNvSpPr/>
-          <p:nvPr/>
-        </p:nvSpPr>
-        <p:spPr>
-          <a:xfrm>
-            <a:off x="685800" y="502920"/>
-            <a:ext cx="36576" cy="658368"/>
+            <a:off x="685800" y="2788920"/>
+            <a:ext cx="548640" cy="38100"/>
           </a:xfrm>
           <a:prstGeom prst="rect">
             <a:avLst/>
@@ -5436,14 +5498,14 @@
       </p:sp>
       <p:sp>
         <p:nvSpPr>
-          <p:cNvPr id="7" name="TextBox 6"/>
+          <p:cNvPr id="5" name="TextBox 4"/>
           <p:cNvSpPr txBox="1"/>
           <p:nvPr/>
         </p:nvSpPr>
         <p:spPr>
           <a:xfrm>
-            <a:off x="813816" y="502920"/>
-            <a:ext cx="10634472" cy="685800"/>
+            <a:off x="685800" y="3017520"/>
+            <a:ext cx="10817352" cy="1463040"/>
           </a:xfrm>
           <a:prstGeom prst="rect">
             <a:avLst/>
@@ -5458,27 +5520,27 @@
           <a:p>
             <a:pPr algn="l"/>
             <a:r>
-              <a:rPr sz="2400" b="1" i="0">
-                <a:solidFill>
-                  <a:srgbClr val="1F2C56"/>
+              <a:rPr sz="4000" b="1" i="0">
+                <a:solidFill>
+                  <a:srgbClr val="FFFFFF"/>
                 </a:solidFill>
                 <a:latin typeface="Arial"/>
               </a:rPr>
-              <a:t>AB-2: Mein 3-Monats-Expertiseplan</a:t>
-            </a:r>
-          </a:p>
-        </p:txBody>
-      </p:sp>
-      <p:sp>
-        <p:nvSpPr>
-          <p:cNvPr id="8" name="TextBox 7"/>
+              <a:t>PESTEL</a:t>
+            </a:r>
+          </a:p>
+        </p:txBody>
+      </p:sp>
+      <p:sp>
+        <p:nvSpPr>
+          <p:cNvPr id="6" name="TextBox 5"/>
           <p:cNvSpPr txBox="1"/>
           <p:nvPr/>
         </p:nvSpPr>
         <p:spPr>
           <a:xfrm>
-            <a:off x="685800" y="1417320"/>
-            <a:ext cx="10817352" cy="4892040"/>
+            <a:off x="685800" y="4480560"/>
+            <a:ext cx="8653881" cy="1280160"/>
           </a:xfrm>
           <a:prstGeom prst="rect">
             <a:avLst/>
@@ -5486,84 +5548,34 @@
           <a:noFill/>
         </p:spPr>
         <p:txBody>
-          <a:bodyPr wrap="square" anchor="ctr">
+          <a:bodyPr wrap="square">
             <a:spAutoFit/>
           </a:bodyPr>
           <a:lstStyle/>
           <a:p>
-            <a:pPr marL="190500" indent="-190500">
-              <a:spcBef>
-                <a:spcPts val="400"/>
-              </a:spcBef>
-              <a:spcAft>
-                <a:spcPts val="200"/>
-              </a:spcAft>
-            </a:pPr>
-            <a:r>
-              <a:rPr sz="1300">
-                <a:solidFill>
-                  <a:srgbClr val="3D5466"/>
+            <a:pPr algn="l"/>
+            <a:r>
+              <a:rPr sz="1600" b="0" i="0">
+                <a:solidFill>
+                  <a:srgbClr val="C8D2E6"/>
                 </a:solidFill>
                 <a:latin typeface="Arial"/>
               </a:rPr>
-              <a:t>▸  Meine Kernmotivation (Warum diese Branche?):</a:t>
-            </a:r>
-          </a:p>
-        </p:txBody>
-      </p:sp>
-      <p:sp>
-        <p:nvSpPr>
-          <p:cNvPr id="9" name="Rectangle 8"/>
-          <p:cNvSpPr/>
-          <p:nvPr/>
-        </p:nvSpPr>
-        <p:spPr>
-          <a:xfrm>
-            <a:off x="0" y="6510528"/>
-            <a:ext cx="12188952" cy="347472"/>
-          </a:xfrm>
-          <a:prstGeom prst="rect">
-            <a:avLst/>
-          </a:prstGeom>
-          <a:solidFill>
-            <a:srgbClr val="0A1937"/>
-          </a:solidFill>
-          <a:ln>
-            <a:noFill/>
-          </a:ln>
-        </p:spPr>
-        <p:style>
-          <a:lnRef idx="1">
-            <a:schemeClr val="accent1"/>
-          </a:lnRef>
-          <a:fillRef idx="3">
-            <a:schemeClr val="accent1"/>
-          </a:fillRef>
-          <a:effectRef idx="2">
-            <a:schemeClr val="accent1"/>
-          </a:effectRef>
-          <a:fontRef idx="minor">
-            <a:schemeClr val="lt1"/>
-          </a:fontRef>
-        </p:style>
-        <p:txBody>
-          <a:bodyPr rtlCol="0" anchor="ctr"/>
-          <a:lstStyle/>
-          <a:p>
-            <a:pPr algn="ctr"/>
-          </a:p>
-        </p:txBody>
-      </p:sp>
-      <p:sp>
-        <p:nvSpPr>
-          <p:cNvPr id="10" name="TextBox 9"/>
+              <a:t>Das weitere Umfeld der Branche mit PESTEL erfassen.</a:t>
+            </a:r>
+          </a:p>
+        </p:txBody>
+      </p:sp>
+      <p:sp>
+        <p:nvSpPr>
+          <p:cNvPr id="7" name="TextBox 6"/>
           <p:cNvSpPr txBox="1"/>
           <p:nvPr/>
         </p:nvSpPr>
         <p:spPr>
           <a:xfrm>
-            <a:off x="685800" y="6583680"/>
-            <a:ext cx="6490411" cy="256032"/>
+            <a:off x="685800" y="6355080"/>
+            <a:ext cx="10817352" cy="274320"/>
           </a:xfrm>
           <a:prstGeom prst="rect">
             <a:avLst/>
@@ -5580,7 +5592,7 @@
             <a:r>
               <a:rPr sz="700">
                 <a:solidFill>
-                  <a:srgbClr val="A0B4D2"/>
+                  <a:srgbClr val="8CA0C3"/>
                 </a:solidFill>
                 <a:latin typeface="Consolas"/>
               </a:rPr>
@@ -5622,7 +5634,7 @@
             <a:avLst/>
           </a:prstGeom>
           <a:solidFill>
-            <a:srgbClr val="FFFFFF"/>
+            <a:srgbClr val="EDEDF3"/>
           </a:solidFill>
           <a:ln>
             <a:noFill/>
@@ -5723,43 +5735,51 @@
                 </a:solidFill>
                 <a:latin typeface="Consolas"/>
               </a:rPr>
-              <a:t>M09  ·  ÜBERSICHT</a:t>
-            </a:r>
-          </a:p>
-        </p:txBody>
-      </p:sp>
-      <p:sp>
-        <p:nvSpPr>
-          <p:cNvPr id="5" name="TextBox 4"/>
-          <p:cNvSpPr txBox="1"/>
-          <p:nvPr/>
-        </p:nvSpPr>
-        <p:spPr>
-          <a:xfrm>
-            <a:off x="685800" y="502920"/>
-            <a:ext cx="10817352" cy="594360"/>
-          </a:xfrm>
-          <a:prstGeom prst="rect">
-            <a:avLst/>
-          </a:prstGeom>
-          <a:noFill/>
-        </p:spPr>
-        <p:txBody>
-          <a:bodyPr wrap="square">
-            <a:spAutoFit/>
-          </a:bodyPr>
-          <a:lstStyle/>
-          <a:p>
-            <a:pPr algn="l"/>
-            <a:r>
-              <a:rPr sz="2000" b="1" i="0">
-                <a:solidFill>
-                  <a:srgbClr val="1F2C56"/>
-                </a:solidFill>
-                <a:latin typeface="Arial"/>
-              </a:rPr>
-              <a:t>AB-2: Mein 3-Monats-Expertiseplan</a:t>
-            </a:r>
+              <a:t>M09  ·  INHALT</a:t>
+            </a:r>
+          </a:p>
+        </p:txBody>
+      </p:sp>
+      <p:sp>
+        <p:nvSpPr>
+          <p:cNvPr id="5" name="Rectangle 4"/>
+          <p:cNvSpPr/>
+          <p:nvPr/>
+        </p:nvSpPr>
+        <p:spPr>
+          <a:xfrm>
+            <a:off x="0" y="1234440"/>
+            <a:ext cx="12188952" cy="12700"/>
+          </a:xfrm>
+          <a:prstGeom prst="rect">
+            <a:avLst/>
+          </a:prstGeom>
+          <a:solidFill>
+            <a:srgbClr val="D8DFE4"/>
+          </a:solidFill>
+          <a:ln>
+            <a:noFill/>
+          </a:ln>
+        </p:spPr>
+        <p:style>
+          <a:lnRef idx="1">
+            <a:schemeClr val="accent1"/>
+          </a:lnRef>
+          <a:fillRef idx="3">
+            <a:schemeClr val="accent1"/>
+          </a:fillRef>
+          <a:effectRef idx="2">
+            <a:schemeClr val="accent1"/>
+          </a:effectRef>
+          <a:fontRef idx="minor">
+            <a:schemeClr val="lt1"/>
+          </a:fontRef>
+        </p:style>
+        <p:txBody>
+          <a:bodyPr rtlCol="0" anchor="ctr"/>
+          <a:lstStyle/>
+          <a:p>
+            <a:pPr algn="ctr"/>
           </a:p>
         </p:txBody>
       </p:sp>
@@ -5771,8 +5791,8 @@
         </p:nvSpPr>
         <p:spPr>
           <a:xfrm>
-            <a:off x="685800" y="1143000"/>
-            <a:ext cx="10817352" cy="25400"/>
+            <a:off x="685800" y="502920"/>
+            <a:ext cx="36576" cy="658368"/>
           </a:xfrm>
           <a:prstGeom prst="rect">
             <a:avLst/>
@@ -5806,289 +5826,124 @@
           </a:p>
         </p:txBody>
       </p:sp>
-      <p:graphicFrame>
-        <p:nvGraphicFramePr>
-          <p:cNvPr id="7" name="Table 6"/>
-          <p:cNvGraphicFramePr>
-            <a:graphicFrameLocks noGrp="1"/>
-          </p:cNvGraphicFramePr>
-          <p:nvPr/>
-        </p:nvGraphicFramePr>
-        <p:xfrm>
-          <a:off x="685800" y="1417320"/>
-          <a:ext cx="10817352" cy="1536192"/>
-        </p:xfrm>
-        <a:graphic>
-          <a:graphicData uri="http://schemas.openxmlformats.org/drawingml/2006/table">
-            <a:tbl>
-              <a:tblPr firstRow="1" bandRow="1">
-                <a:tableStyleId>{5C22544A-7EE6-4342-B048-85BDC9FD1C3A}</a:tableStyleId>
-              </a:tblPr>
-              <a:tblGrid>
-                <a:gridCol w="2704338"/>
-                <a:gridCol w="2704338"/>
-                <a:gridCol w="2704338"/>
-                <a:gridCol w="2704338"/>
-              </a:tblGrid>
-              <a:tr h="384048">
-                <a:tc>
-                  <a:txBody>
-                    <a:bodyPr/>
-                    <a:lstStyle/>
-                    <a:p>
-                      <a:r>
-                        <a:rPr sz="1100" b="1">
-                          <a:solidFill>
-                            <a:srgbClr val="FFFFFF"/>
-                          </a:solidFill>
-                          <a:latin typeface="Arial"/>
-                        </a:rPr>
-                        <a:t>Monat</a:t>
-                      </a:r>
-                    </a:p>
-                  </a:txBody>
-                  <a:tcPr>
-                    <a:solidFill>
-                      <a:srgbClr val="1F2C56"/>
-                    </a:solidFill>
-                  </a:tcPr>
-                </a:tc>
-                <a:tc>
-                  <a:txBody>
-                    <a:bodyPr/>
-                    <a:lstStyle/>
-                    <a:p>
-                      <a:r>
-                        <a:rPr sz="1100" b="1">
-                          <a:solidFill>
-                            <a:srgbClr val="FFFFFF"/>
-                          </a:solidFill>
-                          <a:latin typeface="Arial"/>
-                        </a:rPr>
-                        <a:t>Schwerpunkt</a:t>
-                      </a:r>
-                    </a:p>
-                  </a:txBody>
-                  <a:tcPr>
-                    <a:solidFill>
-                      <a:srgbClr val="1F2C56"/>
-                    </a:solidFill>
-                  </a:tcPr>
-                </a:tc>
-                <a:tc>
-                  <a:txBody>
-                    <a:bodyPr/>
-                    <a:lstStyle/>
-                    <a:p>
-                      <a:r>
-                        <a:rPr sz="1100" b="1">
-                          <a:solidFill>
-                            <a:srgbClr val="FFFFFF"/>
-                          </a:solidFill>
-                          <a:latin typeface="Arial"/>
-                        </a:rPr>
-                        <a:t>Konkrete Aktivität</a:t>
-                      </a:r>
-                    </a:p>
-                  </a:txBody>
-                  <a:tcPr>
-                    <a:solidFill>
-                      <a:srgbClr val="1F2C56"/>
-                    </a:solidFill>
-                  </a:tcPr>
-                </a:tc>
-                <a:tc>
-                  <a:txBody>
-                    <a:bodyPr/>
-                    <a:lstStyle/>
-                    <a:p>
-                      <a:r>
-                        <a:rPr sz="1100" b="1">
-                          <a:solidFill>
-                            <a:srgbClr val="FFFFFF"/>
-                          </a:solidFill>
-                          <a:latin typeface="Arial"/>
-                        </a:rPr>
-                        <a:t>Erwartetes Ergebnis</a:t>
-                      </a:r>
-                    </a:p>
-                  </a:txBody>
-                  <a:tcPr>
-                    <a:solidFill>
-                      <a:srgbClr val="1F2C56"/>
-                    </a:solidFill>
-                  </a:tcPr>
-                </a:tc>
-              </a:tr>
-              <a:tr h="384048">
-                <a:tc>
-                  <a:txBody>
-                    <a:bodyPr/>
-                    <a:lstStyle/>
-                    <a:p>
-                      <a:r>
-                        <a:rPr sz="1050">
-                          <a:solidFill>
-                            <a:srgbClr val="3D5466"/>
-                          </a:solidFill>
-                          <a:latin typeface="Arial"/>
-                        </a:rPr>
-                        <a:t>Monat 1</a:t>
-                      </a:r>
-                    </a:p>
-                  </a:txBody>
-                  <a:tcPr/>
-                </a:tc>
-                <a:tc>
-                  <a:txBody>
-                    <a:bodyPr/>
-                    <a:lstStyle/>
-                    <a:p>
-                      <a:r>
-                        <a:rPr sz="1050">
-                          <a:solidFill>
-                            <a:srgbClr val="3D5466"/>
-                          </a:solidFill>
-                          <a:latin typeface="Arial"/>
-                        </a:rPr>
-                        <a:t>Strukturwissen</a:t>
-                      </a:r>
-                    </a:p>
-                  </a:txBody>
-                  <a:tcPr/>
-                </a:tc>
-                <a:tc>
-                  <a:txBody>
-                    <a:bodyPr/>
-                    <a:lstStyle/>
-                    <a:p/>
-                  </a:txBody>
-                  <a:tcPr/>
-                </a:tc>
-                <a:tc>
-                  <a:txBody>
-                    <a:bodyPr/>
-                    <a:lstStyle/>
-                    <a:p/>
-                  </a:txBody>
-                  <a:tcPr/>
-                </a:tc>
-              </a:tr>
-              <a:tr h="384048">
-                <a:tc>
-                  <a:txBody>
-                    <a:bodyPr/>
-                    <a:lstStyle/>
-                    <a:p>
-                      <a:r>
-                        <a:rPr sz="1050">
-                          <a:solidFill>
-                            <a:srgbClr val="3D5466"/>
-                          </a:solidFill>
-                          <a:latin typeface="Arial"/>
-                        </a:rPr>
-                        <a:t>Monat 2</a:t>
-                      </a:r>
-                    </a:p>
-                  </a:txBody>
-                  <a:tcPr/>
-                </a:tc>
-                <a:tc>
-                  <a:txBody>
-                    <a:bodyPr/>
-                    <a:lstStyle/>
-                    <a:p>
-                      <a:r>
-                        <a:rPr sz="1050">
-                          <a:solidFill>
-                            <a:srgbClr val="3D5466"/>
-                          </a:solidFill>
-                          <a:latin typeface="Arial"/>
-                        </a:rPr>
-                        <a:t>Kundengespräche</a:t>
-                      </a:r>
-                    </a:p>
-                  </a:txBody>
-                  <a:tcPr/>
-                </a:tc>
-                <a:tc>
-                  <a:txBody>
-                    <a:bodyPr/>
-                    <a:lstStyle/>
-                    <a:p/>
-                  </a:txBody>
-                  <a:tcPr/>
-                </a:tc>
-                <a:tc>
-                  <a:txBody>
-                    <a:bodyPr/>
-                    <a:lstStyle/>
-                    <a:p/>
-                  </a:txBody>
-                  <a:tcPr/>
-                </a:tc>
-              </a:tr>
-              <a:tr h="384048">
-                <a:tc>
-                  <a:txBody>
-                    <a:bodyPr/>
-                    <a:lstStyle/>
-                    <a:p>
-                      <a:r>
-                        <a:rPr sz="1050">
-                          <a:solidFill>
-                            <a:srgbClr val="3D5466"/>
-                          </a:solidFill>
-                          <a:latin typeface="Arial"/>
-                        </a:rPr>
-                        <a:t>Monat 3</a:t>
-                      </a:r>
-                    </a:p>
-                  </a:txBody>
-                  <a:tcPr/>
-                </a:tc>
-                <a:tc>
-                  <a:txBody>
-                    <a:bodyPr/>
-                    <a:lstStyle/>
-                    <a:p>
-                      <a:r>
-                        <a:rPr sz="1050">
-                          <a:solidFill>
-                            <a:srgbClr val="3D5466"/>
-                          </a:solidFill>
-                          <a:latin typeface="Arial"/>
-                        </a:rPr>
-                        <a:t>Netzwerk &amp; Portfolio</a:t>
-                      </a:r>
-                    </a:p>
-                  </a:txBody>
-                  <a:tcPr/>
-                </a:tc>
-                <a:tc>
-                  <a:txBody>
-                    <a:bodyPr/>
-                    <a:lstStyle/>
-                    <a:p/>
-                  </a:txBody>
-                  <a:tcPr/>
-                </a:tc>
-                <a:tc>
-                  <a:txBody>
-                    <a:bodyPr/>
-                    <a:lstStyle/>
-                    <a:p/>
-                  </a:txBody>
-                  <a:tcPr/>
-                </a:tc>
-              </a:tr>
-            </a:tbl>
-          </a:graphicData>
-        </a:graphic>
-      </p:graphicFrame>
-      <p:sp>
-        <p:nvSpPr>
-          <p:cNvPr id="8" name="Rectangle 7"/>
+      <p:sp>
+        <p:nvSpPr>
+          <p:cNvPr id="7" name="TextBox 6"/>
+          <p:cNvSpPr txBox="1"/>
+          <p:nvPr/>
+        </p:nvSpPr>
+        <p:spPr>
+          <a:xfrm>
+            <a:off x="813816" y="502920"/>
+            <a:ext cx="10634472" cy="685800"/>
+          </a:xfrm>
+          <a:prstGeom prst="rect">
+            <a:avLst/>
+          </a:prstGeom>
+          <a:noFill/>
+        </p:spPr>
+        <p:txBody>
+          <a:bodyPr wrap="square">
+            <a:spAutoFit/>
+          </a:bodyPr>
+          <a:lstStyle/>
+          <a:p>
+            <a:pPr algn="l"/>
+            <a:r>
+              <a:rPr sz="2400" b="1" i="0">
+                <a:solidFill>
+                  <a:srgbClr val="1F2C56"/>
+                </a:solidFill>
+                <a:latin typeface="Arial"/>
+              </a:rPr>
+              <a:t>Das Umfeld der Branche erfassen</a:t>
+            </a:r>
+          </a:p>
+        </p:txBody>
+      </p:sp>
+      <p:sp>
+        <p:nvSpPr>
+          <p:cNvPr id="8" name="TextBox 7"/>
+          <p:cNvSpPr txBox="1"/>
+          <p:nvPr/>
+        </p:nvSpPr>
+        <p:spPr>
+          <a:xfrm>
+            <a:off x="685800" y="1417320"/>
+            <a:ext cx="10817352" cy="4892040"/>
+          </a:xfrm>
+          <a:prstGeom prst="rect">
+            <a:avLst/>
+          </a:prstGeom>
+          <a:noFill/>
+        </p:spPr>
+        <p:txBody>
+          <a:bodyPr wrap="square" anchor="ctr">
+            <a:spAutoFit/>
+          </a:bodyPr>
+          <a:lstStyle/>
+          <a:p>
+            <a:pPr marL="177800" indent="-177800">
+              <a:spcBef>
+                <a:spcPts val="600"/>
+              </a:spcBef>
+              <a:spcAft>
+                <a:spcPts val="200"/>
+              </a:spcAft>
+            </a:pPr>
+            <a:r>
+              <a:rPr sz="1200" i="1">
+                <a:solidFill>
+                  <a:srgbClr val="3D5466"/>
+                </a:solidFill>
+                <a:latin typeface="Arial"/>
+              </a:rPr>
+              <a:t>→  Five Forces zeigt die Branche, PESTEL zeigt ihr Umfeld – erst zusammen ergeben sie das vollständige Bild.</a:t>
+            </a:r>
+          </a:p>
+          <a:p>
+            <a:pPr marL="190500" indent="-190500">
+              <a:spcBef>
+                <a:spcPts val="400"/>
+              </a:spcBef>
+              <a:spcAft>
+                <a:spcPts val="200"/>
+              </a:spcAft>
+            </a:pPr>
+            <a:r>
+              <a:rPr sz="1300">
+                <a:solidFill>
+                  <a:srgbClr val="3D5466"/>
+                </a:solidFill>
+                <a:latin typeface="Arial"/>
+              </a:rPr>
+              <a:t>▸  Politisch, ökonomisch, sozial, technologisch, ökologisch, rechtlich.</a:t>
+            </a:r>
+          </a:p>
+          <a:p>
+            <a:pPr marL="190500" indent="-190500">
+              <a:spcBef>
+                <a:spcPts val="400"/>
+              </a:spcBef>
+              <a:spcAft>
+                <a:spcPts val="200"/>
+              </a:spcAft>
+            </a:pPr>
+            <a:r>
+              <a:rPr sz="1300">
+                <a:solidFill>
+                  <a:srgbClr val="3D5466"/>
+                </a:solidFill>
+                <a:latin typeface="Arial"/>
+              </a:rPr>
+              <a:t>▸  PESTEL fängt die langfristigen Treiber ein, die eine Branche verschieben.</a:t>
+            </a:r>
+          </a:p>
+        </p:txBody>
+      </p:sp>
+      <p:sp>
+        <p:nvSpPr>
+          <p:cNvPr id="9" name="Rectangle 8"/>
           <p:cNvSpPr/>
           <p:nvPr/>
         </p:nvSpPr>
@@ -6131,7 +5986,7 @@
       </p:sp>
       <p:sp>
         <p:nvSpPr>
-          <p:cNvPr id="9" name="TextBox 8"/>
+          <p:cNvPr id="10" name="TextBox 9"/>
           <p:cNvSpPr txBox="1"/>
           <p:nvPr/>
         </p:nvSpPr>
@@ -6160,41 +6015,6 @@
                 <a:latin typeface="Consolas"/>
               </a:rPr>
               <a:t>FKB Campus  ·  M09</a:t>
-            </a:r>
-          </a:p>
-        </p:txBody>
-      </p:sp>
-      <p:sp>
-        <p:nvSpPr>
-          <p:cNvPr id="10" name="TextBox 9"/>
-          <p:cNvSpPr txBox="1"/>
-          <p:nvPr/>
-        </p:nvSpPr>
-        <p:spPr>
-          <a:xfrm>
-            <a:off x="7176211" y="6583680"/>
-            <a:ext cx="4326940" cy="256032"/>
-          </a:xfrm>
-          <a:prstGeom prst="rect">
-            <a:avLst/>
-          </a:prstGeom>
-          <a:noFill/>
-        </p:spPr>
-        <p:txBody>
-          <a:bodyPr wrap="none">
-            <a:spAutoFit/>
-          </a:bodyPr>
-          <a:lstStyle/>
-          <a:p>
-            <a:pPr algn="r"/>
-            <a:r>
-              <a:rPr sz="700">
-                <a:solidFill>
-                  <a:srgbClr val="A0B4D2"/>
-                </a:solidFill>
-                <a:latin typeface="Consolas"/>
-              </a:rPr>
-              <a:t>Übersicht</a:t>
             </a:r>
           </a:p>
         </p:txBody>
@@ -6232,7 +6052,7 @@
             <a:avLst/>
           </a:prstGeom>
           <a:solidFill>
-            <a:srgbClr val="EDEDF3"/>
+            <a:srgbClr val="FFFFFF"/>
           </a:solidFill>
           <a:ln>
             <a:noFill/>
@@ -6333,6 +6153,604 @@
                 </a:solidFill>
                 <a:latin typeface="Consolas"/>
               </a:rPr>
+              <a:t>M09  ·  SCHAUBILD</a:t>
+            </a:r>
+          </a:p>
+        </p:txBody>
+      </p:sp>
+      <p:sp>
+        <p:nvSpPr>
+          <p:cNvPr id="5" name="TextBox 4"/>
+          <p:cNvSpPr txBox="1"/>
+          <p:nvPr/>
+        </p:nvSpPr>
+        <p:spPr>
+          <a:xfrm>
+            <a:off x="685800" y="502920"/>
+            <a:ext cx="10817352" cy="594360"/>
+          </a:xfrm>
+          <a:prstGeom prst="rect">
+            <a:avLst/>
+          </a:prstGeom>
+          <a:noFill/>
+        </p:spPr>
+        <p:txBody>
+          <a:bodyPr wrap="square">
+            <a:spAutoFit/>
+          </a:bodyPr>
+          <a:lstStyle/>
+          <a:p>
+            <a:pPr algn="l"/>
+            <a:r>
+              <a:rPr sz="2000" b="1" i="0">
+                <a:solidFill>
+                  <a:srgbClr val="1F2C56"/>
+                </a:solidFill>
+                <a:latin typeface="Arial"/>
+              </a:rPr>
+              <a:t>PESTEL-Analyse für die Bankpraxis</a:t>
+            </a:r>
+          </a:p>
+        </p:txBody>
+      </p:sp>
+      <p:sp>
+        <p:nvSpPr>
+          <p:cNvPr id="6" name="Rectangle 5"/>
+          <p:cNvSpPr/>
+          <p:nvPr/>
+        </p:nvSpPr>
+        <p:spPr>
+          <a:xfrm>
+            <a:off x="685800" y="1143000"/>
+            <a:ext cx="10817352" cy="25400"/>
+          </a:xfrm>
+          <a:prstGeom prst="rect">
+            <a:avLst/>
+          </a:prstGeom>
+          <a:solidFill>
+            <a:srgbClr val="D9C089"/>
+          </a:solidFill>
+          <a:ln>
+            <a:noFill/>
+          </a:ln>
+        </p:spPr>
+        <p:style>
+          <a:lnRef idx="1">
+            <a:schemeClr val="accent1"/>
+          </a:lnRef>
+          <a:fillRef idx="3">
+            <a:schemeClr val="accent1"/>
+          </a:fillRef>
+          <a:effectRef idx="2">
+            <a:schemeClr val="accent1"/>
+          </a:effectRef>
+          <a:fontRef idx="minor">
+            <a:schemeClr val="lt1"/>
+          </a:fontRef>
+        </p:style>
+        <p:txBody>
+          <a:bodyPr rtlCol="0" anchor="ctr"/>
+          <a:lstStyle/>
+          <a:p>
+            <a:pPr algn="ctr"/>
+          </a:p>
+        </p:txBody>
+      </p:sp>
+      <p:pic>
+        <p:nvPicPr>
+          <p:cNvPr id="7" name="Picture 6" descr="image.png"/>
+          <p:cNvPicPr>
+            <a:picLocks noChangeAspect="1"/>
+          </p:cNvPicPr>
+          <p:nvPr/>
+        </p:nvPicPr>
+        <p:blipFill>
+          <a:blip r:embed="rId2"/>
+          <a:stretch>
+            <a:fillRect/>
+          </a:stretch>
+        </p:blipFill>
+        <p:spPr>
+          <a:xfrm>
+            <a:off x="2303489" y="1325880"/>
+            <a:ext cx="7581973" cy="4937760"/>
+          </a:xfrm>
+          <a:prstGeom prst="rect">
+            <a:avLst/>
+          </a:prstGeom>
+        </p:spPr>
+      </p:pic>
+      <p:sp>
+        <p:nvSpPr>
+          <p:cNvPr id="8" name="Rectangle 7"/>
+          <p:cNvSpPr/>
+          <p:nvPr/>
+        </p:nvSpPr>
+        <p:spPr>
+          <a:xfrm>
+            <a:off x="0" y="6510528"/>
+            <a:ext cx="12188952" cy="347472"/>
+          </a:xfrm>
+          <a:prstGeom prst="rect">
+            <a:avLst/>
+          </a:prstGeom>
+          <a:solidFill>
+            <a:srgbClr val="0A1937"/>
+          </a:solidFill>
+          <a:ln>
+            <a:noFill/>
+          </a:ln>
+        </p:spPr>
+        <p:style>
+          <a:lnRef idx="1">
+            <a:schemeClr val="accent1"/>
+          </a:lnRef>
+          <a:fillRef idx="3">
+            <a:schemeClr val="accent1"/>
+          </a:fillRef>
+          <a:effectRef idx="2">
+            <a:schemeClr val="accent1"/>
+          </a:effectRef>
+          <a:fontRef idx="minor">
+            <a:schemeClr val="lt1"/>
+          </a:fontRef>
+        </p:style>
+        <p:txBody>
+          <a:bodyPr rtlCol="0" anchor="ctr"/>
+          <a:lstStyle/>
+          <a:p>
+            <a:pPr algn="ctr"/>
+          </a:p>
+        </p:txBody>
+      </p:sp>
+      <p:sp>
+        <p:nvSpPr>
+          <p:cNvPr id="9" name="TextBox 8"/>
+          <p:cNvSpPr txBox="1"/>
+          <p:nvPr/>
+        </p:nvSpPr>
+        <p:spPr>
+          <a:xfrm>
+            <a:off x="685800" y="6583680"/>
+            <a:ext cx="6490411" cy="256032"/>
+          </a:xfrm>
+          <a:prstGeom prst="rect">
+            <a:avLst/>
+          </a:prstGeom>
+          <a:noFill/>
+        </p:spPr>
+        <p:txBody>
+          <a:bodyPr wrap="none">
+            <a:spAutoFit/>
+          </a:bodyPr>
+          <a:lstStyle/>
+          <a:p>
+            <a:pPr algn="l"/>
+            <a:r>
+              <a:rPr sz="700">
+                <a:solidFill>
+                  <a:srgbClr val="A0B4D2"/>
+                </a:solidFill>
+                <a:latin typeface="Consolas"/>
+              </a:rPr>
+              <a:t>FKB Campus  ·  M09</a:t>
+            </a:r>
+          </a:p>
+        </p:txBody>
+      </p:sp>
+      <p:sp>
+        <p:nvSpPr>
+          <p:cNvPr id="10" name="TextBox 9"/>
+          <p:cNvSpPr txBox="1"/>
+          <p:nvPr/>
+        </p:nvSpPr>
+        <p:spPr>
+          <a:xfrm>
+            <a:off x="7176211" y="6583680"/>
+            <a:ext cx="4326940" cy="256032"/>
+          </a:xfrm>
+          <a:prstGeom prst="rect">
+            <a:avLst/>
+          </a:prstGeom>
+          <a:noFill/>
+        </p:spPr>
+        <p:txBody>
+          <a:bodyPr wrap="none">
+            <a:spAutoFit/>
+          </a:bodyPr>
+          <a:lstStyle/>
+          <a:p>
+            <a:pPr algn="r"/>
+            <a:r>
+              <a:rPr sz="700">
+                <a:solidFill>
+                  <a:srgbClr val="A0B4D2"/>
+                </a:solidFill>
+                <a:latin typeface="Consolas"/>
+              </a:rPr>
+              <a:t>Schaubild</a:t>
+            </a:r>
+          </a:p>
+        </p:txBody>
+      </p:sp>
+    </p:spTree>
+  </p:cSld>
+  <p:clrMapOvr>
+    <a:masterClrMapping/>
+  </p:clrMapOvr>
+</p:sld>
+</file>
+
+<file path=ppt/slides/slide14.xml><?xml version="1.0" encoding="utf-8"?>
+<p:sld xmlns:a="http://schemas.openxmlformats.org/drawingml/2006/main" xmlns:p="http://schemas.openxmlformats.org/presentationml/2006/main" xmlns:r="http://schemas.openxmlformats.org/officeDocument/2006/relationships">
+  <p:cSld>
+    <p:spTree>
+      <p:nvGrpSpPr>
+        <p:cNvPr id="1" name=""/>
+        <p:cNvGrpSpPr/>
+        <p:nvPr/>
+      </p:nvGrpSpPr>
+      <p:grpSpPr/>
+      <p:sp>
+        <p:nvSpPr>
+          <p:cNvPr id="2" name="Rectangle 1"/>
+          <p:cNvSpPr/>
+          <p:nvPr/>
+        </p:nvSpPr>
+        <p:spPr>
+          <a:xfrm>
+            <a:off x="0" y="0"/>
+            <a:ext cx="12188952" cy="6858000"/>
+          </a:xfrm>
+          <a:prstGeom prst="rect">
+            <a:avLst/>
+          </a:prstGeom>
+          <a:solidFill>
+            <a:srgbClr val="1F2C56"/>
+          </a:solidFill>
+          <a:ln>
+            <a:noFill/>
+          </a:ln>
+        </p:spPr>
+        <p:style>
+          <a:lnRef idx="1">
+            <a:schemeClr val="accent1"/>
+          </a:lnRef>
+          <a:fillRef idx="3">
+            <a:schemeClr val="accent1"/>
+          </a:fillRef>
+          <a:effectRef idx="2">
+            <a:schemeClr val="accent1"/>
+          </a:effectRef>
+          <a:fontRef idx="minor">
+            <a:schemeClr val="lt1"/>
+          </a:fontRef>
+        </p:style>
+        <p:txBody>
+          <a:bodyPr rtlCol="0" anchor="ctr"/>
+          <a:lstStyle/>
+          <a:p>
+            <a:pPr algn="ctr"/>
+          </a:p>
+        </p:txBody>
+      </p:sp>
+      <p:sp>
+        <p:nvSpPr>
+          <p:cNvPr id="3" name="TextBox 2"/>
+          <p:cNvSpPr txBox="1"/>
+          <p:nvPr/>
+        </p:nvSpPr>
+        <p:spPr>
+          <a:xfrm>
+            <a:off x="685800" y="2377440"/>
+            <a:ext cx="10817352" cy="365760"/>
+          </a:xfrm>
+          <a:prstGeom prst="rect">
+            <a:avLst/>
+          </a:prstGeom>
+          <a:noFill/>
+        </p:spPr>
+        <p:txBody>
+          <a:bodyPr wrap="none">
+            <a:spAutoFit/>
+          </a:bodyPr>
+          <a:lstStyle/>
+          <a:p>
+            <a:pPr algn="l"/>
+            <a:r>
+              <a:rPr sz="1200">
+                <a:solidFill>
+                  <a:srgbClr val="D9C089"/>
+                </a:solidFill>
+                <a:latin typeface="Consolas"/>
+              </a:rPr>
+              <a:t>11:40–12:20</a:t>
+            </a:r>
+          </a:p>
+        </p:txBody>
+      </p:sp>
+      <p:sp>
+        <p:nvSpPr>
+          <p:cNvPr id="4" name="Rectangle 3"/>
+          <p:cNvSpPr/>
+          <p:nvPr/>
+        </p:nvSpPr>
+        <p:spPr>
+          <a:xfrm>
+            <a:off x="685800" y="2788920"/>
+            <a:ext cx="548640" cy="38100"/>
+          </a:xfrm>
+          <a:prstGeom prst="rect">
+            <a:avLst/>
+          </a:prstGeom>
+          <a:solidFill>
+            <a:srgbClr val="D9C089"/>
+          </a:solidFill>
+          <a:ln>
+            <a:noFill/>
+          </a:ln>
+        </p:spPr>
+        <p:style>
+          <a:lnRef idx="1">
+            <a:schemeClr val="accent1"/>
+          </a:lnRef>
+          <a:fillRef idx="3">
+            <a:schemeClr val="accent1"/>
+          </a:fillRef>
+          <a:effectRef idx="2">
+            <a:schemeClr val="accent1"/>
+          </a:effectRef>
+          <a:fontRef idx="minor">
+            <a:schemeClr val="lt1"/>
+          </a:fontRef>
+        </p:style>
+        <p:txBody>
+          <a:bodyPr rtlCol="0" anchor="ctr"/>
+          <a:lstStyle/>
+          <a:p>
+            <a:pPr algn="ctr"/>
+          </a:p>
+        </p:txBody>
+      </p:sp>
+      <p:sp>
+        <p:nvSpPr>
+          <p:cNvPr id="5" name="TextBox 4"/>
+          <p:cNvSpPr txBox="1"/>
+          <p:nvPr/>
+        </p:nvSpPr>
+        <p:spPr>
+          <a:xfrm>
+            <a:off x="685800" y="3017520"/>
+            <a:ext cx="10817352" cy="1463040"/>
+          </a:xfrm>
+          <a:prstGeom prst="rect">
+            <a:avLst/>
+          </a:prstGeom>
+          <a:noFill/>
+        </p:spPr>
+        <p:txBody>
+          <a:bodyPr wrap="square">
+            <a:spAutoFit/>
+          </a:bodyPr>
+          <a:lstStyle/>
+          <a:p>
+            <a:pPr algn="l"/>
+            <a:r>
+              <a:rPr sz="4000" b="1" i="0">
+                <a:solidFill>
+                  <a:srgbClr val="FFFFFF"/>
+                </a:solidFill>
+                <a:latin typeface="Arial"/>
+              </a:rPr>
+              <a:t>Informationsquellen</a:t>
+            </a:r>
+          </a:p>
+        </p:txBody>
+      </p:sp>
+      <p:sp>
+        <p:nvSpPr>
+          <p:cNvPr id="6" name="TextBox 5"/>
+          <p:cNvSpPr txBox="1"/>
+          <p:nvPr/>
+        </p:nvSpPr>
+        <p:spPr>
+          <a:xfrm>
+            <a:off x="685800" y="4480560"/>
+            <a:ext cx="8653881" cy="1280160"/>
+          </a:xfrm>
+          <a:prstGeom prst="rect">
+            <a:avLst/>
+          </a:prstGeom>
+          <a:noFill/>
+        </p:spPr>
+        <p:txBody>
+          <a:bodyPr wrap="square">
+            <a:spAutoFit/>
+          </a:bodyPr>
+          <a:lstStyle/>
+          <a:p>
+            <a:pPr algn="l"/>
+            <a:r>
+              <a:rPr sz="1600" b="0" i="0">
+                <a:solidFill>
+                  <a:srgbClr val="C8D2E6"/>
+                </a:solidFill>
+                <a:latin typeface="Arial"/>
+              </a:rPr>
+              <a:t>Wissen, wo valide Brancheninformationen herkommen.</a:t>
+            </a:r>
+          </a:p>
+        </p:txBody>
+      </p:sp>
+      <p:sp>
+        <p:nvSpPr>
+          <p:cNvPr id="7" name="TextBox 6"/>
+          <p:cNvSpPr txBox="1"/>
+          <p:nvPr/>
+        </p:nvSpPr>
+        <p:spPr>
+          <a:xfrm>
+            <a:off x="685800" y="6355080"/>
+            <a:ext cx="10817352" cy="274320"/>
+          </a:xfrm>
+          <a:prstGeom prst="rect">
+            <a:avLst/>
+          </a:prstGeom>
+          <a:noFill/>
+        </p:spPr>
+        <p:txBody>
+          <a:bodyPr wrap="none">
+            <a:spAutoFit/>
+          </a:bodyPr>
+          <a:lstStyle/>
+          <a:p>
+            <a:pPr algn="l"/>
+            <a:r>
+              <a:rPr sz="700">
+                <a:solidFill>
+                  <a:srgbClr val="8CA0C3"/>
+                </a:solidFill>
+                <a:latin typeface="Consolas"/>
+              </a:rPr>
+              <a:t>FKB Campus  ·  M09</a:t>
+            </a:r>
+          </a:p>
+        </p:txBody>
+      </p:sp>
+    </p:spTree>
+  </p:cSld>
+  <p:clrMapOvr>
+    <a:masterClrMapping/>
+  </p:clrMapOvr>
+</p:sld>
+</file>
+
+<file path=ppt/slides/slide15.xml><?xml version="1.0" encoding="utf-8"?>
+<p:sld xmlns:a="http://schemas.openxmlformats.org/drawingml/2006/main" xmlns:p="http://schemas.openxmlformats.org/presentationml/2006/main" xmlns:r="http://schemas.openxmlformats.org/officeDocument/2006/relationships">
+  <p:cSld>
+    <p:spTree>
+      <p:nvGrpSpPr>
+        <p:cNvPr id="1" name=""/>
+        <p:cNvGrpSpPr/>
+        <p:nvPr/>
+      </p:nvGrpSpPr>
+      <p:grpSpPr/>
+      <p:sp>
+        <p:nvSpPr>
+          <p:cNvPr id="2" name="Rectangle 1"/>
+          <p:cNvSpPr/>
+          <p:nvPr/>
+        </p:nvSpPr>
+        <p:spPr>
+          <a:xfrm>
+            <a:off x="0" y="0"/>
+            <a:ext cx="12188952" cy="6858000"/>
+          </a:xfrm>
+          <a:prstGeom prst="rect">
+            <a:avLst/>
+          </a:prstGeom>
+          <a:solidFill>
+            <a:srgbClr val="EDEDF3"/>
+          </a:solidFill>
+          <a:ln>
+            <a:noFill/>
+          </a:ln>
+        </p:spPr>
+        <p:style>
+          <a:lnRef idx="1">
+            <a:schemeClr val="accent1"/>
+          </a:lnRef>
+          <a:fillRef idx="3">
+            <a:schemeClr val="accent1"/>
+          </a:fillRef>
+          <a:effectRef idx="2">
+            <a:schemeClr val="accent1"/>
+          </a:effectRef>
+          <a:fontRef idx="minor">
+            <a:schemeClr val="lt1"/>
+          </a:fontRef>
+        </p:style>
+        <p:txBody>
+          <a:bodyPr rtlCol="0" anchor="ctr"/>
+          <a:lstStyle/>
+          <a:p>
+            <a:pPr algn="ctr"/>
+          </a:p>
+        </p:txBody>
+      </p:sp>
+      <p:sp>
+        <p:nvSpPr>
+          <p:cNvPr id="3" name="Rectangle 2"/>
+          <p:cNvSpPr/>
+          <p:nvPr/>
+        </p:nvSpPr>
+        <p:spPr>
+          <a:xfrm>
+            <a:off x="0" y="0"/>
+            <a:ext cx="12188952" cy="50292"/>
+          </a:xfrm>
+          <a:prstGeom prst="rect">
+            <a:avLst/>
+          </a:prstGeom>
+          <a:solidFill>
+            <a:srgbClr val="1F2C56"/>
+          </a:solidFill>
+          <a:ln>
+            <a:noFill/>
+          </a:ln>
+        </p:spPr>
+        <p:style>
+          <a:lnRef idx="1">
+            <a:schemeClr val="accent1"/>
+          </a:lnRef>
+          <a:fillRef idx="3">
+            <a:schemeClr val="accent1"/>
+          </a:fillRef>
+          <a:effectRef idx="2">
+            <a:schemeClr val="accent1"/>
+          </a:effectRef>
+          <a:fontRef idx="minor">
+            <a:schemeClr val="lt1"/>
+          </a:fontRef>
+        </p:style>
+        <p:txBody>
+          <a:bodyPr rtlCol="0" anchor="ctr"/>
+          <a:lstStyle/>
+          <a:p>
+            <a:pPr algn="ctr"/>
+          </a:p>
+        </p:txBody>
+      </p:sp>
+      <p:sp>
+        <p:nvSpPr>
+          <p:cNvPr id="4" name="TextBox 3"/>
+          <p:cNvSpPr txBox="1"/>
+          <p:nvPr/>
+        </p:nvSpPr>
+        <p:spPr>
+          <a:xfrm>
+            <a:off x="685800" y="109728"/>
+            <a:ext cx="10817352" cy="228600"/>
+          </a:xfrm>
+          <a:prstGeom prst="rect">
+            <a:avLst/>
+          </a:prstGeom>
+          <a:noFill/>
+        </p:spPr>
+        <p:txBody>
+          <a:bodyPr wrap="none">
+            <a:spAutoFit/>
+          </a:bodyPr>
+          <a:lstStyle/>
+          <a:p>
+            <a:pPr algn="l"/>
+            <a:r>
+              <a:rPr sz="750">
+                <a:solidFill>
+                  <a:srgbClr val="78808C"/>
+                </a:solidFill>
+                <a:latin typeface="Consolas"/>
+              </a:rPr>
               <a:t>M09  ·  INHALT</a:t>
             </a:r>
           </a:p>
@@ -6454,7 +6872,7 @@
                 </a:solidFill>
                 <a:latin typeface="Arial"/>
               </a:rPr>
-              <a:t>AB-3: Strukturiertes Branchengespräch – Protokollvorlage</a:t>
+              <a:t>Wo valide Brancheninformationen herkommen</a:t>
             </a:r>
           </a:p>
         </p:txBody>
@@ -6480,6 +6898,25 @@
             <a:spAutoFit/>
           </a:bodyPr>
           <a:lstStyle/>
+          <a:p>
+            <a:pPr marL="177800" indent="-177800">
+              <a:spcBef>
+                <a:spcPts val="600"/>
+              </a:spcBef>
+              <a:spcAft>
+                <a:spcPts val="200"/>
+              </a:spcAft>
+            </a:pPr>
+            <a:r>
+              <a:rPr sz="1200" i="1">
+                <a:solidFill>
+                  <a:srgbClr val="3D5466"/>
+                </a:solidFill>
+                <a:latin typeface="Arial"/>
+              </a:rPr>
+              <a:t>→  Gute Branchenarbeit stützt sich auf belastbare Quellen – nicht auf Bauchgefühl und Gerüchte.</a:t>
+            </a:r>
+          </a:p>
           <a:p>
             <a:pPr marL="190500" indent="-190500">
               <a:spcBef>
@@ -6496,9 +6933,633 @@
                 </a:solidFill>
                 <a:latin typeface="Arial"/>
               </a:rPr>
-              <a:t>▸  Mein wichtigstes Branchenlernen aus diesem Gespräch:</a:t>
-            </a:r>
-          </a:p>
+              <a:t>▸  Fachverbände (ZDH, Innung), DZ BANK Research, IHK-Konjunkturberichte, Fachpresse.</a:t>
+            </a:r>
+          </a:p>
+          <a:p>
+            <a:pPr marL="190500" indent="-190500">
+              <a:spcBef>
+                <a:spcPts val="400"/>
+              </a:spcBef>
+              <a:spcAft>
+                <a:spcPts val="200"/>
+              </a:spcAft>
+            </a:pPr>
+            <a:r>
+              <a:rPr sz="1300">
+                <a:solidFill>
+                  <a:srgbClr val="3D5466"/>
+                </a:solidFill>
+                <a:latin typeface="Arial"/>
+              </a:rPr>
+              <a:t>▸  Quellen quartalsweise aktualisieren; das Kundengespräch selbst ist eine Primärquelle.</a:t>
+            </a:r>
+          </a:p>
+        </p:txBody>
+      </p:sp>
+      <p:sp>
+        <p:nvSpPr>
+          <p:cNvPr id="9" name="Rectangle 8"/>
+          <p:cNvSpPr/>
+          <p:nvPr/>
+        </p:nvSpPr>
+        <p:spPr>
+          <a:xfrm>
+            <a:off x="0" y="6510528"/>
+            <a:ext cx="12188952" cy="347472"/>
+          </a:xfrm>
+          <a:prstGeom prst="rect">
+            <a:avLst/>
+          </a:prstGeom>
+          <a:solidFill>
+            <a:srgbClr val="0A1937"/>
+          </a:solidFill>
+          <a:ln>
+            <a:noFill/>
+          </a:ln>
+        </p:spPr>
+        <p:style>
+          <a:lnRef idx="1">
+            <a:schemeClr val="accent1"/>
+          </a:lnRef>
+          <a:fillRef idx="3">
+            <a:schemeClr val="accent1"/>
+          </a:fillRef>
+          <a:effectRef idx="2">
+            <a:schemeClr val="accent1"/>
+          </a:effectRef>
+          <a:fontRef idx="minor">
+            <a:schemeClr val="lt1"/>
+          </a:fontRef>
+        </p:style>
+        <p:txBody>
+          <a:bodyPr rtlCol="0" anchor="ctr"/>
+          <a:lstStyle/>
+          <a:p>
+            <a:pPr algn="ctr"/>
+          </a:p>
+        </p:txBody>
+      </p:sp>
+      <p:sp>
+        <p:nvSpPr>
+          <p:cNvPr id="10" name="TextBox 9"/>
+          <p:cNvSpPr txBox="1"/>
+          <p:nvPr/>
+        </p:nvSpPr>
+        <p:spPr>
+          <a:xfrm>
+            <a:off x="685800" y="6583680"/>
+            <a:ext cx="6490411" cy="256032"/>
+          </a:xfrm>
+          <a:prstGeom prst="rect">
+            <a:avLst/>
+          </a:prstGeom>
+          <a:noFill/>
+        </p:spPr>
+        <p:txBody>
+          <a:bodyPr wrap="none">
+            <a:spAutoFit/>
+          </a:bodyPr>
+          <a:lstStyle/>
+          <a:p>
+            <a:pPr algn="l"/>
+            <a:r>
+              <a:rPr sz="700">
+                <a:solidFill>
+                  <a:srgbClr val="A0B4D2"/>
+                </a:solidFill>
+                <a:latin typeface="Consolas"/>
+              </a:rPr>
+              <a:t>FKB Campus  ·  M09</a:t>
+            </a:r>
+          </a:p>
+        </p:txBody>
+      </p:sp>
+    </p:spTree>
+  </p:cSld>
+  <p:clrMapOvr>
+    <a:masterClrMapping/>
+  </p:clrMapOvr>
+</p:sld>
+</file>
+
+<file path=ppt/slides/slide16.xml><?xml version="1.0" encoding="utf-8"?>
+<p:sld xmlns:a="http://schemas.openxmlformats.org/drawingml/2006/main" xmlns:p="http://schemas.openxmlformats.org/presentationml/2006/main" xmlns:r="http://schemas.openxmlformats.org/officeDocument/2006/relationships">
+  <p:cSld>
+    <p:spTree>
+      <p:nvGrpSpPr>
+        <p:cNvPr id="1" name=""/>
+        <p:cNvGrpSpPr/>
+        <p:nvPr/>
+      </p:nvGrpSpPr>
+      <p:grpSpPr/>
+      <p:sp>
+        <p:nvSpPr>
+          <p:cNvPr id="2" name="Rectangle 1"/>
+          <p:cNvSpPr/>
+          <p:nvPr/>
+        </p:nvSpPr>
+        <p:spPr>
+          <a:xfrm>
+            <a:off x="0" y="0"/>
+            <a:ext cx="12188952" cy="6858000"/>
+          </a:xfrm>
+          <a:prstGeom prst="rect">
+            <a:avLst/>
+          </a:prstGeom>
+          <a:solidFill>
+            <a:srgbClr val="1F2C56"/>
+          </a:solidFill>
+          <a:ln>
+            <a:noFill/>
+          </a:ln>
+        </p:spPr>
+        <p:style>
+          <a:lnRef idx="1">
+            <a:schemeClr val="accent1"/>
+          </a:lnRef>
+          <a:fillRef idx="3">
+            <a:schemeClr val="accent1"/>
+          </a:fillRef>
+          <a:effectRef idx="2">
+            <a:schemeClr val="accent1"/>
+          </a:effectRef>
+          <a:fontRef idx="minor">
+            <a:schemeClr val="lt1"/>
+          </a:fontRef>
+        </p:style>
+        <p:txBody>
+          <a:bodyPr rtlCol="0" anchor="ctr"/>
+          <a:lstStyle/>
+          <a:p>
+            <a:pPr algn="ctr"/>
+          </a:p>
+        </p:txBody>
+      </p:sp>
+      <p:sp>
+        <p:nvSpPr>
+          <p:cNvPr id="3" name="TextBox 2"/>
+          <p:cNvSpPr txBox="1"/>
+          <p:nvPr/>
+        </p:nvSpPr>
+        <p:spPr>
+          <a:xfrm>
+            <a:off x="685800" y="2377440"/>
+            <a:ext cx="10817352" cy="365760"/>
+          </a:xfrm>
+          <a:prstGeom prst="rect">
+            <a:avLst/>
+          </a:prstGeom>
+          <a:noFill/>
+        </p:spPr>
+        <p:txBody>
+          <a:bodyPr wrap="none">
+            <a:spAutoFit/>
+          </a:bodyPr>
+          <a:lstStyle/>
+          <a:p>
+            <a:pPr algn="l"/>
+            <a:r>
+              <a:rPr sz="1200">
+                <a:solidFill>
+                  <a:srgbClr val="D9C089"/>
+                </a:solidFill>
+                <a:latin typeface="Consolas"/>
+              </a:rPr>
+              <a:t>13:10–13:45</a:t>
+            </a:r>
+          </a:p>
+        </p:txBody>
+      </p:sp>
+      <p:sp>
+        <p:nvSpPr>
+          <p:cNvPr id="4" name="Rectangle 3"/>
+          <p:cNvSpPr/>
+          <p:nvPr/>
+        </p:nvSpPr>
+        <p:spPr>
+          <a:xfrm>
+            <a:off x="685800" y="2788920"/>
+            <a:ext cx="548640" cy="38100"/>
+          </a:xfrm>
+          <a:prstGeom prst="rect">
+            <a:avLst/>
+          </a:prstGeom>
+          <a:solidFill>
+            <a:srgbClr val="D9C089"/>
+          </a:solidFill>
+          <a:ln>
+            <a:noFill/>
+          </a:ln>
+        </p:spPr>
+        <p:style>
+          <a:lnRef idx="1">
+            <a:schemeClr val="accent1"/>
+          </a:lnRef>
+          <a:fillRef idx="3">
+            <a:schemeClr val="accent1"/>
+          </a:fillRef>
+          <a:effectRef idx="2">
+            <a:schemeClr val="accent1"/>
+          </a:effectRef>
+          <a:fontRef idx="minor">
+            <a:schemeClr val="lt1"/>
+          </a:fontRef>
+        </p:style>
+        <p:txBody>
+          <a:bodyPr rtlCol="0" anchor="ctr"/>
+          <a:lstStyle/>
+          <a:p>
+            <a:pPr algn="ctr"/>
+          </a:p>
+        </p:txBody>
+      </p:sp>
+      <p:sp>
+        <p:nvSpPr>
+          <p:cNvPr id="5" name="TextBox 4"/>
+          <p:cNvSpPr txBox="1"/>
+          <p:nvPr/>
+        </p:nvSpPr>
+        <p:spPr>
+          <a:xfrm>
+            <a:off x="685800" y="3017520"/>
+            <a:ext cx="10817352" cy="1463040"/>
+          </a:xfrm>
+          <a:prstGeom prst="rect">
+            <a:avLst/>
+          </a:prstGeom>
+          <a:noFill/>
+        </p:spPr>
+        <p:txBody>
+          <a:bodyPr wrap="square">
+            <a:spAutoFit/>
+          </a:bodyPr>
+          <a:lstStyle/>
+          <a:p>
+            <a:pPr algn="l"/>
+            <a:r>
+              <a:rPr sz="4000" b="1" i="0">
+                <a:solidFill>
+                  <a:srgbClr val="FFFFFF"/>
+                </a:solidFill>
+                <a:latin typeface="Arial"/>
+              </a:rPr>
+              <a:t>Netzwerkstrategie</a:t>
+            </a:r>
+          </a:p>
+        </p:txBody>
+      </p:sp>
+      <p:sp>
+        <p:nvSpPr>
+          <p:cNvPr id="6" name="TextBox 5"/>
+          <p:cNvSpPr txBox="1"/>
+          <p:nvPr/>
+        </p:nvSpPr>
+        <p:spPr>
+          <a:xfrm>
+            <a:off x="685800" y="4480560"/>
+            <a:ext cx="8653881" cy="1280160"/>
+          </a:xfrm>
+          <a:prstGeom prst="rect">
+            <a:avLst/>
+          </a:prstGeom>
+          <a:noFill/>
+        </p:spPr>
+        <p:txBody>
+          <a:bodyPr wrap="square">
+            <a:spAutoFit/>
+          </a:bodyPr>
+          <a:lstStyle/>
+          <a:p>
+            <a:pPr algn="l"/>
+            <a:r>
+              <a:rPr sz="1600" b="0" i="0">
+                <a:solidFill>
+                  <a:srgbClr val="C8D2E6"/>
+                </a:solidFill>
+                <a:latin typeface="Arial"/>
+              </a:rPr>
+              <a:t>Aus Wissen ein tragfähiges Branchennetzwerk machen.</a:t>
+            </a:r>
+          </a:p>
+        </p:txBody>
+      </p:sp>
+      <p:sp>
+        <p:nvSpPr>
+          <p:cNvPr id="7" name="TextBox 6"/>
+          <p:cNvSpPr txBox="1"/>
+          <p:nvPr/>
+        </p:nvSpPr>
+        <p:spPr>
+          <a:xfrm>
+            <a:off x="685800" y="6355080"/>
+            <a:ext cx="10817352" cy="274320"/>
+          </a:xfrm>
+          <a:prstGeom prst="rect">
+            <a:avLst/>
+          </a:prstGeom>
+          <a:noFill/>
+        </p:spPr>
+        <p:txBody>
+          <a:bodyPr wrap="none">
+            <a:spAutoFit/>
+          </a:bodyPr>
+          <a:lstStyle/>
+          <a:p>
+            <a:pPr algn="l"/>
+            <a:r>
+              <a:rPr sz="700">
+                <a:solidFill>
+                  <a:srgbClr val="8CA0C3"/>
+                </a:solidFill>
+                <a:latin typeface="Consolas"/>
+              </a:rPr>
+              <a:t>FKB Campus  ·  M09</a:t>
+            </a:r>
+          </a:p>
+        </p:txBody>
+      </p:sp>
+    </p:spTree>
+  </p:cSld>
+  <p:clrMapOvr>
+    <a:masterClrMapping/>
+  </p:clrMapOvr>
+</p:sld>
+</file>
+
+<file path=ppt/slides/slide17.xml><?xml version="1.0" encoding="utf-8"?>
+<p:sld xmlns:a="http://schemas.openxmlformats.org/drawingml/2006/main" xmlns:p="http://schemas.openxmlformats.org/presentationml/2006/main" xmlns:r="http://schemas.openxmlformats.org/officeDocument/2006/relationships">
+  <p:cSld>
+    <p:spTree>
+      <p:nvGrpSpPr>
+        <p:cNvPr id="1" name=""/>
+        <p:cNvGrpSpPr/>
+        <p:nvPr/>
+      </p:nvGrpSpPr>
+      <p:grpSpPr/>
+      <p:sp>
+        <p:nvSpPr>
+          <p:cNvPr id="2" name="Rectangle 1"/>
+          <p:cNvSpPr/>
+          <p:nvPr/>
+        </p:nvSpPr>
+        <p:spPr>
+          <a:xfrm>
+            <a:off x="0" y="0"/>
+            <a:ext cx="12188952" cy="6858000"/>
+          </a:xfrm>
+          <a:prstGeom prst="rect">
+            <a:avLst/>
+          </a:prstGeom>
+          <a:solidFill>
+            <a:srgbClr val="EDEDF3"/>
+          </a:solidFill>
+          <a:ln>
+            <a:noFill/>
+          </a:ln>
+        </p:spPr>
+        <p:style>
+          <a:lnRef idx="1">
+            <a:schemeClr val="accent1"/>
+          </a:lnRef>
+          <a:fillRef idx="3">
+            <a:schemeClr val="accent1"/>
+          </a:fillRef>
+          <a:effectRef idx="2">
+            <a:schemeClr val="accent1"/>
+          </a:effectRef>
+          <a:fontRef idx="minor">
+            <a:schemeClr val="lt1"/>
+          </a:fontRef>
+        </p:style>
+        <p:txBody>
+          <a:bodyPr rtlCol="0" anchor="ctr"/>
+          <a:lstStyle/>
+          <a:p>
+            <a:pPr algn="ctr"/>
+          </a:p>
+        </p:txBody>
+      </p:sp>
+      <p:sp>
+        <p:nvSpPr>
+          <p:cNvPr id="3" name="Rectangle 2"/>
+          <p:cNvSpPr/>
+          <p:nvPr/>
+        </p:nvSpPr>
+        <p:spPr>
+          <a:xfrm>
+            <a:off x="0" y="0"/>
+            <a:ext cx="12188952" cy="50292"/>
+          </a:xfrm>
+          <a:prstGeom prst="rect">
+            <a:avLst/>
+          </a:prstGeom>
+          <a:solidFill>
+            <a:srgbClr val="1F2C56"/>
+          </a:solidFill>
+          <a:ln>
+            <a:noFill/>
+          </a:ln>
+        </p:spPr>
+        <p:style>
+          <a:lnRef idx="1">
+            <a:schemeClr val="accent1"/>
+          </a:lnRef>
+          <a:fillRef idx="3">
+            <a:schemeClr val="accent1"/>
+          </a:fillRef>
+          <a:effectRef idx="2">
+            <a:schemeClr val="accent1"/>
+          </a:effectRef>
+          <a:fontRef idx="minor">
+            <a:schemeClr val="lt1"/>
+          </a:fontRef>
+        </p:style>
+        <p:txBody>
+          <a:bodyPr rtlCol="0" anchor="ctr"/>
+          <a:lstStyle/>
+          <a:p>
+            <a:pPr algn="ctr"/>
+          </a:p>
+        </p:txBody>
+      </p:sp>
+      <p:sp>
+        <p:nvSpPr>
+          <p:cNvPr id="4" name="TextBox 3"/>
+          <p:cNvSpPr txBox="1"/>
+          <p:nvPr/>
+        </p:nvSpPr>
+        <p:spPr>
+          <a:xfrm>
+            <a:off x="685800" y="109728"/>
+            <a:ext cx="10817352" cy="228600"/>
+          </a:xfrm>
+          <a:prstGeom prst="rect">
+            <a:avLst/>
+          </a:prstGeom>
+          <a:noFill/>
+        </p:spPr>
+        <p:txBody>
+          <a:bodyPr wrap="none">
+            <a:spAutoFit/>
+          </a:bodyPr>
+          <a:lstStyle/>
+          <a:p>
+            <a:pPr algn="l"/>
+            <a:r>
+              <a:rPr sz="750">
+                <a:solidFill>
+                  <a:srgbClr val="78808C"/>
+                </a:solidFill>
+                <a:latin typeface="Consolas"/>
+              </a:rPr>
+              <a:t>M09  ·  INHALT</a:t>
+            </a:r>
+          </a:p>
+        </p:txBody>
+      </p:sp>
+      <p:sp>
+        <p:nvSpPr>
+          <p:cNvPr id="5" name="Rectangle 4"/>
+          <p:cNvSpPr/>
+          <p:nvPr/>
+        </p:nvSpPr>
+        <p:spPr>
+          <a:xfrm>
+            <a:off x="0" y="1234440"/>
+            <a:ext cx="12188952" cy="12700"/>
+          </a:xfrm>
+          <a:prstGeom prst="rect">
+            <a:avLst/>
+          </a:prstGeom>
+          <a:solidFill>
+            <a:srgbClr val="D8DFE4"/>
+          </a:solidFill>
+          <a:ln>
+            <a:noFill/>
+          </a:ln>
+        </p:spPr>
+        <p:style>
+          <a:lnRef idx="1">
+            <a:schemeClr val="accent1"/>
+          </a:lnRef>
+          <a:fillRef idx="3">
+            <a:schemeClr val="accent1"/>
+          </a:fillRef>
+          <a:effectRef idx="2">
+            <a:schemeClr val="accent1"/>
+          </a:effectRef>
+          <a:fontRef idx="minor">
+            <a:schemeClr val="lt1"/>
+          </a:fontRef>
+        </p:style>
+        <p:txBody>
+          <a:bodyPr rtlCol="0" anchor="ctr"/>
+          <a:lstStyle/>
+          <a:p>
+            <a:pPr algn="ctr"/>
+          </a:p>
+        </p:txBody>
+      </p:sp>
+      <p:sp>
+        <p:nvSpPr>
+          <p:cNvPr id="6" name="Rectangle 5"/>
+          <p:cNvSpPr/>
+          <p:nvPr/>
+        </p:nvSpPr>
+        <p:spPr>
+          <a:xfrm>
+            <a:off x="685800" y="502920"/>
+            <a:ext cx="36576" cy="658368"/>
+          </a:xfrm>
+          <a:prstGeom prst="rect">
+            <a:avLst/>
+          </a:prstGeom>
+          <a:solidFill>
+            <a:srgbClr val="D9C089"/>
+          </a:solidFill>
+          <a:ln>
+            <a:noFill/>
+          </a:ln>
+        </p:spPr>
+        <p:style>
+          <a:lnRef idx="1">
+            <a:schemeClr val="accent1"/>
+          </a:lnRef>
+          <a:fillRef idx="3">
+            <a:schemeClr val="accent1"/>
+          </a:fillRef>
+          <a:effectRef idx="2">
+            <a:schemeClr val="accent1"/>
+          </a:effectRef>
+          <a:fontRef idx="minor">
+            <a:schemeClr val="lt1"/>
+          </a:fontRef>
+        </p:style>
+        <p:txBody>
+          <a:bodyPr rtlCol="0" anchor="ctr"/>
+          <a:lstStyle/>
+          <a:p>
+            <a:pPr algn="ctr"/>
+          </a:p>
+        </p:txBody>
+      </p:sp>
+      <p:sp>
+        <p:nvSpPr>
+          <p:cNvPr id="7" name="TextBox 6"/>
+          <p:cNvSpPr txBox="1"/>
+          <p:nvPr/>
+        </p:nvSpPr>
+        <p:spPr>
+          <a:xfrm>
+            <a:off x="813816" y="502920"/>
+            <a:ext cx="10634472" cy="685800"/>
+          </a:xfrm>
+          <a:prstGeom prst="rect">
+            <a:avLst/>
+          </a:prstGeom>
+          <a:noFill/>
+        </p:spPr>
+        <p:txBody>
+          <a:bodyPr wrap="square">
+            <a:spAutoFit/>
+          </a:bodyPr>
+          <a:lstStyle/>
+          <a:p>
+            <a:pPr algn="l"/>
+            <a:r>
+              <a:rPr sz="2400" b="1" i="0">
+                <a:solidFill>
+                  <a:srgbClr val="1F2C56"/>
+                </a:solidFill>
+                <a:latin typeface="Arial"/>
+              </a:rPr>
+              <a:t>Vom Wissen zum Netzwerk</a:t>
+            </a:r>
+          </a:p>
+        </p:txBody>
+      </p:sp>
+      <p:sp>
+        <p:nvSpPr>
+          <p:cNvPr id="8" name="TextBox 7"/>
+          <p:cNvSpPr txBox="1"/>
+          <p:nvPr/>
+        </p:nvSpPr>
+        <p:spPr>
+          <a:xfrm>
+            <a:off x="685800" y="1417320"/>
+            <a:ext cx="10817352" cy="4892040"/>
+          </a:xfrm>
+          <a:prstGeom prst="rect">
+            <a:avLst/>
+          </a:prstGeom>
+          <a:noFill/>
+        </p:spPr>
+        <p:txBody>
+          <a:bodyPr wrap="square" anchor="ctr">
+            <a:spAutoFit/>
+          </a:bodyPr>
+          <a:lstStyle/>
           <a:p>
             <a:pPr marL="177800" indent="-177800">
               <a:spcBef>
@@ -6515,9 +7576,652 @@
                 </a:solidFill>
                 <a:latin typeface="Arial"/>
               </a:rPr>
-              <a:t>→  Tipp: Dieses Protokoll in agree (Gesprächsnotiz) hinterlegen. Orientieren Sie sich an dieser Mini-Vorlage (5 Stichpunkte reichen):</a:t>
-            </a:r>
-          </a:p>
+              <a:t>→  Branchenkompetenz ist System plus Netzwerk – erst Kontakte machen aus Wissen einen Gesprächsvorsprung.</a:t>
+            </a:r>
+          </a:p>
+          <a:p>
+            <a:pPr marL="190500" indent="-190500">
+              <a:spcBef>
+                <a:spcPts val="400"/>
+              </a:spcBef>
+              <a:spcAft>
+                <a:spcPts val="200"/>
+              </a:spcAft>
+            </a:pPr>
+            <a:r>
+              <a:rPr sz="1300">
+                <a:solidFill>
+                  <a:srgbClr val="3D5466"/>
+                </a:solidFill>
+                <a:latin typeface="Arial"/>
+              </a:rPr>
+              <a:t>▸  Schlüsselpersonen der Zielbranche identifizieren (Verband, Kammer, Multiplikatoren).</a:t>
+            </a:r>
+          </a:p>
+          <a:p>
+            <a:pPr marL="190500" indent="-190500">
+              <a:spcBef>
+                <a:spcPts val="400"/>
+              </a:spcBef>
+              <a:spcAft>
+                <a:spcPts val="200"/>
+              </a:spcAft>
+            </a:pPr>
+            <a:r>
+              <a:rPr sz="1300">
+                <a:solidFill>
+                  <a:srgbClr val="3D5466"/>
+                </a:solidFill>
+                <a:latin typeface="Arial"/>
+              </a:rPr>
+              <a:t>▸  Eine Kontaktstrategie skizzieren: wen, worüber, in welchem Rhythmus.</a:t>
+            </a:r>
+          </a:p>
+        </p:txBody>
+      </p:sp>
+      <p:sp>
+        <p:nvSpPr>
+          <p:cNvPr id="9" name="Rectangle 8"/>
+          <p:cNvSpPr/>
+          <p:nvPr/>
+        </p:nvSpPr>
+        <p:spPr>
+          <a:xfrm>
+            <a:off x="0" y="6510528"/>
+            <a:ext cx="12188952" cy="347472"/>
+          </a:xfrm>
+          <a:prstGeom prst="rect">
+            <a:avLst/>
+          </a:prstGeom>
+          <a:solidFill>
+            <a:srgbClr val="0A1937"/>
+          </a:solidFill>
+          <a:ln>
+            <a:noFill/>
+          </a:ln>
+        </p:spPr>
+        <p:style>
+          <a:lnRef idx="1">
+            <a:schemeClr val="accent1"/>
+          </a:lnRef>
+          <a:fillRef idx="3">
+            <a:schemeClr val="accent1"/>
+          </a:fillRef>
+          <a:effectRef idx="2">
+            <a:schemeClr val="accent1"/>
+          </a:effectRef>
+          <a:fontRef idx="minor">
+            <a:schemeClr val="lt1"/>
+          </a:fontRef>
+        </p:style>
+        <p:txBody>
+          <a:bodyPr rtlCol="0" anchor="ctr"/>
+          <a:lstStyle/>
+          <a:p>
+            <a:pPr algn="ctr"/>
+          </a:p>
+        </p:txBody>
+      </p:sp>
+      <p:sp>
+        <p:nvSpPr>
+          <p:cNvPr id="10" name="TextBox 9"/>
+          <p:cNvSpPr txBox="1"/>
+          <p:nvPr/>
+        </p:nvSpPr>
+        <p:spPr>
+          <a:xfrm>
+            <a:off x="685800" y="6583680"/>
+            <a:ext cx="6490411" cy="256032"/>
+          </a:xfrm>
+          <a:prstGeom prst="rect">
+            <a:avLst/>
+          </a:prstGeom>
+          <a:noFill/>
+        </p:spPr>
+        <p:txBody>
+          <a:bodyPr wrap="none">
+            <a:spAutoFit/>
+          </a:bodyPr>
+          <a:lstStyle/>
+          <a:p>
+            <a:pPr algn="l"/>
+            <a:r>
+              <a:rPr sz="700">
+                <a:solidFill>
+                  <a:srgbClr val="A0B4D2"/>
+                </a:solidFill>
+                <a:latin typeface="Consolas"/>
+              </a:rPr>
+              <a:t>FKB Campus  ·  M09</a:t>
+            </a:r>
+          </a:p>
+        </p:txBody>
+      </p:sp>
+    </p:spTree>
+  </p:cSld>
+  <p:clrMapOvr>
+    <a:masterClrMapping/>
+  </p:clrMapOvr>
+</p:sld>
+</file>
+
+<file path=ppt/slides/slide18.xml><?xml version="1.0" encoding="utf-8"?>
+<p:sld xmlns:a="http://schemas.openxmlformats.org/drawingml/2006/main" xmlns:p="http://schemas.openxmlformats.org/presentationml/2006/main" xmlns:r="http://schemas.openxmlformats.org/officeDocument/2006/relationships">
+  <p:cSld>
+    <p:spTree>
+      <p:nvGrpSpPr>
+        <p:cNvPr id="1" name=""/>
+        <p:cNvGrpSpPr/>
+        <p:nvPr/>
+      </p:nvGrpSpPr>
+      <p:grpSpPr/>
+      <p:sp>
+        <p:nvSpPr>
+          <p:cNvPr id="2" name="Rectangle 1"/>
+          <p:cNvSpPr/>
+          <p:nvPr/>
+        </p:nvSpPr>
+        <p:spPr>
+          <a:xfrm>
+            <a:off x="0" y="0"/>
+            <a:ext cx="12188952" cy="6858000"/>
+          </a:xfrm>
+          <a:prstGeom prst="rect">
+            <a:avLst/>
+          </a:prstGeom>
+          <a:solidFill>
+            <a:srgbClr val="1F2C56"/>
+          </a:solidFill>
+          <a:ln>
+            <a:noFill/>
+          </a:ln>
+        </p:spPr>
+        <p:style>
+          <a:lnRef idx="1">
+            <a:schemeClr val="accent1"/>
+          </a:lnRef>
+          <a:fillRef idx="3">
+            <a:schemeClr val="accent1"/>
+          </a:fillRef>
+          <a:effectRef idx="2">
+            <a:schemeClr val="accent1"/>
+          </a:effectRef>
+          <a:fontRef idx="minor">
+            <a:schemeClr val="lt1"/>
+          </a:fontRef>
+        </p:style>
+        <p:txBody>
+          <a:bodyPr rtlCol="0" anchor="ctr"/>
+          <a:lstStyle/>
+          <a:p>
+            <a:pPr algn="ctr"/>
+          </a:p>
+        </p:txBody>
+      </p:sp>
+      <p:sp>
+        <p:nvSpPr>
+          <p:cNvPr id="3" name="TextBox 2"/>
+          <p:cNvSpPr txBox="1"/>
+          <p:nvPr/>
+        </p:nvSpPr>
+        <p:spPr>
+          <a:xfrm>
+            <a:off x="685800" y="2377440"/>
+            <a:ext cx="10817352" cy="365760"/>
+          </a:xfrm>
+          <a:prstGeom prst="rect">
+            <a:avLst/>
+          </a:prstGeom>
+          <a:noFill/>
+        </p:spPr>
+        <p:txBody>
+          <a:bodyPr wrap="none">
+            <a:spAutoFit/>
+          </a:bodyPr>
+          <a:lstStyle/>
+          <a:p>
+            <a:pPr algn="l"/>
+            <a:r>
+              <a:rPr sz="1200">
+                <a:solidFill>
+                  <a:srgbClr val="D9C089"/>
+                </a:solidFill>
+                <a:latin typeface="Consolas"/>
+              </a:rPr>
+              <a:t>13:45–15:45</a:t>
+            </a:r>
+          </a:p>
+        </p:txBody>
+      </p:sp>
+      <p:sp>
+        <p:nvSpPr>
+          <p:cNvPr id="4" name="Rectangle 3"/>
+          <p:cNvSpPr/>
+          <p:nvPr/>
+        </p:nvSpPr>
+        <p:spPr>
+          <a:xfrm>
+            <a:off x="685800" y="2788920"/>
+            <a:ext cx="548640" cy="38100"/>
+          </a:xfrm>
+          <a:prstGeom prst="rect">
+            <a:avLst/>
+          </a:prstGeom>
+          <a:solidFill>
+            <a:srgbClr val="D9C089"/>
+          </a:solidFill>
+          <a:ln>
+            <a:noFill/>
+          </a:ln>
+        </p:spPr>
+        <p:style>
+          <a:lnRef idx="1">
+            <a:schemeClr val="accent1"/>
+          </a:lnRef>
+          <a:fillRef idx="3">
+            <a:schemeClr val="accent1"/>
+          </a:fillRef>
+          <a:effectRef idx="2">
+            <a:schemeClr val="accent1"/>
+          </a:effectRef>
+          <a:fontRef idx="minor">
+            <a:schemeClr val="lt1"/>
+          </a:fontRef>
+        </p:style>
+        <p:txBody>
+          <a:bodyPr rtlCol="0" anchor="ctr"/>
+          <a:lstStyle/>
+          <a:p>
+            <a:pPr algn="ctr"/>
+          </a:p>
+        </p:txBody>
+      </p:sp>
+      <p:sp>
+        <p:nvSpPr>
+          <p:cNvPr id="5" name="TextBox 4"/>
+          <p:cNvSpPr txBox="1"/>
+          <p:nvPr/>
+        </p:nvSpPr>
+        <p:spPr>
+          <a:xfrm>
+            <a:off x="685800" y="3017520"/>
+            <a:ext cx="10817352" cy="1463040"/>
+          </a:xfrm>
+          <a:prstGeom prst="rect">
+            <a:avLst/>
+          </a:prstGeom>
+          <a:noFill/>
+        </p:spPr>
+        <p:txBody>
+          <a:bodyPr wrap="square">
+            <a:spAutoFit/>
+          </a:bodyPr>
+          <a:lstStyle/>
+          <a:p>
+            <a:pPr algn="l"/>
+            <a:r>
+              <a:rPr sz="4000" b="1" i="0">
+                <a:solidFill>
+                  <a:srgbClr val="FFFFFF"/>
+                </a:solidFill>
+                <a:latin typeface="Arial"/>
+              </a:rPr>
+              <a:t>Branchenportfolio &amp; 3-Monats-Plan</a:t>
+            </a:r>
+          </a:p>
+        </p:txBody>
+      </p:sp>
+      <p:sp>
+        <p:nvSpPr>
+          <p:cNvPr id="6" name="TextBox 5"/>
+          <p:cNvSpPr txBox="1"/>
+          <p:nvPr/>
+        </p:nvSpPr>
+        <p:spPr>
+          <a:xfrm>
+            <a:off x="685800" y="4480560"/>
+            <a:ext cx="8653881" cy="1280160"/>
+          </a:xfrm>
+          <a:prstGeom prst="rect">
+            <a:avLst/>
+          </a:prstGeom>
+          <a:noFill/>
+        </p:spPr>
+        <p:txBody>
+          <a:bodyPr wrap="square">
+            <a:spAutoFit/>
+          </a:bodyPr>
+          <a:lstStyle/>
+          <a:p>
+            <a:pPr algn="l"/>
+            <a:r>
+              <a:rPr sz="1600" b="0" i="0">
+                <a:solidFill>
+                  <a:srgbClr val="C8D2E6"/>
+                </a:solidFill>
+                <a:latin typeface="Arial"/>
+              </a:rPr>
+              <a:t>Ein pflegbares Branchenportfolio und einen verbindlichen Expertiseplan aufbauen.</a:t>
+            </a:r>
+          </a:p>
+        </p:txBody>
+      </p:sp>
+      <p:sp>
+        <p:nvSpPr>
+          <p:cNvPr id="7" name="TextBox 6"/>
+          <p:cNvSpPr txBox="1"/>
+          <p:nvPr/>
+        </p:nvSpPr>
+        <p:spPr>
+          <a:xfrm>
+            <a:off x="685800" y="6355080"/>
+            <a:ext cx="10817352" cy="274320"/>
+          </a:xfrm>
+          <a:prstGeom prst="rect">
+            <a:avLst/>
+          </a:prstGeom>
+          <a:noFill/>
+        </p:spPr>
+        <p:txBody>
+          <a:bodyPr wrap="none">
+            <a:spAutoFit/>
+          </a:bodyPr>
+          <a:lstStyle/>
+          <a:p>
+            <a:pPr algn="l"/>
+            <a:r>
+              <a:rPr sz="700">
+                <a:solidFill>
+                  <a:srgbClr val="8CA0C3"/>
+                </a:solidFill>
+                <a:latin typeface="Consolas"/>
+              </a:rPr>
+              <a:t>FKB Campus  ·  M09</a:t>
+            </a:r>
+          </a:p>
+        </p:txBody>
+      </p:sp>
+    </p:spTree>
+  </p:cSld>
+  <p:clrMapOvr>
+    <a:masterClrMapping/>
+  </p:clrMapOvr>
+</p:sld>
+</file>
+
+<file path=ppt/slides/slide19.xml><?xml version="1.0" encoding="utf-8"?>
+<p:sld xmlns:a="http://schemas.openxmlformats.org/drawingml/2006/main" xmlns:p="http://schemas.openxmlformats.org/presentationml/2006/main" xmlns:r="http://schemas.openxmlformats.org/officeDocument/2006/relationships">
+  <p:cSld>
+    <p:spTree>
+      <p:nvGrpSpPr>
+        <p:cNvPr id="1" name=""/>
+        <p:cNvGrpSpPr/>
+        <p:nvPr/>
+      </p:nvGrpSpPr>
+      <p:grpSpPr/>
+      <p:sp>
+        <p:nvSpPr>
+          <p:cNvPr id="2" name="Rectangle 1"/>
+          <p:cNvSpPr/>
+          <p:nvPr/>
+        </p:nvSpPr>
+        <p:spPr>
+          <a:xfrm>
+            <a:off x="0" y="0"/>
+            <a:ext cx="12188952" cy="6858000"/>
+          </a:xfrm>
+          <a:prstGeom prst="rect">
+            <a:avLst/>
+          </a:prstGeom>
+          <a:solidFill>
+            <a:srgbClr val="EDEDF3"/>
+          </a:solidFill>
+          <a:ln>
+            <a:noFill/>
+          </a:ln>
+        </p:spPr>
+        <p:style>
+          <a:lnRef idx="1">
+            <a:schemeClr val="accent1"/>
+          </a:lnRef>
+          <a:fillRef idx="3">
+            <a:schemeClr val="accent1"/>
+          </a:fillRef>
+          <a:effectRef idx="2">
+            <a:schemeClr val="accent1"/>
+          </a:effectRef>
+          <a:fontRef idx="minor">
+            <a:schemeClr val="lt1"/>
+          </a:fontRef>
+        </p:style>
+        <p:txBody>
+          <a:bodyPr rtlCol="0" anchor="ctr"/>
+          <a:lstStyle/>
+          <a:p>
+            <a:pPr algn="ctr"/>
+          </a:p>
+        </p:txBody>
+      </p:sp>
+      <p:sp>
+        <p:nvSpPr>
+          <p:cNvPr id="3" name="Rectangle 2"/>
+          <p:cNvSpPr/>
+          <p:nvPr/>
+        </p:nvSpPr>
+        <p:spPr>
+          <a:xfrm>
+            <a:off x="0" y="0"/>
+            <a:ext cx="12188952" cy="50292"/>
+          </a:xfrm>
+          <a:prstGeom prst="rect">
+            <a:avLst/>
+          </a:prstGeom>
+          <a:solidFill>
+            <a:srgbClr val="1F2C56"/>
+          </a:solidFill>
+          <a:ln>
+            <a:noFill/>
+          </a:ln>
+        </p:spPr>
+        <p:style>
+          <a:lnRef idx="1">
+            <a:schemeClr val="accent1"/>
+          </a:lnRef>
+          <a:fillRef idx="3">
+            <a:schemeClr val="accent1"/>
+          </a:fillRef>
+          <a:effectRef idx="2">
+            <a:schemeClr val="accent1"/>
+          </a:effectRef>
+          <a:fontRef idx="minor">
+            <a:schemeClr val="lt1"/>
+          </a:fontRef>
+        </p:style>
+        <p:txBody>
+          <a:bodyPr rtlCol="0" anchor="ctr"/>
+          <a:lstStyle/>
+          <a:p>
+            <a:pPr algn="ctr"/>
+          </a:p>
+        </p:txBody>
+      </p:sp>
+      <p:sp>
+        <p:nvSpPr>
+          <p:cNvPr id="4" name="TextBox 3"/>
+          <p:cNvSpPr txBox="1"/>
+          <p:nvPr/>
+        </p:nvSpPr>
+        <p:spPr>
+          <a:xfrm>
+            <a:off x="685800" y="109728"/>
+            <a:ext cx="10817352" cy="228600"/>
+          </a:xfrm>
+          <a:prstGeom prst="rect">
+            <a:avLst/>
+          </a:prstGeom>
+          <a:noFill/>
+        </p:spPr>
+        <p:txBody>
+          <a:bodyPr wrap="none">
+            <a:spAutoFit/>
+          </a:bodyPr>
+          <a:lstStyle/>
+          <a:p>
+            <a:pPr algn="l"/>
+            <a:r>
+              <a:rPr sz="750">
+                <a:solidFill>
+                  <a:srgbClr val="78808C"/>
+                </a:solidFill>
+                <a:latin typeface="Consolas"/>
+              </a:rPr>
+              <a:t>M09  ·  INHALT</a:t>
+            </a:r>
+          </a:p>
+        </p:txBody>
+      </p:sp>
+      <p:sp>
+        <p:nvSpPr>
+          <p:cNvPr id="5" name="Rectangle 4"/>
+          <p:cNvSpPr/>
+          <p:nvPr/>
+        </p:nvSpPr>
+        <p:spPr>
+          <a:xfrm>
+            <a:off x="0" y="1234440"/>
+            <a:ext cx="12188952" cy="12700"/>
+          </a:xfrm>
+          <a:prstGeom prst="rect">
+            <a:avLst/>
+          </a:prstGeom>
+          <a:solidFill>
+            <a:srgbClr val="D8DFE4"/>
+          </a:solidFill>
+          <a:ln>
+            <a:noFill/>
+          </a:ln>
+        </p:spPr>
+        <p:style>
+          <a:lnRef idx="1">
+            <a:schemeClr val="accent1"/>
+          </a:lnRef>
+          <a:fillRef idx="3">
+            <a:schemeClr val="accent1"/>
+          </a:fillRef>
+          <a:effectRef idx="2">
+            <a:schemeClr val="accent1"/>
+          </a:effectRef>
+          <a:fontRef idx="minor">
+            <a:schemeClr val="lt1"/>
+          </a:fontRef>
+        </p:style>
+        <p:txBody>
+          <a:bodyPr rtlCol="0" anchor="ctr"/>
+          <a:lstStyle/>
+          <a:p>
+            <a:pPr algn="ctr"/>
+          </a:p>
+        </p:txBody>
+      </p:sp>
+      <p:sp>
+        <p:nvSpPr>
+          <p:cNvPr id="6" name="Rectangle 5"/>
+          <p:cNvSpPr/>
+          <p:nvPr/>
+        </p:nvSpPr>
+        <p:spPr>
+          <a:xfrm>
+            <a:off x="685800" y="502920"/>
+            <a:ext cx="36576" cy="658368"/>
+          </a:xfrm>
+          <a:prstGeom prst="rect">
+            <a:avLst/>
+          </a:prstGeom>
+          <a:solidFill>
+            <a:srgbClr val="D9C089"/>
+          </a:solidFill>
+          <a:ln>
+            <a:noFill/>
+          </a:ln>
+        </p:spPr>
+        <p:style>
+          <a:lnRef idx="1">
+            <a:schemeClr val="accent1"/>
+          </a:lnRef>
+          <a:fillRef idx="3">
+            <a:schemeClr val="accent1"/>
+          </a:fillRef>
+          <a:effectRef idx="2">
+            <a:schemeClr val="accent1"/>
+          </a:effectRef>
+          <a:fontRef idx="minor">
+            <a:schemeClr val="lt1"/>
+          </a:fontRef>
+        </p:style>
+        <p:txBody>
+          <a:bodyPr rtlCol="0" anchor="ctr"/>
+          <a:lstStyle/>
+          <a:p>
+            <a:pPr algn="ctr"/>
+          </a:p>
+        </p:txBody>
+      </p:sp>
+      <p:sp>
+        <p:nvSpPr>
+          <p:cNvPr id="7" name="TextBox 6"/>
+          <p:cNvSpPr txBox="1"/>
+          <p:nvPr/>
+        </p:nvSpPr>
+        <p:spPr>
+          <a:xfrm>
+            <a:off x="813816" y="502920"/>
+            <a:ext cx="10634472" cy="685800"/>
+          </a:xfrm>
+          <a:prstGeom prst="rect">
+            <a:avLst/>
+          </a:prstGeom>
+          <a:noFill/>
+        </p:spPr>
+        <p:txBody>
+          <a:bodyPr wrap="square">
+            <a:spAutoFit/>
+          </a:bodyPr>
+          <a:lstStyle/>
+          <a:p>
+            <a:pPr algn="l"/>
+            <a:r>
+              <a:rPr sz="2400" b="1" i="0">
+                <a:solidFill>
+                  <a:srgbClr val="1F2C56"/>
+                </a:solidFill>
+                <a:latin typeface="Arial"/>
+              </a:rPr>
+              <a:t>Das Branchenportfolio pflegen</a:t>
+            </a:r>
+          </a:p>
+        </p:txBody>
+      </p:sp>
+      <p:sp>
+        <p:nvSpPr>
+          <p:cNvPr id="8" name="TextBox 7"/>
+          <p:cNvSpPr txBox="1"/>
+          <p:nvPr/>
+        </p:nvSpPr>
+        <p:spPr>
+          <a:xfrm>
+            <a:off x="685800" y="1417320"/>
+            <a:ext cx="10817352" cy="4892040"/>
+          </a:xfrm>
+          <a:prstGeom prst="rect">
+            <a:avLst/>
+          </a:prstGeom>
+          <a:noFill/>
+        </p:spPr>
+        <p:txBody>
+          <a:bodyPr wrap="square" anchor="ctr">
+            <a:spAutoFit/>
+          </a:bodyPr>
+          <a:lstStyle/>
           <a:p>
             <a:pPr marL="177800" indent="-177800">
               <a:spcBef>
@@ -6534,7 +8238,45 @@
                 </a:solidFill>
                 <a:latin typeface="Arial"/>
               </a:rPr>
-              <a:t>→  Drei solcher Notizen aus der gleichen Branche zeigen Ihnen verlässlich die Muster – und sind im nächsten Jahresgespräch Gold wert.</a:t>
+              <a:t>→  Expertise, die nicht gepflegt wird, veraltet – das Portfolio braucht Struktur, Mindestinhalt und einen festen Rhythmus.</a:t>
+            </a:r>
+          </a:p>
+          <a:p>
+            <a:pPr marL="190500" indent="-190500">
+              <a:spcBef>
+                <a:spcPts val="400"/>
+              </a:spcBef>
+              <a:spcAft>
+                <a:spcPts val="200"/>
+              </a:spcAft>
+            </a:pPr>
+            <a:r>
+              <a:rPr sz="1300">
+                <a:solidFill>
+                  <a:srgbClr val="3D5466"/>
+                </a:solidFill>
+                <a:latin typeface="Arial"/>
+              </a:rPr>
+              <a:t>▸  Struktur: Branchenprofil, Kennzahlen-Benchmarks, Quellen, Kontakte, Anlässe.</a:t>
+            </a:r>
+          </a:p>
+          <a:p>
+            <a:pPr marL="190500" indent="-190500">
+              <a:spcBef>
+                <a:spcPts val="400"/>
+              </a:spcBef>
+              <a:spcAft>
+                <a:spcPts val="200"/>
+              </a:spcAft>
+            </a:pPr>
+            <a:r>
+              <a:rPr sz="1300">
+                <a:solidFill>
+                  <a:srgbClr val="3D5466"/>
+                </a:solidFill>
+                <a:latin typeface="Arial"/>
+              </a:rPr>
+              <a:t>▸  Pflegerhythmus: Informationsquellen quartalsweise, Kontakte laufend aktualisieren.</a:t>
             </a:r>
           </a:p>
         </p:txBody>
@@ -6991,6 +8733,1319 @@
 </p:sld>
 </file>
 
+<file path=ppt/slides/slide20.xml><?xml version="1.0" encoding="utf-8"?>
+<p:sld xmlns:a="http://schemas.openxmlformats.org/drawingml/2006/main" xmlns:p="http://schemas.openxmlformats.org/presentationml/2006/main" xmlns:r="http://schemas.openxmlformats.org/officeDocument/2006/relationships">
+  <p:cSld>
+    <p:spTree>
+      <p:nvGrpSpPr>
+        <p:cNvPr id="1" name=""/>
+        <p:cNvGrpSpPr/>
+        <p:nvPr/>
+      </p:nvGrpSpPr>
+      <p:grpSpPr/>
+      <p:sp>
+        <p:nvSpPr>
+          <p:cNvPr id="2" name="Rectangle 1"/>
+          <p:cNvSpPr/>
+          <p:nvPr/>
+        </p:nvSpPr>
+        <p:spPr>
+          <a:xfrm>
+            <a:off x="0" y="0"/>
+            <a:ext cx="12188952" cy="6858000"/>
+          </a:xfrm>
+          <a:prstGeom prst="rect">
+            <a:avLst/>
+          </a:prstGeom>
+          <a:solidFill>
+            <a:srgbClr val="EDEDF3"/>
+          </a:solidFill>
+          <a:ln>
+            <a:noFill/>
+          </a:ln>
+        </p:spPr>
+        <p:style>
+          <a:lnRef idx="1">
+            <a:schemeClr val="accent1"/>
+          </a:lnRef>
+          <a:fillRef idx="3">
+            <a:schemeClr val="accent1"/>
+          </a:fillRef>
+          <a:effectRef idx="2">
+            <a:schemeClr val="accent1"/>
+          </a:effectRef>
+          <a:fontRef idx="minor">
+            <a:schemeClr val="lt1"/>
+          </a:fontRef>
+        </p:style>
+        <p:txBody>
+          <a:bodyPr rtlCol="0" anchor="ctr"/>
+          <a:lstStyle/>
+          <a:p>
+            <a:pPr algn="ctr"/>
+          </a:p>
+        </p:txBody>
+      </p:sp>
+      <p:sp>
+        <p:nvSpPr>
+          <p:cNvPr id="3" name="Rectangle 2"/>
+          <p:cNvSpPr/>
+          <p:nvPr/>
+        </p:nvSpPr>
+        <p:spPr>
+          <a:xfrm>
+            <a:off x="0" y="0"/>
+            <a:ext cx="12188952" cy="50292"/>
+          </a:xfrm>
+          <a:prstGeom prst="rect">
+            <a:avLst/>
+          </a:prstGeom>
+          <a:solidFill>
+            <a:srgbClr val="1F2C56"/>
+          </a:solidFill>
+          <a:ln>
+            <a:noFill/>
+          </a:ln>
+        </p:spPr>
+        <p:style>
+          <a:lnRef idx="1">
+            <a:schemeClr val="accent1"/>
+          </a:lnRef>
+          <a:fillRef idx="3">
+            <a:schemeClr val="accent1"/>
+          </a:fillRef>
+          <a:effectRef idx="2">
+            <a:schemeClr val="accent1"/>
+          </a:effectRef>
+          <a:fontRef idx="minor">
+            <a:schemeClr val="lt1"/>
+          </a:fontRef>
+        </p:style>
+        <p:txBody>
+          <a:bodyPr rtlCol="0" anchor="ctr"/>
+          <a:lstStyle/>
+          <a:p>
+            <a:pPr algn="ctr"/>
+          </a:p>
+        </p:txBody>
+      </p:sp>
+      <p:sp>
+        <p:nvSpPr>
+          <p:cNvPr id="4" name="TextBox 3"/>
+          <p:cNvSpPr txBox="1"/>
+          <p:nvPr/>
+        </p:nvSpPr>
+        <p:spPr>
+          <a:xfrm>
+            <a:off x="685800" y="109728"/>
+            <a:ext cx="10817352" cy="228600"/>
+          </a:xfrm>
+          <a:prstGeom prst="rect">
+            <a:avLst/>
+          </a:prstGeom>
+          <a:noFill/>
+        </p:spPr>
+        <p:txBody>
+          <a:bodyPr wrap="none">
+            <a:spAutoFit/>
+          </a:bodyPr>
+          <a:lstStyle/>
+          <a:p>
+            <a:pPr algn="l"/>
+            <a:r>
+              <a:rPr sz="750">
+                <a:solidFill>
+                  <a:srgbClr val="78808C"/>
+                </a:solidFill>
+                <a:latin typeface="Consolas"/>
+              </a:rPr>
+              <a:t>M09  ·  ARBEITSBLATT</a:t>
+            </a:r>
+          </a:p>
+        </p:txBody>
+      </p:sp>
+      <p:sp>
+        <p:nvSpPr>
+          <p:cNvPr id="5" name="Rectangle 4"/>
+          <p:cNvSpPr/>
+          <p:nvPr/>
+        </p:nvSpPr>
+        <p:spPr>
+          <a:xfrm>
+            <a:off x="0" y="1234440"/>
+            <a:ext cx="12188952" cy="12700"/>
+          </a:xfrm>
+          <a:prstGeom prst="rect">
+            <a:avLst/>
+          </a:prstGeom>
+          <a:solidFill>
+            <a:srgbClr val="D8DFE4"/>
+          </a:solidFill>
+          <a:ln>
+            <a:noFill/>
+          </a:ln>
+        </p:spPr>
+        <p:style>
+          <a:lnRef idx="1">
+            <a:schemeClr val="accent1"/>
+          </a:lnRef>
+          <a:fillRef idx="3">
+            <a:schemeClr val="accent1"/>
+          </a:fillRef>
+          <a:effectRef idx="2">
+            <a:schemeClr val="accent1"/>
+          </a:effectRef>
+          <a:fontRef idx="minor">
+            <a:schemeClr val="lt1"/>
+          </a:fontRef>
+        </p:style>
+        <p:txBody>
+          <a:bodyPr rtlCol="0" anchor="ctr"/>
+          <a:lstStyle/>
+          <a:p>
+            <a:pPr algn="ctr"/>
+          </a:p>
+        </p:txBody>
+      </p:sp>
+      <p:sp>
+        <p:nvSpPr>
+          <p:cNvPr id="6" name="Rectangle 5"/>
+          <p:cNvSpPr/>
+          <p:nvPr/>
+        </p:nvSpPr>
+        <p:spPr>
+          <a:xfrm>
+            <a:off x="685800" y="502920"/>
+            <a:ext cx="36576" cy="658368"/>
+          </a:xfrm>
+          <a:prstGeom prst="rect">
+            <a:avLst/>
+          </a:prstGeom>
+          <a:solidFill>
+            <a:srgbClr val="D9C089"/>
+          </a:solidFill>
+          <a:ln>
+            <a:noFill/>
+          </a:ln>
+        </p:spPr>
+        <p:style>
+          <a:lnRef idx="1">
+            <a:schemeClr val="accent1"/>
+          </a:lnRef>
+          <a:fillRef idx="3">
+            <a:schemeClr val="accent1"/>
+          </a:fillRef>
+          <a:effectRef idx="2">
+            <a:schemeClr val="accent1"/>
+          </a:effectRef>
+          <a:fontRef idx="minor">
+            <a:schemeClr val="lt1"/>
+          </a:fontRef>
+        </p:style>
+        <p:txBody>
+          <a:bodyPr rtlCol="0" anchor="ctr"/>
+          <a:lstStyle/>
+          <a:p>
+            <a:pPr algn="ctr"/>
+          </a:p>
+        </p:txBody>
+      </p:sp>
+      <p:sp>
+        <p:nvSpPr>
+          <p:cNvPr id="7" name="TextBox 6"/>
+          <p:cNvSpPr txBox="1"/>
+          <p:nvPr/>
+        </p:nvSpPr>
+        <p:spPr>
+          <a:xfrm>
+            <a:off x="813816" y="502920"/>
+            <a:ext cx="10634472" cy="685800"/>
+          </a:xfrm>
+          <a:prstGeom prst="rect">
+            <a:avLst/>
+          </a:prstGeom>
+          <a:noFill/>
+        </p:spPr>
+        <p:txBody>
+          <a:bodyPr wrap="square">
+            <a:spAutoFit/>
+          </a:bodyPr>
+          <a:lstStyle/>
+          <a:p>
+            <a:pPr algn="l"/>
+            <a:r>
+              <a:rPr sz="2400" b="1" i="0">
+                <a:solidFill>
+                  <a:srgbClr val="1F2C56"/>
+                </a:solidFill>
+                <a:latin typeface="Arial"/>
+              </a:rPr>
+              <a:t>Mein 3-Monats-Expertiseplan</a:t>
+            </a:r>
+          </a:p>
+        </p:txBody>
+      </p:sp>
+      <p:sp>
+        <p:nvSpPr>
+          <p:cNvPr id="8" name="TextBox 7"/>
+          <p:cNvSpPr txBox="1"/>
+          <p:nvPr/>
+        </p:nvSpPr>
+        <p:spPr>
+          <a:xfrm>
+            <a:off x="685800" y="1554480"/>
+            <a:ext cx="10817352" cy="3840480"/>
+          </a:xfrm>
+          <a:prstGeom prst="rect">
+            <a:avLst/>
+          </a:prstGeom>
+          <a:noFill/>
+        </p:spPr>
+        <p:txBody>
+          <a:bodyPr wrap="square">
+            <a:spAutoFit/>
+          </a:bodyPr>
+          <a:lstStyle/>
+          <a:p>
+            <a:pPr marL="190500" indent="-190500">
+              <a:spcBef>
+                <a:spcPts val="400"/>
+              </a:spcBef>
+              <a:spcAft>
+                <a:spcPts val="200"/>
+              </a:spcAft>
+            </a:pPr>
+            <a:r>
+              <a:rPr sz="1400">
+                <a:solidFill>
+                  <a:srgbClr val="3D5466"/>
+                </a:solidFill>
+                <a:latin typeface="Arial"/>
+              </a:rPr>
+              <a:t>▸  Entwickeln Sie Ihren 3-Monats-Plan: Zielbranche, Analyseziel je Monat, Quellen, Kontakte, Meilensteine (AB-2).</a:t>
+            </a:r>
+          </a:p>
+          <a:p>
+            <a:pPr marL="190500" indent="-190500">
+              <a:spcBef>
+                <a:spcPts val="400"/>
+              </a:spcBef>
+              <a:spcAft>
+                <a:spcPts val="200"/>
+              </a:spcAft>
+            </a:pPr>
+            <a:r>
+              <a:rPr sz="1400">
+                <a:solidFill>
+                  <a:srgbClr val="3D5466"/>
+                </a:solidFill>
+                <a:latin typeface="Arial"/>
+              </a:rPr>
+              <a:t>▸  Führen Sie ein strukturiertes Branchengespräch und protokollieren Sie es (AB-3).</a:t>
+            </a:r>
+          </a:p>
+          <a:p>
+            <a:pPr marL="190500" indent="-190500">
+              <a:spcBef>
+                <a:spcPts val="400"/>
+              </a:spcBef>
+              <a:spcAft>
+                <a:spcPts val="200"/>
+              </a:spcAft>
+            </a:pPr>
+            <a:r>
+              <a:rPr sz="1400">
+                <a:solidFill>
+                  <a:srgbClr val="3D5466"/>
+                </a:solidFill>
+                <a:latin typeface="Arial"/>
+              </a:rPr>
+              <a:t>▸  Vereinbaren Sie verbindlich die drei Monatsrunden (Format, Hausaufgaben, Moderation).</a:t>
+            </a:r>
+          </a:p>
+        </p:txBody>
+      </p:sp>
+      <p:sp>
+        <p:nvSpPr>
+          <p:cNvPr id="9" name="Rectangle 8"/>
+          <p:cNvSpPr/>
+          <p:nvPr/>
+        </p:nvSpPr>
+        <p:spPr>
+          <a:xfrm>
+            <a:off x="685800" y="5486400"/>
+            <a:ext cx="10817352" cy="640080"/>
+          </a:xfrm>
+          <a:prstGeom prst="rect">
+            <a:avLst/>
+          </a:prstGeom>
+          <a:solidFill>
+            <a:srgbClr val="1F2C56"/>
+          </a:solidFill>
+          <a:ln>
+            <a:noFill/>
+          </a:ln>
+        </p:spPr>
+        <p:style>
+          <a:lnRef idx="1">
+            <a:schemeClr val="accent1"/>
+          </a:lnRef>
+          <a:fillRef idx="3">
+            <a:schemeClr val="accent1"/>
+          </a:fillRef>
+          <a:effectRef idx="2">
+            <a:schemeClr val="accent1"/>
+          </a:effectRef>
+          <a:fontRef idx="minor">
+            <a:schemeClr val="lt1"/>
+          </a:fontRef>
+        </p:style>
+        <p:txBody>
+          <a:bodyPr rtlCol="0" anchor="ctr"/>
+          <a:lstStyle/>
+          <a:p>
+            <a:pPr algn="ctr"/>
+          </a:p>
+        </p:txBody>
+      </p:sp>
+      <p:sp>
+        <p:nvSpPr>
+          <p:cNvPr id="10" name="TextBox 9"/>
+          <p:cNvSpPr txBox="1"/>
+          <p:nvPr/>
+        </p:nvSpPr>
+        <p:spPr>
+          <a:xfrm>
+            <a:off x="868680" y="5596128"/>
+            <a:ext cx="10451592" cy="457200"/>
+          </a:xfrm>
+          <a:prstGeom prst="rect">
+            <a:avLst/>
+          </a:prstGeom>
+          <a:noFill/>
+        </p:spPr>
+        <p:txBody>
+          <a:bodyPr wrap="square">
+            <a:spAutoFit/>
+          </a:bodyPr>
+          <a:lstStyle/>
+          <a:p>
+            <a:pPr algn="l"/>
+            <a:r>
+              <a:rPr sz="1300" b="1" i="0">
+                <a:solidFill>
+                  <a:srgbClr val="FFFFFF"/>
+                </a:solidFill>
+                <a:latin typeface="Arial"/>
+              </a:rPr>
+              <a:t>→  Bearbeitung im Teilnehmer-Workbook (Arbeitsblatt mit Ausfüllfeldern)</a:t>
+            </a:r>
+          </a:p>
+        </p:txBody>
+      </p:sp>
+      <p:sp>
+        <p:nvSpPr>
+          <p:cNvPr id="11" name="Rectangle 10"/>
+          <p:cNvSpPr/>
+          <p:nvPr/>
+        </p:nvSpPr>
+        <p:spPr>
+          <a:xfrm>
+            <a:off x="0" y="6510528"/>
+            <a:ext cx="12188952" cy="347472"/>
+          </a:xfrm>
+          <a:prstGeom prst="rect">
+            <a:avLst/>
+          </a:prstGeom>
+          <a:solidFill>
+            <a:srgbClr val="0A1937"/>
+          </a:solidFill>
+          <a:ln>
+            <a:noFill/>
+          </a:ln>
+        </p:spPr>
+        <p:style>
+          <a:lnRef idx="1">
+            <a:schemeClr val="accent1"/>
+          </a:lnRef>
+          <a:fillRef idx="3">
+            <a:schemeClr val="accent1"/>
+          </a:fillRef>
+          <a:effectRef idx="2">
+            <a:schemeClr val="accent1"/>
+          </a:effectRef>
+          <a:fontRef idx="minor">
+            <a:schemeClr val="lt1"/>
+          </a:fontRef>
+        </p:style>
+        <p:txBody>
+          <a:bodyPr rtlCol="0" anchor="ctr"/>
+          <a:lstStyle/>
+          <a:p>
+            <a:pPr algn="ctr"/>
+          </a:p>
+        </p:txBody>
+      </p:sp>
+      <p:sp>
+        <p:nvSpPr>
+          <p:cNvPr id="12" name="TextBox 11"/>
+          <p:cNvSpPr txBox="1"/>
+          <p:nvPr/>
+        </p:nvSpPr>
+        <p:spPr>
+          <a:xfrm>
+            <a:off x="685800" y="6583680"/>
+            <a:ext cx="6490411" cy="256032"/>
+          </a:xfrm>
+          <a:prstGeom prst="rect">
+            <a:avLst/>
+          </a:prstGeom>
+          <a:noFill/>
+        </p:spPr>
+        <p:txBody>
+          <a:bodyPr wrap="none">
+            <a:spAutoFit/>
+          </a:bodyPr>
+          <a:lstStyle/>
+          <a:p>
+            <a:pPr algn="l"/>
+            <a:r>
+              <a:rPr sz="700">
+                <a:solidFill>
+                  <a:srgbClr val="A0B4D2"/>
+                </a:solidFill>
+                <a:latin typeface="Consolas"/>
+              </a:rPr>
+              <a:t>FKB Campus  ·  M09</a:t>
+            </a:r>
+          </a:p>
+        </p:txBody>
+      </p:sp>
+    </p:spTree>
+  </p:cSld>
+  <p:clrMapOvr>
+    <a:masterClrMapping/>
+  </p:clrMapOvr>
+</p:sld>
+</file>
+
+<file path=ppt/slides/slide21.xml><?xml version="1.0" encoding="utf-8"?>
+<p:sld xmlns:a="http://schemas.openxmlformats.org/drawingml/2006/main" xmlns:p="http://schemas.openxmlformats.org/presentationml/2006/main" xmlns:r="http://schemas.openxmlformats.org/officeDocument/2006/relationships">
+  <p:cSld>
+    <p:spTree>
+      <p:nvGrpSpPr>
+        <p:cNvPr id="1" name=""/>
+        <p:cNvGrpSpPr/>
+        <p:nvPr/>
+      </p:nvGrpSpPr>
+      <p:grpSpPr/>
+      <p:sp>
+        <p:nvSpPr>
+          <p:cNvPr id="2" name="Rectangle 1"/>
+          <p:cNvSpPr/>
+          <p:nvPr/>
+        </p:nvSpPr>
+        <p:spPr>
+          <a:xfrm>
+            <a:off x="0" y="0"/>
+            <a:ext cx="12188952" cy="6858000"/>
+          </a:xfrm>
+          <a:prstGeom prst="rect">
+            <a:avLst/>
+          </a:prstGeom>
+          <a:solidFill>
+            <a:srgbClr val="EDEDF3"/>
+          </a:solidFill>
+          <a:ln>
+            <a:noFill/>
+          </a:ln>
+        </p:spPr>
+        <p:style>
+          <a:lnRef idx="1">
+            <a:schemeClr val="accent1"/>
+          </a:lnRef>
+          <a:fillRef idx="3">
+            <a:schemeClr val="accent1"/>
+          </a:fillRef>
+          <a:effectRef idx="2">
+            <a:schemeClr val="accent1"/>
+          </a:effectRef>
+          <a:fontRef idx="minor">
+            <a:schemeClr val="lt1"/>
+          </a:fontRef>
+        </p:style>
+        <p:txBody>
+          <a:bodyPr rtlCol="0" anchor="ctr"/>
+          <a:lstStyle/>
+          <a:p>
+            <a:pPr algn="ctr"/>
+          </a:p>
+        </p:txBody>
+      </p:sp>
+      <p:sp>
+        <p:nvSpPr>
+          <p:cNvPr id="3" name="Rectangle 2"/>
+          <p:cNvSpPr/>
+          <p:nvPr/>
+        </p:nvSpPr>
+        <p:spPr>
+          <a:xfrm>
+            <a:off x="0" y="0"/>
+            <a:ext cx="12188952" cy="50292"/>
+          </a:xfrm>
+          <a:prstGeom prst="rect">
+            <a:avLst/>
+          </a:prstGeom>
+          <a:solidFill>
+            <a:srgbClr val="1F2C56"/>
+          </a:solidFill>
+          <a:ln>
+            <a:noFill/>
+          </a:ln>
+        </p:spPr>
+        <p:style>
+          <a:lnRef idx="1">
+            <a:schemeClr val="accent1"/>
+          </a:lnRef>
+          <a:fillRef idx="3">
+            <a:schemeClr val="accent1"/>
+          </a:fillRef>
+          <a:effectRef idx="2">
+            <a:schemeClr val="accent1"/>
+          </a:effectRef>
+          <a:fontRef idx="minor">
+            <a:schemeClr val="lt1"/>
+          </a:fontRef>
+        </p:style>
+        <p:txBody>
+          <a:bodyPr rtlCol="0" anchor="ctr"/>
+          <a:lstStyle/>
+          <a:p>
+            <a:pPr algn="ctr"/>
+          </a:p>
+        </p:txBody>
+      </p:sp>
+      <p:sp>
+        <p:nvSpPr>
+          <p:cNvPr id="4" name="TextBox 3"/>
+          <p:cNvSpPr txBox="1"/>
+          <p:nvPr/>
+        </p:nvSpPr>
+        <p:spPr>
+          <a:xfrm>
+            <a:off x="685800" y="109728"/>
+            <a:ext cx="10817352" cy="228600"/>
+          </a:xfrm>
+          <a:prstGeom prst="rect">
+            <a:avLst/>
+          </a:prstGeom>
+          <a:noFill/>
+        </p:spPr>
+        <p:txBody>
+          <a:bodyPr wrap="none">
+            <a:spAutoFit/>
+          </a:bodyPr>
+          <a:lstStyle/>
+          <a:p>
+            <a:pPr algn="l"/>
+            <a:r>
+              <a:rPr sz="750">
+                <a:solidFill>
+                  <a:srgbClr val="78808C"/>
+                </a:solidFill>
+                <a:latin typeface="Consolas"/>
+              </a:rPr>
+              <a:t>M09  ·  INHALT</a:t>
+            </a:r>
+          </a:p>
+        </p:txBody>
+      </p:sp>
+      <p:sp>
+        <p:nvSpPr>
+          <p:cNvPr id="5" name="Rectangle 4"/>
+          <p:cNvSpPr/>
+          <p:nvPr/>
+        </p:nvSpPr>
+        <p:spPr>
+          <a:xfrm>
+            <a:off x="0" y="1234440"/>
+            <a:ext cx="12188952" cy="12700"/>
+          </a:xfrm>
+          <a:prstGeom prst="rect">
+            <a:avLst/>
+          </a:prstGeom>
+          <a:solidFill>
+            <a:srgbClr val="D8DFE4"/>
+          </a:solidFill>
+          <a:ln>
+            <a:noFill/>
+          </a:ln>
+        </p:spPr>
+        <p:style>
+          <a:lnRef idx="1">
+            <a:schemeClr val="accent1"/>
+          </a:lnRef>
+          <a:fillRef idx="3">
+            <a:schemeClr val="accent1"/>
+          </a:fillRef>
+          <a:effectRef idx="2">
+            <a:schemeClr val="accent1"/>
+          </a:effectRef>
+          <a:fontRef idx="minor">
+            <a:schemeClr val="lt1"/>
+          </a:fontRef>
+        </p:style>
+        <p:txBody>
+          <a:bodyPr rtlCol="0" anchor="ctr"/>
+          <a:lstStyle/>
+          <a:p>
+            <a:pPr algn="ctr"/>
+          </a:p>
+        </p:txBody>
+      </p:sp>
+      <p:sp>
+        <p:nvSpPr>
+          <p:cNvPr id="6" name="Rectangle 5"/>
+          <p:cNvSpPr/>
+          <p:nvPr/>
+        </p:nvSpPr>
+        <p:spPr>
+          <a:xfrm>
+            <a:off x="685800" y="502920"/>
+            <a:ext cx="36576" cy="658368"/>
+          </a:xfrm>
+          <a:prstGeom prst="rect">
+            <a:avLst/>
+          </a:prstGeom>
+          <a:solidFill>
+            <a:srgbClr val="D9C089"/>
+          </a:solidFill>
+          <a:ln>
+            <a:noFill/>
+          </a:ln>
+        </p:spPr>
+        <p:style>
+          <a:lnRef idx="1">
+            <a:schemeClr val="accent1"/>
+          </a:lnRef>
+          <a:fillRef idx="3">
+            <a:schemeClr val="accent1"/>
+          </a:fillRef>
+          <a:effectRef idx="2">
+            <a:schemeClr val="accent1"/>
+          </a:effectRef>
+          <a:fontRef idx="minor">
+            <a:schemeClr val="lt1"/>
+          </a:fontRef>
+        </p:style>
+        <p:txBody>
+          <a:bodyPr rtlCol="0" anchor="ctr"/>
+          <a:lstStyle/>
+          <a:p>
+            <a:pPr algn="ctr"/>
+          </a:p>
+        </p:txBody>
+      </p:sp>
+      <p:sp>
+        <p:nvSpPr>
+          <p:cNvPr id="7" name="TextBox 6"/>
+          <p:cNvSpPr txBox="1"/>
+          <p:nvPr/>
+        </p:nvSpPr>
+        <p:spPr>
+          <a:xfrm>
+            <a:off x="813816" y="502920"/>
+            <a:ext cx="10634472" cy="685800"/>
+          </a:xfrm>
+          <a:prstGeom prst="rect">
+            <a:avLst/>
+          </a:prstGeom>
+          <a:noFill/>
+        </p:spPr>
+        <p:txBody>
+          <a:bodyPr wrap="square">
+            <a:spAutoFit/>
+          </a:bodyPr>
+          <a:lstStyle/>
+          <a:p>
+            <a:pPr algn="l"/>
+            <a:r>
+              <a:rPr sz="2400" b="1" i="0">
+                <a:solidFill>
+                  <a:srgbClr val="1F2C56"/>
+                </a:solidFill>
+                <a:latin typeface="Arial"/>
+              </a:rPr>
+              <a:t>Prinzip dieses Moduls</a:t>
+            </a:r>
+          </a:p>
+        </p:txBody>
+      </p:sp>
+      <p:sp>
+        <p:nvSpPr>
+          <p:cNvPr id="8" name="TextBox 7"/>
+          <p:cNvSpPr txBox="1"/>
+          <p:nvPr/>
+        </p:nvSpPr>
+        <p:spPr>
+          <a:xfrm>
+            <a:off x="685800" y="1417320"/>
+            <a:ext cx="10817352" cy="4892040"/>
+          </a:xfrm>
+          <a:prstGeom prst="rect">
+            <a:avLst/>
+          </a:prstGeom>
+          <a:noFill/>
+        </p:spPr>
+        <p:txBody>
+          <a:bodyPr wrap="square" anchor="ctr">
+            <a:spAutoFit/>
+          </a:bodyPr>
+          <a:lstStyle/>
+          <a:p>
+            <a:pPr marL="177800" indent="-177800">
+              <a:spcBef>
+                <a:spcPts val="600"/>
+              </a:spcBef>
+              <a:spcAft>
+                <a:spcPts val="200"/>
+              </a:spcAft>
+            </a:pPr>
+            <a:r>
+              <a:rPr sz="1200" i="1">
+                <a:solidFill>
+                  <a:srgbClr val="3D5466"/>
+                </a:solidFill>
+                <a:latin typeface="Arial"/>
+              </a:rPr>
+              <a:t>→  Branchenkompetenz ist kein Wissen allein, sondern System plus Netzwerk.</a:t>
+            </a:r>
+          </a:p>
+          <a:p>
+            <a:pPr marL="190500" indent="-190500">
+              <a:spcBef>
+                <a:spcPts val="400"/>
+              </a:spcBef>
+              <a:spcAft>
+                <a:spcPts val="200"/>
+              </a:spcAft>
+            </a:pPr>
+            <a:r>
+              <a:rPr sz="1300">
+                <a:solidFill>
+                  <a:srgbClr val="3D5466"/>
+                </a:solidFill>
+                <a:latin typeface="Arial"/>
+              </a:rPr>
+              <a:t>▸  Wer eine Branche mit Five Forces und PESTEL systematisch liest und vernetzt ist, wird vom Anbieter zum gefragten Gesprächspartner.</a:t>
+            </a:r>
+          </a:p>
+        </p:txBody>
+      </p:sp>
+      <p:sp>
+        <p:nvSpPr>
+          <p:cNvPr id="9" name="Rectangle 8"/>
+          <p:cNvSpPr/>
+          <p:nvPr/>
+        </p:nvSpPr>
+        <p:spPr>
+          <a:xfrm>
+            <a:off x="0" y="6510528"/>
+            <a:ext cx="12188952" cy="347472"/>
+          </a:xfrm>
+          <a:prstGeom prst="rect">
+            <a:avLst/>
+          </a:prstGeom>
+          <a:solidFill>
+            <a:srgbClr val="0A1937"/>
+          </a:solidFill>
+          <a:ln>
+            <a:noFill/>
+          </a:ln>
+        </p:spPr>
+        <p:style>
+          <a:lnRef idx="1">
+            <a:schemeClr val="accent1"/>
+          </a:lnRef>
+          <a:fillRef idx="3">
+            <a:schemeClr val="accent1"/>
+          </a:fillRef>
+          <a:effectRef idx="2">
+            <a:schemeClr val="accent1"/>
+          </a:effectRef>
+          <a:fontRef idx="minor">
+            <a:schemeClr val="lt1"/>
+          </a:fontRef>
+        </p:style>
+        <p:txBody>
+          <a:bodyPr rtlCol="0" anchor="ctr"/>
+          <a:lstStyle/>
+          <a:p>
+            <a:pPr algn="ctr"/>
+          </a:p>
+        </p:txBody>
+      </p:sp>
+      <p:sp>
+        <p:nvSpPr>
+          <p:cNvPr id="10" name="TextBox 9"/>
+          <p:cNvSpPr txBox="1"/>
+          <p:nvPr/>
+        </p:nvSpPr>
+        <p:spPr>
+          <a:xfrm>
+            <a:off x="685800" y="6583680"/>
+            <a:ext cx="6490411" cy="256032"/>
+          </a:xfrm>
+          <a:prstGeom prst="rect">
+            <a:avLst/>
+          </a:prstGeom>
+          <a:noFill/>
+        </p:spPr>
+        <p:txBody>
+          <a:bodyPr wrap="none">
+            <a:spAutoFit/>
+          </a:bodyPr>
+          <a:lstStyle/>
+          <a:p>
+            <a:pPr algn="l"/>
+            <a:r>
+              <a:rPr sz="700">
+                <a:solidFill>
+                  <a:srgbClr val="A0B4D2"/>
+                </a:solidFill>
+                <a:latin typeface="Consolas"/>
+              </a:rPr>
+              <a:t>FKB Campus  ·  M09</a:t>
+            </a:r>
+          </a:p>
+        </p:txBody>
+      </p:sp>
+    </p:spTree>
+  </p:cSld>
+  <p:clrMapOvr>
+    <a:masterClrMapping/>
+  </p:clrMapOvr>
+</p:sld>
+</file>
+
+<file path=ppt/slides/slide22.xml><?xml version="1.0" encoding="utf-8"?>
+<p:sld xmlns:a="http://schemas.openxmlformats.org/drawingml/2006/main" xmlns:p="http://schemas.openxmlformats.org/presentationml/2006/main" xmlns:r="http://schemas.openxmlformats.org/officeDocument/2006/relationships">
+  <p:cSld>
+    <p:spTree>
+      <p:nvGrpSpPr>
+        <p:cNvPr id="1" name=""/>
+        <p:cNvGrpSpPr/>
+        <p:nvPr/>
+      </p:nvGrpSpPr>
+      <p:grpSpPr/>
+      <p:sp>
+        <p:nvSpPr>
+          <p:cNvPr id="2" name="Rectangle 1"/>
+          <p:cNvSpPr/>
+          <p:nvPr/>
+        </p:nvSpPr>
+        <p:spPr>
+          <a:xfrm>
+            <a:off x="0" y="0"/>
+            <a:ext cx="12188952" cy="6858000"/>
+          </a:xfrm>
+          <a:prstGeom prst="rect">
+            <a:avLst/>
+          </a:prstGeom>
+          <a:solidFill>
+            <a:srgbClr val="EDEDF3"/>
+          </a:solidFill>
+          <a:ln>
+            <a:noFill/>
+          </a:ln>
+        </p:spPr>
+        <p:style>
+          <a:lnRef idx="1">
+            <a:schemeClr val="accent1"/>
+          </a:lnRef>
+          <a:fillRef idx="3">
+            <a:schemeClr val="accent1"/>
+          </a:fillRef>
+          <a:effectRef idx="2">
+            <a:schemeClr val="accent1"/>
+          </a:effectRef>
+          <a:fontRef idx="minor">
+            <a:schemeClr val="lt1"/>
+          </a:fontRef>
+        </p:style>
+        <p:txBody>
+          <a:bodyPr rtlCol="0" anchor="ctr"/>
+          <a:lstStyle/>
+          <a:p>
+            <a:pPr algn="ctr"/>
+          </a:p>
+        </p:txBody>
+      </p:sp>
+      <p:sp>
+        <p:nvSpPr>
+          <p:cNvPr id="3" name="Rectangle 2"/>
+          <p:cNvSpPr/>
+          <p:nvPr/>
+        </p:nvSpPr>
+        <p:spPr>
+          <a:xfrm>
+            <a:off x="0" y="0"/>
+            <a:ext cx="12188952" cy="50292"/>
+          </a:xfrm>
+          <a:prstGeom prst="rect">
+            <a:avLst/>
+          </a:prstGeom>
+          <a:solidFill>
+            <a:srgbClr val="1F2C56"/>
+          </a:solidFill>
+          <a:ln>
+            <a:noFill/>
+          </a:ln>
+        </p:spPr>
+        <p:style>
+          <a:lnRef idx="1">
+            <a:schemeClr val="accent1"/>
+          </a:lnRef>
+          <a:fillRef idx="3">
+            <a:schemeClr val="accent1"/>
+          </a:fillRef>
+          <a:effectRef idx="2">
+            <a:schemeClr val="accent1"/>
+          </a:effectRef>
+          <a:fontRef idx="minor">
+            <a:schemeClr val="lt1"/>
+          </a:fontRef>
+        </p:style>
+        <p:txBody>
+          <a:bodyPr rtlCol="0" anchor="ctr"/>
+          <a:lstStyle/>
+          <a:p>
+            <a:pPr algn="ctr"/>
+          </a:p>
+        </p:txBody>
+      </p:sp>
+      <p:sp>
+        <p:nvSpPr>
+          <p:cNvPr id="4" name="TextBox 3"/>
+          <p:cNvSpPr txBox="1"/>
+          <p:nvPr/>
+        </p:nvSpPr>
+        <p:spPr>
+          <a:xfrm>
+            <a:off x="685800" y="109728"/>
+            <a:ext cx="10817352" cy="228600"/>
+          </a:xfrm>
+          <a:prstGeom prst="rect">
+            <a:avLst/>
+          </a:prstGeom>
+          <a:noFill/>
+        </p:spPr>
+        <p:txBody>
+          <a:bodyPr wrap="none">
+            <a:spAutoFit/>
+          </a:bodyPr>
+          <a:lstStyle/>
+          <a:p>
+            <a:pPr algn="l"/>
+            <a:r>
+              <a:rPr sz="750">
+                <a:solidFill>
+                  <a:srgbClr val="78808C"/>
+                </a:solidFill>
+                <a:latin typeface="Consolas"/>
+              </a:rPr>
+              <a:t>M09  ·  INHALT</a:t>
+            </a:r>
+          </a:p>
+        </p:txBody>
+      </p:sp>
+      <p:sp>
+        <p:nvSpPr>
+          <p:cNvPr id="5" name="Rectangle 4"/>
+          <p:cNvSpPr/>
+          <p:nvPr/>
+        </p:nvSpPr>
+        <p:spPr>
+          <a:xfrm>
+            <a:off x="0" y="1234440"/>
+            <a:ext cx="12188952" cy="12700"/>
+          </a:xfrm>
+          <a:prstGeom prst="rect">
+            <a:avLst/>
+          </a:prstGeom>
+          <a:solidFill>
+            <a:srgbClr val="D8DFE4"/>
+          </a:solidFill>
+          <a:ln>
+            <a:noFill/>
+          </a:ln>
+        </p:spPr>
+        <p:style>
+          <a:lnRef idx="1">
+            <a:schemeClr val="accent1"/>
+          </a:lnRef>
+          <a:fillRef idx="3">
+            <a:schemeClr val="accent1"/>
+          </a:fillRef>
+          <a:effectRef idx="2">
+            <a:schemeClr val="accent1"/>
+          </a:effectRef>
+          <a:fontRef idx="minor">
+            <a:schemeClr val="lt1"/>
+          </a:fontRef>
+        </p:style>
+        <p:txBody>
+          <a:bodyPr rtlCol="0" anchor="ctr"/>
+          <a:lstStyle/>
+          <a:p>
+            <a:pPr algn="ctr"/>
+          </a:p>
+        </p:txBody>
+      </p:sp>
+      <p:sp>
+        <p:nvSpPr>
+          <p:cNvPr id="6" name="Rectangle 5"/>
+          <p:cNvSpPr/>
+          <p:nvPr/>
+        </p:nvSpPr>
+        <p:spPr>
+          <a:xfrm>
+            <a:off x="685800" y="502920"/>
+            <a:ext cx="36576" cy="658368"/>
+          </a:xfrm>
+          <a:prstGeom prst="rect">
+            <a:avLst/>
+          </a:prstGeom>
+          <a:solidFill>
+            <a:srgbClr val="D9C089"/>
+          </a:solidFill>
+          <a:ln>
+            <a:noFill/>
+          </a:ln>
+        </p:spPr>
+        <p:style>
+          <a:lnRef idx="1">
+            <a:schemeClr val="accent1"/>
+          </a:lnRef>
+          <a:fillRef idx="3">
+            <a:schemeClr val="accent1"/>
+          </a:fillRef>
+          <a:effectRef idx="2">
+            <a:schemeClr val="accent1"/>
+          </a:effectRef>
+          <a:fontRef idx="minor">
+            <a:schemeClr val="lt1"/>
+          </a:fontRef>
+        </p:style>
+        <p:txBody>
+          <a:bodyPr rtlCol="0" anchor="ctr"/>
+          <a:lstStyle/>
+          <a:p>
+            <a:pPr algn="ctr"/>
+          </a:p>
+        </p:txBody>
+      </p:sp>
+      <p:sp>
+        <p:nvSpPr>
+          <p:cNvPr id="7" name="TextBox 6"/>
+          <p:cNvSpPr txBox="1"/>
+          <p:nvPr/>
+        </p:nvSpPr>
+        <p:spPr>
+          <a:xfrm>
+            <a:off x="813816" y="502920"/>
+            <a:ext cx="10634472" cy="685800"/>
+          </a:xfrm>
+          <a:prstGeom prst="rect">
+            <a:avLst/>
+          </a:prstGeom>
+          <a:noFill/>
+        </p:spPr>
+        <p:txBody>
+          <a:bodyPr wrap="square">
+            <a:spAutoFit/>
+          </a:bodyPr>
+          <a:lstStyle/>
+          <a:p>
+            <a:pPr algn="l"/>
+            <a:r>
+              <a:rPr sz="2400" b="1" i="0">
+                <a:solidFill>
+                  <a:srgbClr val="1F2C56"/>
+                </a:solidFill>
+                <a:latin typeface="Arial"/>
+              </a:rPr>
+              <a:t>Reflexion und Selbstcheck</a:t>
+            </a:r>
+          </a:p>
+        </p:txBody>
+      </p:sp>
+      <p:sp>
+        <p:nvSpPr>
+          <p:cNvPr id="8" name="TextBox 7"/>
+          <p:cNvSpPr txBox="1"/>
+          <p:nvPr/>
+        </p:nvSpPr>
+        <p:spPr>
+          <a:xfrm>
+            <a:off x="685800" y="1417320"/>
+            <a:ext cx="10817352" cy="4892040"/>
+          </a:xfrm>
+          <a:prstGeom prst="rect">
+            <a:avLst/>
+          </a:prstGeom>
+          <a:noFill/>
+        </p:spPr>
+        <p:txBody>
+          <a:bodyPr wrap="square" anchor="ctr">
+            <a:spAutoFit/>
+          </a:bodyPr>
+          <a:lstStyle/>
+          <a:p>
+            <a:pPr marL="190500" indent="-190500">
+              <a:spcBef>
+                <a:spcPts val="400"/>
+              </a:spcBef>
+              <a:spcAft>
+                <a:spcPts val="200"/>
+              </a:spcAft>
+            </a:pPr>
+            <a:r>
+              <a:rPr sz="1300">
+                <a:solidFill>
+                  <a:srgbClr val="3D5466"/>
+                </a:solidFill>
+                <a:latin typeface="Arial"/>
+              </a:rPr>
+              <a:t>▸  Welche der drei Informationsquellen hätte in Ihrer Branche den größten Lerneffekt?</a:t>
+            </a:r>
+          </a:p>
+          <a:p>
+            <a:pPr marL="190500" indent="-190500">
+              <a:spcBef>
+                <a:spcPts val="400"/>
+              </a:spcBef>
+              <a:spcAft>
+                <a:spcPts val="200"/>
+              </a:spcAft>
+            </a:pPr>
+            <a:r>
+              <a:rPr sz="1300">
+                <a:solidFill>
+                  <a:srgbClr val="3D5466"/>
+                </a:solidFill>
+                <a:latin typeface="Arial"/>
+              </a:rPr>
+              <a:t>▸  Wer ist die eine Schlüsselperson, die Sie im nächsten Monat ansprechen?</a:t>
+            </a:r>
+          </a:p>
+          <a:p>
+            <a:pPr marL="190500" indent="-190500">
+              <a:spcBef>
+                <a:spcPts val="400"/>
+              </a:spcBef>
+              <a:spcAft>
+                <a:spcPts val="200"/>
+              </a:spcAft>
+            </a:pPr>
+            <a:r>
+              <a:rPr sz="1300">
+                <a:solidFill>
+                  <a:srgbClr val="3D5466"/>
+                </a:solidFill>
+                <a:latin typeface="Arial"/>
+              </a:rPr>
+              <a:t>▸  Woran merken Sie in drei Monaten, dass Sie vom Anbieter zum Gesprächspartner geworden sind?</a:t>
+            </a:r>
+          </a:p>
+        </p:txBody>
+      </p:sp>
+      <p:sp>
+        <p:nvSpPr>
+          <p:cNvPr id="9" name="Rectangle 8"/>
+          <p:cNvSpPr/>
+          <p:nvPr/>
+        </p:nvSpPr>
+        <p:spPr>
+          <a:xfrm>
+            <a:off x="0" y="6510528"/>
+            <a:ext cx="12188952" cy="347472"/>
+          </a:xfrm>
+          <a:prstGeom prst="rect">
+            <a:avLst/>
+          </a:prstGeom>
+          <a:solidFill>
+            <a:srgbClr val="0A1937"/>
+          </a:solidFill>
+          <a:ln>
+            <a:noFill/>
+          </a:ln>
+        </p:spPr>
+        <p:style>
+          <a:lnRef idx="1">
+            <a:schemeClr val="accent1"/>
+          </a:lnRef>
+          <a:fillRef idx="3">
+            <a:schemeClr val="accent1"/>
+          </a:fillRef>
+          <a:effectRef idx="2">
+            <a:schemeClr val="accent1"/>
+          </a:effectRef>
+          <a:fontRef idx="minor">
+            <a:schemeClr val="lt1"/>
+          </a:fontRef>
+        </p:style>
+        <p:txBody>
+          <a:bodyPr rtlCol="0" anchor="ctr"/>
+          <a:lstStyle/>
+          <a:p>
+            <a:pPr algn="ctr"/>
+          </a:p>
+        </p:txBody>
+      </p:sp>
+      <p:sp>
+        <p:nvSpPr>
+          <p:cNvPr id="10" name="TextBox 9"/>
+          <p:cNvSpPr txBox="1"/>
+          <p:nvPr/>
+        </p:nvSpPr>
+        <p:spPr>
+          <a:xfrm>
+            <a:off x="685800" y="6583680"/>
+            <a:ext cx="6490411" cy="256032"/>
+          </a:xfrm>
+          <a:prstGeom prst="rect">
+            <a:avLst/>
+          </a:prstGeom>
+          <a:noFill/>
+        </p:spPr>
+        <p:txBody>
+          <a:bodyPr wrap="none">
+            <a:spAutoFit/>
+          </a:bodyPr>
+          <a:lstStyle/>
+          <a:p>
+            <a:pPr algn="l"/>
+            <a:r>
+              <a:rPr sz="700">
+                <a:solidFill>
+                  <a:srgbClr val="A0B4D2"/>
+                </a:solidFill>
+                <a:latin typeface="Consolas"/>
+              </a:rPr>
+              <a:t>FKB Campus  ·  M09</a:t>
+            </a:r>
+          </a:p>
+        </p:txBody>
+      </p:sp>
+    </p:spTree>
+  </p:cSld>
+  <p:clrMapOvr>
+    <a:masterClrMapping/>
+  </p:clrMapOvr>
+</p:sld>
+</file>
+
 <file path=ppt/slides/slide3.xml><?xml version="1.0" encoding="utf-8"?>
 <p:sld xmlns:a="http://schemas.openxmlformats.org/drawingml/2006/main" xmlns:p="http://schemas.openxmlformats.org/presentationml/2006/main" xmlns:r="http://schemas.openxmlformats.org/officeDocument/2006/relationships">
   <p:cSld>
@@ -8220,7 +11275,7 @@
             <a:avLst/>
           </a:prstGeom>
           <a:solidFill>
-            <a:srgbClr val="EDEDF3"/>
+            <a:srgbClr val="1F2C56"/>
           </a:solidFill>
           <a:ln>
             <a:noFill/>
@@ -8250,57 +11305,14 @@
       </p:sp>
       <p:sp>
         <p:nvSpPr>
-          <p:cNvPr id="3" name="Rectangle 2"/>
-          <p:cNvSpPr/>
-          <p:nvPr/>
-        </p:nvSpPr>
-        <p:spPr>
-          <a:xfrm>
-            <a:off x="0" y="0"/>
-            <a:ext cx="12188952" cy="50292"/>
-          </a:xfrm>
-          <a:prstGeom prst="rect">
-            <a:avLst/>
-          </a:prstGeom>
-          <a:solidFill>
-            <a:srgbClr val="1F2C56"/>
-          </a:solidFill>
-          <a:ln>
-            <a:noFill/>
-          </a:ln>
-        </p:spPr>
-        <p:style>
-          <a:lnRef idx="1">
-            <a:schemeClr val="accent1"/>
-          </a:lnRef>
-          <a:fillRef idx="3">
-            <a:schemeClr val="accent1"/>
-          </a:fillRef>
-          <a:effectRef idx="2">
-            <a:schemeClr val="accent1"/>
-          </a:effectRef>
-          <a:fontRef idx="minor">
-            <a:schemeClr val="lt1"/>
-          </a:fontRef>
-        </p:style>
-        <p:txBody>
-          <a:bodyPr rtlCol="0" anchor="ctr"/>
-          <a:lstStyle/>
-          <a:p>
-            <a:pPr algn="ctr"/>
-          </a:p>
-        </p:txBody>
-      </p:sp>
-      <p:sp>
-        <p:nvSpPr>
-          <p:cNvPr id="4" name="TextBox 3"/>
+          <p:cNvPr id="3" name="TextBox 2"/>
           <p:cNvSpPr txBox="1"/>
           <p:nvPr/>
         </p:nvSpPr>
         <p:spPr>
           <a:xfrm>
-            <a:off x="685800" y="109728"/>
-            <a:ext cx="10817352" cy="228600"/>
+            <a:off x="685800" y="2377440"/>
+            <a:ext cx="10817352" cy="365760"/>
           </a:xfrm>
           <a:prstGeom prst="rect">
             <a:avLst/>
@@ -8315,70 +11327,27 @@
           <a:p>
             <a:pPr algn="l"/>
             <a:r>
-              <a:rPr sz="750">
-                <a:solidFill>
-                  <a:srgbClr val="78808C"/>
+              <a:rPr sz="1200">
+                <a:solidFill>
+                  <a:srgbClr val="D9C089"/>
                 </a:solidFill>
                 <a:latin typeface="Consolas"/>
               </a:rPr>
-              <a:t>M09  ·  INHALT</a:t>
-            </a:r>
-          </a:p>
-        </p:txBody>
-      </p:sp>
-      <p:sp>
-        <p:nvSpPr>
-          <p:cNvPr id="5" name="Rectangle 4"/>
+              <a:t>09:00–09:30</a:t>
+            </a:r>
+          </a:p>
+        </p:txBody>
+      </p:sp>
+      <p:sp>
+        <p:nvSpPr>
+          <p:cNvPr id="4" name="Rectangle 3"/>
           <p:cNvSpPr/>
           <p:nvPr/>
         </p:nvSpPr>
         <p:spPr>
           <a:xfrm>
-            <a:off x="0" y="1234440"/>
-            <a:ext cx="12188952" cy="12700"/>
-          </a:xfrm>
-          <a:prstGeom prst="rect">
-            <a:avLst/>
-          </a:prstGeom>
-          <a:solidFill>
-            <a:srgbClr val="D8DFE4"/>
-          </a:solidFill>
-          <a:ln>
-            <a:noFill/>
-          </a:ln>
-        </p:spPr>
-        <p:style>
-          <a:lnRef idx="1">
-            <a:schemeClr val="accent1"/>
-          </a:lnRef>
-          <a:fillRef idx="3">
-            <a:schemeClr val="accent1"/>
-          </a:fillRef>
-          <a:effectRef idx="2">
-            <a:schemeClr val="accent1"/>
-          </a:effectRef>
-          <a:fontRef idx="minor">
-            <a:schemeClr val="lt1"/>
-          </a:fontRef>
-        </p:style>
-        <p:txBody>
-          <a:bodyPr rtlCol="0" anchor="ctr"/>
-          <a:lstStyle/>
-          <a:p>
-            <a:pPr algn="ctr"/>
-          </a:p>
-        </p:txBody>
-      </p:sp>
-      <p:sp>
-        <p:nvSpPr>
-          <p:cNvPr id="6" name="Rectangle 5"/>
-          <p:cNvSpPr/>
-          <p:nvPr/>
-        </p:nvSpPr>
-        <p:spPr>
-          <a:xfrm>
-            <a:off x="685800" y="502920"/>
-            <a:ext cx="36576" cy="658368"/>
+            <a:off x="685800" y="2788920"/>
+            <a:ext cx="548640" cy="38100"/>
           </a:xfrm>
           <a:prstGeom prst="rect">
             <a:avLst/>
@@ -8414,14 +11383,14 @@
       </p:sp>
       <p:sp>
         <p:nvSpPr>
-          <p:cNvPr id="7" name="TextBox 6"/>
+          <p:cNvPr id="5" name="TextBox 4"/>
           <p:cNvSpPr txBox="1"/>
           <p:nvPr/>
         </p:nvSpPr>
         <p:spPr>
           <a:xfrm>
-            <a:off x="813816" y="502920"/>
-            <a:ext cx="10634472" cy="685800"/>
+            <a:off x="685800" y="3017520"/>
+            <a:ext cx="10817352" cy="1463040"/>
           </a:xfrm>
           <a:prstGeom prst="rect">
             <a:avLst/>
@@ -8436,27 +11405,27 @@
           <a:p>
             <a:pPr algn="l"/>
             <a:r>
-              <a:rPr sz="2400" b="1" i="0">
-                <a:solidFill>
-                  <a:srgbClr val="1F2C56"/>
+              <a:rPr sz="4000" b="1" i="0">
+                <a:solidFill>
+                  <a:srgbClr val="FFFFFF"/>
                 </a:solidFill>
                 <a:latin typeface="Arial"/>
               </a:rPr>
-              <a:t>Was unterscheidet den Branchenexperten?</a:t>
-            </a:r>
-          </a:p>
-        </p:txBody>
-      </p:sp>
-      <p:sp>
-        <p:nvSpPr>
-          <p:cNvPr id="8" name="TextBox 7"/>
+              <a:t>Einstieg</a:t>
+            </a:r>
+          </a:p>
+        </p:txBody>
+      </p:sp>
+      <p:sp>
+        <p:nvSpPr>
+          <p:cNvPr id="6" name="TextBox 5"/>
           <p:cNvSpPr txBox="1"/>
           <p:nvPr/>
         </p:nvSpPr>
         <p:spPr>
           <a:xfrm>
-            <a:off x="685800" y="1417320"/>
-            <a:ext cx="10817352" cy="4892040"/>
+            <a:off x="685800" y="4480560"/>
+            <a:ext cx="8653881" cy="1280160"/>
           </a:xfrm>
           <a:prstGeom prst="rect">
             <a:avLst/>
@@ -8469,193 +11438,29 @@
           </a:bodyPr>
           <a:lstStyle/>
           <a:p>
-            <a:pPr marL="190500" indent="-190500">
-              <a:spcBef>
-                <a:spcPts val="400"/>
-              </a:spcBef>
-              <a:spcAft>
-                <a:spcPts val="200"/>
-              </a:spcAft>
-            </a:pPr>
-            <a:r>
-              <a:rPr sz="1300">
-                <a:solidFill>
-                  <a:srgbClr val="3D5466"/>
+            <a:pPr algn="l"/>
+            <a:r>
+              <a:rPr sz="1600" b="0" i="0">
+                <a:solidFill>
+                  <a:srgbClr val="C8D2E6"/>
                 </a:solidFill>
                 <a:latin typeface="Arial"/>
               </a:rPr>
-              <a:t>▸  Branchenexpertise bedeutet mehr als das Kennen von Kennziffern. Sie umfasst:</a:t>
-            </a:r>
-          </a:p>
-          <a:p>
-            <a:pPr marL="190500" indent="-190500">
-              <a:spcBef>
-                <a:spcPts val="400"/>
-              </a:spcBef>
-              <a:spcAft>
-                <a:spcPts val="200"/>
-              </a:spcAft>
-            </a:pPr>
-            <a:r>
-              <a:rPr sz="1300">
-                <a:solidFill>
-                  <a:srgbClr val="3D5466"/>
-                </a:solidFill>
-                <a:latin typeface="Arial"/>
-              </a:rPr>
-              <a:t>▸  Strukturwissen: Wie ist die Branche aufgebaut? Welche Wertschöpfungsstufen gibt es?</a:t>
-            </a:r>
-          </a:p>
-          <a:p>
-            <a:pPr marL="190500" indent="-190500">
-              <a:spcBef>
-                <a:spcPts val="400"/>
-              </a:spcBef>
-              <a:spcAft>
-                <a:spcPts val="200"/>
-              </a:spcAft>
-            </a:pPr>
-            <a:r>
-              <a:rPr sz="1300">
-                <a:solidFill>
-                  <a:srgbClr val="3D5466"/>
-                </a:solidFill>
-                <a:latin typeface="Arial"/>
-              </a:rPr>
-              <a:t>▸  Dynamikwissen: Welche Veränderungskräfte treiben die Branche?</a:t>
-            </a:r>
-          </a:p>
-          <a:p>
-            <a:pPr marL="190500" indent="-190500">
-              <a:spcBef>
-                <a:spcPts val="400"/>
-              </a:spcBef>
-              <a:spcAft>
-                <a:spcPts val="200"/>
-              </a:spcAft>
-            </a:pPr>
-            <a:r>
-              <a:rPr sz="1300">
-                <a:solidFill>
-                  <a:srgbClr val="3D5466"/>
-                </a:solidFill>
-                <a:latin typeface="Arial"/>
-              </a:rPr>
-              <a:t>▸  Netzwerkwissen: Wer sind die relevanten Verbände, Meinungsführer, Schlüsselkunden?</a:t>
-            </a:r>
-          </a:p>
-          <a:p>
-            <a:pPr marL="190500" indent="-190500">
-              <a:spcBef>
-                <a:spcPts val="400"/>
-              </a:spcBef>
-              <a:spcAft>
-                <a:spcPts val="200"/>
-              </a:spcAft>
-            </a:pPr>
-            <a:r>
-              <a:rPr sz="1300">
-                <a:solidFill>
-                  <a:srgbClr val="3D5466"/>
-                </a:solidFill>
-                <a:latin typeface="Arial"/>
-              </a:rPr>
-              <a:t>▸  Erfahrungswissen: Welche typischen Herausforderungen begegnen Unternehmern dieser Branche?</a:t>
-            </a:r>
-          </a:p>
-          <a:p>
-            <a:pPr marL="177800" indent="-177800">
-              <a:spcBef>
-                <a:spcPts val="600"/>
-              </a:spcBef>
-              <a:spcAft>
-                <a:spcPts val="200"/>
-              </a:spcAft>
-            </a:pPr>
-            <a:r>
-              <a:rPr sz="1200" i="1">
-                <a:solidFill>
-                  <a:srgbClr val="3D5466"/>
-                </a:solidFill>
-                <a:latin typeface="Arial"/>
-              </a:rPr>
-              <a:t>→  „Der Experte weiß nicht mehr Fakten als der Novize – er sieht die Situation anders." (Dreyfus &amp; Dreyfus, 1986, S. 28)</a:t>
-            </a:r>
-          </a:p>
-          <a:p>
-            <a:pPr marL="190500" indent="-190500">
-              <a:spcBef>
-                <a:spcPts val="400"/>
-              </a:spcBef>
-              <a:spcAft>
-                <a:spcPts val="200"/>
-              </a:spcAft>
-            </a:pPr>
-            <a:r>
-              <a:rPr sz="1300">
-                <a:solidFill>
-                  <a:srgbClr val="3D5466"/>
-                </a:solidFill>
-                <a:latin typeface="Arial"/>
-              </a:rPr>
-              <a:t>▸  ## 4.2 Branchenanalyse: Porter's Five Forces und PESTEL</a:t>
-            </a:r>
-          </a:p>
-        </p:txBody>
-      </p:sp>
-      <p:sp>
-        <p:nvSpPr>
-          <p:cNvPr id="9" name="Rectangle 8"/>
-          <p:cNvSpPr/>
-          <p:nvPr/>
-        </p:nvSpPr>
-        <p:spPr>
-          <a:xfrm>
-            <a:off x="0" y="6510528"/>
-            <a:ext cx="12188952" cy="347472"/>
-          </a:xfrm>
-          <a:prstGeom prst="rect">
-            <a:avLst/>
-          </a:prstGeom>
-          <a:solidFill>
-            <a:srgbClr val="0A1937"/>
-          </a:solidFill>
-          <a:ln>
-            <a:noFill/>
-          </a:ln>
-        </p:spPr>
-        <p:style>
-          <a:lnRef idx="1">
-            <a:schemeClr val="accent1"/>
-          </a:lnRef>
-          <a:fillRef idx="3">
-            <a:schemeClr val="accent1"/>
-          </a:fillRef>
-          <a:effectRef idx="2">
-            <a:schemeClr val="accent1"/>
-          </a:effectRef>
-          <a:fontRef idx="minor">
-            <a:schemeClr val="lt1"/>
-          </a:fontRef>
-        </p:style>
-        <p:txBody>
-          <a:bodyPr rtlCol="0" anchor="ctr"/>
-          <a:lstStyle/>
-          <a:p>
-            <a:pPr algn="ctr"/>
-          </a:p>
-        </p:txBody>
-      </p:sp>
-      <p:sp>
-        <p:nvSpPr>
-          <p:cNvPr id="10" name="TextBox 9"/>
+              <a:t>Die eigene Zielbranche benennen – und was Expertise wirklich ausmacht.</a:t>
+            </a:r>
+          </a:p>
+        </p:txBody>
+      </p:sp>
+      <p:sp>
+        <p:nvSpPr>
+          <p:cNvPr id="7" name="TextBox 6"/>
           <p:cNvSpPr txBox="1"/>
           <p:nvPr/>
         </p:nvSpPr>
         <p:spPr>
           <a:xfrm>
-            <a:off x="685800" y="6583680"/>
-            <a:ext cx="6490411" cy="256032"/>
+            <a:off x="685800" y="6355080"/>
+            <a:ext cx="10817352" cy="274320"/>
           </a:xfrm>
           <a:prstGeom prst="rect">
             <a:avLst/>
@@ -8672,7 +11477,7 @@
             <a:r>
               <a:rPr sz="700">
                 <a:solidFill>
-                  <a:srgbClr val="A0B4D2"/>
+                  <a:srgbClr val="8CA0C3"/>
                 </a:solidFill>
                 <a:latin typeface="Consolas"/>
               </a:rPr>
@@ -8936,7 +11741,7 @@
                 </a:solidFill>
                 <a:latin typeface="Arial"/>
               </a:rPr>
-              <a:t>PESTEL-Analyse</a:t>
+              <a:t>Was unterscheidet den Branchenexperten?</a:t>
             </a:r>
           </a:p>
         </p:txBody>
@@ -8962,6 +11767,25 @@
             <a:spAutoFit/>
           </a:bodyPr>
           <a:lstStyle/>
+          <a:p>
+            <a:pPr marL="177800" indent="-177800">
+              <a:spcBef>
+                <a:spcPts val="600"/>
+              </a:spcBef>
+              <a:spcAft>
+                <a:spcPts val="200"/>
+              </a:spcAft>
+            </a:pPr>
+            <a:r>
+              <a:rPr sz="1200" i="1">
+                <a:solidFill>
+                  <a:srgbClr val="3D5466"/>
+                </a:solidFill>
+                <a:latin typeface="Arial"/>
+              </a:rPr>
+              <a:t>→  Der Experte weiß nicht mehr Fakten als der Novize – er sieht die Situation anders (Dreyfus &amp; Dreyfus, 1986).</a:t>
+            </a:r>
+          </a:p>
           <a:p>
             <a:pPr marL="190500" indent="-190500">
               <a:spcBef>
@@ -8978,7 +11802,45 @@
                 </a:solidFill>
                 <a:latin typeface="Arial"/>
               </a:rPr>
-              <a:t>▸  Die PESTEL-Analyse ergänzt das Five-Forces-Modell um das makroökonomische Umfeld:</a:t>
+              <a:t>▸  Expertise entsteht durch reflektierte Praxis: beobachten, handeln, reflektieren, anpassen.</a:t>
+            </a:r>
+          </a:p>
+          <a:p>
+            <a:pPr marL="190500" indent="-190500">
+              <a:spcBef>
+                <a:spcPts val="400"/>
+              </a:spcBef>
+              <a:spcAft>
+                <a:spcPts val="200"/>
+              </a:spcAft>
+            </a:pPr>
+            <a:r>
+              <a:rPr sz="1300">
+                <a:solidFill>
+                  <a:srgbClr val="3D5466"/>
+                </a:solidFill>
+                <a:latin typeface="Arial"/>
+              </a:rPr>
+              <a:t>▸  „Reflection in Action" (Schön): der Praktiker lernt im Tun und nutzt die Überraschung als Lernimpuls.</a:t>
+            </a:r>
+          </a:p>
+          <a:p>
+            <a:pPr marL="190500" indent="-190500">
+              <a:spcBef>
+                <a:spcPts val="400"/>
+              </a:spcBef>
+              <a:spcAft>
+                <a:spcPts val="200"/>
+              </a:spcAft>
+            </a:pPr>
+            <a:r>
+              <a:rPr sz="1300">
+                <a:solidFill>
+                  <a:srgbClr val="3D5466"/>
+                </a:solidFill>
+                <a:latin typeface="Arial"/>
+              </a:rPr>
+              <a:t>▸  Selbststudium allein reicht nicht – es braucht System (Analyse) plus Netzwerk.</a:t>
             </a:r>
           </a:p>
         </p:txBody>
@@ -9094,7 +11956,7 @@
             <a:avLst/>
           </a:prstGeom>
           <a:solidFill>
-            <a:srgbClr val="FFFFFF"/>
+            <a:srgbClr val="1F2C56"/>
           </a:solidFill>
           <a:ln>
             <a:noFill/>
@@ -9124,57 +11986,14 @@
       </p:sp>
       <p:sp>
         <p:nvSpPr>
-          <p:cNvPr id="3" name="Rectangle 2"/>
-          <p:cNvSpPr/>
-          <p:nvPr/>
-        </p:nvSpPr>
-        <p:spPr>
-          <a:xfrm>
-            <a:off x="0" y="0"/>
-            <a:ext cx="12188952" cy="50292"/>
-          </a:xfrm>
-          <a:prstGeom prst="rect">
-            <a:avLst/>
-          </a:prstGeom>
-          <a:solidFill>
-            <a:srgbClr val="1F2C56"/>
-          </a:solidFill>
-          <a:ln>
-            <a:noFill/>
-          </a:ln>
-        </p:spPr>
-        <p:style>
-          <a:lnRef idx="1">
-            <a:schemeClr val="accent1"/>
-          </a:lnRef>
-          <a:fillRef idx="3">
-            <a:schemeClr val="accent1"/>
-          </a:fillRef>
-          <a:effectRef idx="2">
-            <a:schemeClr val="accent1"/>
-          </a:effectRef>
-          <a:fontRef idx="minor">
-            <a:schemeClr val="lt1"/>
-          </a:fontRef>
-        </p:style>
-        <p:txBody>
-          <a:bodyPr rtlCol="0" anchor="ctr"/>
-          <a:lstStyle/>
-          <a:p>
-            <a:pPr algn="ctr"/>
-          </a:p>
-        </p:txBody>
-      </p:sp>
-      <p:sp>
-        <p:nvSpPr>
-          <p:cNvPr id="4" name="TextBox 3"/>
+          <p:cNvPr id="3" name="TextBox 2"/>
           <p:cNvSpPr txBox="1"/>
           <p:nvPr/>
         </p:nvSpPr>
         <p:spPr>
           <a:xfrm>
-            <a:off x="685800" y="109728"/>
-            <a:ext cx="10817352" cy="228600"/>
+            <a:off x="685800" y="2377440"/>
+            <a:ext cx="10817352" cy="365760"/>
           </a:xfrm>
           <a:prstGeom prst="rect">
             <a:avLst/>
@@ -9189,62 +12008,27 @@
           <a:p>
             <a:pPr algn="l"/>
             <a:r>
-              <a:rPr sz="750">
-                <a:solidFill>
-                  <a:srgbClr val="78808C"/>
+              <a:rPr sz="1200">
+                <a:solidFill>
+                  <a:srgbClr val="D9C089"/>
                 </a:solidFill>
                 <a:latin typeface="Consolas"/>
               </a:rPr>
-              <a:t>M09  ·  SCHAUBILD</a:t>
-            </a:r>
-          </a:p>
-        </p:txBody>
-      </p:sp>
-      <p:sp>
-        <p:nvSpPr>
-          <p:cNvPr id="5" name="TextBox 4"/>
-          <p:cNvSpPr txBox="1"/>
-          <p:nvPr/>
-        </p:nvSpPr>
-        <p:spPr>
-          <a:xfrm>
-            <a:off x="685800" y="502920"/>
-            <a:ext cx="10817352" cy="594360"/>
-          </a:xfrm>
-          <a:prstGeom prst="rect">
-            <a:avLst/>
-          </a:prstGeom>
-          <a:noFill/>
-        </p:spPr>
-        <p:txBody>
-          <a:bodyPr wrap="square">
-            <a:spAutoFit/>
-          </a:bodyPr>
-          <a:lstStyle/>
-          <a:p>
-            <a:pPr algn="l"/>
-            <a:r>
-              <a:rPr sz="2000" b="1" i="0">
-                <a:solidFill>
-                  <a:srgbClr val="1F2C56"/>
-                </a:solidFill>
-                <a:latin typeface="Arial"/>
-              </a:rPr>
-              <a:t>PESTEL-Analyse für die Bankpraxis</a:t>
-            </a:r>
-          </a:p>
-        </p:txBody>
-      </p:sp>
-      <p:sp>
-        <p:nvSpPr>
-          <p:cNvPr id="6" name="Rectangle 5"/>
+              <a:t>10:10–11:00</a:t>
+            </a:r>
+          </a:p>
+        </p:txBody>
+      </p:sp>
+      <p:sp>
+        <p:nvSpPr>
+          <p:cNvPr id="4" name="Rectangle 3"/>
           <p:cNvSpPr/>
           <p:nvPr/>
         </p:nvSpPr>
         <p:spPr>
           <a:xfrm>
-            <a:off x="685800" y="1143000"/>
-            <a:ext cx="10817352" cy="25400"/>
+            <a:off x="685800" y="2788920"/>
+            <a:ext cx="548640" cy="38100"/>
           </a:xfrm>
           <a:prstGeom prst="rect">
             <a:avLst/>
@@ -9278,83 +12062,86 @@
           </a:p>
         </p:txBody>
       </p:sp>
-      <p:pic>
-        <p:nvPicPr>
-          <p:cNvPr id="7" name="Picture 6" descr="image.png"/>
-          <p:cNvPicPr>
-            <a:picLocks noChangeAspect="1"/>
-          </p:cNvPicPr>
-          <p:nvPr/>
-        </p:nvPicPr>
-        <p:blipFill>
-          <a:blip r:embed="rId2"/>
-          <a:stretch>
-            <a:fillRect/>
-          </a:stretch>
-        </p:blipFill>
-        <p:spPr>
-          <a:xfrm>
-            <a:off x="2303489" y="1325880"/>
-            <a:ext cx="7581973" cy="4937760"/>
-          </a:xfrm>
-          <a:prstGeom prst="rect">
-            <a:avLst/>
-          </a:prstGeom>
-        </p:spPr>
-      </p:pic>
-      <p:sp>
-        <p:nvSpPr>
-          <p:cNvPr id="8" name="Rectangle 7"/>
-          <p:cNvSpPr/>
-          <p:nvPr/>
-        </p:nvSpPr>
-        <p:spPr>
-          <a:xfrm>
-            <a:off x="0" y="6510528"/>
-            <a:ext cx="12188952" cy="347472"/>
-          </a:xfrm>
-          <a:prstGeom prst="rect">
-            <a:avLst/>
-          </a:prstGeom>
-          <a:solidFill>
-            <a:srgbClr val="0A1937"/>
-          </a:solidFill>
-          <a:ln>
-            <a:noFill/>
-          </a:ln>
-        </p:spPr>
-        <p:style>
-          <a:lnRef idx="1">
-            <a:schemeClr val="accent1"/>
-          </a:lnRef>
-          <a:fillRef idx="3">
-            <a:schemeClr val="accent1"/>
-          </a:fillRef>
-          <a:effectRef idx="2">
-            <a:schemeClr val="accent1"/>
-          </a:effectRef>
-          <a:fontRef idx="minor">
-            <a:schemeClr val="lt1"/>
-          </a:fontRef>
-        </p:style>
-        <p:txBody>
-          <a:bodyPr rtlCol="0" anchor="ctr"/>
-          <a:lstStyle/>
-          <a:p>
-            <a:pPr algn="ctr"/>
-          </a:p>
-        </p:txBody>
-      </p:sp>
-      <p:sp>
-        <p:nvSpPr>
-          <p:cNvPr id="9" name="TextBox 8"/>
+      <p:sp>
+        <p:nvSpPr>
+          <p:cNvPr id="5" name="TextBox 4"/>
           <p:cNvSpPr txBox="1"/>
           <p:nvPr/>
         </p:nvSpPr>
         <p:spPr>
           <a:xfrm>
-            <a:off x="685800" y="6583680"/>
-            <a:ext cx="6490411" cy="256032"/>
+            <a:off x="685800" y="3017520"/>
+            <a:ext cx="10817352" cy="1463040"/>
+          </a:xfrm>
+          <a:prstGeom prst="rect">
+            <a:avLst/>
+          </a:prstGeom>
+          <a:noFill/>
+        </p:spPr>
+        <p:txBody>
+          <a:bodyPr wrap="square">
+            <a:spAutoFit/>
+          </a:bodyPr>
+          <a:lstStyle/>
+          <a:p>
+            <a:pPr algn="l"/>
+            <a:r>
+              <a:rPr sz="4000" b="1" i="0">
+                <a:solidFill>
+                  <a:srgbClr val="FFFFFF"/>
+                </a:solidFill>
+                <a:latin typeface="Arial"/>
+              </a:rPr>
+              <a:t>Five Forces</a:t>
+            </a:r>
+          </a:p>
+        </p:txBody>
+      </p:sp>
+      <p:sp>
+        <p:nvSpPr>
+          <p:cNvPr id="6" name="TextBox 5"/>
+          <p:cNvSpPr txBox="1"/>
+          <p:nvPr/>
+        </p:nvSpPr>
+        <p:spPr>
+          <a:xfrm>
+            <a:off x="685800" y="4480560"/>
+            <a:ext cx="8653881" cy="1280160"/>
+          </a:xfrm>
+          <a:prstGeom prst="rect">
+            <a:avLst/>
+          </a:prstGeom>
+          <a:noFill/>
+        </p:spPr>
+        <p:txBody>
+          <a:bodyPr wrap="square">
+            <a:spAutoFit/>
+          </a:bodyPr>
+          <a:lstStyle/>
+          <a:p>
+            <a:pPr algn="l"/>
+            <a:r>
+              <a:rPr sz="1600" b="0" i="0">
+                <a:solidFill>
+                  <a:srgbClr val="C8D2E6"/>
+                </a:solidFill>
+                <a:latin typeface="Arial"/>
+              </a:rPr>
+              <a:t>Eine Branche mit Porters fünf Kräften systematisch lesen.</a:t>
+            </a:r>
+          </a:p>
+        </p:txBody>
+      </p:sp>
+      <p:sp>
+        <p:nvSpPr>
+          <p:cNvPr id="7" name="TextBox 6"/>
+          <p:cNvSpPr txBox="1"/>
+          <p:nvPr/>
+        </p:nvSpPr>
+        <p:spPr>
+          <a:xfrm>
+            <a:off x="685800" y="6355080"/>
+            <a:ext cx="10817352" cy="274320"/>
           </a:xfrm>
           <a:prstGeom prst="rect">
             <a:avLst/>
@@ -9371,46 +12158,11 @@
             <a:r>
               <a:rPr sz="700">
                 <a:solidFill>
-                  <a:srgbClr val="A0B4D2"/>
+                  <a:srgbClr val="8CA0C3"/>
                 </a:solidFill>
                 <a:latin typeface="Consolas"/>
               </a:rPr>
               <a:t>FKB Campus  ·  M09</a:t>
-            </a:r>
-          </a:p>
-        </p:txBody>
-      </p:sp>
-      <p:sp>
-        <p:nvSpPr>
-          <p:cNvPr id="10" name="TextBox 9"/>
-          <p:cNvSpPr txBox="1"/>
-          <p:nvPr/>
-        </p:nvSpPr>
-        <p:spPr>
-          <a:xfrm>
-            <a:off x="7176211" y="6583680"/>
-            <a:ext cx="4326940" cy="256032"/>
-          </a:xfrm>
-          <a:prstGeom prst="rect">
-            <a:avLst/>
-          </a:prstGeom>
-          <a:noFill/>
-        </p:spPr>
-        <p:txBody>
-          <a:bodyPr wrap="none">
-            <a:spAutoFit/>
-          </a:bodyPr>
-          <a:lstStyle/>
-          <a:p>
-            <a:pPr algn="r"/>
-            <a:r>
-              <a:rPr sz="700">
-                <a:solidFill>
-                  <a:srgbClr val="A0B4D2"/>
-                </a:solidFill>
-                <a:latin typeface="Consolas"/>
-              </a:rPr>
-              <a:t>Schaubild</a:t>
             </a:r>
           </a:p>
         </p:txBody>
@@ -9670,7 +12422,7 @@
                 </a:solidFill>
                 <a:latin typeface="Arial"/>
               </a:rPr>
-              <a:t>Wissensarbeit transparent machen – Gespräche in der Lernphase</a:t>
+              <a:t>Die Branche systematisch lesen</a:t>
             </a:r>
           </a:p>
         </p:txBody>
@@ -9692,10 +12444,29 @@
           <a:noFill/>
         </p:spPr>
         <p:txBody>
-          <a:bodyPr wrap="square">
+          <a:bodyPr wrap="square" anchor="ctr">
             <a:spAutoFit/>
           </a:bodyPr>
           <a:lstStyle/>
+          <a:p>
+            <a:pPr marL="177800" indent="-177800">
+              <a:spcBef>
+                <a:spcPts val="600"/>
+              </a:spcBef>
+              <a:spcAft>
+                <a:spcPts val="200"/>
+              </a:spcAft>
+            </a:pPr>
+            <a:r>
+              <a:rPr sz="1200" i="1">
+                <a:solidFill>
+                  <a:srgbClr val="3D5466"/>
+                </a:solidFill>
+                <a:latin typeface="Arial"/>
+              </a:rPr>
+              <a:t>→  Wer eine Branche mit Five Forces liest, versteht ihre Ertragslogik – nicht nur die Zahlen eines einzelnen Kunden.</a:t>
+            </a:r>
+          </a:p>
           <a:p>
             <a:pPr marL="190500" indent="-190500">
               <a:spcBef>
@@ -9712,45 +12483,7 @@
                 </a:solidFill>
                 <a:latin typeface="Arial"/>
               </a:rPr>
-              <a:t>▸  Formulierungen, die funktionieren:</a:t>
-            </a:r>
-          </a:p>
-          <a:p>
-            <a:pPr marL="177800" indent="-177800">
-              <a:spcBef>
-                <a:spcPts val="600"/>
-              </a:spcBef>
-              <a:spcAft>
-                <a:spcPts val="200"/>
-              </a:spcAft>
-            </a:pPr>
-            <a:r>
-              <a:rPr sz="1200" i="1">
-                <a:solidFill>
-                  <a:srgbClr val="3D5466"/>
-                </a:solidFill>
-                <a:latin typeface="Arial"/>
-              </a:rPr>
-              <a:t>→  „Ich bin gerade dabei, mein Wissen über Ihre Branche systematisch auszubauen – ich lerne am meisten von meinen Kunden. Was sollte jeder Bankmitarbeiter über Ihr Geschäft wissen?"</a:t>
-            </a:r>
-          </a:p>
-          <a:p>
-            <a:pPr marL="177800" indent="-177800">
-              <a:spcBef>
-                <a:spcPts val="600"/>
-              </a:spcBef>
-              <a:spcAft>
-                <a:spcPts val="200"/>
-              </a:spcAft>
-            </a:pPr>
-            <a:r>
-              <a:rPr sz="1200" i="1">
-                <a:solidFill>
-                  <a:srgbClr val="3D5466"/>
-                </a:solidFill>
-                <a:latin typeface="Arial"/>
-              </a:rPr>
-              <a:t>→  „Ich habe mit dem DZ BANK Agrar-Spezialisten gesprochen – der hat mir [Thema] erklärt. Das war neu für mich. Stimmt das mit Ihrer Erfahrung überein?"</a:t>
+              <a:t>▸  Wettbewerb, Lieferanten, Abnehmer, neue Anbieter, Substitute.</a:t>
             </a:r>
           </a:p>
           <a:p>
@@ -9769,159 +12502,7 @@
                 </a:solidFill>
                 <a:latin typeface="Arial"/>
               </a:rPr>
-              <a:t>▸  Was vermeiden:</a:t>
-            </a:r>
-          </a:p>
-          <a:p>
-            <a:pPr marL="190500" indent="-190500">
-              <a:spcBef>
-                <a:spcPts val="400"/>
-              </a:spcBef>
-              <a:spcAft>
-                <a:spcPts val="200"/>
-              </a:spcAft>
-            </a:pPr>
-            <a:r>
-              <a:rPr sz="1300">
-                <a:solidFill>
-                  <a:srgbClr val="3D5466"/>
-                </a:solidFill>
-                <a:latin typeface="Arial"/>
-              </a:rPr>
-              <a:t>▸  Nicht sagen: „Ich kenne mich in Ihrer Branche noch nicht so gut aus." (schafft Unsicherheit)</a:t>
-            </a:r>
-          </a:p>
-          <a:p>
-            <a:pPr marL="190500" indent="-190500">
-              <a:spcBef>
-                <a:spcPts val="400"/>
-              </a:spcBef>
-              <a:spcAft>
-                <a:spcPts val="200"/>
-              </a:spcAft>
-            </a:pPr>
-            <a:r>
-              <a:rPr sz="1300">
-                <a:solidFill>
-                  <a:srgbClr val="3D5466"/>
-                </a:solidFill>
-                <a:latin typeface="Arial"/>
-              </a:rPr>
-              <a:t>▸  Nicht sagen: „Ich bin kein Branchenexperte, aber..." (unnötige Selbstabwertung)</a:t>
-            </a:r>
-          </a:p>
-          <a:p>
-            <a:pPr marL="190500" indent="-190500">
-              <a:spcBef>
-                <a:spcPts val="400"/>
-              </a:spcBef>
-              <a:spcAft>
-                <a:spcPts val="200"/>
-              </a:spcAft>
-            </a:pPr>
-            <a:r>
-              <a:rPr sz="1300">
-                <a:solidFill>
-                  <a:srgbClr val="3D5466"/>
-                </a:solidFill>
-                <a:latin typeface="Arial"/>
-              </a:rPr>
-              <a:t>▸  Nicht so tun, als ob man alles weiß (Kunden merken es sofort)</a:t>
-            </a:r>
-          </a:p>
-          <a:p>
-            <a:pPr marL="190500" indent="-190500">
-              <a:spcBef>
-                <a:spcPts val="400"/>
-              </a:spcBef>
-              <a:spcAft>
-                <a:spcPts val="200"/>
-              </a:spcAft>
-            </a:pPr>
-            <a:r>
-              <a:rPr sz="1300">
-                <a:solidFill>
-                  <a:srgbClr val="3D5466"/>
-                </a:solidFill>
-                <a:latin typeface="Arial"/>
-              </a:rPr>
-              <a:t>▸  Die Grundregel: Interesse + konkrete Vorbereitung + echtes Zuhören ersetzen fehlende Expertise – zumindest in den ersten Gesprächen. Expertise entsteht dann im Dialog.</a:t>
-            </a:r>
-          </a:p>
-          <a:p>
-            <a:pPr marL="190500" indent="-190500">
-              <a:spcBef>
-                <a:spcPts val="400"/>
-              </a:spcBef>
-              <a:spcAft>
-                <a:spcPts val="200"/>
-              </a:spcAft>
-            </a:pPr>
-            <a:r>
-              <a:rPr sz="1300">
-                <a:solidFill>
-                  <a:srgbClr val="3D5466"/>
-                </a:solidFill>
-                <a:latin typeface="Arial"/>
-              </a:rPr>
-              <a:t>▸  ## 4.3 Informationsquellen für Branchenexpertise</a:t>
-            </a:r>
-          </a:p>
-          <a:p>
-            <a:pPr marL="190500" indent="-190500">
-              <a:spcBef>
-                <a:spcPts val="400"/>
-              </a:spcBef>
-              <a:spcAft>
-                <a:spcPts val="200"/>
-              </a:spcAft>
-            </a:pPr>
-            <a:r>
-              <a:rPr sz="1300">
-                <a:solidFill>
-                  <a:srgbClr val="3D5466"/>
-                </a:solidFill>
-                <a:latin typeface="Arial"/>
-              </a:rPr>
-              <a:t>▸  Systematische Branchenexpertise entsteht aus dem Zusammenspiel verschiedener Quellen. Die folgende Matrix hilft bei der Auswahl:</a:t>
-            </a:r>
-          </a:p>
-          <a:p>
-            <a:pPr marL="190500" indent="-190500">
-              <a:spcBef>
-                <a:spcPts val="400"/>
-              </a:spcBef>
-              <a:spcAft>
-                <a:spcPts val="200"/>
-              </a:spcAft>
-            </a:pPr>
-            <a:r>
-              <a:rPr sz="1300">
-                <a:solidFill>
-                  <a:srgbClr val="3D5466"/>
-                </a:solidFill>
-                <a:latin typeface="Arial"/>
-              </a:rPr>
-              <a:t>▸  Empfohlene Priorisierung für den Start: Branchenverband (Jahresbericht), DZ BANK Research (sofern verfügbar), IHK-Konjunkturbericht, 3–5 Kundengespräche mit Fokus auf Branchentrends.</a:t>
-            </a:r>
-          </a:p>
-          <a:p>
-            <a:pPr marL="190500" indent="-190500">
-              <a:spcBef>
-                <a:spcPts val="400"/>
-              </a:spcBef>
-              <a:spcAft>
-                <a:spcPts val="200"/>
-              </a:spcAft>
-            </a:pPr>
-            <a:r>
-              <a:rPr sz="1300">
-                <a:solidFill>
-                  <a:srgbClr val="3D5466"/>
-                </a:solidFill>
-                <a:latin typeface="Arial"/>
-              </a:rPr>
-              <a:t>▸  ## 4.4 Expertennetzwerk aufbauen</a:t>
+              <a:t>▸  Jede Kraft ist ein Gesprächsanlass mit dem Unternehmer.</a:t>
             </a:r>
           </a:p>
         </p:txBody>
@@ -10037,7 +12618,7 @@
             <a:avLst/>
           </a:prstGeom>
           <a:solidFill>
-            <a:srgbClr val="EDEDF3"/>
+            <a:srgbClr val="FFFFFF"/>
           </a:solidFill>
           <a:ln>
             <a:noFill/>
@@ -10138,51 +12719,43 @@
                 </a:solidFill>
                 <a:latin typeface="Consolas"/>
               </a:rPr>
-              <a:t>M09  ·  INHALT</a:t>
-            </a:r>
-          </a:p>
-        </p:txBody>
-      </p:sp>
-      <p:sp>
-        <p:nvSpPr>
-          <p:cNvPr id="5" name="Rectangle 4"/>
-          <p:cNvSpPr/>
-          <p:nvPr/>
-        </p:nvSpPr>
-        <p:spPr>
-          <a:xfrm>
-            <a:off x="0" y="1234440"/>
-            <a:ext cx="12188952" cy="12700"/>
-          </a:xfrm>
-          <a:prstGeom prst="rect">
-            <a:avLst/>
-          </a:prstGeom>
-          <a:solidFill>
-            <a:srgbClr val="D8DFE4"/>
-          </a:solidFill>
-          <a:ln>
-            <a:noFill/>
-          </a:ln>
-        </p:spPr>
-        <p:style>
-          <a:lnRef idx="1">
-            <a:schemeClr val="accent1"/>
-          </a:lnRef>
-          <a:fillRef idx="3">
-            <a:schemeClr val="accent1"/>
-          </a:fillRef>
-          <a:effectRef idx="2">
-            <a:schemeClr val="accent1"/>
-          </a:effectRef>
-          <a:fontRef idx="minor">
-            <a:schemeClr val="lt1"/>
-          </a:fontRef>
-        </p:style>
-        <p:txBody>
-          <a:bodyPr rtlCol="0" anchor="ctr"/>
-          <a:lstStyle/>
-          <a:p>
-            <a:pPr algn="ctr"/>
+              <a:t>M09  ·  SCHAUBILD</a:t>
+            </a:r>
+          </a:p>
+        </p:txBody>
+      </p:sp>
+      <p:sp>
+        <p:nvSpPr>
+          <p:cNvPr id="5" name="TextBox 4"/>
+          <p:cNvSpPr txBox="1"/>
+          <p:nvPr/>
+        </p:nvSpPr>
+        <p:spPr>
+          <a:xfrm>
+            <a:off x="685800" y="502920"/>
+            <a:ext cx="10817352" cy="594360"/>
+          </a:xfrm>
+          <a:prstGeom prst="rect">
+            <a:avLst/>
+          </a:prstGeom>
+          <a:noFill/>
+        </p:spPr>
+        <p:txBody>
+          <a:bodyPr wrap="square">
+            <a:spAutoFit/>
+          </a:bodyPr>
+          <a:lstStyle/>
+          <a:p>
+            <a:pPr algn="l"/>
+            <a:r>
+              <a:rPr sz="2000" b="1" i="0">
+                <a:solidFill>
+                  <a:srgbClr val="1F2C56"/>
+                </a:solidFill>
+                <a:latin typeface="Arial"/>
+              </a:rPr>
+              <a:t>Wettbewerbskräfte einer Branche (Five Forces)</a:t>
+            </a:r>
           </a:p>
         </p:txBody>
       </p:sp>
@@ -10194,8 +12767,8 @@
         </p:nvSpPr>
         <p:spPr>
           <a:xfrm>
-            <a:off x="685800" y="502920"/>
-            <a:ext cx="36576" cy="658368"/>
+            <a:off x="685800" y="1143000"/>
+            <a:ext cx="10817352" cy="25400"/>
           </a:xfrm>
           <a:prstGeom prst="rect">
             <a:avLst/>
@@ -10229,105 +12802,33 @@
           </a:p>
         </p:txBody>
       </p:sp>
-      <p:sp>
-        <p:nvSpPr>
-          <p:cNvPr id="7" name="TextBox 6"/>
-          <p:cNvSpPr txBox="1"/>
-          <p:nvPr/>
-        </p:nvSpPr>
-        <p:spPr>
-          <a:xfrm>
-            <a:off x="813816" y="502920"/>
-            <a:ext cx="10634472" cy="685800"/>
-          </a:xfrm>
-          <a:prstGeom prst="rect">
-            <a:avLst/>
-          </a:prstGeom>
-          <a:noFill/>
-        </p:spPr>
-        <p:txBody>
-          <a:bodyPr wrap="square">
-            <a:spAutoFit/>
-          </a:bodyPr>
-          <a:lstStyle/>
-          <a:p>
-            <a:pPr algn="l"/>
-            <a:r>
-              <a:rPr sz="2400" b="1" i="0">
-                <a:solidFill>
-                  <a:srgbClr val="1F2C56"/>
-                </a:solidFill>
-                <a:latin typeface="Arial"/>
-              </a:rPr>
-              <a:t>AB-1: Branchenanalyse – Five Forces Scoring</a:t>
-            </a:r>
-          </a:p>
-        </p:txBody>
-      </p:sp>
-      <p:sp>
-        <p:nvSpPr>
-          <p:cNvPr id="8" name="TextBox 7"/>
-          <p:cNvSpPr txBox="1"/>
-          <p:nvPr/>
-        </p:nvSpPr>
-        <p:spPr>
-          <a:xfrm>
-            <a:off x="685800" y="1417320"/>
-            <a:ext cx="10817352" cy="4892040"/>
-          </a:xfrm>
-          <a:prstGeom prst="rect">
-            <a:avLst/>
-          </a:prstGeom>
-          <a:noFill/>
-        </p:spPr>
-        <p:txBody>
-          <a:bodyPr wrap="square" anchor="ctr">
-            <a:spAutoFit/>
-          </a:bodyPr>
-          <a:lstStyle/>
-          <a:p>
-            <a:pPr marL="190500" indent="-190500">
-              <a:spcBef>
-                <a:spcPts val="400"/>
-              </a:spcBef>
-              <a:spcAft>
-                <a:spcPts val="200"/>
-              </a:spcAft>
-            </a:pPr>
-            <a:r>
-              <a:rPr sz="1300">
-                <a:solidFill>
-                  <a:srgbClr val="3D5466"/>
-                </a:solidFill>
-                <a:latin typeface="Arial"/>
-              </a:rPr>
-              <a:t>▸  Bewertungslogik: 1 = schwach / kaum relevant · 5 = stark / hochrelevant</a:t>
-            </a:r>
-          </a:p>
-          <a:p>
-            <a:pPr marL="190500" indent="-190500">
-              <a:spcBef>
-                <a:spcPts val="400"/>
-              </a:spcBef>
-              <a:spcAft>
-                <a:spcPts val="200"/>
-              </a:spcAft>
-            </a:pPr>
-            <a:r>
-              <a:rPr sz="1300">
-                <a:solidFill>
-                  <a:srgbClr val="3D5466"/>
-                </a:solidFill>
-                <a:latin typeface="Arial"/>
-              </a:rPr>
-              <a:t>▸  Wichtigste Erkenntnis aus dieser Analyse:</a:t>
-            </a:r>
-          </a:p>
-        </p:txBody>
-      </p:sp>
-      <p:sp>
-        <p:nvSpPr>
-          <p:cNvPr id="9" name="Rectangle 8"/>
+      <p:pic>
+        <p:nvPicPr>
+          <p:cNvPr id="7" name="Picture 6" descr="image.png"/>
+          <p:cNvPicPr>
+            <a:picLocks noChangeAspect="1"/>
+          </p:cNvPicPr>
+          <p:nvPr/>
+        </p:nvPicPr>
+        <p:blipFill>
+          <a:blip r:embed="rId2"/>
+          <a:stretch>
+            <a:fillRect/>
+          </a:stretch>
+        </p:blipFill>
+        <p:spPr>
+          <a:xfrm>
+            <a:off x="2554863" y="1325880"/>
+            <a:ext cx="7079225" cy="4937760"/>
+          </a:xfrm>
+          <a:prstGeom prst="rect">
+            <a:avLst/>
+          </a:prstGeom>
+        </p:spPr>
+      </p:pic>
+      <p:sp>
+        <p:nvSpPr>
+          <p:cNvPr id="8" name="Rectangle 7"/>
           <p:cNvSpPr/>
           <p:nvPr/>
         </p:nvSpPr>
@@ -10370,7 +12871,7 @@
       </p:sp>
       <p:sp>
         <p:nvSpPr>
-          <p:cNvPr id="10" name="TextBox 9"/>
+          <p:cNvPr id="9" name="TextBox 8"/>
           <p:cNvSpPr txBox="1"/>
           <p:nvPr/>
         </p:nvSpPr>
@@ -10399,6 +12900,41 @@
                 <a:latin typeface="Consolas"/>
               </a:rPr>
               <a:t>FKB Campus  ·  M09</a:t>
+            </a:r>
+          </a:p>
+        </p:txBody>
+      </p:sp>
+      <p:sp>
+        <p:nvSpPr>
+          <p:cNvPr id="10" name="TextBox 9"/>
+          <p:cNvSpPr txBox="1"/>
+          <p:nvPr/>
+        </p:nvSpPr>
+        <p:spPr>
+          <a:xfrm>
+            <a:off x="7176211" y="6583680"/>
+            <a:ext cx="4326940" cy="256032"/>
+          </a:xfrm>
+          <a:prstGeom prst="rect">
+            <a:avLst/>
+          </a:prstGeom>
+          <a:noFill/>
+        </p:spPr>
+        <p:txBody>
+          <a:bodyPr wrap="none">
+            <a:spAutoFit/>
+          </a:bodyPr>
+          <a:lstStyle/>
+          <a:p>
+            <a:pPr algn="r"/>
+            <a:r>
+              <a:rPr sz="700">
+                <a:solidFill>
+                  <a:srgbClr val="A0B4D2"/>
+                </a:solidFill>
+                <a:latin typeface="Consolas"/>
+              </a:rPr>
+              <a:t>Schaubild</a:t>
             </a:r>
           </a:p>
         </p:txBody>
